--- a/docs/Car Market Trends Analysis - Presentation.pptx
+++ b/docs/Car Market Trends Analysis - Presentation.pptx
@@ -5,10 +5,10 @@
     <p:sldMasterId id="2147483747" r:id="rId4"/>
   </p:sldMasterIdLst>
   <p:notesMasterIdLst>
-    <p:notesMasterId r:id="rId17"/>
+    <p:notesMasterId r:id="rId18"/>
   </p:notesMasterIdLst>
   <p:handoutMasterIdLst>
-    <p:handoutMasterId r:id="rId18"/>
+    <p:handoutMasterId r:id="rId19"/>
   </p:handoutMasterIdLst>
   <p:sldIdLst>
     <p:sldId id="338" r:id="rId5"/>
@@ -22,7 +22,8 @@
     <p:sldId id="341" r:id="rId13"/>
     <p:sldId id="343" r:id="rId14"/>
     <p:sldId id="344" r:id="rId15"/>
-    <p:sldId id="304" r:id="rId16"/>
+    <p:sldId id="347" r:id="rId16"/>
+    <p:sldId id="346" r:id="rId17"/>
   </p:sldIdLst>
   <p:sldSz cx="12192000" cy="6858000"/>
   <p:notesSz cx="6858000" cy="9144000"/>
@@ -193,7 +194,7 @@
           <p:cNvPr id="2" name="Header Placeholder 1">
             <a:extLst>
               <a:ext uri="{FF2B5EF4-FFF2-40B4-BE49-F238E27FC236}">
-                <a16:creationId xmlns="" xmlns:a16="http://schemas.microsoft.com/office/drawing/2014/main" id="{B76F666D-E0C2-435B-BAA8-9287F9E5D38A}"/>
+                <a16:creationId xmlns:a16="http://schemas.microsoft.com/office/drawing/2014/main" xmlns="" id="{B76F666D-E0C2-435B-BAA8-9287F9E5D38A}"/>
               </a:ext>
             </a:extLst>
           </p:cNvPr>
@@ -230,7 +231,7 @@
           <p:cNvPr id="3" name="Date Placeholder 2">
             <a:extLst>
               <a:ext uri="{FF2B5EF4-FFF2-40B4-BE49-F238E27FC236}">
-                <a16:creationId xmlns="" xmlns:a16="http://schemas.microsoft.com/office/drawing/2014/main" id="{19FEBCAF-CB3F-4928-91AA-D61472F880C0}"/>
+                <a16:creationId xmlns:a16="http://schemas.microsoft.com/office/drawing/2014/main" xmlns="" id="{19FEBCAF-CB3F-4928-91AA-D61472F880C0}"/>
               </a:ext>
             </a:extLst>
           </p:cNvPr>
@@ -260,7 +261,7 @@
           <a:p>
             <a:fld id="{EF1077DB-935E-4A0A-947A-D283B9F9F452}" type="datetimeFigureOut">
               <a:rPr lang="en-US" smtClean="0"/>
-              <a:t>8/31/2026</a:t>
+              <a:t>9/9/2026</a:t>
             </a:fld>
             <a:endParaRPr lang="en-US" dirty="0"/>
           </a:p>
@@ -271,7 +272,7 @@
           <p:cNvPr id="4" name="Footer Placeholder 3">
             <a:extLst>
               <a:ext uri="{FF2B5EF4-FFF2-40B4-BE49-F238E27FC236}">
-                <a16:creationId xmlns="" xmlns:a16="http://schemas.microsoft.com/office/drawing/2014/main" id="{69256698-63C6-4CCC-81CB-EA5604C30F1E}"/>
+                <a16:creationId xmlns:a16="http://schemas.microsoft.com/office/drawing/2014/main" xmlns="" id="{69256698-63C6-4CCC-81CB-EA5604C30F1E}"/>
               </a:ext>
             </a:extLst>
           </p:cNvPr>
@@ -308,7 +309,7 @@
           <p:cNvPr id="5" name="Slide Number Placeholder 4">
             <a:extLst>
               <a:ext uri="{FF2B5EF4-FFF2-40B4-BE49-F238E27FC236}">
-                <a16:creationId xmlns="" xmlns:a16="http://schemas.microsoft.com/office/drawing/2014/main" id="{B2467FDA-05D7-4760-A373-5D6AEAAF4278}"/>
+                <a16:creationId xmlns:a16="http://schemas.microsoft.com/office/drawing/2014/main" xmlns="" id="{B2467FDA-05D7-4760-A373-5D6AEAAF4278}"/>
               </a:ext>
             </a:extLst>
           </p:cNvPr>
@@ -437,7 +438,7 @@
           <a:p>
             <a:fld id="{2D9EC30E-1A71-4188-9BE7-E2A64929A436}" type="datetimeFigureOut">
               <a:rPr lang="en-US" noProof="0" smtClean="0"/>
-              <a:t>8/31/2026</a:t>
+              <a:t>9/9/2026</a:t>
             </a:fld>
             <a:endParaRPr lang="en-US" noProof="0" dirty="0"/>
           </a:p>
@@ -1534,7 +1535,7 @@
             <a:fld id="{B61BEF0D-F0BB-DE4B-95CE-6DB70DBA9567}" type="datetimeFigureOut">
               <a:rPr lang="en-US" smtClean="0"/>
               <a:pPr/>
-              <a:t>8/31/2026</a:t>
+              <a:t>9/9/2026</a:t>
             </a:fld>
             <a:endParaRPr lang="en-US" dirty="0"/>
           </a:p>
@@ -1788,7 +1789,7 @@
             <a:fld id="{B61BEF0D-F0BB-DE4B-95CE-6DB70DBA9567}" type="datetimeFigureOut">
               <a:rPr lang="en-US" smtClean="0"/>
               <a:pPr/>
-              <a:t>8/31/2026</a:t>
+              <a:t>9/9/2026</a:t>
             </a:fld>
             <a:endParaRPr lang="en-US" dirty="0"/>
           </a:p>
@@ -2105,7 +2106,7 @@
             <a:fld id="{B61BEF0D-F0BB-DE4B-95CE-6DB70DBA9567}" type="datetimeFigureOut">
               <a:rPr lang="en-US" smtClean="0"/>
               <a:pPr/>
-              <a:t>8/31/2026</a:t>
+              <a:t>9/9/2026</a:t>
             </a:fld>
             <a:endParaRPr lang="en-US" dirty="0"/>
           </a:p>
@@ -2441,7 +2442,7 @@
             <a:fld id="{B61BEF0D-F0BB-DE4B-95CE-6DB70DBA9567}" type="datetimeFigureOut">
               <a:rPr lang="en-US" smtClean="0"/>
               <a:pPr/>
-              <a:t>8/31/2026</a:t>
+              <a:t>9/9/2026</a:t>
             </a:fld>
             <a:endParaRPr lang="en-US" dirty="0"/>
           </a:p>
@@ -2758,7 +2759,7 @@
             <a:fld id="{B61BEF0D-F0BB-DE4B-95CE-6DB70DBA9567}" type="datetimeFigureOut">
               <a:rPr lang="en-US" smtClean="0"/>
               <a:pPr/>
-              <a:t>8/31/2026</a:t>
+              <a:t>9/9/2026</a:t>
             </a:fld>
             <a:endParaRPr lang="en-US" dirty="0"/>
           </a:p>
@@ -3154,7 +3155,7 @@
             <a:fld id="{B61BEF0D-F0BB-DE4B-95CE-6DB70DBA9567}" type="datetimeFigureOut">
               <a:rPr lang="en-US" smtClean="0"/>
               <a:pPr/>
-              <a:t>8/31/2026</a:t>
+              <a:t>9/9/2026</a:t>
             </a:fld>
             <a:endParaRPr lang="en-US" dirty="0"/>
           </a:p>
@@ -3326,7 +3327,7 @@
           <a:p>
             <a:fld id="{55C6B4A9-1611-4792-9094-5F34BCA07E0B}" type="datetimeFigureOut">
               <a:rPr lang="en-US" smtClean="0"/>
-              <a:t>8/31/2026</a:t>
+              <a:t>9/9/2026</a:t>
             </a:fld>
             <a:endParaRPr lang="en-US" dirty="0"/>
           </a:p>
@@ -3508,7 +3509,7 @@
             <a:fld id="{B61BEF0D-F0BB-DE4B-95CE-6DB70DBA9567}" type="datetimeFigureOut">
               <a:rPr lang="en-US" smtClean="0"/>
               <a:pPr/>
-              <a:t>8/31/2026</a:t>
+              <a:t>9/9/2026</a:t>
             </a:fld>
             <a:endParaRPr lang="en-US" dirty="0"/>
           </a:p>
@@ -3593,7 +3594,7 @@
           <p:cNvPr id="11" name="Text Placeholder 10">
             <a:extLst>
               <a:ext uri="{FF2B5EF4-FFF2-40B4-BE49-F238E27FC236}">
-                <a16:creationId xmlns="" xmlns:a16="http://schemas.microsoft.com/office/drawing/2014/main" id="{6FDA3C6F-5F6A-4D64-8BFE-AFFF58B1A047}"/>
+                <a16:creationId xmlns:a16="http://schemas.microsoft.com/office/drawing/2014/main" xmlns="" id="{6FDA3C6F-5F6A-4D64-8BFE-AFFF58B1A047}"/>
               </a:ext>
             </a:extLst>
           </p:cNvPr>
@@ -3651,7 +3652,7 @@
           <p:cNvPr id="15" name="Hexagon 14">
             <a:extLst>
               <a:ext uri="{FF2B5EF4-FFF2-40B4-BE49-F238E27FC236}">
-                <a16:creationId xmlns="" xmlns:a16="http://schemas.microsoft.com/office/drawing/2014/main" id="{AC159667-7690-4645-986D-BE501438455F}"/>
+                <a16:creationId xmlns:a16="http://schemas.microsoft.com/office/drawing/2014/main" xmlns="" id="{AC159667-7690-4645-986D-BE501438455F}"/>
               </a:ext>
             </a:extLst>
           </p:cNvPr>
@@ -3703,7 +3704,7 @@
           <p:cNvPr id="16" name="Hexagon 15">
             <a:extLst>
               <a:ext uri="{FF2B5EF4-FFF2-40B4-BE49-F238E27FC236}">
-                <a16:creationId xmlns="" xmlns:a16="http://schemas.microsoft.com/office/drawing/2014/main" id="{54667EE4-E77F-453B-BF8B-B1EE2AE80715}"/>
+                <a16:creationId xmlns:a16="http://schemas.microsoft.com/office/drawing/2014/main" xmlns="" id="{54667EE4-E77F-453B-BF8B-B1EE2AE80715}"/>
               </a:ext>
             </a:extLst>
           </p:cNvPr>
@@ -3755,7 +3756,7 @@
           <p:cNvPr id="17" name="Hexagon 16">
             <a:extLst>
               <a:ext uri="{FF2B5EF4-FFF2-40B4-BE49-F238E27FC236}">
-                <a16:creationId xmlns="" xmlns:a16="http://schemas.microsoft.com/office/drawing/2014/main" id="{FC050232-A229-425F-BFC8-D50374F2D171}"/>
+                <a16:creationId xmlns:a16="http://schemas.microsoft.com/office/drawing/2014/main" xmlns="" id="{FC050232-A229-425F-BFC8-D50374F2D171}"/>
               </a:ext>
             </a:extLst>
           </p:cNvPr>
@@ -3807,7 +3808,7 @@
           <p:cNvPr id="18" name="Hexagon 17">
             <a:extLst>
               <a:ext uri="{FF2B5EF4-FFF2-40B4-BE49-F238E27FC236}">
-                <a16:creationId xmlns="" xmlns:a16="http://schemas.microsoft.com/office/drawing/2014/main" id="{53E4EBC7-340A-43A5-9E23-4B73A6F700B6}"/>
+                <a16:creationId xmlns:a16="http://schemas.microsoft.com/office/drawing/2014/main" xmlns="" id="{53E4EBC7-340A-43A5-9E23-4B73A6F700B6}"/>
               </a:ext>
             </a:extLst>
           </p:cNvPr>
@@ -3859,7 +3860,7 @@
           <p:cNvPr id="19" name="Picture Placeholder 18">
             <a:extLst>
               <a:ext uri="{FF2B5EF4-FFF2-40B4-BE49-F238E27FC236}">
-                <a16:creationId xmlns="" xmlns:a16="http://schemas.microsoft.com/office/drawing/2014/main" id="{1ED0E31A-F0A3-481D-8D9C-E3C4531FD21D}"/>
+                <a16:creationId xmlns:a16="http://schemas.microsoft.com/office/drawing/2014/main" xmlns="" id="{1ED0E31A-F0A3-481D-8D9C-E3C4531FD21D}"/>
               </a:ext>
             </a:extLst>
           </p:cNvPr>
@@ -4060,7 +4061,7 @@
           <p:cNvPr id="2" name="Title 1">
             <a:extLst>
               <a:ext uri="{FF2B5EF4-FFF2-40B4-BE49-F238E27FC236}">
-                <a16:creationId xmlns="" xmlns:a16="http://schemas.microsoft.com/office/drawing/2014/main" id="{03E68100-C56F-4515-A4FD-3F301797E78F}"/>
+                <a16:creationId xmlns:a16="http://schemas.microsoft.com/office/drawing/2014/main" xmlns="" id="{03E68100-C56F-4515-A4FD-3F301797E78F}"/>
               </a:ext>
             </a:extLst>
           </p:cNvPr>
@@ -4146,7 +4147,7 @@
           <p:cNvPr id="10" name="Oval 9">
             <a:extLst>
               <a:ext uri="{FF2B5EF4-FFF2-40B4-BE49-F238E27FC236}">
-                <a16:creationId xmlns="" xmlns:a16="http://schemas.microsoft.com/office/drawing/2014/main" id="{24FAA9D0-7C9C-4043-9931-A15819ABB9B5}"/>
+                <a16:creationId xmlns:a16="http://schemas.microsoft.com/office/drawing/2014/main" xmlns="" id="{24FAA9D0-7C9C-4043-9931-A15819ABB9B5}"/>
               </a:ext>
             </a:extLst>
           </p:cNvPr>
@@ -4202,7 +4203,7 @@
           <p:cNvPr id="14" name="Oval 13">
             <a:extLst>
               <a:ext uri="{FF2B5EF4-FFF2-40B4-BE49-F238E27FC236}">
-                <a16:creationId xmlns="" xmlns:a16="http://schemas.microsoft.com/office/drawing/2014/main" id="{E232AB2D-843E-4B5F-8793-6A263DA356BB}"/>
+                <a16:creationId xmlns:a16="http://schemas.microsoft.com/office/drawing/2014/main" xmlns="" id="{E232AB2D-843E-4B5F-8793-6A263DA356BB}"/>
               </a:ext>
             </a:extLst>
           </p:cNvPr>
@@ -4258,7 +4259,7 @@
           <p:cNvPr id="16" name="Oval 15">
             <a:extLst>
               <a:ext uri="{FF2B5EF4-FFF2-40B4-BE49-F238E27FC236}">
-                <a16:creationId xmlns="" xmlns:a16="http://schemas.microsoft.com/office/drawing/2014/main" id="{FA75A12B-C399-4072-BD69-D872D2C2AD1F}"/>
+                <a16:creationId xmlns:a16="http://schemas.microsoft.com/office/drawing/2014/main" xmlns="" id="{FA75A12B-C399-4072-BD69-D872D2C2AD1F}"/>
               </a:ext>
             </a:extLst>
           </p:cNvPr>
@@ -4314,7 +4315,7 @@
           <p:cNvPr id="23" name="Picture Placeholder 22">
             <a:extLst>
               <a:ext uri="{FF2B5EF4-FFF2-40B4-BE49-F238E27FC236}">
-                <a16:creationId xmlns="" xmlns:a16="http://schemas.microsoft.com/office/drawing/2014/main" id="{423AE48B-50E9-4BEA-B66A-B2D2B9CCFE9C}"/>
+                <a16:creationId xmlns:a16="http://schemas.microsoft.com/office/drawing/2014/main" xmlns="" id="{423AE48B-50E9-4BEA-B66A-B2D2B9CCFE9C}"/>
               </a:ext>
             </a:extLst>
           </p:cNvPr>
@@ -4466,7 +4467,7 @@
           <p:cNvPr id="27" name="Text Placeholder 26">
             <a:extLst>
               <a:ext uri="{FF2B5EF4-FFF2-40B4-BE49-F238E27FC236}">
-                <a16:creationId xmlns="" xmlns:a16="http://schemas.microsoft.com/office/drawing/2014/main" id="{282D3E62-6D1A-4E9D-BE54-2EED9BF429A4}"/>
+                <a16:creationId xmlns:a16="http://schemas.microsoft.com/office/drawing/2014/main" xmlns="" id="{282D3E62-6D1A-4E9D-BE54-2EED9BF429A4}"/>
               </a:ext>
             </a:extLst>
           </p:cNvPr>
@@ -4547,7 +4548,7 @@
           <p:cNvPr id="8" name="Title 1">
             <a:extLst>
               <a:ext uri="{FF2B5EF4-FFF2-40B4-BE49-F238E27FC236}">
-                <a16:creationId xmlns="" xmlns:a16="http://schemas.microsoft.com/office/drawing/2014/main" id="{DEB8F0E5-B89F-48AD-87BD-534EA9463CD3}"/>
+                <a16:creationId xmlns:a16="http://schemas.microsoft.com/office/drawing/2014/main" xmlns="" id="{DEB8F0E5-B89F-48AD-87BD-534EA9463CD3}"/>
               </a:ext>
             </a:extLst>
           </p:cNvPr>
@@ -4633,7 +4634,7 @@
           <p:cNvPr id="10" name="Text Placeholder 26">
             <a:extLst>
               <a:ext uri="{FF2B5EF4-FFF2-40B4-BE49-F238E27FC236}">
-                <a16:creationId xmlns="" xmlns:a16="http://schemas.microsoft.com/office/drawing/2014/main" id="{4AA38E8C-A334-4183-8ABC-112B8517F487}"/>
+                <a16:creationId xmlns:a16="http://schemas.microsoft.com/office/drawing/2014/main" xmlns="" id="{4AA38E8C-A334-4183-8ABC-112B8517F487}"/>
               </a:ext>
             </a:extLst>
           </p:cNvPr>
@@ -4711,7 +4712,7 @@
           <p:cNvPr id="19" name="Rectangle 18">
             <a:extLst>
               <a:ext uri="{FF2B5EF4-FFF2-40B4-BE49-F238E27FC236}">
-                <a16:creationId xmlns="" xmlns:a16="http://schemas.microsoft.com/office/drawing/2014/main" id="{B80624A4-5116-4AAF-8C31-C25D1DB16FEC}"/>
+                <a16:creationId xmlns:a16="http://schemas.microsoft.com/office/drawing/2014/main" xmlns="" id="{B80624A4-5116-4AAF-8C31-C25D1DB16FEC}"/>
               </a:ext>
             </a:extLst>
           </p:cNvPr>
@@ -4763,7 +4764,7 @@
           <p:cNvPr id="21" name="Rectangle 20">
             <a:extLst>
               <a:ext uri="{FF2B5EF4-FFF2-40B4-BE49-F238E27FC236}">
-                <a16:creationId xmlns="" xmlns:a16="http://schemas.microsoft.com/office/drawing/2014/main" id="{1D07EC8A-6024-4DEA-9C4D-AE4228E17854}"/>
+                <a16:creationId xmlns:a16="http://schemas.microsoft.com/office/drawing/2014/main" xmlns="" id="{1D07EC8A-6024-4DEA-9C4D-AE4228E17854}"/>
               </a:ext>
             </a:extLst>
           </p:cNvPr>
@@ -4815,7 +4816,7 @@
           <p:cNvPr id="23" name="Rectangle 22">
             <a:extLst>
               <a:ext uri="{FF2B5EF4-FFF2-40B4-BE49-F238E27FC236}">
-                <a16:creationId xmlns="" xmlns:a16="http://schemas.microsoft.com/office/drawing/2014/main" id="{D1C8FAEF-DF78-48CC-AEEF-F9B802055C05}"/>
+                <a16:creationId xmlns:a16="http://schemas.microsoft.com/office/drawing/2014/main" xmlns="" id="{D1C8FAEF-DF78-48CC-AEEF-F9B802055C05}"/>
               </a:ext>
             </a:extLst>
           </p:cNvPr>
@@ -4867,7 +4868,7 @@
           <p:cNvPr id="11" name="Picture Placeholder 10">
             <a:extLst>
               <a:ext uri="{FF2B5EF4-FFF2-40B4-BE49-F238E27FC236}">
-                <a16:creationId xmlns="" xmlns:a16="http://schemas.microsoft.com/office/drawing/2014/main" id="{566F72D6-AEEE-4CF3-8136-F6782F1E489E}"/>
+                <a16:creationId xmlns:a16="http://schemas.microsoft.com/office/drawing/2014/main" xmlns="" id="{566F72D6-AEEE-4CF3-8136-F6782F1E489E}"/>
               </a:ext>
             </a:extLst>
           </p:cNvPr>
@@ -5053,7 +5054,7 @@
           <p:cNvPr id="2" name="Title 1">
             <a:extLst>
               <a:ext uri="{FF2B5EF4-FFF2-40B4-BE49-F238E27FC236}">
-                <a16:creationId xmlns="" xmlns:a16="http://schemas.microsoft.com/office/drawing/2014/main" id="{459DADC7-BE21-4434-A6E4-BAF809005389}"/>
+                <a16:creationId xmlns:a16="http://schemas.microsoft.com/office/drawing/2014/main" xmlns="" id="{459DADC7-BE21-4434-A6E4-BAF809005389}"/>
               </a:ext>
             </a:extLst>
           </p:cNvPr>
@@ -5237,7 +5238,7 @@
             <a:fld id="{B61BEF0D-F0BB-DE4B-95CE-6DB70DBA9567}" type="datetimeFigureOut">
               <a:rPr lang="en-US" smtClean="0"/>
               <a:pPr/>
-              <a:t>8/31/2026</a:t>
+              <a:t>9/9/2026</a:t>
             </a:fld>
             <a:endParaRPr lang="en-US" dirty="0"/>
           </a:p>
@@ -5322,7 +5323,7 @@
           <p:cNvPr id="39" name="Picture Placeholder 38">
             <a:extLst>
               <a:ext uri="{FF2B5EF4-FFF2-40B4-BE49-F238E27FC236}">
-                <a16:creationId xmlns="" xmlns:a16="http://schemas.microsoft.com/office/drawing/2014/main" id="{CF421413-161E-4B36-B693-FB38DF14EDAB}"/>
+                <a16:creationId xmlns:a16="http://schemas.microsoft.com/office/drawing/2014/main" xmlns="" id="{CF421413-161E-4B36-B693-FB38DF14EDAB}"/>
               </a:ext>
             </a:extLst>
           </p:cNvPr>
@@ -5425,7 +5426,7 @@
           <p:cNvPr id="38" name="Picture Placeholder 37">
             <a:extLst>
               <a:ext uri="{FF2B5EF4-FFF2-40B4-BE49-F238E27FC236}">
-                <a16:creationId xmlns="" xmlns:a16="http://schemas.microsoft.com/office/drawing/2014/main" id="{B5D207AE-9C9C-410A-9F31-2402BAD6DDFF}"/>
+                <a16:creationId xmlns:a16="http://schemas.microsoft.com/office/drawing/2014/main" xmlns="" id="{B5D207AE-9C9C-410A-9F31-2402BAD6DDFF}"/>
               </a:ext>
             </a:extLst>
           </p:cNvPr>
@@ -5528,7 +5529,7 @@
           <p:cNvPr id="40" name="Picture Placeholder 39">
             <a:extLst>
               <a:ext uri="{FF2B5EF4-FFF2-40B4-BE49-F238E27FC236}">
-                <a16:creationId xmlns="" xmlns:a16="http://schemas.microsoft.com/office/drawing/2014/main" id="{DE3344FC-C4DE-481F-9C31-667EDD563C47}"/>
+                <a16:creationId xmlns:a16="http://schemas.microsoft.com/office/drawing/2014/main" xmlns="" id="{DE3344FC-C4DE-481F-9C31-667EDD563C47}"/>
               </a:ext>
             </a:extLst>
           </p:cNvPr>
@@ -5631,7 +5632,7 @@
           <p:cNvPr id="41" name="Picture Placeholder 40">
             <a:extLst>
               <a:ext uri="{FF2B5EF4-FFF2-40B4-BE49-F238E27FC236}">
-                <a16:creationId xmlns="" xmlns:a16="http://schemas.microsoft.com/office/drawing/2014/main" id="{59094D7D-3613-49C1-BB58-A65B41A9738D}"/>
+                <a16:creationId xmlns:a16="http://schemas.microsoft.com/office/drawing/2014/main" xmlns="" id="{59094D7D-3613-49C1-BB58-A65B41A9738D}"/>
               </a:ext>
             </a:extLst>
           </p:cNvPr>
@@ -5734,7 +5735,7 @@
           <p:cNvPr id="8" name="Title 1">
             <a:extLst>
               <a:ext uri="{FF2B5EF4-FFF2-40B4-BE49-F238E27FC236}">
-                <a16:creationId xmlns="" xmlns:a16="http://schemas.microsoft.com/office/drawing/2014/main" id="{69FE87B7-32A4-4C7F-9AAF-37688E640456}"/>
+                <a16:creationId xmlns:a16="http://schemas.microsoft.com/office/drawing/2014/main" xmlns="" id="{69FE87B7-32A4-4C7F-9AAF-37688E640456}"/>
               </a:ext>
             </a:extLst>
           </p:cNvPr>
@@ -5780,7 +5781,7 @@
           <p:cNvPr id="9" name="Hexagon 8">
             <a:extLst>
               <a:ext uri="{FF2B5EF4-FFF2-40B4-BE49-F238E27FC236}">
-                <a16:creationId xmlns="" xmlns:a16="http://schemas.microsoft.com/office/drawing/2014/main" id="{476CA45F-A66A-4AD8-A004-10DB55A5D7B2}"/>
+                <a16:creationId xmlns:a16="http://schemas.microsoft.com/office/drawing/2014/main" xmlns="" id="{476CA45F-A66A-4AD8-A004-10DB55A5D7B2}"/>
               </a:ext>
             </a:extLst>
           </p:cNvPr>
@@ -5832,7 +5833,7 @@
           <p:cNvPr id="10" name="Hexagon 9">
             <a:extLst>
               <a:ext uri="{FF2B5EF4-FFF2-40B4-BE49-F238E27FC236}">
-                <a16:creationId xmlns="" xmlns:a16="http://schemas.microsoft.com/office/drawing/2014/main" id="{27A66A3D-2437-4015-9F5F-380C4D23D83C}"/>
+                <a16:creationId xmlns:a16="http://schemas.microsoft.com/office/drawing/2014/main" xmlns="" id="{27A66A3D-2437-4015-9F5F-380C4D23D83C}"/>
               </a:ext>
             </a:extLst>
           </p:cNvPr>
@@ -5884,7 +5885,7 @@
           <p:cNvPr id="11" name="Hexagon 10">
             <a:extLst>
               <a:ext uri="{FF2B5EF4-FFF2-40B4-BE49-F238E27FC236}">
-                <a16:creationId xmlns="" xmlns:a16="http://schemas.microsoft.com/office/drawing/2014/main" id="{FFB14F3B-E7EF-4546-8D74-71FFB45C77C0}"/>
+                <a16:creationId xmlns:a16="http://schemas.microsoft.com/office/drawing/2014/main" xmlns="" id="{FFB14F3B-E7EF-4546-8D74-71FFB45C77C0}"/>
               </a:ext>
             </a:extLst>
           </p:cNvPr>
@@ -5936,7 +5937,7 @@
           <p:cNvPr id="23" name="Text Placeholder 22">
             <a:extLst>
               <a:ext uri="{FF2B5EF4-FFF2-40B4-BE49-F238E27FC236}">
-                <a16:creationId xmlns="" xmlns:a16="http://schemas.microsoft.com/office/drawing/2014/main" id="{591F943B-ED0D-49A1-844A-E23BA9A4871B}"/>
+                <a16:creationId xmlns:a16="http://schemas.microsoft.com/office/drawing/2014/main" xmlns="" id="{591F943B-ED0D-49A1-844A-E23BA9A4871B}"/>
               </a:ext>
             </a:extLst>
           </p:cNvPr>
@@ -5985,7 +5986,7 @@
           <p:cNvPr id="24" name="Text Placeholder 22">
             <a:extLst>
               <a:ext uri="{FF2B5EF4-FFF2-40B4-BE49-F238E27FC236}">
-                <a16:creationId xmlns="" xmlns:a16="http://schemas.microsoft.com/office/drawing/2014/main" id="{9AC6B9A8-053C-4828-B705-901C6018F30D}"/>
+                <a16:creationId xmlns:a16="http://schemas.microsoft.com/office/drawing/2014/main" xmlns="" id="{9AC6B9A8-053C-4828-B705-901C6018F30D}"/>
               </a:ext>
             </a:extLst>
           </p:cNvPr>
@@ -6034,7 +6035,7 @@
           <p:cNvPr id="27" name="Text Placeholder 22">
             <a:extLst>
               <a:ext uri="{FF2B5EF4-FFF2-40B4-BE49-F238E27FC236}">
-                <a16:creationId xmlns="" xmlns:a16="http://schemas.microsoft.com/office/drawing/2014/main" id="{BBA6FD52-E179-41F8-AE78-9AF3D65F28B6}"/>
+                <a16:creationId xmlns:a16="http://schemas.microsoft.com/office/drawing/2014/main" xmlns="" id="{BBA6FD52-E179-41F8-AE78-9AF3D65F28B6}"/>
               </a:ext>
             </a:extLst>
           </p:cNvPr>
@@ -6083,7 +6084,7 @@
           <p:cNvPr id="28" name="Text Placeholder 22">
             <a:extLst>
               <a:ext uri="{FF2B5EF4-FFF2-40B4-BE49-F238E27FC236}">
-                <a16:creationId xmlns="" xmlns:a16="http://schemas.microsoft.com/office/drawing/2014/main" id="{C49A82AB-D328-4DB0-841B-186884119EBF}"/>
+                <a16:creationId xmlns:a16="http://schemas.microsoft.com/office/drawing/2014/main" xmlns="" id="{C49A82AB-D328-4DB0-841B-186884119EBF}"/>
               </a:ext>
             </a:extLst>
           </p:cNvPr>
@@ -6132,7 +6133,7 @@
           <p:cNvPr id="29" name="Text Placeholder 22">
             <a:extLst>
               <a:ext uri="{FF2B5EF4-FFF2-40B4-BE49-F238E27FC236}">
-                <a16:creationId xmlns="" xmlns:a16="http://schemas.microsoft.com/office/drawing/2014/main" id="{84E23D5D-9866-48F9-8E08-DD2DBE4C4E32}"/>
+                <a16:creationId xmlns:a16="http://schemas.microsoft.com/office/drawing/2014/main" xmlns="" id="{84E23D5D-9866-48F9-8E08-DD2DBE4C4E32}"/>
               </a:ext>
             </a:extLst>
           </p:cNvPr>
@@ -6181,7 +6182,7 @@
           <p:cNvPr id="30" name="Text Placeholder 22">
             <a:extLst>
               <a:ext uri="{FF2B5EF4-FFF2-40B4-BE49-F238E27FC236}">
-                <a16:creationId xmlns="" xmlns:a16="http://schemas.microsoft.com/office/drawing/2014/main" id="{E671C9E6-A1A5-4EE5-8642-94AA7635DB05}"/>
+                <a16:creationId xmlns:a16="http://schemas.microsoft.com/office/drawing/2014/main" xmlns="" id="{E671C9E6-A1A5-4EE5-8642-94AA7635DB05}"/>
               </a:ext>
             </a:extLst>
           </p:cNvPr>
@@ -6230,7 +6231,7 @@
           <p:cNvPr id="31" name="Text Placeholder 22">
             <a:extLst>
               <a:ext uri="{FF2B5EF4-FFF2-40B4-BE49-F238E27FC236}">
-                <a16:creationId xmlns="" xmlns:a16="http://schemas.microsoft.com/office/drawing/2014/main" id="{DF6BB5C9-B678-435A-830F-4C10EB1A957C}"/>
+                <a16:creationId xmlns:a16="http://schemas.microsoft.com/office/drawing/2014/main" xmlns="" id="{DF6BB5C9-B678-435A-830F-4C10EB1A957C}"/>
               </a:ext>
             </a:extLst>
           </p:cNvPr>
@@ -6279,7 +6280,7 @@
           <p:cNvPr id="32" name="Text Placeholder 22">
             <a:extLst>
               <a:ext uri="{FF2B5EF4-FFF2-40B4-BE49-F238E27FC236}">
-                <a16:creationId xmlns="" xmlns:a16="http://schemas.microsoft.com/office/drawing/2014/main" id="{1861EC87-A9E2-4FC3-B8BC-06C520B8A17F}"/>
+                <a16:creationId xmlns:a16="http://schemas.microsoft.com/office/drawing/2014/main" xmlns="" id="{1861EC87-A9E2-4FC3-B8BC-06C520B8A17F}"/>
               </a:ext>
             </a:extLst>
           </p:cNvPr>
@@ -6328,7 +6329,7 @@
           <p:cNvPr id="33" name="Text Placeholder 22">
             <a:extLst>
               <a:ext uri="{FF2B5EF4-FFF2-40B4-BE49-F238E27FC236}">
-                <a16:creationId xmlns="" xmlns:a16="http://schemas.microsoft.com/office/drawing/2014/main" id="{FC3EDE91-631F-4947-94DC-557685FD23E0}"/>
+                <a16:creationId xmlns:a16="http://schemas.microsoft.com/office/drawing/2014/main" xmlns="" id="{FC3EDE91-631F-4947-94DC-557685FD23E0}"/>
               </a:ext>
             </a:extLst>
           </p:cNvPr>
@@ -6377,7 +6378,7 @@
           <p:cNvPr id="34" name="Text Placeholder 22">
             <a:extLst>
               <a:ext uri="{FF2B5EF4-FFF2-40B4-BE49-F238E27FC236}">
-                <a16:creationId xmlns="" xmlns:a16="http://schemas.microsoft.com/office/drawing/2014/main" id="{8FDDBEF4-1329-49DF-B043-D51B34F5EE34}"/>
+                <a16:creationId xmlns:a16="http://schemas.microsoft.com/office/drawing/2014/main" xmlns="" id="{8FDDBEF4-1329-49DF-B043-D51B34F5EE34}"/>
               </a:ext>
             </a:extLst>
           </p:cNvPr>
@@ -6426,7 +6427,7 @@
           <p:cNvPr id="37" name="Picture Placeholder 36">
             <a:extLst>
               <a:ext uri="{FF2B5EF4-FFF2-40B4-BE49-F238E27FC236}">
-                <a16:creationId xmlns="" xmlns:a16="http://schemas.microsoft.com/office/drawing/2014/main" id="{FBDB3FD3-4F52-4E28-B639-5F73070E47D9}"/>
+                <a16:creationId xmlns:a16="http://schemas.microsoft.com/office/drawing/2014/main" xmlns="" id="{FBDB3FD3-4F52-4E28-B639-5F73070E47D9}"/>
               </a:ext>
             </a:extLst>
           </p:cNvPr>
@@ -6583,7 +6584,7 @@
           <p:cNvPr id="22" name="Picture Placeholder 21">
             <a:extLst>
               <a:ext uri="{FF2B5EF4-FFF2-40B4-BE49-F238E27FC236}">
-                <a16:creationId xmlns="" xmlns:a16="http://schemas.microsoft.com/office/drawing/2014/main" id="{DFA57703-9E4A-48E0-A123-3A5EDC76475C}"/>
+                <a16:creationId xmlns:a16="http://schemas.microsoft.com/office/drawing/2014/main" xmlns="" id="{DFA57703-9E4A-48E0-A123-3A5EDC76475C}"/>
               </a:ext>
             </a:extLst>
           </p:cNvPr>
@@ -6620,7 +6621,7 @@
           <p:cNvPr id="2" name="Rectangle 1" descr="Tall office building looking up">
             <a:extLst>
               <a:ext uri="{FF2B5EF4-FFF2-40B4-BE49-F238E27FC236}">
-                <a16:creationId xmlns="" xmlns:a16="http://schemas.microsoft.com/office/drawing/2014/main" id="{AF7FA146-2A75-4EA7-A9AD-EBCE6F17FB42}"/>
+                <a16:creationId xmlns:a16="http://schemas.microsoft.com/office/drawing/2014/main" xmlns="" id="{AF7FA146-2A75-4EA7-A9AD-EBCE6F17FB42}"/>
               </a:ext>
             </a:extLst>
           </p:cNvPr>
@@ -6676,7 +6677,7 @@
           <p:cNvPr id="24" name="Text Placeholder 23">
             <a:extLst>
               <a:ext uri="{FF2B5EF4-FFF2-40B4-BE49-F238E27FC236}">
-                <a16:creationId xmlns="" xmlns:a16="http://schemas.microsoft.com/office/drawing/2014/main" id="{340C15AA-E296-48AE-857F-0589EEA69DC6}"/>
+                <a16:creationId xmlns:a16="http://schemas.microsoft.com/office/drawing/2014/main" xmlns="" id="{340C15AA-E296-48AE-857F-0589EEA69DC6}"/>
               </a:ext>
             </a:extLst>
           </p:cNvPr>
@@ -6729,7 +6730,7 @@
           <p:cNvPr id="6" name="Title 1">
             <a:extLst>
               <a:ext uri="{FF2B5EF4-FFF2-40B4-BE49-F238E27FC236}">
-                <a16:creationId xmlns="" xmlns:a16="http://schemas.microsoft.com/office/drawing/2014/main" id="{162BE5D7-9E35-49F8-A8E4-2093183A6404}"/>
+                <a16:creationId xmlns:a16="http://schemas.microsoft.com/office/drawing/2014/main" xmlns="" id="{162BE5D7-9E35-49F8-A8E4-2093183A6404}"/>
               </a:ext>
             </a:extLst>
           </p:cNvPr>
@@ -6972,7 +6973,7 @@
             <a:fld id="{B61BEF0D-F0BB-DE4B-95CE-6DB70DBA9567}" type="datetimeFigureOut">
               <a:rPr lang="en-US" smtClean="0"/>
               <a:pPr/>
-              <a:t>8/31/2026</a:t>
+              <a:t>9/9/2026</a:t>
             </a:fld>
             <a:endParaRPr lang="en-US" dirty="0"/>
           </a:p>
@@ -7206,7 +7207,7 @@
           <a:p>
             <a:fld id="{EB712588-04B1-427B-82EE-E8DB90309F08}" type="datetimeFigureOut">
               <a:rPr lang="en-US" smtClean="0"/>
-              <a:t>8/31/2026</a:t>
+              <a:t>9/9/2026</a:t>
             </a:fld>
             <a:endParaRPr lang="en-US" dirty="0"/>
           </a:p>
@@ -7582,7 +7583,7 @@
             <a:fld id="{B61BEF0D-F0BB-DE4B-95CE-6DB70DBA9567}" type="datetimeFigureOut">
               <a:rPr lang="en-US" smtClean="0"/>
               <a:pPr/>
-              <a:t>8/31/2026</a:t>
+              <a:t>9/9/2026</a:t>
             </a:fld>
             <a:endParaRPr lang="en-US" dirty="0"/>
           </a:p>
@@ -7708,7 +7709,7 @@
             <a:fld id="{B61BEF0D-F0BB-DE4B-95CE-6DB70DBA9567}" type="datetimeFigureOut">
               <a:rPr lang="en-US" smtClean="0"/>
               <a:pPr/>
-              <a:t>8/31/2026</a:t>
+              <a:t>9/9/2026</a:t>
             </a:fld>
             <a:endParaRPr lang="en-US" dirty="0"/>
           </a:p>
@@ -7806,7 +7807,7 @@
             <a:fld id="{B61BEF0D-F0BB-DE4B-95CE-6DB70DBA9567}" type="datetimeFigureOut">
               <a:rPr lang="en-US" smtClean="0"/>
               <a:pPr/>
-              <a:t>8/31/2026</a:t>
+              <a:t>9/9/2026</a:t>
             </a:fld>
             <a:endParaRPr lang="en-US" dirty="0"/>
           </a:p>
@@ -8063,7 +8064,7 @@
           <a:p>
             <a:fld id="{42A54C80-263E-416B-A8E0-580EDEADCBDC}" type="datetimeFigureOut">
               <a:rPr lang="en-US" smtClean="0"/>
-              <a:t>8/31/2026</a:t>
+              <a:t>9/9/2026</a:t>
             </a:fld>
             <a:endParaRPr lang="en-US" dirty="0"/>
           </a:p>
@@ -8371,7 +8372,7 @@
             <a:fld id="{B61BEF0D-F0BB-DE4B-95CE-6DB70DBA9567}" type="datetimeFigureOut">
               <a:rPr lang="en-US" smtClean="0"/>
               <a:pPr/>
-              <a:t>8/31/2026</a:t>
+              <a:t>9/9/2026</a:t>
             </a:fld>
             <a:endParaRPr lang="en-US" dirty="0"/>
           </a:p>
@@ -9075,7 +9076,7 @@
             <a:fld id="{B61BEF0D-F0BB-DE4B-95CE-6DB70DBA9567}" type="datetimeFigureOut">
               <a:rPr lang="en-US" smtClean="0"/>
               <a:pPr/>
-              <a:t>8/31/2026</a:t>
+              <a:t>9/9/2026</a:t>
             </a:fld>
             <a:endParaRPr lang="en-US" dirty="0"/>
           </a:p>
@@ -9163,7 +9164,7 @@
           <p:cNvPr id="18" name="Date Placeholder 3">
             <a:extLst>
               <a:ext uri="{FF2B5EF4-FFF2-40B4-BE49-F238E27FC236}">
-                <a16:creationId xmlns="" xmlns:a16="http://schemas.microsoft.com/office/drawing/2014/main" id="{2CD6B789-4B66-4BD0-9623-80E9542A65FE}"/>
+                <a16:creationId xmlns:a16="http://schemas.microsoft.com/office/drawing/2014/main" xmlns="" id="{2CD6B789-4B66-4BD0-9623-80E9542A65FE}"/>
               </a:ext>
             </a:extLst>
           </p:cNvPr>
@@ -9286,7 +9287,7 @@
                 </a:solidFill>
               </a:rPr>
               <a:pPr/>
-              <a:t>8/31/2026</a:t>
+              <a:t>9/9/2026</a:t>
             </a:fld>
             <a:endParaRPr lang="en-US" sz="1100" dirty="0">
               <a:solidFill>
@@ -9301,7 +9302,7 @@
           <p:cNvPr id="29" name="Footer Placeholder 4">
             <a:extLst>
               <a:ext uri="{FF2B5EF4-FFF2-40B4-BE49-F238E27FC236}">
-                <a16:creationId xmlns="" xmlns:a16="http://schemas.microsoft.com/office/drawing/2014/main" id="{A3BB5234-44A4-4506-BD19-5808475EBB7F}"/>
+                <a16:creationId xmlns:a16="http://schemas.microsoft.com/office/drawing/2014/main" xmlns="" id="{A3BB5234-44A4-4506-BD19-5808475EBB7F}"/>
               </a:ext>
             </a:extLst>
           </p:cNvPr>
@@ -9434,7 +9435,7 @@
           <p:cNvPr id="30" name="Slide Number Placeholder 5">
             <a:extLst>
               <a:ext uri="{FF2B5EF4-FFF2-40B4-BE49-F238E27FC236}">
-                <a16:creationId xmlns="" xmlns:a16="http://schemas.microsoft.com/office/drawing/2014/main" id="{68D89618-7EE9-46BF-BEAC-45E6F98ACA1A}"/>
+                <a16:creationId xmlns:a16="http://schemas.microsoft.com/office/drawing/2014/main" xmlns="" id="{68D89618-7EE9-46BF-BEAC-45E6F98ACA1A}"/>
               </a:ext>
             </a:extLst>
           </p:cNvPr>
@@ -10026,7 +10027,7 @@
           <p:cNvPr id="2" name="Text Placeholder 1">
             <a:extLst>
               <a:ext uri="{FF2B5EF4-FFF2-40B4-BE49-F238E27FC236}">
-                <a16:creationId xmlns="" xmlns:a16="http://schemas.microsoft.com/office/drawing/2014/main" id="{7201737A-B873-4D1D-8A41-5ABF5184BC8F}"/>
+                <a16:creationId xmlns:a16="http://schemas.microsoft.com/office/drawing/2014/main" xmlns="" id="{7201737A-B873-4D1D-8A41-5ABF5184BC8F}"/>
               </a:ext>
             </a:extLst>
           </p:cNvPr>
@@ -10112,7 +10113,7 @@
           <p:cNvPr id="4" name="Title 3">
             <a:extLst>
               <a:ext uri="{FF2B5EF4-FFF2-40B4-BE49-F238E27FC236}">
-                <a16:creationId xmlns="" xmlns:a16="http://schemas.microsoft.com/office/drawing/2014/main" id="{92056599-CDAA-4367-BEF8-31D6E32518C8}"/>
+                <a16:creationId xmlns:a16="http://schemas.microsoft.com/office/drawing/2014/main" xmlns="" id="{92056599-CDAA-4367-BEF8-31D6E32518C8}"/>
               </a:ext>
             </a:extLst>
           </p:cNvPr>
@@ -10125,8 +10126,8 @@
         </p:nvSpPr>
         <p:spPr>
           <a:xfrm>
-            <a:off x="508959" y="2788944"/>
-            <a:ext cx="9583947" cy="1613139"/>
+            <a:off x="2216991" y="2788944"/>
+            <a:ext cx="5391508" cy="1613139"/>
           </a:xfrm>
         </p:spPr>
         <p:txBody>
@@ -10136,45 +10137,16 @@
           <a:lstStyle/>
           <a:p>
             <a:r>
-              <a:rPr lang="en-US" sz="3200" b="1" dirty="0" smtClean="0">
-                <a:latin typeface="Trebuchet MS" pitchFamily="34" charset="0"/>
-                <a:ea typeface="Trebuchet MS" pitchFamily="34" charset="-122"/>
-                <a:cs typeface="Trebuchet MS" pitchFamily="34" charset="-120"/>
+              <a:rPr lang="en-US" sz="4000" b="1" dirty="0" smtClean="0">
+                <a:latin typeface="Arial" panose="020B0604020202020204" pitchFamily="34" charset="0"/>
+                <a:cs typeface="Arial" panose="020B0604020202020204" pitchFamily="34" charset="0"/>
               </a:rPr>
-              <a:t>CAR </a:t>
-            </a:r>
-            <a:r>
-              <a:rPr lang="en-US" sz="3200" b="1" dirty="0">
-                <a:latin typeface="Trebuchet MS" pitchFamily="34" charset="0"/>
-                <a:ea typeface="Trebuchet MS" pitchFamily="34" charset="-122"/>
-                <a:cs typeface="Trebuchet MS" pitchFamily="34" charset="-120"/>
-              </a:rPr>
-              <a:t>MARKET </a:t>
-            </a:r>
-            <a:r>
-              <a:rPr lang="en-US" sz="3200" b="1" dirty="0" smtClean="0">
-                <a:latin typeface="Trebuchet MS" pitchFamily="34" charset="0"/>
-                <a:ea typeface="Trebuchet MS" pitchFamily="34" charset="-122"/>
-                <a:cs typeface="Trebuchet MS" pitchFamily="34" charset="-120"/>
-              </a:rPr>
-              <a:t>TREND </a:t>
-            </a:r>
-            <a:r>
-              <a:rPr lang="en-US" sz="3200" b="1" dirty="0">
-                <a:latin typeface="Trebuchet MS" pitchFamily="34" charset="0"/>
-                <a:ea typeface="Trebuchet MS" pitchFamily="34" charset="-122"/>
-                <a:cs typeface="Trebuchet MS" pitchFamily="34" charset="-120"/>
-              </a:rPr>
-              <a:t>ANALYSIS</a:t>
-            </a:r>
-            <a:r>
-              <a:rPr lang="en-US" sz="3200" dirty="0"/>
-              <a:t/>
-            </a:r>
-            <a:br>
-              <a:rPr lang="en-US" sz="3200" dirty="0"/>
-            </a:br>
-            <a:endParaRPr lang="en-IN" sz="3200" dirty="0"/>
+              <a:t>Car Market Insights</a:t>
+            </a:r>
+            <a:endParaRPr lang="en-IN" sz="4000" dirty="0">
+              <a:latin typeface="Arial" panose="020B0604020202020204" pitchFamily="34" charset="0"/>
+              <a:cs typeface="Arial" panose="020B0604020202020204" pitchFamily="34" charset="0"/>
+            </a:endParaRPr>
           </a:p>
         </p:txBody>
       </p:sp>
@@ -10183,7 +10155,7 @@
           <p:cNvPr id="6" name="Picture 5">
             <a:extLst>
               <a:ext uri="{FF2B5EF4-FFF2-40B4-BE49-F238E27FC236}">
-                <a16:creationId xmlns="" xmlns:a16="http://schemas.microsoft.com/office/drawing/2014/main" id="{E30DEFF0-8DEE-4B0B-9B30-675FE9E288A2}"/>
+                <a16:creationId xmlns:a16="http://schemas.microsoft.com/office/drawing/2014/main" xmlns="" id="{E30DEFF0-8DEE-4B0B-9B30-675FE9E288A2}"/>
               </a:ext>
             </a:extLst>
           </p:cNvPr>
@@ -10215,7 +10187,7 @@
         </p:nvSpPr>
         <p:spPr>
           <a:xfrm>
-            <a:off x="508959" y="3318802"/>
+            <a:off x="2777705" y="3410848"/>
             <a:ext cx="6788989" cy="369332"/>
           </a:xfrm>
           <a:prstGeom prst="rect">
@@ -10231,49 +10203,11 @@
             <a:r>
               <a:rPr lang="en-US" dirty="0">
                 <a:solidFill>
-                  <a:schemeClr val="accent1">
-                    <a:lumMod val="50000"/>
-                  </a:schemeClr>
-                </a:solidFill>
-                <a:latin typeface="Calibri" pitchFamily="34" charset="0"/>
-                <a:ea typeface="Calibri" pitchFamily="34" charset="-122"/>
-                <a:cs typeface="Calibri" pitchFamily="34" charset="-120"/>
+                  <a:srgbClr val="00B0F0"/>
+                </a:solidFill>
               </a:rPr>
-              <a:t>Pricing &amp; Depreciation Insights from the </a:t>
-            </a:r>
-            <a:r>
-              <a:rPr lang="en-US" dirty="0" err="1">
-                <a:solidFill>
-                  <a:schemeClr val="accent1">
-                    <a:lumMod val="50000"/>
-                  </a:schemeClr>
-                </a:solidFill>
-                <a:latin typeface="Calibri" pitchFamily="34" charset="0"/>
-                <a:ea typeface="Calibri" pitchFamily="34" charset="-122"/>
-                <a:cs typeface="Calibri" pitchFamily="34" charset="-120"/>
-              </a:rPr>
-              <a:t>CarDekho</a:t>
-            </a:r>
-            <a:r>
-              <a:rPr lang="en-US" dirty="0">
-                <a:solidFill>
-                  <a:schemeClr val="accent1">
-                    <a:lumMod val="50000"/>
-                  </a:schemeClr>
-                </a:solidFill>
-                <a:latin typeface="Calibri" pitchFamily="34" charset="0"/>
-                <a:ea typeface="Calibri" pitchFamily="34" charset="-122"/>
-                <a:cs typeface="Calibri" pitchFamily="34" charset="-120"/>
-              </a:rPr>
-              <a:t> Used-Car Dataset</a:t>
-            </a:r>
-            <a:endParaRPr lang="en-US" dirty="0">
-              <a:solidFill>
-                <a:schemeClr val="accent1">
-                  <a:lumMod val="50000"/>
-                </a:schemeClr>
-              </a:solidFill>
-            </a:endParaRPr>
+              <a:t>What Makes a Used Car Worth More?</a:t>
+            </a:r>
           </a:p>
         </p:txBody>
       </p:sp>
@@ -10764,7 +10698,7 @@
           <p:cNvPr id="5" name="Picture 4">
             <a:extLst>
               <a:ext uri="{FF2B5EF4-FFF2-40B4-BE49-F238E27FC236}">
-                <a16:creationId xmlns="" xmlns:a16="http://schemas.microsoft.com/office/drawing/2014/main" id="{BBB0C869-7C5C-4070-BD4D-F3FC2DA8F301}"/>
+                <a16:creationId xmlns:a16="http://schemas.microsoft.com/office/drawing/2014/main" xmlns="" id="{BBB0C869-7C5C-4070-BD4D-F3FC2DA8F301}"/>
               </a:ext>
             </a:extLst>
           </p:cNvPr>
@@ -10793,7 +10727,7 @@
           <p:cNvPr id="4" name="Title 3">
             <a:extLst>
               <a:ext uri="{FF2B5EF4-FFF2-40B4-BE49-F238E27FC236}">
-                <a16:creationId xmlns="" xmlns:a16="http://schemas.microsoft.com/office/drawing/2014/main" id="{AFE3A2AF-177E-45E6-A191-0F8523DB7FFA}"/>
+                <a16:creationId xmlns:a16="http://schemas.microsoft.com/office/drawing/2014/main" xmlns="" id="{AFE3A2AF-177E-45E6-A191-0F8523DB7FFA}"/>
               </a:ext>
             </a:extLst>
           </p:cNvPr>
@@ -10833,7 +10767,7 @@
           <p:cNvPr id="7" name="Text Placeholder 30">
             <a:extLst>
               <a:ext uri="{FF2B5EF4-FFF2-40B4-BE49-F238E27FC236}">
-                <a16:creationId xmlns="" xmlns:a16="http://schemas.microsoft.com/office/drawing/2014/main" id="{372426BE-BEE7-4A6D-BCD2-059615BBCE25}"/>
+                <a16:creationId xmlns:a16="http://schemas.microsoft.com/office/drawing/2014/main" xmlns="" id="{372426BE-BEE7-4A6D-BCD2-059615BBCE25}"/>
               </a:ext>
             </a:extLst>
           </p:cNvPr>
@@ -11089,7 +11023,7 @@
           <p:cNvPr id="8" name="Text Placeholder 30">
             <a:extLst>
               <a:ext uri="{FF2B5EF4-FFF2-40B4-BE49-F238E27FC236}">
-                <a16:creationId xmlns="" xmlns:a16="http://schemas.microsoft.com/office/drawing/2014/main" id="{E61E227A-5883-4C77-B25A-46A22FFDF41F}"/>
+                <a16:creationId xmlns:a16="http://schemas.microsoft.com/office/drawing/2014/main" xmlns="" id="{E61E227A-5883-4C77-B25A-46A22FFDF41F}"/>
               </a:ext>
             </a:extLst>
           </p:cNvPr>
@@ -11345,7 +11279,7 @@
           <p:cNvPr id="9" name="Title 3">
             <a:extLst>
               <a:ext uri="{FF2B5EF4-FFF2-40B4-BE49-F238E27FC236}">
-                <a16:creationId xmlns="" xmlns:a16="http://schemas.microsoft.com/office/drawing/2014/main" id="{E25373E9-1A26-4A40-9897-E42DE485D8E3}"/>
+                <a16:creationId xmlns:a16="http://schemas.microsoft.com/office/drawing/2014/main" xmlns="" id="{E25373E9-1A26-4A40-9897-E42DE485D8E3}"/>
               </a:ext>
             </a:extLst>
           </p:cNvPr>
@@ -11457,7 +11391,7 @@
           <p:cNvPr id="10" name="Text Placeholder 1">
             <a:extLst>
               <a:ext uri="{FF2B5EF4-FFF2-40B4-BE49-F238E27FC236}">
-                <a16:creationId xmlns="" xmlns:a16="http://schemas.microsoft.com/office/drawing/2014/main" id="{B19D8AC7-3787-4ADB-9212-0808F015C2DD}"/>
+                <a16:creationId xmlns:a16="http://schemas.microsoft.com/office/drawing/2014/main" xmlns="" id="{B19D8AC7-3787-4ADB-9212-0808F015C2DD}"/>
               </a:ext>
             </a:extLst>
           </p:cNvPr>
@@ -11493,8 +11427,8 @@
         </p:nvSpPr>
         <p:spPr>
           <a:xfrm>
-            <a:off x="422959" y="4844891"/>
-            <a:ext cx="8168950" cy="1723549"/>
+            <a:off x="320982" y="4583281"/>
+            <a:ext cx="8978492" cy="2308324"/>
           </a:xfrm>
           <a:prstGeom prst="rect">
             <a:avLst/>
@@ -11506,74 +11440,87 @@
           </a:bodyPr>
           <a:lstStyle/>
           <a:p>
-            <a:pPr marL="342900" indent="-342900">
-              <a:spcAft>
-                <a:spcPts val="600"/>
-              </a:spcAft>
-              <a:buSzPct val="100000"/>
+            <a:pPr marL="285750" lvl="0" indent="-285750">
+              <a:lnSpc>
+                <a:spcPct val="150000"/>
+              </a:lnSpc>
+              <a:buFont typeface="Arial" panose="020B0604020202020204" pitchFamily="34" charset="0"/>
               <a:buChar char="•"/>
             </a:pPr>
             <a:r>
-              <a:rPr lang="en-US" sz="1600" dirty="0">
-                <a:latin typeface="Calibri" pitchFamily="34" charset="0"/>
-                <a:ea typeface="Calibri" pitchFamily="34" charset="-122"/>
-                <a:cs typeface="Calibri" pitchFamily="34" charset="-120"/>
+              <a:rPr lang="en-IN" sz="1600" b="1" dirty="0">
+                <a:latin typeface="Arial" panose="020B0604020202020204" pitchFamily="34" charset="0"/>
+                <a:cs typeface="Arial" panose="020B0604020202020204" pitchFamily="34" charset="0"/>
               </a:rPr>
-              <a:t>Zero-owner cars (96.3% of listings) show a much higher median price and wider upside than 1-owner cars.</a:t>
-            </a:r>
-            <a:endParaRPr lang="en-US" sz="1600" dirty="0"/>
-          </a:p>
-          <a:p>
-            <a:pPr marL="342900" indent="-342900">
-              <a:spcAft>
-                <a:spcPts val="600"/>
-              </a:spcAft>
-              <a:buSzPct val="100000"/>
+              <a:t>First-owner cars hold better value:</a:t>
+            </a:r>
+            <a:r>
+              <a:rPr lang="en-IN" sz="1600" dirty="0">
+                <a:latin typeface="Arial" panose="020B0604020202020204" pitchFamily="34" charset="0"/>
+                <a:cs typeface="Arial" panose="020B0604020202020204" pitchFamily="34" charset="0"/>
+              </a:rPr>
+              <a:t> Cars with zero previous transfers sell for noticeably higher prices than multi-owner cars.</a:t>
+            </a:r>
+          </a:p>
+          <a:p>
+            <a:pPr marL="285750" lvl="0" indent="-285750">
+              <a:lnSpc>
+                <a:spcPct val="150000"/>
+              </a:lnSpc>
+              <a:buFont typeface="Arial" panose="020B0604020202020204" pitchFamily="34" charset="0"/>
               <a:buChar char="•"/>
             </a:pPr>
             <a:r>
-              <a:rPr lang="en-US" sz="1600" dirty="0">
-                <a:latin typeface="Calibri" pitchFamily="34" charset="0"/>
-                <a:ea typeface="Calibri" pitchFamily="34" charset="-122"/>
-                <a:cs typeface="Calibri" pitchFamily="34" charset="-120"/>
+              <a:rPr lang="en-IN" sz="1600" b="1" dirty="0">
+                <a:latin typeface="Arial" panose="020B0604020202020204" pitchFamily="34" charset="0"/>
+                <a:cs typeface="Arial" panose="020B0604020202020204" pitchFamily="34" charset="0"/>
               </a:rPr>
-              <a:t>Seller type is the sharpest split in the data: Dealer median ₹4.98L vs Individual median ₹0.51L </a:t>
-            </a:r>
-            <a:r>
-              <a:rPr lang="en-US" sz="1600" dirty="0" smtClean="0">
-                <a:latin typeface="Calibri" pitchFamily="34" charset="0"/>
-                <a:ea typeface="Calibri" pitchFamily="34" charset="-122"/>
-                <a:cs typeface="Calibri" pitchFamily="34" charset="-120"/>
+              <a:t>Dealers list higher-value cars:</a:t>
+            </a:r>
+            <a:r>
+              <a:rPr lang="en-IN" sz="1600" dirty="0">
+                <a:latin typeface="Arial" panose="020B0604020202020204" pitchFamily="34" charset="0"/>
+                <a:cs typeface="Arial" panose="020B0604020202020204" pitchFamily="34" charset="0"/>
               </a:rPr>
-              <a:t>- </a:t>
-            </a:r>
-            <a:r>
-              <a:rPr lang="en-US" sz="1600" dirty="0">
-                <a:latin typeface="Calibri" pitchFamily="34" charset="0"/>
-                <a:ea typeface="Calibri" pitchFamily="34" charset="-122"/>
-                <a:cs typeface="Calibri" pitchFamily="34" charset="-120"/>
-              </a:rPr>
-              <a:t>roughly 10x.</a:t>
-            </a:r>
-            <a:endParaRPr lang="en-US" sz="1600" dirty="0"/>
-          </a:p>
-          <a:p>
-            <a:pPr marL="342900" indent="-342900">
-              <a:spcAft>
-                <a:spcPts val="600"/>
-              </a:spcAft>
-              <a:buSzPct val="100000"/>
+              <a:t> Dealers average much higher selling prices (₹4.98L) compared to individual sellers (₹0.51L).</a:t>
+            </a:r>
+          </a:p>
+          <a:p>
+            <a:pPr marL="285750" lvl="0" indent="-285750">
+              <a:lnSpc>
+                <a:spcPct val="150000"/>
+              </a:lnSpc>
+              <a:buFont typeface="Arial" panose="020B0604020202020204" pitchFamily="34" charset="0"/>
               <a:buChar char="•"/>
             </a:pPr>
             <a:r>
-              <a:rPr lang="en-US" sz="1600" dirty="0">
-                <a:latin typeface="Calibri" pitchFamily="34" charset="0"/>
-                <a:ea typeface="Calibri" pitchFamily="34" charset="-122"/>
-                <a:cs typeface="Calibri" pitchFamily="34" charset="-120"/>
+              <a:rPr lang="en-IN" sz="1600" b="1" dirty="0">
+                <a:latin typeface="Arial" panose="020B0604020202020204" pitchFamily="34" charset="0"/>
+                <a:cs typeface="Arial" panose="020B0604020202020204" pitchFamily="34" charset="0"/>
               </a:rPr>
-              <a:t>That gap is likely a quality-tier proxy (dealers stock newer/premium cars), not a standalone “dealer markup” effect.</a:t>
-            </a:r>
-            <a:endParaRPr lang="en-US" sz="1600" dirty="0"/>
+              <a:t>Key takeaway:</a:t>
+            </a:r>
+            <a:r>
+              <a:rPr lang="en-IN" sz="1600" dirty="0">
+                <a:latin typeface="Arial" panose="020B0604020202020204" pitchFamily="34" charset="0"/>
+                <a:cs typeface="Arial" panose="020B0604020202020204" pitchFamily="34" charset="0"/>
+              </a:rPr>
+              <a:t> Dealers tend to stock newer, premium inventory rather than simply charging higher </a:t>
+            </a:r>
+            <a:r>
+              <a:rPr lang="en-IN" sz="1600" dirty="0" err="1">
+                <a:latin typeface="Arial" panose="020B0604020202020204" pitchFamily="34" charset="0"/>
+                <a:cs typeface="Arial" panose="020B0604020202020204" pitchFamily="34" charset="0"/>
+              </a:rPr>
+              <a:t>markups</a:t>
+            </a:r>
+            <a:r>
+              <a:rPr lang="en-IN" sz="1600" dirty="0">
+                <a:latin typeface="Arial" panose="020B0604020202020204" pitchFamily="34" charset="0"/>
+                <a:cs typeface="Arial" panose="020B0604020202020204" pitchFamily="34" charset="0"/>
+              </a:rPr>
+              <a:t>.</a:t>
+            </a:r>
           </a:p>
         </p:txBody>
       </p:sp>
@@ -11599,7 +11546,7 @@
         </p:blipFill>
         <p:spPr>
           <a:xfrm>
-            <a:off x="189781" y="1010409"/>
+            <a:off x="238244" y="913889"/>
             <a:ext cx="4968815" cy="3795994"/>
           </a:xfrm>
           <a:prstGeom prst="rect">
@@ -11629,7 +11576,7 @@
         </p:blipFill>
         <p:spPr>
           <a:xfrm>
-            <a:off x="4787661" y="1010409"/>
+            <a:off x="4775315" y="913889"/>
             <a:ext cx="4632385" cy="3795994"/>
           </a:xfrm>
           <a:prstGeom prst="rect">
@@ -12178,7 +12125,7 @@
           <p:cNvPr id="5" name="Picture 4">
             <a:extLst>
               <a:ext uri="{FF2B5EF4-FFF2-40B4-BE49-F238E27FC236}">
-                <a16:creationId xmlns="" xmlns:a16="http://schemas.microsoft.com/office/drawing/2014/main" id="{BBB0C869-7C5C-4070-BD4D-F3FC2DA8F301}"/>
+                <a16:creationId xmlns:a16="http://schemas.microsoft.com/office/drawing/2014/main" xmlns="" id="{BBB0C869-7C5C-4070-BD4D-F3FC2DA8F301}"/>
               </a:ext>
             </a:extLst>
           </p:cNvPr>
@@ -12207,7 +12154,7 @@
           <p:cNvPr id="4" name="Title 3">
             <a:extLst>
               <a:ext uri="{FF2B5EF4-FFF2-40B4-BE49-F238E27FC236}">
-                <a16:creationId xmlns="" xmlns:a16="http://schemas.microsoft.com/office/drawing/2014/main" id="{AFE3A2AF-177E-45E6-A191-0F8523DB7FFA}"/>
+                <a16:creationId xmlns:a16="http://schemas.microsoft.com/office/drawing/2014/main" xmlns="" id="{AFE3A2AF-177E-45E6-A191-0F8523DB7FFA}"/>
               </a:ext>
             </a:extLst>
           </p:cNvPr>
@@ -12263,7 +12210,7 @@
           <p:cNvPr id="7" name="Text Placeholder 30">
             <a:extLst>
               <a:ext uri="{FF2B5EF4-FFF2-40B4-BE49-F238E27FC236}">
-                <a16:creationId xmlns="" xmlns:a16="http://schemas.microsoft.com/office/drawing/2014/main" id="{372426BE-BEE7-4A6D-BCD2-059615BBCE25}"/>
+                <a16:creationId xmlns:a16="http://schemas.microsoft.com/office/drawing/2014/main" xmlns="" id="{372426BE-BEE7-4A6D-BCD2-059615BBCE25}"/>
               </a:ext>
             </a:extLst>
           </p:cNvPr>
@@ -12519,7 +12466,7 @@
           <p:cNvPr id="8" name="Text Placeholder 30">
             <a:extLst>
               <a:ext uri="{FF2B5EF4-FFF2-40B4-BE49-F238E27FC236}">
-                <a16:creationId xmlns="" xmlns:a16="http://schemas.microsoft.com/office/drawing/2014/main" id="{E61E227A-5883-4C77-B25A-46A22FFDF41F}"/>
+                <a16:creationId xmlns:a16="http://schemas.microsoft.com/office/drawing/2014/main" xmlns="" id="{E61E227A-5883-4C77-B25A-46A22FFDF41F}"/>
               </a:ext>
             </a:extLst>
           </p:cNvPr>
@@ -12772,172 +12719,10 @@
       </p:sp>
       <p:sp>
         <p:nvSpPr>
-          <p:cNvPr id="9" name="Title 3">
-            <a:extLst>
-              <a:ext uri="{FF2B5EF4-FFF2-40B4-BE49-F238E27FC236}">
-                <a16:creationId xmlns="" xmlns:a16="http://schemas.microsoft.com/office/drawing/2014/main" id="{E25373E9-1A26-4A40-9897-E42DE485D8E3}"/>
-              </a:ext>
-            </a:extLst>
-          </p:cNvPr>
-          <p:cNvSpPr txBox="1">
-            <a:spLocks/>
-          </p:cNvSpPr>
-          <p:nvPr/>
-        </p:nvSpPr>
-        <p:spPr>
-          <a:xfrm>
-            <a:off x="448131" y="5429534"/>
-            <a:ext cx="2981643" cy="830997"/>
-          </a:xfrm>
-          <a:prstGeom prst="rect">
-            <a:avLst/>
-          </a:prstGeom>
-        </p:spPr>
-        <p:txBody>
-          <a:bodyPr vert="horz" lIns="91440" tIns="45720" rIns="91440" bIns="45720" rtlCol="0" anchor="t">
-            <a:normAutofit/>
-          </a:bodyPr>
-          <a:lstStyle>
-            <a:lvl1pPr algn="l" defTabSz="457200" rtl="0" eaLnBrk="1" latinLnBrk="0" hangingPunct="1">
-              <a:spcBef>
-                <a:spcPct val="0"/>
-              </a:spcBef>
-              <a:buNone/>
-              <a:defRPr sz="4800" b="1" kern="1200">
-                <a:solidFill>
-                  <a:schemeClr val="tx1"/>
-                </a:solidFill>
-                <a:latin typeface="+mj-lt"/>
-                <a:ea typeface="+mj-ea"/>
-                <a:cs typeface="+mj-cs"/>
-              </a:defRPr>
-            </a:lvl1pPr>
-            <a:lvl2pPr eaLnBrk="1" hangingPunct="1">
-              <a:defRPr>
-                <a:solidFill>
-                  <a:schemeClr val="tx2"/>
-                </a:solidFill>
-              </a:defRPr>
-            </a:lvl2pPr>
-            <a:lvl3pPr eaLnBrk="1" hangingPunct="1">
-              <a:defRPr>
-                <a:solidFill>
-                  <a:schemeClr val="tx2"/>
-                </a:solidFill>
-              </a:defRPr>
-            </a:lvl3pPr>
-            <a:lvl4pPr eaLnBrk="1" hangingPunct="1">
-              <a:defRPr>
-                <a:solidFill>
-                  <a:schemeClr val="tx2"/>
-                </a:solidFill>
-              </a:defRPr>
-            </a:lvl4pPr>
-            <a:lvl5pPr eaLnBrk="1" hangingPunct="1">
-              <a:defRPr>
-                <a:solidFill>
-                  <a:schemeClr val="tx2"/>
-                </a:solidFill>
-              </a:defRPr>
-            </a:lvl5pPr>
-            <a:lvl6pPr eaLnBrk="1" hangingPunct="1">
-              <a:defRPr>
-                <a:solidFill>
-                  <a:schemeClr val="tx2"/>
-                </a:solidFill>
-              </a:defRPr>
-            </a:lvl6pPr>
-            <a:lvl7pPr eaLnBrk="1" hangingPunct="1">
-              <a:defRPr>
-                <a:solidFill>
-                  <a:schemeClr val="tx2"/>
-                </a:solidFill>
-              </a:defRPr>
-            </a:lvl7pPr>
-            <a:lvl8pPr eaLnBrk="1" hangingPunct="1">
-              <a:defRPr>
-                <a:solidFill>
-                  <a:schemeClr val="tx2"/>
-                </a:solidFill>
-              </a:defRPr>
-            </a:lvl8pPr>
-            <a:lvl9pPr eaLnBrk="1" hangingPunct="1">
-              <a:defRPr>
-                <a:solidFill>
-                  <a:schemeClr val="tx2"/>
-                </a:solidFill>
-              </a:defRPr>
-            </a:lvl9pPr>
-          </a:lstStyle>
-          <a:p>
-            <a:r>
-              <a:rPr lang="en-US" sz="1400" dirty="0" err="1">
-                <a:latin typeface="Calibri" pitchFamily="34" charset="0"/>
-                <a:ea typeface="Calibri" pitchFamily="34" charset="-122"/>
-                <a:cs typeface="Calibri" pitchFamily="34" charset="-120"/>
-              </a:rPr>
-              <a:t>Present_Price</a:t>
-            </a:r>
-            <a:r>
-              <a:rPr lang="en-US" sz="1400" dirty="0">
-                <a:latin typeface="Calibri" pitchFamily="34" charset="0"/>
-                <a:ea typeface="Calibri" pitchFamily="34" charset="-122"/>
-                <a:cs typeface="Calibri" pitchFamily="34" charset="-120"/>
-              </a:rPr>
-              <a:t> </a:t>
-            </a:r>
-            <a:r>
-              <a:rPr lang="en-US" sz="1400" dirty="0" smtClean="0">
-                <a:latin typeface="Calibri" pitchFamily="34" charset="0"/>
-                <a:ea typeface="Calibri" pitchFamily="34" charset="-122"/>
-                <a:cs typeface="Calibri" pitchFamily="34" charset="-120"/>
-              </a:rPr>
-              <a:t>-&gt; </a:t>
-            </a:r>
-            <a:r>
-              <a:rPr lang="en-US" sz="1400" dirty="0" err="1" smtClean="0">
-                <a:latin typeface="Calibri" pitchFamily="34" charset="0"/>
-                <a:ea typeface="Calibri" pitchFamily="34" charset="-122"/>
-                <a:cs typeface="Calibri" pitchFamily="34" charset="-120"/>
-              </a:rPr>
-              <a:t>Selling_Price</a:t>
-            </a:r>
-            <a:r>
-              <a:rPr lang="en-US" sz="1400" dirty="0" smtClean="0">
-                <a:latin typeface="Calibri" pitchFamily="34" charset="0"/>
-                <a:ea typeface="Calibri" pitchFamily="34" charset="-122"/>
-                <a:cs typeface="Calibri" pitchFamily="34" charset="-120"/>
-              </a:rPr>
-              <a:t>  </a:t>
-            </a:r>
-            <a:r>
-              <a:rPr lang="en-US" sz="1400" dirty="0" smtClean="0">
-                <a:solidFill>
-                  <a:srgbClr val="00B050"/>
-                </a:solidFill>
-                <a:latin typeface="Trebuchet MS" pitchFamily="34" charset="0"/>
-                <a:ea typeface="Trebuchet MS" pitchFamily="34" charset="-122"/>
-                <a:cs typeface="Trebuchet MS" pitchFamily="34" charset="-120"/>
-              </a:rPr>
-              <a:t>0.80</a:t>
-            </a:r>
-            <a:endParaRPr lang="en-US" sz="1400" dirty="0">
-              <a:solidFill>
-                <a:srgbClr val="00B050"/>
-              </a:solidFill>
-            </a:endParaRPr>
-          </a:p>
-          <a:p>
-            <a:endParaRPr lang="en-US" sz="1400" dirty="0"/>
-          </a:p>
-        </p:txBody>
-      </p:sp>
-      <p:sp>
-        <p:nvSpPr>
           <p:cNvPr id="10" name="Text Placeholder 1">
             <a:extLst>
               <a:ext uri="{FF2B5EF4-FFF2-40B4-BE49-F238E27FC236}">
-                <a16:creationId xmlns="" xmlns:a16="http://schemas.microsoft.com/office/drawing/2014/main" id="{B19D8AC7-3787-4ADB-9212-0808F015C2DD}"/>
+                <a16:creationId xmlns:a16="http://schemas.microsoft.com/office/drawing/2014/main" xmlns="" id="{B19D8AC7-3787-4ADB-9212-0808F015C2DD}"/>
               </a:ext>
             </a:extLst>
           </p:cNvPr>
@@ -12962,63 +12747,6 @@
               <a:buNone/>
             </a:pPr>
             <a:endParaRPr lang="en-IN" dirty="0"/>
-          </a:p>
-        </p:txBody>
-      </p:sp>
-      <p:sp>
-        <p:nvSpPr>
-          <p:cNvPr id="11" name="Rectangle 10"/>
-          <p:cNvSpPr/>
-          <p:nvPr/>
-        </p:nvSpPr>
-        <p:spPr>
-          <a:xfrm>
-            <a:off x="320982" y="5170490"/>
-            <a:ext cx="8168950" cy="307777"/>
-          </a:xfrm>
-          <a:prstGeom prst="rect">
-            <a:avLst/>
-          </a:prstGeom>
-        </p:spPr>
-        <p:txBody>
-          <a:bodyPr wrap="square">
-            <a:spAutoFit/>
-          </a:bodyPr>
-          <a:lstStyle/>
-          <a:p>
-            <a:r>
-              <a:rPr lang="en-US" sz="1400" b="1" u="sng" dirty="0">
-                <a:solidFill>
-                  <a:schemeClr val="accent1">
-                    <a:lumMod val="75000"/>
-                  </a:schemeClr>
-                </a:solidFill>
-                <a:latin typeface="Calibri" pitchFamily="34" charset="0"/>
-                <a:ea typeface="Calibri" pitchFamily="34" charset="-122"/>
-                <a:cs typeface="Calibri" pitchFamily="34" charset="-120"/>
-              </a:rPr>
-              <a:t>Correlation </a:t>
-            </a:r>
-            <a:r>
-              <a:rPr lang="en-US" sz="1400" b="1" u="sng" dirty="0" smtClean="0">
-                <a:solidFill>
-                  <a:schemeClr val="accent1">
-                    <a:lumMod val="75000"/>
-                  </a:schemeClr>
-                </a:solidFill>
-                <a:latin typeface="Calibri" pitchFamily="34" charset="0"/>
-                <a:ea typeface="Calibri" pitchFamily="34" charset="-122"/>
-                <a:cs typeface="Calibri" pitchFamily="34" charset="-120"/>
-              </a:rPr>
-              <a:t>Readouts :</a:t>
-            </a:r>
-            <a:endParaRPr lang="en-US" sz="1400" u="sng" dirty="0">
-              <a:solidFill>
-                <a:schemeClr val="accent1">
-                  <a:lumMod val="75000"/>
-                </a:schemeClr>
-              </a:solidFill>
-            </a:endParaRPr>
           </a:p>
         </p:txBody>
       </p:sp>
@@ -13052,328 +12780,6 @@
           </a:prstGeom>
         </p:spPr>
       </p:pic>
-      <p:sp>
-        <p:nvSpPr>
-          <p:cNvPr id="17" name="Rectangle 16"/>
-          <p:cNvSpPr/>
-          <p:nvPr/>
-        </p:nvSpPr>
-        <p:spPr>
-          <a:xfrm>
-            <a:off x="461471" y="6330994"/>
-            <a:ext cx="4194689" cy="523220"/>
-          </a:xfrm>
-          <a:prstGeom prst="rect">
-            <a:avLst/>
-          </a:prstGeom>
-        </p:spPr>
-        <p:txBody>
-          <a:bodyPr wrap="square">
-            <a:spAutoFit/>
-          </a:bodyPr>
-          <a:lstStyle/>
-          <a:p>
-            <a:r>
-              <a:rPr lang="en-US" sz="1400" b="1" dirty="0" err="1">
-                <a:latin typeface="Calibri" pitchFamily="34" charset="0"/>
-                <a:ea typeface="Calibri" pitchFamily="34" charset="-122"/>
-                <a:cs typeface="Calibri" pitchFamily="34" charset="-120"/>
-              </a:rPr>
-              <a:t>Kms_Driven</a:t>
-            </a:r>
-            <a:r>
-              <a:rPr lang="en-US" sz="1400" b="1" dirty="0">
-                <a:latin typeface="Calibri" pitchFamily="34" charset="0"/>
-                <a:ea typeface="Calibri" pitchFamily="34" charset="-122"/>
-                <a:cs typeface="Calibri" pitchFamily="34" charset="-120"/>
-              </a:rPr>
-              <a:t> </a:t>
-            </a:r>
-            <a:r>
-              <a:rPr lang="en-US" sz="1400" dirty="0">
-                <a:latin typeface="Calibri" pitchFamily="34" charset="0"/>
-                <a:ea typeface="Calibri" pitchFamily="34" charset="-122"/>
-                <a:cs typeface="Calibri" pitchFamily="34" charset="-120"/>
-              </a:rPr>
-              <a:t>-&gt; </a:t>
-            </a:r>
-            <a:r>
-              <a:rPr lang="en-US" sz="1400" b="1" dirty="0" err="1" smtClean="0">
-                <a:latin typeface="Calibri" pitchFamily="34" charset="0"/>
-                <a:ea typeface="Calibri" pitchFamily="34" charset="-122"/>
-                <a:cs typeface="Calibri" pitchFamily="34" charset="-120"/>
-              </a:rPr>
-              <a:t>Selling_Price</a:t>
-            </a:r>
-            <a:r>
-              <a:rPr lang="en-US" sz="1400" b="1" dirty="0" smtClean="0">
-                <a:latin typeface="Calibri" pitchFamily="34" charset="0"/>
-                <a:ea typeface="Calibri" pitchFamily="34" charset="-122"/>
-                <a:cs typeface="Calibri" pitchFamily="34" charset="-120"/>
-              </a:rPr>
-              <a:t> </a:t>
-            </a:r>
-            <a:r>
-              <a:rPr lang="en-US" sz="1400" b="1" dirty="0" smtClean="0">
-                <a:latin typeface="Trebuchet MS" pitchFamily="34" charset="0"/>
-                <a:ea typeface="Calibri" pitchFamily="34" charset="-122"/>
-                <a:cs typeface="Calibri" pitchFamily="34" charset="-120"/>
-              </a:rPr>
-              <a:t> </a:t>
-            </a:r>
-            <a:r>
-              <a:rPr lang="en-US" sz="1400" b="1" dirty="0" smtClean="0">
-                <a:solidFill>
-                  <a:srgbClr val="C00000"/>
-                </a:solidFill>
-                <a:latin typeface="Trebuchet MS" pitchFamily="34" charset="0"/>
-                <a:ea typeface="Calibri" pitchFamily="34" charset="-122"/>
-                <a:cs typeface="Calibri" pitchFamily="34" charset="-120"/>
-              </a:rPr>
-              <a:t>-</a:t>
-            </a:r>
-            <a:r>
-              <a:rPr lang="en-US" sz="1400" b="1" dirty="0" smtClean="0">
-                <a:solidFill>
-                  <a:srgbClr val="C00000"/>
-                </a:solidFill>
-                <a:latin typeface="Trebuchet MS" pitchFamily="34" charset="0"/>
-                <a:ea typeface="Trebuchet MS" pitchFamily="34" charset="-122"/>
-                <a:cs typeface="Trebuchet MS" pitchFamily="34" charset="-120"/>
-              </a:rPr>
-              <a:t>0.00</a:t>
-            </a:r>
-            <a:endParaRPr lang="en-US" sz="1400" dirty="0">
-              <a:solidFill>
-                <a:srgbClr val="C00000"/>
-              </a:solidFill>
-            </a:endParaRPr>
-          </a:p>
-          <a:p>
-            <a:endParaRPr lang="en-US" sz="1400" dirty="0"/>
-          </a:p>
-        </p:txBody>
-      </p:sp>
-      <p:sp>
-        <p:nvSpPr>
-          <p:cNvPr id="18" name="Rectangle 17"/>
-          <p:cNvSpPr/>
-          <p:nvPr/>
-        </p:nvSpPr>
-        <p:spPr>
-          <a:xfrm>
-            <a:off x="461471" y="5742474"/>
-            <a:ext cx="3467103" cy="307777"/>
-          </a:xfrm>
-          <a:prstGeom prst="rect">
-            <a:avLst/>
-          </a:prstGeom>
-        </p:spPr>
-        <p:txBody>
-          <a:bodyPr wrap="none">
-            <a:spAutoFit/>
-          </a:bodyPr>
-          <a:lstStyle/>
-          <a:p>
-            <a:r>
-              <a:rPr lang="en-US" sz="1400" b="1" dirty="0" err="1">
-                <a:latin typeface="Calibri" pitchFamily="34" charset="0"/>
-                <a:ea typeface="Calibri" pitchFamily="34" charset="-122"/>
-                <a:cs typeface="Calibri" pitchFamily="34" charset="-120"/>
-              </a:rPr>
-              <a:t>Depreciation_Amount</a:t>
-            </a:r>
-            <a:r>
-              <a:rPr lang="en-US" sz="1400" b="1" dirty="0">
-                <a:latin typeface="Calibri" pitchFamily="34" charset="0"/>
-                <a:ea typeface="Calibri" pitchFamily="34" charset="-122"/>
-                <a:cs typeface="Calibri" pitchFamily="34" charset="-120"/>
-              </a:rPr>
-              <a:t> </a:t>
-            </a:r>
-            <a:r>
-              <a:rPr lang="en-US" sz="1400" dirty="0">
-                <a:latin typeface="Calibri" pitchFamily="34" charset="0"/>
-                <a:ea typeface="Calibri" pitchFamily="34" charset="-122"/>
-                <a:cs typeface="Calibri" pitchFamily="34" charset="-120"/>
-              </a:rPr>
-              <a:t>-&gt;</a:t>
-            </a:r>
-            <a:r>
-              <a:rPr lang="en-US" sz="1400" b="1" dirty="0" smtClean="0">
-                <a:latin typeface="Calibri" pitchFamily="34" charset="0"/>
-                <a:ea typeface="Calibri" pitchFamily="34" charset="-122"/>
-                <a:cs typeface="Calibri" pitchFamily="34" charset="-120"/>
-              </a:rPr>
-              <a:t> </a:t>
-            </a:r>
-            <a:r>
-              <a:rPr lang="en-US" sz="1400" b="1" dirty="0" err="1" smtClean="0">
-                <a:latin typeface="Calibri" pitchFamily="34" charset="0"/>
-                <a:ea typeface="Calibri" pitchFamily="34" charset="-122"/>
-                <a:cs typeface="Calibri" pitchFamily="34" charset="-120"/>
-              </a:rPr>
-              <a:t>Selling_Price</a:t>
-            </a:r>
-            <a:r>
-              <a:rPr lang="en-US" sz="1400" b="1" dirty="0">
-                <a:latin typeface="Trebuchet MS" pitchFamily="34" charset="0"/>
-                <a:ea typeface="Trebuchet MS" pitchFamily="34" charset="-122"/>
-                <a:cs typeface="Trebuchet MS" pitchFamily="34" charset="-120"/>
-              </a:rPr>
-              <a:t> </a:t>
-            </a:r>
-            <a:r>
-              <a:rPr lang="en-US" sz="1400" b="1" dirty="0">
-                <a:solidFill>
-                  <a:schemeClr val="accent6">
-                    <a:lumMod val="75000"/>
-                  </a:schemeClr>
-                </a:solidFill>
-                <a:latin typeface="Trebuchet MS" pitchFamily="34" charset="0"/>
-                <a:ea typeface="Trebuchet MS" pitchFamily="34" charset="-122"/>
-                <a:cs typeface="Trebuchet MS" pitchFamily="34" charset="-120"/>
-              </a:rPr>
-              <a:t>0.32</a:t>
-            </a:r>
-            <a:endParaRPr lang="en-US" sz="1400" b="1" dirty="0">
-              <a:solidFill>
-                <a:schemeClr val="accent6">
-                  <a:lumMod val="75000"/>
-                </a:schemeClr>
-              </a:solidFill>
-            </a:endParaRPr>
-          </a:p>
-        </p:txBody>
-      </p:sp>
-      <p:sp>
-        <p:nvSpPr>
-          <p:cNvPr id="19" name="Rectangle 18"/>
-          <p:cNvSpPr/>
-          <p:nvPr/>
-        </p:nvSpPr>
-        <p:spPr>
-          <a:xfrm>
-            <a:off x="461471" y="6023217"/>
-            <a:ext cx="3038652" cy="307777"/>
-          </a:xfrm>
-          <a:prstGeom prst="rect">
-            <a:avLst/>
-          </a:prstGeom>
-        </p:spPr>
-        <p:txBody>
-          <a:bodyPr wrap="none">
-            <a:spAutoFit/>
-          </a:bodyPr>
-          <a:lstStyle/>
-          <a:p>
-            <a:r>
-              <a:rPr lang="en-US" sz="1400" b="1" dirty="0" err="1">
-                <a:latin typeface="Calibri" pitchFamily="34" charset="0"/>
-                <a:ea typeface="Calibri" pitchFamily="34" charset="-122"/>
-                <a:cs typeface="Calibri" pitchFamily="34" charset="-120"/>
-              </a:rPr>
-              <a:t>Kms_Driven</a:t>
-            </a:r>
-            <a:r>
-              <a:rPr lang="en-US" sz="1400" b="1" dirty="0">
-                <a:latin typeface="Calibri" pitchFamily="34" charset="0"/>
-                <a:ea typeface="Calibri" pitchFamily="34" charset="-122"/>
-                <a:cs typeface="Calibri" pitchFamily="34" charset="-120"/>
-              </a:rPr>
-              <a:t> </a:t>
-            </a:r>
-            <a:r>
-              <a:rPr lang="en-US" sz="1400" dirty="0">
-                <a:latin typeface="Calibri" pitchFamily="34" charset="0"/>
-                <a:ea typeface="Calibri" pitchFamily="34" charset="-122"/>
-                <a:cs typeface="Calibri" pitchFamily="34" charset="-120"/>
-              </a:rPr>
-              <a:t>-&gt;</a:t>
-            </a:r>
-            <a:r>
-              <a:rPr lang="en-US" sz="1400" b="1" dirty="0" smtClean="0">
-                <a:latin typeface="Calibri" pitchFamily="34" charset="0"/>
-                <a:ea typeface="Calibri" pitchFamily="34" charset="-122"/>
-                <a:cs typeface="Calibri" pitchFamily="34" charset="-120"/>
-              </a:rPr>
-              <a:t> </a:t>
-            </a:r>
-            <a:r>
-              <a:rPr lang="en-US" sz="1400" b="1" dirty="0" err="1" smtClean="0">
-                <a:latin typeface="Calibri" pitchFamily="34" charset="0"/>
-                <a:ea typeface="Calibri" pitchFamily="34" charset="-122"/>
-                <a:cs typeface="Calibri" pitchFamily="34" charset="-120"/>
-              </a:rPr>
-              <a:t>Depreciation_Pct</a:t>
-            </a:r>
-            <a:r>
-              <a:rPr lang="en-US" sz="1400" b="1" dirty="0">
-                <a:latin typeface="Trebuchet MS" pitchFamily="34" charset="0"/>
-                <a:ea typeface="Trebuchet MS" pitchFamily="34" charset="-122"/>
-                <a:cs typeface="Trebuchet MS" pitchFamily="34" charset="-120"/>
-              </a:rPr>
-              <a:t> </a:t>
-            </a:r>
-            <a:r>
-              <a:rPr lang="en-US" sz="1400" b="1" dirty="0">
-                <a:solidFill>
-                  <a:srgbClr val="2E83C3"/>
-                </a:solidFill>
-                <a:latin typeface="Trebuchet MS" pitchFamily="34" charset="0"/>
-                <a:ea typeface="Trebuchet MS" pitchFamily="34" charset="-122"/>
-                <a:cs typeface="Trebuchet MS" pitchFamily="34" charset="-120"/>
-              </a:rPr>
-              <a:t>0.50</a:t>
-            </a:r>
-            <a:endParaRPr lang="en-US" sz="1400" dirty="0"/>
-          </a:p>
-        </p:txBody>
-      </p:sp>
-      <p:sp>
-        <p:nvSpPr>
-          <p:cNvPr id="20" name="Rectangle 19"/>
-          <p:cNvSpPr/>
-          <p:nvPr/>
-        </p:nvSpPr>
-        <p:spPr>
-          <a:xfrm>
-            <a:off x="7387087" y="2514961"/>
-            <a:ext cx="2395268" cy="954107"/>
-          </a:xfrm>
-          <a:prstGeom prst="rect">
-            <a:avLst/>
-          </a:prstGeom>
-        </p:spPr>
-        <p:txBody>
-          <a:bodyPr wrap="square">
-            <a:spAutoFit/>
-          </a:bodyPr>
-          <a:lstStyle/>
-          <a:p>
-            <a:r>
-              <a:rPr lang="en-US" sz="1400" i="1" dirty="0">
-                <a:solidFill>
-                  <a:schemeClr val="accent1">
-                    <a:lumMod val="75000"/>
-                  </a:schemeClr>
-                </a:solidFill>
-                <a:latin typeface="Calibri" pitchFamily="34" charset="0"/>
-                <a:ea typeface="Calibri" pitchFamily="34" charset="-122"/>
-                <a:cs typeface="Calibri" pitchFamily="34" charset="-120"/>
-              </a:rPr>
-              <a:t>Present Price is the strongest single predictor; mileage predicts % depreciation better than it predicts raw price.</a:t>
-            </a:r>
-            <a:endParaRPr lang="en-US" sz="1400" dirty="0">
-              <a:solidFill>
-                <a:schemeClr val="accent1">
-                  <a:lumMod val="75000"/>
-                </a:schemeClr>
-              </a:solidFill>
-            </a:endParaRPr>
-          </a:p>
-        </p:txBody>
-      </p:sp>
       <p:sp>
         <p:nvSpPr>
           <p:cNvPr id="31" name="TextBox 30"/>
@@ -13440,6 +12846,166 @@
               <a:t>Finding No - 5</a:t>
             </a:r>
             <a:endParaRPr lang="en-IN" sz="1400" dirty="0"/>
+          </a:p>
+        </p:txBody>
+      </p:sp>
+      <p:sp>
+        <p:nvSpPr>
+          <p:cNvPr id="15" name="Rectangle 14"/>
+          <p:cNvSpPr/>
+          <p:nvPr/>
+        </p:nvSpPr>
+        <p:spPr>
+          <a:xfrm>
+            <a:off x="346570" y="4782443"/>
+            <a:ext cx="8585159" cy="1938992"/>
+          </a:xfrm>
+          <a:prstGeom prst="rect">
+            <a:avLst/>
+          </a:prstGeom>
+        </p:spPr>
+        <p:txBody>
+          <a:bodyPr wrap="square">
+            <a:spAutoFit/>
+          </a:bodyPr>
+          <a:lstStyle/>
+          <a:p>
+            <a:pPr marL="285750" lvl="0" indent="-285750" defTabSz="914400" eaLnBrk="0" fontAlgn="base" hangingPunct="0">
+              <a:lnSpc>
+                <a:spcPct val="150000"/>
+              </a:lnSpc>
+              <a:spcBef>
+                <a:spcPct val="0"/>
+              </a:spcBef>
+              <a:spcAft>
+                <a:spcPct val="0"/>
+              </a:spcAft>
+              <a:buFont typeface="Arial" panose="020B0604020202020204" pitchFamily="34" charset="0"/>
+              <a:buChar char="•"/>
+              <a:tabLst>
+                <a:tab pos="457200" algn="l"/>
+              </a:tabLst>
+            </a:pPr>
+            <a:r>
+              <a:rPr lang="en-US" altLang="en-US" sz="1600" b="1" dirty="0">
+                <a:latin typeface="Arial" panose="020B0604020202020204" pitchFamily="34" charset="0"/>
+                <a:ea typeface="Times New Roman" panose="02020603050405020304" pitchFamily="18" charset="0"/>
+                <a:cs typeface="Arial" panose="020B0604020202020204" pitchFamily="34" charset="0"/>
+              </a:rPr>
+              <a:t>Original price is the biggest factor:</a:t>
+            </a:r>
+            <a:r>
+              <a:rPr lang="en-US" altLang="en-US" sz="1600" dirty="0">
+                <a:latin typeface="Arial" panose="020B0604020202020204" pitchFamily="34" charset="0"/>
+                <a:ea typeface="Times New Roman" panose="02020603050405020304" pitchFamily="18" charset="0"/>
+                <a:cs typeface="Arial" panose="020B0604020202020204" pitchFamily="34" charset="0"/>
+              </a:rPr>
+              <a:t> The original new price (</a:t>
+            </a:r>
+            <a:r>
+              <a:rPr lang="en-US" altLang="en-US" sz="1200" dirty="0" err="1">
+                <a:latin typeface="Arial" panose="020B0604020202020204" pitchFamily="34" charset="0"/>
+                <a:ea typeface="Times New Roman" panose="02020603050405020304" pitchFamily="18" charset="0"/>
+                <a:cs typeface="Arial" panose="020B0604020202020204" pitchFamily="34" charset="0"/>
+              </a:rPr>
+              <a:t>Present_Price</a:t>
+            </a:r>
+            <a:r>
+              <a:rPr lang="en-US" altLang="en-US" sz="1600" dirty="0">
+                <a:latin typeface="Arial" panose="020B0604020202020204" pitchFamily="34" charset="0"/>
+                <a:ea typeface="Times New Roman" panose="02020603050405020304" pitchFamily="18" charset="0"/>
+                <a:cs typeface="Arial" panose="020B0604020202020204" pitchFamily="34" charset="0"/>
+              </a:rPr>
+              <a:t>) is the strongest indicator of a car's used value (0.80 correlation).</a:t>
+            </a:r>
+          </a:p>
+          <a:p>
+            <a:pPr marL="285750" lvl="0" indent="-285750" defTabSz="914400" eaLnBrk="0" fontAlgn="base" hangingPunct="0">
+              <a:lnSpc>
+                <a:spcPct val="150000"/>
+              </a:lnSpc>
+              <a:spcBef>
+                <a:spcPct val="0"/>
+              </a:spcBef>
+              <a:spcAft>
+                <a:spcPct val="0"/>
+              </a:spcAft>
+              <a:buFont typeface="Arial" panose="020B0604020202020204" pitchFamily="34" charset="0"/>
+              <a:buChar char="•"/>
+              <a:tabLst>
+                <a:tab pos="457200" algn="l"/>
+              </a:tabLst>
+            </a:pPr>
+            <a:r>
+              <a:rPr lang="en-US" altLang="en-US" sz="1600" b="1" dirty="0">
+                <a:latin typeface="Arial" panose="020B0604020202020204" pitchFamily="34" charset="0"/>
+                <a:ea typeface="Times New Roman" panose="02020603050405020304" pitchFamily="18" charset="0"/>
+                <a:cs typeface="Arial" panose="020B0604020202020204" pitchFamily="34" charset="0"/>
+              </a:rPr>
+              <a:t>Mileage affects percentage loss:</a:t>
+            </a:r>
+            <a:r>
+              <a:rPr lang="en-US" altLang="en-US" sz="1600" dirty="0">
+                <a:latin typeface="Arial" panose="020B0604020202020204" pitchFamily="34" charset="0"/>
+                <a:ea typeface="Times New Roman" panose="02020603050405020304" pitchFamily="18" charset="0"/>
+                <a:cs typeface="Arial" panose="020B0604020202020204" pitchFamily="34" charset="0"/>
+              </a:rPr>
+              <a:t> Kilometers driven better predict the </a:t>
+            </a:r>
+            <a:r>
+              <a:rPr lang="en-US" altLang="en-US" sz="1600" i="1" dirty="0">
+                <a:latin typeface="Arial" panose="020B0604020202020204" pitchFamily="34" charset="0"/>
+                <a:ea typeface="Times New Roman" panose="02020603050405020304" pitchFamily="18" charset="0"/>
+                <a:cs typeface="Arial" panose="020B0604020202020204" pitchFamily="34" charset="0"/>
+              </a:rPr>
+              <a:t>percentage</a:t>
+            </a:r>
+            <a:r>
+              <a:rPr lang="en-US" altLang="en-US" sz="1600" dirty="0">
+                <a:latin typeface="Arial" panose="020B0604020202020204" pitchFamily="34" charset="0"/>
+                <a:ea typeface="Times New Roman" panose="02020603050405020304" pitchFamily="18" charset="0"/>
+                <a:cs typeface="Arial" panose="020B0604020202020204" pitchFamily="34" charset="0"/>
+              </a:rPr>
+              <a:t> of value lost rather than the raw selling price.</a:t>
+            </a:r>
+          </a:p>
+          <a:p>
+            <a:pPr marL="285750" lvl="0" indent="-285750" defTabSz="914400" eaLnBrk="0" fontAlgn="base" hangingPunct="0">
+              <a:lnSpc>
+                <a:spcPct val="150000"/>
+              </a:lnSpc>
+              <a:spcBef>
+                <a:spcPct val="0"/>
+              </a:spcBef>
+              <a:spcAft>
+                <a:spcPct val="0"/>
+              </a:spcAft>
+              <a:buFont typeface="Arial" panose="020B0604020202020204" pitchFamily="34" charset="0"/>
+              <a:buChar char="•"/>
+              <a:tabLst>
+                <a:tab pos="457200" algn="l"/>
+              </a:tabLst>
+            </a:pPr>
+            <a:r>
+              <a:rPr lang="en-US" altLang="en-US" sz="1600" b="1" dirty="0">
+                <a:latin typeface="Arial" panose="020B0604020202020204" pitchFamily="34" charset="0"/>
+                <a:ea typeface="Times New Roman" panose="02020603050405020304" pitchFamily="18" charset="0"/>
+                <a:cs typeface="Arial" panose="020B0604020202020204" pitchFamily="34" charset="0"/>
+              </a:rPr>
+              <a:t>Key takeaway:</a:t>
+            </a:r>
+            <a:r>
+              <a:rPr lang="en-US" altLang="en-US" sz="1600" dirty="0">
+                <a:latin typeface="Arial" panose="020B0604020202020204" pitchFamily="34" charset="0"/>
+                <a:ea typeface="Times New Roman" panose="02020603050405020304" pitchFamily="18" charset="0"/>
+                <a:cs typeface="Arial" panose="020B0604020202020204" pitchFamily="34" charset="0"/>
+              </a:rPr>
+              <a:t> Start with the car's original brand/new price to determine its base resale </a:t>
+            </a:r>
+            <a:endParaRPr lang="en-US" altLang="en-US" sz="2400" dirty="0">
+              <a:latin typeface="Arial" panose="020B0604020202020204" pitchFamily="34" charset="0"/>
+              <a:cs typeface="Arial" panose="020B0604020202020204" pitchFamily="34" charset="0"/>
+            </a:endParaRPr>
           </a:p>
         </p:txBody>
       </p:sp>
@@ -13924,6 +13490,1337 @@
   <p:cSld>
     <p:spTree>
       <p:nvGrpSpPr>
+        <p:cNvPr id="1" name="">
+          <a:extLst>
+            <a:ext uri="{FF2B5EF4-FFF2-40B4-BE49-F238E27FC236}">
+              <a16:creationId xmlns:a16="http://schemas.microsoft.com/office/drawing/2014/main" xmlns="" id="{327316CE-193E-3D5D-C15A-98517303A13F}"/>
+            </a:ext>
+          </a:extLst>
+        </p:cNvPr>
+        <p:cNvGrpSpPr/>
+        <p:nvPr/>
+      </p:nvGrpSpPr>
+      <p:grpSpPr>
+        <a:xfrm>
+          <a:off x="0" y="0"/>
+          <a:ext cx="0" cy="0"/>
+          <a:chOff x="0" y="0"/>
+          <a:chExt cx="0" cy="0"/>
+        </a:xfrm>
+      </p:grpSpPr>
+      <p:pic>
+        <p:nvPicPr>
+          <p:cNvPr id="5" name="Picture 4">
+            <a:extLst>
+              <a:ext uri="{FF2B5EF4-FFF2-40B4-BE49-F238E27FC236}">
+                <a16:creationId xmlns:a16="http://schemas.microsoft.com/office/drawing/2014/main" xmlns="" id="{3D44118A-0276-9E2F-E0E8-85CEE9F1E0C7}"/>
+              </a:ext>
+            </a:extLst>
+          </p:cNvPr>
+          <p:cNvPicPr>
+            <a:picLocks noChangeAspect="1"/>
+          </p:cNvPicPr>
+          <p:nvPr/>
+        </p:nvPicPr>
+        <p:blipFill rotWithShape="1">
+          <a:blip r:embed="rId2"/>
+          <a:srcRect t="96181"/>
+          <a:stretch/>
+        </p:blipFill>
+        <p:spPr>
+          <a:xfrm>
+            <a:off x="675957" y="6471920"/>
+            <a:ext cx="2143125" cy="193040"/>
+          </a:xfrm>
+          <a:prstGeom prst="rect">
+            <a:avLst/>
+          </a:prstGeom>
+        </p:spPr>
+      </p:pic>
+      <p:sp>
+        <p:nvSpPr>
+          <p:cNvPr id="4" name="Title 3">
+            <a:extLst>
+              <a:ext uri="{FF2B5EF4-FFF2-40B4-BE49-F238E27FC236}">
+                <a16:creationId xmlns:a16="http://schemas.microsoft.com/office/drawing/2014/main" xmlns="" id="{901A2257-2F98-CB88-038E-C0F1D0A1A363}"/>
+              </a:ext>
+            </a:extLst>
+          </p:cNvPr>
+          <p:cNvSpPr>
+            <a:spLocks noGrp="1"/>
+          </p:cNvSpPr>
+          <p:nvPr>
+            <p:ph type="title"/>
+          </p:nvPr>
+        </p:nvSpPr>
+        <p:spPr>
+          <a:xfrm>
+            <a:off x="675957" y="370589"/>
+            <a:ext cx="4735798" cy="830997"/>
+          </a:xfrm>
+        </p:spPr>
+        <p:txBody>
+          <a:bodyPr>
+            <a:normAutofit/>
+          </a:bodyPr>
+          <a:lstStyle/>
+          <a:p>
+            <a:r>
+              <a:rPr lang="en-IN" sz="4000" dirty="0"/>
+              <a:t>GitHub Link</a:t>
+            </a:r>
+          </a:p>
+        </p:txBody>
+      </p:sp>
+      <p:sp>
+        <p:nvSpPr>
+          <p:cNvPr id="7" name="Text Placeholder 30">
+            <a:extLst>
+              <a:ext uri="{FF2B5EF4-FFF2-40B4-BE49-F238E27FC236}">
+                <a16:creationId xmlns:a16="http://schemas.microsoft.com/office/drawing/2014/main" xmlns="" id="{AF1C8809-654A-4DD1-BB18-87B8B6C020B9}"/>
+              </a:ext>
+            </a:extLst>
+          </p:cNvPr>
+          <p:cNvSpPr txBox="1">
+            <a:spLocks/>
+          </p:cNvSpPr>
+          <p:nvPr/>
+        </p:nvSpPr>
+        <p:spPr>
+          <a:xfrm>
+            <a:off x="320982" y="1275371"/>
+            <a:ext cx="3343561" cy="666078"/>
+          </a:xfrm>
+          <a:prstGeom prst="rect">
+            <a:avLst/>
+          </a:prstGeom>
+        </p:spPr>
+        <p:txBody>
+          <a:bodyPr vert="horz" lIns="91440" tIns="45720" rIns="91440" bIns="45720" rtlCol="0">
+            <a:normAutofit/>
+          </a:bodyPr>
+          <a:lstStyle>
+            <a:lvl1pPr marL="0" indent="0" algn="ctr" defTabSz="457200" rtl="0" eaLnBrk="1" latinLnBrk="0" hangingPunct="1">
+              <a:spcBef>
+                <a:spcPts val="1000"/>
+              </a:spcBef>
+              <a:spcAft>
+                <a:spcPts val="0"/>
+              </a:spcAft>
+              <a:buClr>
+                <a:schemeClr val="accent1"/>
+              </a:buClr>
+              <a:buSzPct val="80000"/>
+              <a:buFont typeface="Wingdings 3" charset="2"/>
+              <a:buNone/>
+              <a:defRPr lang="en-US" sz="1600" kern="1200" dirty="0" smtClean="0">
+                <a:solidFill>
+                  <a:schemeClr val="tx1"/>
+                </a:solidFill>
+                <a:latin typeface="+mn-lt"/>
+                <a:ea typeface="+mn-ea"/>
+                <a:cs typeface="+mn-cs"/>
+              </a:defRPr>
+            </a:lvl1pPr>
+            <a:lvl2pPr marL="742950" indent="-285750" algn="l" defTabSz="457200" rtl="0" eaLnBrk="1" latinLnBrk="0" hangingPunct="1">
+              <a:spcBef>
+                <a:spcPts val="1000"/>
+              </a:spcBef>
+              <a:spcAft>
+                <a:spcPts val="0"/>
+              </a:spcAft>
+              <a:buClr>
+                <a:schemeClr val="accent1"/>
+              </a:buClr>
+              <a:buSzPct val="80000"/>
+              <a:buFont typeface="Wingdings 3" charset="2"/>
+              <a:buChar char=""/>
+              <a:defRPr sz="1600" kern="1200">
+                <a:solidFill>
+                  <a:schemeClr val="tx1">
+                    <a:lumMod val="75000"/>
+                    <a:lumOff val="25000"/>
+                  </a:schemeClr>
+                </a:solidFill>
+                <a:latin typeface="+mn-lt"/>
+                <a:ea typeface="+mn-ea"/>
+                <a:cs typeface="+mn-cs"/>
+              </a:defRPr>
+            </a:lvl2pPr>
+            <a:lvl3pPr marL="1143000" indent="-228600" algn="l" defTabSz="457200" rtl="0" eaLnBrk="1" latinLnBrk="0" hangingPunct="1">
+              <a:spcBef>
+                <a:spcPts val="1000"/>
+              </a:spcBef>
+              <a:spcAft>
+                <a:spcPts val="0"/>
+              </a:spcAft>
+              <a:buClr>
+                <a:schemeClr val="accent1"/>
+              </a:buClr>
+              <a:buSzPct val="80000"/>
+              <a:buFont typeface="Wingdings 3" charset="2"/>
+              <a:buChar char=""/>
+              <a:defRPr sz="1400" kern="1200">
+                <a:solidFill>
+                  <a:schemeClr val="tx1">
+                    <a:lumMod val="75000"/>
+                    <a:lumOff val="25000"/>
+                  </a:schemeClr>
+                </a:solidFill>
+                <a:latin typeface="+mn-lt"/>
+                <a:ea typeface="+mn-ea"/>
+                <a:cs typeface="+mn-cs"/>
+              </a:defRPr>
+            </a:lvl3pPr>
+            <a:lvl4pPr marL="1600200" indent="-228600" algn="l" defTabSz="457200" rtl="0" eaLnBrk="1" latinLnBrk="0" hangingPunct="1">
+              <a:spcBef>
+                <a:spcPts val="1000"/>
+              </a:spcBef>
+              <a:spcAft>
+                <a:spcPts val="0"/>
+              </a:spcAft>
+              <a:buClr>
+                <a:schemeClr val="accent1"/>
+              </a:buClr>
+              <a:buSzPct val="80000"/>
+              <a:buFont typeface="Wingdings 3" charset="2"/>
+              <a:buChar char=""/>
+              <a:defRPr sz="1200" kern="1200">
+                <a:solidFill>
+                  <a:schemeClr val="tx1">
+                    <a:lumMod val="75000"/>
+                    <a:lumOff val="25000"/>
+                  </a:schemeClr>
+                </a:solidFill>
+                <a:latin typeface="+mn-lt"/>
+                <a:ea typeface="+mn-ea"/>
+                <a:cs typeface="+mn-cs"/>
+              </a:defRPr>
+            </a:lvl4pPr>
+            <a:lvl5pPr marL="2057400" indent="-228600" algn="l" defTabSz="457200" rtl="0" eaLnBrk="1" latinLnBrk="0" hangingPunct="1">
+              <a:spcBef>
+                <a:spcPts val="1000"/>
+              </a:spcBef>
+              <a:spcAft>
+                <a:spcPts val="0"/>
+              </a:spcAft>
+              <a:buClr>
+                <a:schemeClr val="accent1"/>
+              </a:buClr>
+              <a:buSzPct val="80000"/>
+              <a:buFont typeface="Wingdings 3" charset="2"/>
+              <a:buChar char=""/>
+              <a:defRPr sz="1200" kern="1200">
+                <a:solidFill>
+                  <a:schemeClr val="tx1">
+                    <a:lumMod val="75000"/>
+                    <a:lumOff val="25000"/>
+                  </a:schemeClr>
+                </a:solidFill>
+                <a:latin typeface="+mn-lt"/>
+                <a:ea typeface="+mn-ea"/>
+                <a:cs typeface="+mn-cs"/>
+              </a:defRPr>
+            </a:lvl5pPr>
+            <a:lvl6pPr marL="2514600" indent="-228600" algn="l" defTabSz="457200" rtl="0" eaLnBrk="1" latinLnBrk="0" hangingPunct="1">
+              <a:spcBef>
+                <a:spcPts val="1000"/>
+              </a:spcBef>
+              <a:spcAft>
+                <a:spcPts val="0"/>
+              </a:spcAft>
+              <a:buClr>
+                <a:schemeClr val="accent1"/>
+              </a:buClr>
+              <a:buSzPct val="80000"/>
+              <a:buFont typeface="Wingdings 3" charset="2"/>
+              <a:buChar char=""/>
+              <a:defRPr sz="1200" kern="1200">
+                <a:solidFill>
+                  <a:schemeClr val="tx1">
+                    <a:lumMod val="75000"/>
+                    <a:lumOff val="25000"/>
+                  </a:schemeClr>
+                </a:solidFill>
+                <a:latin typeface="+mn-lt"/>
+                <a:ea typeface="+mn-ea"/>
+                <a:cs typeface="+mn-cs"/>
+              </a:defRPr>
+            </a:lvl6pPr>
+            <a:lvl7pPr marL="2971800" indent="-228600" algn="l" defTabSz="457200" rtl="0" eaLnBrk="1" latinLnBrk="0" hangingPunct="1">
+              <a:spcBef>
+                <a:spcPts val="1000"/>
+              </a:spcBef>
+              <a:spcAft>
+                <a:spcPts val="0"/>
+              </a:spcAft>
+              <a:buClr>
+                <a:schemeClr val="accent1"/>
+              </a:buClr>
+              <a:buSzPct val="80000"/>
+              <a:buFont typeface="Wingdings 3" charset="2"/>
+              <a:buChar char=""/>
+              <a:defRPr sz="1200" kern="1200">
+                <a:solidFill>
+                  <a:schemeClr val="tx1">
+                    <a:lumMod val="75000"/>
+                    <a:lumOff val="25000"/>
+                  </a:schemeClr>
+                </a:solidFill>
+                <a:latin typeface="+mn-lt"/>
+                <a:ea typeface="+mn-ea"/>
+                <a:cs typeface="+mn-cs"/>
+              </a:defRPr>
+            </a:lvl7pPr>
+            <a:lvl8pPr marL="3429000" indent="-228600" algn="l" defTabSz="457200" rtl="0" eaLnBrk="1" latinLnBrk="0" hangingPunct="1">
+              <a:spcBef>
+                <a:spcPts val="1000"/>
+              </a:spcBef>
+              <a:spcAft>
+                <a:spcPts val="0"/>
+              </a:spcAft>
+              <a:buClr>
+                <a:schemeClr val="accent1"/>
+              </a:buClr>
+              <a:buSzPct val="80000"/>
+              <a:buFont typeface="Wingdings 3" charset="2"/>
+              <a:buChar char=""/>
+              <a:defRPr sz="1200" kern="1200">
+                <a:solidFill>
+                  <a:schemeClr val="tx1">
+                    <a:lumMod val="75000"/>
+                    <a:lumOff val="25000"/>
+                  </a:schemeClr>
+                </a:solidFill>
+                <a:latin typeface="+mn-lt"/>
+                <a:ea typeface="+mn-ea"/>
+                <a:cs typeface="+mn-cs"/>
+              </a:defRPr>
+            </a:lvl8pPr>
+            <a:lvl9pPr marL="3886200" indent="-228600" algn="l" defTabSz="457200" rtl="0" eaLnBrk="1" latinLnBrk="0" hangingPunct="1">
+              <a:spcBef>
+                <a:spcPts val="1000"/>
+              </a:spcBef>
+              <a:spcAft>
+                <a:spcPts val="0"/>
+              </a:spcAft>
+              <a:buClr>
+                <a:schemeClr val="accent1"/>
+              </a:buClr>
+              <a:buSzPct val="80000"/>
+              <a:buFont typeface="Wingdings 3" charset="2"/>
+              <a:buChar char=""/>
+              <a:defRPr sz="1200" kern="1200">
+                <a:solidFill>
+                  <a:schemeClr val="tx1">
+                    <a:lumMod val="75000"/>
+                    <a:lumOff val="25000"/>
+                  </a:schemeClr>
+                </a:solidFill>
+                <a:latin typeface="+mn-lt"/>
+                <a:ea typeface="+mn-ea"/>
+                <a:cs typeface="+mn-cs"/>
+              </a:defRPr>
+            </a:lvl9pPr>
+          </a:lstStyle>
+          <a:p>
+            <a:endParaRPr lang="en-GB" sz="2000" dirty="0"/>
+          </a:p>
+        </p:txBody>
+      </p:sp>
+      <p:sp>
+        <p:nvSpPr>
+          <p:cNvPr id="8" name="Text Placeholder 30">
+            <a:extLst>
+              <a:ext uri="{FF2B5EF4-FFF2-40B4-BE49-F238E27FC236}">
+                <a16:creationId xmlns:a16="http://schemas.microsoft.com/office/drawing/2014/main" xmlns="" id="{0F7D0B46-DEEA-1B5E-FE84-59D11F3B1105}"/>
+              </a:ext>
+            </a:extLst>
+          </p:cNvPr>
+          <p:cNvSpPr txBox="1">
+            <a:spLocks/>
+          </p:cNvSpPr>
+          <p:nvPr/>
+        </p:nvSpPr>
+        <p:spPr>
+          <a:xfrm>
+            <a:off x="4276683" y="1284989"/>
+            <a:ext cx="3343561" cy="666078"/>
+          </a:xfrm>
+          <a:prstGeom prst="rect">
+            <a:avLst/>
+          </a:prstGeom>
+        </p:spPr>
+        <p:txBody>
+          <a:bodyPr vert="horz" lIns="91440" tIns="45720" rIns="91440" bIns="45720" rtlCol="0">
+            <a:normAutofit/>
+          </a:bodyPr>
+          <a:lstStyle>
+            <a:lvl1pPr marL="0" indent="0" algn="ctr" defTabSz="457200" rtl="0" eaLnBrk="1" latinLnBrk="0" hangingPunct="1">
+              <a:spcBef>
+                <a:spcPts val="1000"/>
+              </a:spcBef>
+              <a:spcAft>
+                <a:spcPts val="0"/>
+              </a:spcAft>
+              <a:buClr>
+                <a:schemeClr val="accent1"/>
+              </a:buClr>
+              <a:buSzPct val="80000"/>
+              <a:buFont typeface="Wingdings 3" charset="2"/>
+              <a:buNone/>
+              <a:defRPr lang="en-US" sz="1600" kern="1200" dirty="0" smtClean="0">
+                <a:solidFill>
+                  <a:schemeClr val="tx1"/>
+                </a:solidFill>
+                <a:latin typeface="+mn-lt"/>
+                <a:ea typeface="+mn-ea"/>
+                <a:cs typeface="+mn-cs"/>
+              </a:defRPr>
+            </a:lvl1pPr>
+            <a:lvl2pPr marL="742950" indent="-285750" algn="l" defTabSz="457200" rtl="0" eaLnBrk="1" latinLnBrk="0" hangingPunct="1">
+              <a:spcBef>
+                <a:spcPts val="1000"/>
+              </a:spcBef>
+              <a:spcAft>
+                <a:spcPts val="0"/>
+              </a:spcAft>
+              <a:buClr>
+                <a:schemeClr val="accent1"/>
+              </a:buClr>
+              <a:buSzPct val="80000"/>
+              <a:buFont typeface="Wingdings 3" charset="2"/>
+              <a:buChar char=""/>
+              <a:defRPr sz="1600" kern="1200">
+                <a:solidFill>
+                  <a:schemeClr val="tx1">
+                    <a:lumMod val="75000"/>
+                    <a:lumOff val="25000"/>
+                  </a:schemeClr>
+                </a:solidFill>
+                <a:latin typeface="+mn-lt"/>
+                <a:ea typeface="+mn-ea"/>
+                <a:cs typeface="+mn-cs"/>
+              </a:defRPr>
+            </a:lvl2pPr>
+            <a:lvl3pPr marL="1143000" indent="-228600" algn="l" defTabSz="457200" rtl="0" eaLnBrk="1" latinLnBrk="0" hangingPunct="1">
+              <a:spcBef>
+                <a:spcPts val="1000"/>
+              </a:spcBef>
+              <a:spcAft>
+                <a:spcPts val="0"/>
+              </a:spcAft>
+              <a:buClr>
+                <a:schemeClr val="accent1"/>
+              </a:buClr>
+              <a:buSzPct val="80000"/>
+              <a:buFont typeface="Wingdings 3" charset="2"/>
+              <a:buChar char=""/>
+              <a:defRPr sz="1400" kern="1200">
+                <a:solidFill>
+                  <a:schemeClr val="tx1">
+                    <a:lumMod val="75000"/>
+                    <a:lumOff val="25000"/>
+                  </a:schemeClr>
+                </a:solidFill>
+                <a:latin typeface="+mn-lt"/>
+                <a:ea typeface="+mn-ea"/>
+                <a:cs typeface="+mn-cs"/>
+              </a:defRPr>
+            </a:lvl3pPr>
+            <a:lvl4pPr marL="1600200" indent="-228600" algn="l" defTabSz="457200" rtl="0" eaLnBrk="1" latinLnBrk="0" hangingPunct="1">
+              <a:spcBef>
+                <a:spcPts val="1000"/>
+              </a:spcBef>
+              <a:spcAft>
+                <a:spcPts val="0"/>
+              </a:spcAft>
+              <a:buClr>
+                <a:schemeClr val="accent1"/>
+              </a:buClr>
+              <a:buSzPct val="80000"/>
+              <a:buFont typeface="Wingdings 3" charset="2"/>
+              <a:buChar char=""/>
+              <a:defRPr sz="1200" kern="1200">
+                <a:solidFill>
+                  <a:schemeClr val="tx1">
+                    <a:lumMod val="75000"/>
+                    <a:lumOff val="25000"/>
+                  </a:schemeClr>
+                </a:solidFill>
+                <a:latin typeface="+mn-lt"/>
+                <a:ea typeface="+mn-ea"/>
+                <a:cs typeface="+mn-cs"/>
+              </a:defRPr>
+            </a:lvl4pPr>
+            <a:lvl5pPr marL="2057400" indent="-228600" algn="l" defTabSz="457200" rtl="0" eaLnBrk="1" latinLnBrk="0" hangingPunct="1">
+              <a:spcBef>
+                <a:spcPts val="1000"/>
+              </a:spcBef>
+              <a:spcAft>
+                <a:spcPts val="0"/>
+              </a:spcAft>
+              <a:buClr>
+                <a:schemeClr val="accent1"/>
+              </a:buClr>
+              <a:buSzPct val="80000"/>
+              <a:buFont typeface="Wingdings 3" charset="2"/>
+              <a:buChar char=""/>
+              <a:defRPr sz="1200" kern="1200">
+                <a:solidFill>
+                  <a:schemeClr val="tx1">
+                    <a:lumMod val="75000"/>
+                    <a:lumOff val="25000"/>
+                  </a:schemeClr>
+                </a:solidFill>
+                <a:latin typeface="+mn-lt"/>
+                <a:ea typeface="+mn-ea"/>
+                <a:cs typeface="+mn-cs"/>
+              </a:defRPr>
+            </a:lvl5pPr>
+            <a:lvl6pPr marL="2514600" indent="-228600" algn="l" defTabSz="457200" rtl="0" eaLnBrk="1" latinLnBrk="0" hangingPunct="1">
+              <a:spcBef>
+                <a:spcPts val="1000"/>
+              </a:spcBef>
+              <a:spcAft>
+                <a:spcPts val="0"/>
+              </a:spcAft>
+              <a:buClr>
+                <a:schemeClr val="accent1"/>
+              </a:buClr>
+              <a:buSzPct val="80000"/>
+              <a:buFont typeface="Wingdings 3" charset="2"/>
+              <a:buChar char=""/>
+              <a:defRPr sz="1200" kern="1200">
+                <a:solidFill>
+                  <a:schemeClr val="tx1">
+                    <a:lumMod val="75000"/>
+                    <a:lumOff val="25000"/>
+                  </a:schemeClr>
+                </a:solidFill>
+                <a:latin typeface="+mn-lt"/>
+                <a:ea typeface="+mn-ea"/>
+                <a:cs typeface="+mn-cs"/>
+              </a:defRPr>
+            </a:lvl6pPr>
+            <a:lvl7pPr marL="2971800" indent="-228600" algn="l" defTabSz="457200" rtl="0" eaLnBrk="1" latinLnBrk="0" hangingPunct="1">
+              <a:spcBef>
+                <a:spcPts val="1000"/>
+              </a:spcBef>
+              <a:spcAft>
+                <a:spcPts val="0"/>
+              </a:spcAft>
+              <a:buClr>
+                <a:schemeClr val="accent1"/>
+              </a:buClr>
+              <a:buSzPct val="80000"/>
+              <a:buFont typeface="Wingdings 3" charset="2"/>
+              <a:buChar char=""/>
+              <a:defRPr sz="1200" kern="1200">
+                <a:solidFill>
+                  <a:schemeClr val="tx1">
+                    <a:lumMod val="75000"/>
+                    <a:lumOff val="25000"/>
+                  </a:schemeClr>
+                </a:solidFill>
+                <a:latin typeface="+mn-lt"/>
+                <a:ea typeface="+mn-ea"/>
+                <a:cs typeface="+mn-cs"/>
+              </a:defRPr>
+            </a:lvl7pPr>
+            <a:lvl8pPr marL="3429000" indent="-228600" algn="l" defTabSz="457200" rtl="0" eaLnBrk="1" latinLnBrk="0" hangingPunct="1">
+              <a:spcBef>
+                <a:spcPts val="1000"/>
+              </a:spcBef>
+              <a:spcAft>
+                <a:spcPts val="0"/>
+              </a:spcAft>
+              <a:buClr>
+                <a:schemeClr val="accent1"/>
+              </a:buClr>
+              <a:buSzPct val="80000"/>
+              <a:buFont typeface="Wingdings 3" charset="2"/>
+              <a:buChar char=""/>
+              <a:defRPr sz="1200" kern="1200">
+                <a:solidFill>
+                  <a:schemeClr val="tx1">
+                    <a:lumMod val="75000"/>
+                    <a:lumOff val="25000"/>
+                  </a:schemeClr>
+                </a:solidFill>
+                <a:latin typeface="+mn-lt"/>
+                <a:ea typeface="+mn-ea"/>
+                <a:cs typeface="+mn-cs"/>
+              </a:defRPr>
+            </a:lvl8pPr>
+            <a:lvl9pPr marL="3886200" indent="-228600" algn="l" defTabSz="457200" rtl="0" eaLnBrk="1" latinLnBrk="0" hangingPunct="1">
+              <a:spcBef>
+                <a:spcPts val="1000"/>
+              </a:spcBef>
+              <a:spcAft>
+                <a:spcPts val="0"/>
+              </a:spcAft>
+              <a:buClr>
+                <a:schemeClr val="accent1"/>
+              </a:buClr>
+              <a:buSzPct val="80000"/>
+              <a:buFont typeface="Wingdings 3" charset="2"/>
+              <a:buChar char=""/>
+              <a:defRPr sz="1200" kern="1200">
+                <a:solidFill>
+                  <a:schemeClr val="tx1">
+                    <a:lumMod val="75000"/>
+                    <a:lumOff val="25000"/>
+                  </a:schemeClr>
+                </a:solidFill>
+                <a:latin typeface="+mn-lt"/>
+                <a:ea typeface="+mn-ea"/>
+                <a:cs typeface="+mn-cs"/>
+              </a:defRPr>
+            </a:lvl9pPr>
+          </a:lstStyle>
+          <a:p>
+            <a:endParaRPr lang="en-GB" sz="2000" dirty="0"/>
+          </a:p>
+        </p:txBody>
+      </p:sp>
+      <p:sp>
+        <p:nvSpPr>
+          <p:cNvPr id="6" name="Rectangle 5"/>
+          <p:cNvSpPr/>
+          <p:nvPr/>
+        </p:nvSpPr>
+        <p:spPr>
+          <a:xfrm>
+            <a:off x="320983" y="287186"/>
+            <a:ext cx="3871456" cy="914400"/>
+          </a:xfrm>
+          <a:prstGeom prst="rect">
+            <a:avLst/>
+          </a:prstGeom>
+          <a:noFill/>
+        </p:spPr>
+        <p:style>
+          <a:lnRef idx="2">
+            <a:schemeClr val="accent1">
+              <a:shade val="50000"/>
+            </a:schemeClr>
+          </a:lnRef>
+          <a:fillRef idx="1">
+            <a:schemeClr val="accent1"/>
+          </a:fillRef>
+          <a:effectRef idx="0">
+            <a:schemeClr val="accent1"/>
+          </a:effectRef>
+          <a:fontRef idx="minor">
+            <a:schemeClr val="lt1"/>
+          </a:fontRef>
+        </p:style>
+        <p:txBody>
+          <a:bodyPr rtlCol="0" anchor="ctr"/>
+          <a:lstStyle/>
+          <a:p>
+            <a:pPr algn="ctr"/>
+            <a:endParaRPr lang="en-IN"/>
+          </a:p>
+        </p:txBody>
+      </p:sp>
+      <p:sp>
+        <p:nvSpPr>
+          <p:cNvPr id="16" name="TextBox 15"/>
+          <p:cNvSpPr txBox="1"/>
+          <p:nvPr/>
+        </p:nvSpPr>
+        <p:spPr>
+          <a:xfrm>
+            <a:off x="320982" y="1586647"/>
+            <a:ext cx="7202392" cy="4893647"/>
+          </a:xfrm>
+          <a:prstGeom prst="rect">
+            <a:avLst/>
+          </a:prstGeom>
+          <a:noFill/>
+        </p:spPr>
+        <p:txBody>
+          <a:bodyPr wrap="square" rtlCol="0">
+            <a:spAutoFit/>
+          </a:bodyPr>
+          <a:lstStyle/>
+          <a:p>
+            <a:pPr>
+              <a:lnSpc>
+                <a:spcPct val="150000"/>
+              </a:lnSpc>
+            </a:pPr>
+            <a:r>
+              <a:rPr lang="en-US" sz="1600" b="1" dirty="0">
+                <a:latin typeface="Arial" panose="020B0604020202020204" pitchFamily="34" charset="0"/>
+                <a:cs typeface="Arial" panose="020B0604020202020204" pitchFamily="34" charset="0"/>
+              </a:rPr>
+              <a:t>Project Repository &amp; Source </a:t>
+            </a:r>
+            <a:r>
+              <a:rPr lang="en-US" sz="1600" b="1" dirty="0" smtClean="0">
+                <a:latin typeface="Arial" panose="020B0604020202020204" pitchFamily="34" charset="0"/>
+                <a:cs typeface="Arial" panose="020B0604020202020204" pitchFamily="34" charset="0"/>
+              </a:rPr>
+              <a:t>Code :</a:t>
+            </a:r>
+            <a:endParaRPr lang="en-US" sz="1600" b="1" dirty="0">
+              <a:latin typeface="Arial" panose="020B0604020202020204" pitchFamily="34" charset="0"/>
+              <a:cs typeface="Arial" panose="020B0604020202020204" pitchFamily="34" charset="0"/>
+            </a:endParaRPr>
+          </a:p>
+          <a:p>
+            <a:pPr marL="285750" indent="-285750">
+              <a:lnSpc>
+                <a:spcPct val="150000"/>
+              </a:lnSpc>
+              <a:buFont typeface="Arial" panose="020B0604020202020204" pitchFamily="34" charset="0"/>
+              <a:buChar char="•"/>
+            </a:pPr>
+            <a:r>
+              <a:rPr lang="en-US" sz="1600" dirty="0">
+                <a:latin typeface="Arial" panose="020B0604020202020204" pitchFamily="34" charset="0"/>
+                <a:cs typeface="Arial" panose="020B0604020202020204" pitchFamily="34" charset="0"/>
+              </a:rPr>
+              <a:t>All code files, clean </a:t>
+            </a:r>
+            <a:r>
+              <a:rPr lang="en-US" sz="1600" dirty="0" smtClean="0">
+                <a:latin typeface="Arial" panose="020B0604020202020204" pitchFamily="34" charset="0"/>
+                <a:cs typeface="Arial" panose="020B0604020202020204" pitchFamily="34" charset="0"/>
+              </a:rPr>
+              <a:t>datasets </a:t>
+            </a:r>
+            <a:r>
+              <a:rPr lang="en-US" sz="1600" dirty="0">
+                <a:latin typeface="Arial" panose="020B0604020202020204" pitchFamily="34" charset="0"/>
+                <a:cs typeface="Arial" panose="020B0604020202020204" pitchFamily="34" charset="0"/>
+              </a:rPr>
+              <a:t>and analysis notebooks for this project are completely open-source and hosted on GitHub.</a:t>
+            </a:r>
+          </a:p>
+          <a:p>
+            <a:pPr>
+              <a:lnSpc>
+                <a:spcPct val="150000"/>
+              </a:lnSpc>
+            </a:pPr>
+            <a:r>
+              <a:rPr lang="en-IN" sz="1600" b="1" dirty="0">
+                <a:latin typeface="Arial" panose="020B0604020202020204" pitchFamily="34" charset="0"/>
+                <a:cs typeface="Arial" panose="020B0604020202020204" pitchFamily="34" charset="0"/>
+              </a:rPr>
+              <a:t>Repository Link</a:t>
+            </a:r>
+          </a:p>
+          <a:p>
+            <a:pPr marL="285750" indent="-285750">
+              <a:lnSpc>
+                <a:spcPct val="150000"/>
+              </a:lnSpc>
+              <a:buFont typeface="Arial" panose="020B0604020202020204" pitchFamily="34" charset="0"/>
+              <a:buChar char="•"/>
+            </a:pPr>
+            <a:r>
+              <a:rPr lang="en-US" sz="1600" dirty="0" err="1" smtClean="0">
+                <a:latin typeface="Arial" panose="020B0604020202020204" pitchFamily="34" charset="0"/>
+                <a:cs typeface="Arial" panose="020B0604020202020204" pitchFamily="34" charset="0"/>
+              </a:rPr>
+              <a:t>Url</a:t>
+            </a:r>
+            <a:r>
+              <a:rPr lang="en-US" sz="1600" dirty="0" smtClean="0">
+                <a:latin typeface="Arial" panose="020B0604020202020204" pitchFamily="34" charset="0"/>
+                <a:cs typeface="Arial" panose="020B0604020202020204" pitchFamily="34" charset="0"/>
+              </a:rPr>
+              <a:t> </a:t>
+            </a:r>
+            <a:r>
+              <a:rPr lang="en-US" sz="1600" dirty="0">
+                <a:latin typeface="Arial" panose="020B0604020202020204" pitchFamily="34" charset="0"/>
+                <a:cs typeface="Arial" panose="020B0604020202020204" pitchFamily="34" charset="0"/>
+              </a:rPr>
+              <a:t>: </a:t>
+            </a:r>
+            <a:r>
+              <a:rPr lang="en-US" sz="1600" dirty="0">
+                <a:solidFill>
+                  <a:srgbClr val="0070C0"/>
+                </a:solidFill>
+                <a:latin typeface="Arial" panose="020B0604020202020204" pitchFamily="34" charset="0"/>
+                <a:cs typeface="Arial" panose="020B0604020202020204" pitchFamily="34" charset="0"/>
+                <a:hlinkClick r:id="rId3"/>
+              </a:rPr>
+              <a:t>https://</a:t>
+            </a:r>
+            <a:r>
+              <a:rPr lang="en-US" sz="1600" dirty="0" smtClean="0">
+                <a:solidFill>
+                  <a:srgbClr val="0070C0"/>
+                </a:solidFill>
+                <a:latin typeface="Arial" panose="020B0604020202020204" pitchFamily="34" charset="0"/>
+                <a:cs typeface="Arial" panose="020B0604020202020204" pitchFamily="34" charset="0"/>
+                <a:hlinkClick r:id="rId3"/>
+              </a:rPr>
+              <a:t>github.com/yashmonde24/car-market-insights</a:t>
+            </a:r>
+            <a:endParaRPr lang="en-US" sz="1600" dirty="0" smtClean="0">
+              <a:solidFill>
+                <a:srgbClr val="0070C0"/>
+              </a:solidFill>
+              <a:latin typeface="Arial" panose="020B0604020202020204" pitchFamily="34" charset="0"/>
+              <a:cs typeface="Arial" panose="020B0604020202020204" pitchFamily="34" charset="0"/>
+            </a:endParaRPr>
+          </a:p>
+          <a:p>
+            <a:pPr>
+              <a:lnSpc>
+                <a:spcPct val="150000"/>
+              </a:lnSpc>
+            </a:pPr>
+            <a:r>
+              <a:rPr lang="en-US" sz="1600" b="1" dirty="0" smtClean="0">
+                <a:latin typeface="Arial" panose="020B0604020202020204" pitchFamily="34" charset="0"/>
+                <a:cs typeface="Arial" panose="020B0604020202020204" pitchFamily="34" charset="0"/>
+              </a:rPr>
+              <a:t>What </a:t>
+            </a:r>
+            <a:r>
+              <a:rPr lang="en-US" sz="1600" b="1" dirty="0">
+                <a:latin typeface="Arial" panose="020B0604020202020204" pitchFamily="34" charset="0"/>
+                <a:cs typeface="Arial" panose="020B0604020202020204" pitchFamily="34" charset="0"/>
+              </a:rPr>
+              <a:t>You Will Find in the Repository</a:t>
+            </a:r>
+            <a:r>
+              <a:rPr lang="en-US" sz="1600" b="1" dirty="0" smtClean="0">
+                <a:latin typeface="Arial" panose="020B0604020202020204" pitchFamily="34" charset="0"/>
+                <a:cs typeface="Arial" panose="020B0604020202020204" pitchFamily="34" charset="0"/>
+              </a:rPr>
+              <a:t>:</a:t>
+            </a:r>
+          </a:p>
+          <a:p>
+            <a:pPr marL="285750" indent="-285750">
+              <a:lnSpc>
+                <a:spcPct val="150000"/>
+              </a:lnSpc>
+              <a:buFont typeface="Arial" panose="020B0604020202020204" pitchFamily="34" charset="0"/>
+              <a:buChar char="•"/>
+            </a:pPr>
+            <a:r>
+              <a:rPr lang="en-US" sz="1600" dirty="0" smtClean="0">
+                <a:latin typeface="Arial" panose="020B0604020202020204" pitchFamily="34" charset="0"/>
+                <a:cs typeface="Arial" panose="020B0604020202020204" pitchFamily="34" charset="0"/>
+              </a:rPr>
+              <a:t>python/ : </a:t>
+            </a:r>
+            <a:r>
+              <a:rPr lang="en-US" sz="1600" dirty="0">
+                <a:latin typeface="Arial" panose="020B0604020202020204" pitchFamily="34" charset="0"/>
+                <a:cs typeface="Arial" panose="020B0604020202020204" pitchFamily="34" charset="0"/>
+              </a:rPr>
+              <a:t>Source code and </a:t>
+            </a:r>
+            <a:r>
+              <a:rPr lang="en-US" sz="1600" dirty="0" err="1">
+                <a:latin typeface="Arial" panose="020B0604020202020204" pitchFamily="34" charset="0"/>
+                <a:cs typeface="Arial" panose="020B0604020202020204" pitchFamily="34" charset="0"/>
+              </a:rPr>
+              <a:t>Jupyter</a:t>
+            </a:r>
+            <a:r>
+              <a:rPr lang="en-US" sz="1600" dirty="0">
+                <a:latin typeface="Arial" panose="020B0604020202020204" pitchFamily="34" charset="0"/>
+                <a:cs typeface="Arial" panose="020B0604020202020204" pitchFamily="34" charset="0"/>
+              </a:rPr>
+              <a:t> notebooks for data cleaning, </a:t>
+            </a:r>
+            <a:r>
+              <a:rPr lang="en-US" sz="1600" dirty="0" smtClean="0">
+                <a:latin typeface="Arial" panose="020B0604020202020204" pitchFamily="34" charset="0"/>
+                <a:cs typeface="Arial" panose="020B0604020202020204" pitchFamily="34" charset="0"/>
+              </a:rPr>
+              <a:t>EDA </a:t>
+            </a:r>
+            <a:r>
+              <a:rPr lang="en-US" sz="1600" dirty="0">
+                <a:latin typeface="Arial" panose="020B0604020202020204" pitchFamily="34" charset="0"/>
+                <a:cs typeface="Arial" panose="020B0604020202020204" pitchFamily="34" charset="0"/>
+              </a:rPr>
+              <a:t>and generating visualization charts.</a:t>
+            </a:r>
+            <a:endParaRPr lang="en-US" sz="1600" dirty="0" smtClean="0">
+              <a:latin typeface="Arial" panose="020B0604020202020204" pitchFamily="34" charset="0"/>
+              <a:cs typeface="Arial" panose="020B0604020202020204" pitchFamily="34" charset="0"/>
+            </a:endParaRPr>
+          </a:p>
+          <a:p>
+            <a:pPr marL="285750" indent="-285750">
+              <a:lnSpc>
+                <a:spcPct val="150000"/>
+              </a:lnSpc>
+              <a:buFont typeface="Arial" panose="020B0604020202020204" pitchFamily="34" charset="0"/>
+              <a:buChar char="•"/>
+            </a:pPr>
+            <a:r>
+              <a:rPr lang="en-US" sz="1600" dirty="0" smtClean="0">
+                <a:latin typeface="Arial" panose="020B0604020202020204" pitchFamily="34" charset="0"/>
+                <a:cs typeface="Arial" panose="020B0604020202020204" pitchFamily="34" charset="0"/>
+              </a:rPr>
+              <a:t>docs/ : </a:t>
+            </a:r>
+            <a:r>
+              <a:rPr lang="en-IN" sz="1600" dirty="0">
+                <a:latin typeface="Arial" panose="020B0604020202020204" pitchFamily="34" charset="0"/>
+                <a:cs typeface="Arial" panose="020B0604020202020204" pitchFamily="34" charset="0"/>
+              </a:rPr>
+              <a:t>A clean, presentation-ready slide deck outlining our main findings and recommendations for non-technical </a:t>
+            </a:r>
+            <a:r>
+              <a:rPr lang="en-IN" sz="1600" dirty="0" smtClean="0">
+                <a:latin typeface="Arial" panose="020B0604020202020204" pitchFamily="34" charset="0"/>
+                <a:cs typeface="Arial" panose="020B0604020202020204" pitchFamily="34" charset="0"/>
+              </a:rPr>
+              <a:t>stakeholders.</a:t>
+            </a:r>
+          </a:p>
+          <a:p>
+            <a:pPr marL="285750" indent="-285750">
+              <a:lnSpc>
+                <a:spcPct val="150000"/>
+              </a:lnSpc>
+              <a:buFont typeface="Arial" panose="020B0604020202020204" pitchFamily="34" charset="0"/>
+              <a:buChar char="•"/>
+            </a:pPr>
+            <a:r>
+              <a:rPr lang="en-IN" sz="1400" dirty="0" smtClean="0">
+                <a:latin typeface="Arial" panose="020B0604020202020204" pitchFamily="34" charset="0"/>
+                <a:cs typeface="Arial" panose="020B0604020202020204" pitchFamily="34" charset="0"/>
+              </a:rPr>
+              <a:t>.</a:t>
+            </a:r>
+            <a:r>
+              <a:rPr lang="en-US" sz="1600" dirty="0" smtClean="0">
+                <a:latin typeface="Arial" panose="020B0604020202020204" pitchFamily="34" charset="0"/>
+                <a:cs typeface="Arial" panose="020B0604020202020204" pitchFamily="34" charset="0"/>
+              </a:rPr>
+              <a:t>data/ : </a:t>
+            </a:r>
+            <a:r>
+              <a:rPr lang="en-US" sz="1600" dirty="0" err="1"/>
+              <a:t>CarDekho</a:t>
+            </a:r>
+            <a:r>
+              <a:rPr lang="en-US" sz="1600" dirty="0"/>
+              <a:t> used-car dataset used for performing the analysis.</a:t>
+            </a:r>
+            <a:endParaRPr lang="en-US" sz="1600" dirty="0" smtClean="0">
+              <a:latin typeface="Arial" panose="020B0604020202020204" pitchFamily="34" charset="0"/>
+              <a:cs typeface="Arial" panose="020B0604020202020204" pitchFamily="34" charset="0"/>
+            </a:endParaRPr>
+          </a:p>
+          <a:p>
+            <a:pPr marL="285750" indent="-285750">
+              <a:lnSpc>
+                <a:spcPct val="150000"/>
+              </a:lnSpc>
+              <a:buFont typeface="Arial" panose="020B0604020202020204" pitchFamily="34" charset="0"/>
+              <a:buChar char="•"/>
+            </a:pPr>
+            <a:r>
+              <a:rPr lang="en-US" sz="1600" dirty="0" smtClean="0">
+                <a:latin typeface="Arial" panose="020B0604020202020204" pitchFamily="34" charset="0"/>
+                <a:cs typeface="Arial" panose="020B0604020202020204" pitchFamily="34" charset="0"/>
+              </a:rPr>
+              <a:t>README.md : A </a:t>
+            </a:r>
+            <a:r>
+              <a:rPr lang="en-US" sz="1600" dirty="0">
+                <a:latin typeface="Arial" panose="020B0604020202020204" pitchFamily="34" charset="0"/>
+                <a:cs typeface="Arial" panose="020B0604020202020204" pitchFamily="34" charset="0"/>
+              </a:rPr>
+              <a:t>detailed, step-by-step project guide featuring the exact visual charts and actionable recommendations </a:t>
+            </a:r>
+            <a:r>
+              <a:rPr lang="en-US" sz="1600" dirty="0" smtClean="0">
+                <a:latin typeface="Arial" panose="020B0604020202020204" pitchFamily="34" charset="0"/>
+                <a:cs typeface="Arial" panose="020B0604020202020204" pitchFamily="34" charset="0"/>
+              </a:rPr>
+              <a:t>shown.</a:t>
+            </a:r>
+            <a:endParaRPr lang="en-IN" sz="1600" dirty="0">
+              <a:solidFill>
+                <a:srgbClr val="0070C0"/>
+              </a:solidFill>
+              <a:latin typeface="Arial" panose="020B0604020202020204" pitchFamily="34" charset="0"/>
+              <a:cs typeface="Arial" panose="020B0604020202020204" pitchFamily="34" charset="0"/>
+            </a:endParaRPr>
+          </a:p>
+        </p:txBody>
+      </p:sp>
+    </p:spTree>
+    <p:extLst>
+      <p:ext uri="{BB962C8B-B14F-4D97-AF65-F5344CB8AC3E}">
+        <p14:creationId xmlns:p14="http://schemas.microsoft.com/office/powerpoint/2010/main" val="3066006506"/>
+      </p:ext>
+    </p:extLst>
+  </p:cSld>
+  <p:clrMapOvr>
+    <a:masterClrMapping/>
+  </p:clrMapOvr>
+  <p:timing>
+    <p:tnLst>
+      <p:par>
+        <p:cTn id="1" dur="indefinite" restart="never" nodeType="tmRoot">
+          <p:childTnLst>
+            <p:seq concurrent="1" nextAc="seek">
+              <p:cTn id="2" dur="indefinite" nodeType="mainSeq">
+                <p:childTnLst>
+                  <p:par>
+                    <p:cTn id="3" fill="hold">
+                      <p:stCondLst>
+                        <p:cond delay="indefinite"/>
+                      </p:stCondLst>
+                      <p:childTnLst>
+                        <p:par>
+                          <p:cTn id="4" fill="hold">
+                            <p:stCondLst>
+                              <p:cond delay="0"/>
+                            </p:stCondLst>
+                            <p:childTnLst>
+                              <p:par>
+                                <p:cTn id="5" presetID="53" presetClass="entr" presetSubtype="16" fill="hold" grpId="0" nodeType="clickEffect">
+                                  <p:stCondLst>
+                                    <p:cond delay="0"/>
+                                  </p:stCondLst>
+                                  <p:childTnLst>
+                                    <p:set>
+                                      <p:cBhvr>
+                                        <p:cTn id="6" dur="1" fill="hold">
+                                          <p:stCondLst>
+                                            <p:cond delay="0"/>
+                                          </p:stCondLst>
+                                        </p:cTn>
+                                        <p:tgtEl>
+                                          <p:spTgt spid="4"/>
+                                        </p:tgtEl>
+                                        <p:attrNameLst>
+                                          <p:attrName>style.visibility</p:attrName>
+                                        </p:attrNameLst>
+                                      </p:cBhvr>
+                                      <p:to>
+                                        <p:strVal val="visible"/>
+                                      </p:to>
+                                    </p:set>
+                                    <p:anim calcmode="lin" valueType="num">
+                                      <p:cBhvr>
+                                        <p:cTn id="7" dur="500" fill="hold"/>
+                                        <p:tgtEl>
+                                          <p:spTgt spid="4"/>
+                                        </p:tgtEl>
+                                        <p:attrNameLst>
+                                          <p:attrName>ppt_w</p:attrName>
+                                        </p:attrNameLst>
+                                      </p:cBhvr>
+                                      <p:tavLst>
+                                        <p:tav tm="0">
+                                          <p:val>
+                                            <p:fltVal val="0"/>
+                                          </p:val>
+                                        </p:tav>
+                                        <p:tav tm="100000">
+                                          <p:val>
+                                            <p:strVal val="#ppt_w"/>
+                                          </p:val>
+                                        </p:tav>
+                                      </p:tavLst>
+                                    </p:anim>
+                                    <p:anim calcmode="lin" valueType="num">
+                                      <p:cBhvr>
+                                        <p:cTn id="8" dur="500" fill="hold"/>
+                                        <p:tgtEl>
+                                          <p:spTgt spid="4"/>
+                                        </p:tgtEl>
+                                        <p:attrNameLst>
+                                          <p:attrName>ppt_h</p:attrName>
+                                        </p:attrNameLst>
+                                      </p:cBhvr>
+                                      <p:tavLst>
+                                        <p:tav tm="0">
+                                          <p:val>
+                                            <p:fltVal val="0"/>
+                                          </p:val>
+                                        </p:tav>
+                                        <p:tav tm="100000">
+                                          <p:val>
+                                            <p:strVal val="#ppt_h"/>
+                                          </p:val>
+                                        </p:tav>
+                                      </p:tavLst>
+                                    </p:anim>
+                                    <p:animEffect transition="in" filter="fade">
+                                      <p:cBhvr>
+                                        <p:cTn id="9" dur="500"/>
+                                        <p:tgtEl>
+                                          <p:spTgt spid="4"/>
+                                        </p:tgtEl>
+                                      </p:cBhvr>
+                                    </p:animEffect>
+                                  </p:childTnLst>
+                                </p:cTn>
+                              </p:par>
+                            </p:childTnLst>
+                          </p:cTn>
+                        </p:par>
+                      </p:childTnLst>
+                    </p:cTn>
+                  </p:par>
+                  <p:par>
+                    <p:cTn id="10" fill="hold">
+                      <p:stCondLst>
+                        <p:cond delay="indefinite"/>
+                      </p:stCondLst>
+                      <p:childTnLst>
+                        <p:par>
+                          <p:cTn id="11" fill="hold">
+                            <p:stCondLst>
+                              <p:cond delay="0"/>
+                            </p:stCondLst>
+                            <p:childTnLst>
+                              <p:par>
+                                <p:cTn id="12" presetID="42" presetClass="entr" presetSubtype="0" fill="hold" grpId="0" nodeType="clickEffect" nodePh="1">
+                                  <p:stCondLst>
+                                    <p:cond delay="0"/>
+                                  </p:stCondLst>
+                                  <p:endCondLst>
+                                    <p:cond evt="begin" delay="0">
+                                      <p:tn val="12"/>
+                                    </p:cond>
+                                  </p:endCondLst>
+                                  <p:childTnLst>
+                                    <p:set>
+                                      <p:cBhvr>
+                                        <p:cTn id="13" dur="1" fill="hold">
+                                          <p:stCondLst>
+                                            <p:cond delay="0"/>
+                                          </p:stCondLst>
+                                        </p:cTn>
+                                        <p:tgtEl>
+                                          <p:spTgt spid="7"/>
+                                        </p:tgtEl>
+                                        <p:attrNameLst>
+                                          <p:attrName>style.visibility</p:attrName>
+                                        </p:attrNameLst>
+                                      </p:cBhvr>
+                                      <p:to>
+                                        <p:strVal val="visible"/>
+                                      </p:to>
+                                    </p:set>
+                                    <p:animEffect transition="in" filter="fade">
+                                      <p:cBhvr>
+                                        <p:cTn id="14" dur="1000"/>
+                                        <p:tgtEl>
+                                          <p:spTgt spid="7"/>
+                                        </p:tgtEl>
+                                      </p:cBhvr>
+                                    </p:animEffect>
+                                    <p:anim calcmode="lin" valueType="num">
+                                      <p:cBhvr>
+                                        <p:cTn id="15" dur="1000" fill="hold"/>
+                                        <p:tgtEl>
+                                          <p:spTgt spid="7"/>
+                                        </p:tgtEl>
+                                        <p:attrNameLst>
+                                          <p:attrName>ppt_x</p:attrName>
+                                        </p:attrNameLst>
+                                      </p:cBhvr>
+                                      <p:tavLst>
+                                        <p:tav tm="0">
+                                          <p:val>
+                                            <p:strVal val="#ppt_x"/>
+                                          </p:val>
+                                        </p:tav>
+                                        <p:tav tm="100000">
+                                          <p:val>
+                                            <p:strVal val="#ppt_x"/>
+                                          </p:val>
+                                        </p:tav>
+                                      </p:tavLst>
+                                    </p:anim>
+                                    <p:anim calcmode="lin" valueType="num">
+                                      <p:cBhvr>
+                                        <p:cTn id="16" dur="1000" fill="hold"/>
+                                        <p:tgtEl>
+                                          <p:spTgt spid="7"/>
+                                        </p:tgtEl>
+                                        <p:attrNameLst>
+                                          <p:attrName>ppt_y</p:attrName>
+                                        </p:attrNameLst>
+                                      </p:cBhvr>
+                                      <p:tavLst>
+                                        <p:tav tm="0">
+                                          <p:val>
+                                            <p:strVal val="#ppt_y+.1"/>
+                                          </p:val>
+                                        </p:tav>
+                                        <p:tav tm="100000">
+                                          <p:val>
+                                            <p:strVal val="#ppt_y"/>
+                                          </p:val>
+                                        </p:tav>
+                                      </p:tavLst>
+                                    </p:anim>
+                                  </p:childTnLst>
+                                </p:cTn>
+                              </p:par>
+                            </p:childTnLst>
+                          </p:cTn>
+                        </p:par>
+                      </p:childTnLst>
+                    </p:cTn>
+                  </p:par>
+                  <p:par>
+                    <p:cTn id="17" fill="hold">
+                      <p:stCondLst>
+                        <p:cond delay="indefinite"/>
+                      </p:stCondLst>
+                      <p:childTnLst>
+                        <p:par>
+                          <p:cTn id="18" fill="hold">
+                            <p:stCondLst>
+                              <p:cond delay="0"/>
+                            </p:stCondLst>
+                            <p:childTnLst>
+                              <p:par>
+                                <p:cTn id="19" presetID="42" presetClass="entr" presetSubtype="0" fill="hold" grpId="0" nodeType="clickEffect" nodePh="1">
+                                  <p:stCondLst>
+                                    <p:cond delay="0"/>
+                                  </p:stCondLst>
+                                  <p:endCondLst>
+                                    <p:cond evt="begin" delay="0">
+                                      <p:tn val="19"/>
+                                    </p:cond>
+                                  </p:endCondLst>
+                                  <p:childTnLst>
+                                    <p:set>
+                                      <p:cBhvr>
+                                        <p:cTn id="20" dur="1" fill="hold">
+                                          <p:stCondLst>
+                                            <p:cond delay="0"/>
+                                          </p:stCondLst>
+                                        </p:cTn>
+                                        <p:tgtEl>
+                                          <p:spTgt spid="8"/>
+                                        </p:tgtEl>
+                                        <p:attrNameLst>
+                                          <p:attrName>style.visibility</p:attrName>
+                                        </p:attrNameLst>
+                                      </p:cBhvr>
+                                      <p:to>
+                                        <p:strVal val="visible"/>
+                                      </p:to>
+                                    </p:set>
+                                    <p:animEffect transition="in" filter="fade">
+                                      <p:cBhvr>
+                                        <p:cTn id="21" dur="1000"/>
+                                        <p:tgtEl>
+                                          <p:spTgt spid="8"/>
+                                        </p:tgtEl>
+                                      </p:cBhvr>
+                                    </p:animEffect>
+                                    <p:anim calcmode="lin" valueType="num">
+                                      <p:cBhvr>
+                                        <p:cTn id="22" dur="1000" fill="hold"/>
+                                        <p:tgtEl>
+                                          <p:spTgt spid="8"/>
+                                        </p:tgtEl>
+                                        <p:attrNameLst>
+                                          <p:attrName>ppt_x</p:attrName>
+                                        </p:attrNameLst>
+                                      </p:cBhvr>
+                                      <p:tavLst>
+                                        <p:tav tm="0">
+                                          <p:val>
+                                            <p:strVal val="#ppt_x"/>
+                                          </p:val>
+                                        </p:tav>
+                                        <p:tav tm="100000">
+                                          <p:val>
+                                            <p:strVal val="#ppt_x"/>
+                                          </p:val>
+                                        </p:tav>
+                                      </p:tavLst>
+                                    </p:anim>
+                                    <p:anim calcmode="lin" valueType="num">
+                                      <p:cBhvr>
+                                        <p:cTn id="23" dur="1000" fill="hold"/>
+                                        <p:tgtEl>
+                                          <p:spTgt spid="8"/>
+                                        </p:tgtEl>
+                                        <p:attrNameLst>
+                                          <p:attrName>ppt_y</p:attrName>
+                                        </p:attrNameLst>
+                                      </p:cBhvr>
+                                      <p:tavLst>
+                                        <p:tav tm="0">
+                                          <p:val>
+                                            <p:strVal val="#ppt_y+.1"/>
+                                          </p:val>
+                                        </p:tav>
+                                        <p:tav tm="100000">
+                                          <p:val>
+                                            <p:strVal val="#ppt_y"/>
+                                          </p:val>
+                                        </p:tav>
+                                      </p:tavLst>
+                                    </p:anim>
+                                  </p:childTnLst>
+                                </p:cTn>
+                              </p:par>
+                            </p:childTnLst>
+                          </p:cTn>
+                        </p:par>
+                      </p:childTnLst>
+                    </p:cTn>
+                  </p:par>
+                </p:childTnLst>
+              </p:cTn>
+              <p:prevCondLst>
+                <p:cond evt="onPrev" delay="0">
+                  <p:tgtEl>
+                    <p:sldTgt/>
+                  </p:tgtEl>
+                </p:cond>
+              </p:prevCondLst>
+              <p:nextCondLst>
+                <p:cond evt="onNext" delay="0">
+                  <p:tgtEl>
+                    <p:sldTgt/>
+                  </p:tgtEl>
+                </p:cond>
+              </p:nextCondLst>
+            </p:seq>
+          </p:childTnLst>
+        </p:cTn>
+      </p:par>
+    </p:tnLst>
+    <p:bldLst>
+      <p:bldP spid="4" grpId="0"/>
+      <p:bldP spid="7" grpId="0"/>
+      <p:bldP spid="8" grpId="0"/>
+    </p:bldLst>
+  </p:timing>
+</p:sld>
+</file>
+
+<file path=ppt/slides/slide13.xml><?xml version="1.0" encoding="utf-8"?>
+<p:sld xmlns:a="http://schemas.openxmlformats.org/drawingml/2006/main" xmlns:r="http://schemas.openxmlformats.org/officeDocument/2006/relationships" xmlns:p="http://schemas.openxmlformats.org/presentationml/2006/main">
+  <p:cSld>
+    <p:spTree>
+      <p:nvGrpSpPr>
         <p:cNvPr id="1" name=""/>
         <p:cNvGrpSpPr/>
         <p:nvPr/>
@@ -13941,7 +14838,7 @@
           <p:cNvPr id="3" name="Title 1">
             <a:extLst>
               <a:ext uri="{FF2B5EF4-FFF2-40B4-BE49-F238E27FC236}">
-                <a16:creationId xmlns="" xmlns:a16="http://schemas.microsoft.com/office/drawing/2014/main" id="{D88C20CF-C1EE-4092-B52D-FD4AB2AB2508}"/>
+                <a16:creationId xmlns:a16="http://schemas.microsoft.com/office/drawing/2014/main" xmlns="" id="{D88C20CF-C1EE-4092-B52D-FD4AB2AB2508}"/>
               </a:ext>
             </a:extLst>
           </p:cNvPr>
@@ -13954,8 +14851,8 @@
         </p:nvSpPr>
         <p:spPr>
           <a:xfrm>
-            <a:off x="-376877" y="1177761"/>
-            <a:ext cx="11340000" cy="3522304"/>
+            <a:off x="-915190" y="735947"/>
+            <a:ext cx="11340000" cy="700114"/>
           </a:xfrm>
           <a:prstGeom prst="rect">
             <a:avLst/>
@@ -13963,24 +14860,54 @@
         </p:spPr>
         <p:txBody>
           <a:bodyPr anchor="ctr">
+            <a:normAutofit fontScale="90000"/>
+          </a:bodyPr>
+          <a:lstStyle/>
+          <a:p>
+            <a:pPr algn="ctr"/>
+            <a:r>
+              <a:rPr lang="en-US" sz="4800" b="1" dirty="0">
+                <a:solidFill>
+                  <a:schemeClr val="tx1"/>
+                </a:solidFill>
+              </a:rPr>
+              <a:t>Thank you</a:t>
+            </a:r>
+          </a:p>
+        </p:txBody>
+      </p:sp>
+      <p:sp>
+        <p:nvSpPr>
+          <p:cNvPr id="31" name="Text Placeholder 30">
+            <a:extLst>
+              <a:ext uri="{FF2B5EF4-FFF2-40B4-BE49-F238E27FC236}">
+                <a16:creationId xmlns:a16="http://schemas.microsoft.com/office/drawing/2014/main" xmlns="" id="{97AB1F14-3A1E-4057-A473-9975BA59F012}"/>
+              </a:ext>
+            </a:extLst>
+          </p:cNvPr>
+          <p:cNvSpPr>
+            <a:spLocks noGrp="1"/>
+          </p:cNvSpPr>
+          <p:nvPr>
+            <p:ph type="body" sz="quarter" idx="13"/>
+          </p:nvPr>
+        </p:nvSpPr>
+        <p:spPr>
+          <a:xfrm>
+            <a:off x="3727865" y="4641925"/>
+            <a:ext cx="2139695" cy="1108635"/>
+          </a:xfrm>
+        </p:spPr>
+        <p:txBody>
+          <a:bodyPr>
             <a:normAutofit/>
           </a:bodyPr>
           <a:lstStyle/>
           <a:p>
-            <a:pPr algn="ctr"/>
-            <a:r>
-              <a:rPr lang="en-US" sz="4800" b="1" i="1" dirty="0" smtClean="0">
-                <a:solidFill>
-                  <a:schemeClr val="tx1"/>
-                </a:solidFill>
-              </a:rPr>
-              <a:t>Thank you</a:t>
-            </a:r>
-            <a:endParaRPr lang="en-US" sz="4800" b="1" i="1" dirty="0">
-              <a:solidFill>
-                <a:schemeClr val="tx1"/>
-              </a:solidFill>
-            </a:endParaRPr>
+            <a:r>
+              <a:rPr lang="en-US" dirty="0"/>
+              <a:t>.</a:t>
+            </a:r>
           </a:p>
         </p:txBody>
       </p:sp>
@@ -13989,7 +14916,7 @@
           <p:cNvPr id="17" name="Text Placeholder 28">
             <a:extLst>
               <a:ext uri="{FF2B5EF4-FFF2-40B4-BE49-F238E27FC236}">
-                <a16:creationId xmlns="" xmlns:a16="http://schemas.microsoft.com/office/drawing/2014/main" id="{E212CE24-374D-44D0-8F39-0F5A36E42ED7}"/>
+                <a16:creationId xmlns:a16="http://schemas.microsoft.com/office/drawing/2014/main" xmlns="" id="{E212CE24-374D-44D0-8F39-0F5A36E42ED7}"/>
               </a:ext>
             </a:extLst>
           </p:cNvPr>
@@ -14245,7 +15172,7 @@
           <p:cNvPr id="20" name="Text Placeholder 28">
             <a:extLst>
               <a:ext uri="{FF2B5EF4-FFF2-40B4-BE49-F238E27FC236}">
-                <a16:creationId xmlns="" xmlns:a16="http://schemas.microsoft.com/office/drawing/2014/main" id="{A09A5BC1-0E62-4E6B-A590-951A87D4B4FE}"/>
+                <a16:creationId xmlns:a16="http://schemas.microsoft.com/office/drawing/2014/main" xmlns="" id="{A09A5BC1-0E62-4E6B-A590-951A87D4B4FE}"/>
               </a:ext>
             </a:extLst>
           </p:cNvPr>
@@ -14501,7 +15428,7 @@
           <p:cNvPr id="23" name="Text Placeholder 28">
             <a:extLst>
               <a:ext uri="{FF2B5EF4-FFF2-40B4-BE49-F238E27FC236}">
-                <a16:creationId xmlns="" xmlns:a16="http://schemas.microsoft.com/office/drawing/2014/main" id="{9E6B148F-F3B6-4E6B-9B85-645C039858E8}"/>
+                <a16:creationId xmlns:a16="http://schemas.microsoft.com/office/drawing/2014/main" xmlns="" id="{9E6B148F-F3B6-4E6B-9B85-645C039858E8}"/>
               </a:ext>
             </a:extLst>
           </p:cNvPr>
@@ -14757,7 +15684,7 @@
           <p:cNvPr id="30" name="Text Placeholder 30">
             <a:extLst>
               <a:ext uri="{FF2B5EF4-FFF2-40B4-BE49-F238E27FC236}">
-                <a16:creationId xmlns="" xmlns:a16="http://schemas.microsoft.com/office/drawing/2014/main" id="{D3BF02F6-2753-476A-8046-A85AE3A49748}"/>
+                <a16:creationId xmlns:a16="http://schemas.microsoft.com/office/drawing/2014/main" xmlns="" id="{D3BF02F6-2753-476A-8046-A85AE3A49748}"/>
               </a:ext>
             </a:extLst>
           </p:cNvPr>
@@ -15013,7 +15940,7 @@
           <p:cNvPr id="32" name="Text Placeholder 30">
             <a:extLst>
               <a:ext uri="{FF2B5EF4-FFF2-40B4-BE49-F238E27FC236}">
-                <a16:creationId xmlns="" xmlns:a16="http://schemas.microsoft.com/office/drawing/2014/main" id="{B993AB29-3A3A-4473-8AC8-86E859C97321}"/>
+                <a16:creationId xmlns:a16="http://schemas.microsoft.com/office/drawing/2014/main" xmlns="" id="{B993AB29-3A3A-4473-8AC8-86E859C97321}"/>
               </a:ext>
             </a:extLst>
           </p:cNvPr>
@@ -15272,7 +16199,7 @@
           <p:cNvPr id="15" name="Picture 14">
             <a:extLst>
               <a:ext uri="{FF2B5EF4-FFF2-40B4-BE49-F238E27FC236}">
-                <a16:creationId xmlns="" xmlns:a16="http://schemas.microsoft.com/office/drawing/2014/main" id="{BD3F9E86-2FB3-4DB3-9343-59D594F350A0}"/>
+                <a16:creationId xmlns:a16="http://schemas.microsoft.com/office/drawing/2014/main" xmlns="" id="{BD3F9E86-2FB3-4DB3-9343-59D594F350A0}"/>
               </a:ext>
             </a:extLst>
           </p:cNvPr>
@@ -15301,7 +16228,7 @@
           <p:cNvPr id="12" name="Text Placeholder 11">
             <a:extLst>
               <a:ext uri="{FF2B5EF4-FFF2-40B4-BE49-F238E27FC236}">
-                <a16:creationId xmlns="" xmlns:a16="http://schemas.microsoft.com/office/drawing/2014/main" id="{BC277FD7-925B-4C3D-A364-118403201507}"/>
+                <a16:creationId xmlns:a16="http://schemas.microsoft.com/office/drawing/2014/main" xmlns="" id="{BC277FD7-925B-4C3D-A364-118403201507}"/>
               </a:ext>
             </a:extLst>
           </p:cNvPr>
@@ -15314,41 +16241,393 @@
         </p:nvSpPr>
         <p:spPr>
           <a:xfrm>
-            <a:off x="4205644" y="3396659"/>
-            <a:ext cx="2174957" cy="453197"/>
+            <a:off x="1285337" y="2058234"/>
+            <a:ext cx="7306026" cy="3229757"/>
           </a:xfrm>
         </p:spPr>
         <p:txBody>
           <a:bodyPr>
-            <a:normAutofit fontScale="85000" lnSpcReduction="10000"/>
+            <a:noAutofit/>
           </a:bodyPr>
           <a:lstStyle/>
           <a:p>
             <a:r>
+              <a:rPr lang="en-IN" sz="3200" dirty="0" smtClean="0">
+                <a:solidFill>
+                  <a:schemeClr val="tx1"/>
+                </a:solidFill>
+                <a:latin typeface="Arial" panose="020B0604020202020204" pitchFamily="34" charset="0"/>
+                <a:cs typeface="Arial" panose="020B0604020202020204" pitchFamily="34" charset="0"/>
+              </a:rPr>
+              <a:t>Car Market Insights</a:t>
+            </a:r>
+            <a:endParaRPr lang="en-IN" dirty="0">
+              <a:solidFill>
+                <a:schemeClr val="tx1"/>
+              </a:solidFill>
+              <a:latin typeface="Arial" panose="020B0604020202020204" pitchFamily="34" charset="0"/>
+              <a:cs typeface="Arial" panose="020B0604020202020204" pitchFamily="34" charset="0"/>
+            </a:endParaRPr>
+          </a:p>
+          <a:p>
+            <a:r>
+              <a:rPr lang="en-US" sz="1400" dirty="0">
+                <a:solidFill>
+                  <a:srgbClr val="00B0F0"/>
+                </a:solidFill>
+                <a:latin typeface="Arial" panose="020B0604020202020204" pitchFamily="34" charset="0"/>
+                <a:cs typeface="Arial" panose="020B0604020202020204" pitchFamily="34" charset="0"/>
+              </a:rPr>
+              <a:t>What Makes a Used Car Worth More?</a:t>
+            </a:r>
+          </a:p>
+          <a:p>
+            <a:pPr marL="457200" lvl="1" indent="0">
+              <a:lnSpc>
+                <a:spcPct val="150000"/>
+              </a:lnSpc>
+              <a:buNone/>
+            </a:pPr>
+            <a:r>
+              <a:rPr lang="en-US" sz="1800" b="1" dirty="0" smtClean="0">
+                <a:solidFill>
+                  <a:schemeClr val="tx1"/>
+                </a:solidFill>
+                <a:latin typeface="Arial" panose="020B0604020202020204" pitchFamily="34" charset="0"/>
+                <a:cs typeface="Arial" panose="020B0604020202020204" pitchFamily="34" charset="0"/>
+              </a:rPr>
+              <a:t>Any Questions ?</a:t>
+            </a:r>
+            <a:r>
+              <a:rPr lang="en-US" sz="1400" b="0" dirty="0">
+                <a:solidFill>
+                  <a:schemeClr val="tx1"/>
+                </a:solidFill>
+                <a:latin typeface="Arial" panose="020B0604020202020204" pitchFamily="34" charset="0"/>
+                <a:cs typeface="Arial" panose="020B0604020202020204" pitchFamily="34" charset="0"/>
+              </a:rPr>
+              <a:t/>
+            </a:r>
+            <a:br>
+              <a:rPr lang="en-US" sz="1400" b="0" dirty="0">
+                <a:solidFill>
+                  <a:schemeClr val="tx1"/>
+                </a:solidFill>
+                <a:latin typeface="Arial" panose="020B0604020202020204" pitchFamily="34" charset="0"/>
+                <a:cs typeface="Arial" panose="020B0604020202020204" pitchFamily="34" charset="0"/>
+              </a:rPr>
+            </a:br>
+            <a:r>
+              <a:rPr lang="en-US" sz="1400" b="0" i="1" dirty="0">
+                <a:solidFill>
+                  <a:schemeClr val="tx1"/>
+                </a:solidFill>
+                <a:latin typeface="Arial" panose="020B0604020202020204" pitchFamily="34" charset="0"/>
+                <a:cs typeface="Arial" panose="020B0604020202020204" pitchFamily="34" charset="0"/>
+              </a:rPr>
+              <a:t>Feel free to share your thoughts, </a:t>
+            </a:r>
+            <a:r>
+              <a:rPr lang="en-US" sz="1400" b="0" i="1" dirty="0" smtClean="0">
+                <a:solidFill>
+                  <a:schemeClr val="tx1"/>
+                </a:solidFill>
+                <a:latin typeface="Arial" panose="020B0604020202020204" pitchFamily="34" charset="0"/>
+                <a:cs typeface="Arial" panose="020B0604020202020204" pitchFamily="34" charset="0"/>
+              </a:rPr>
+              <a:t>feedback or </a:t>
+            </a:r>
+            <a:r>
+              <a:rPr lang="en-US" sz="1400" b="0" i="1" dirty="0">
+                <a:solidFill>
+                  <a:schemeClr val="tx1"/>
+                </a:solidFill>
+                <a:latin typeface="Arial" panose="020B0604020202020204" pitchFamily="34" charset="0"/>
+                <a:cs typeface="Arial" panose="020B0604020202020204" pitchFamily="34" charset="0"/>
+              </a:rPr>
+              <a:t>questions regarding the data </a:t>
+            </a:r>
+            <a:r>
+              <a:rPr lang="en-US" sz="1400" b="0" i="1" dirty="0" smtClean="0">
+                <a:solidFill>
+                  <a:schemeClr val="tx1"/>
+                </a:solidFill>
+                <a:latin typeface="Arial" panose="020B0604020202020204" pitchFamily="34" charset="0"/>
+                <a:cs typeface="Arial" panose="020B0604020202020204" pitchFamily="34" charset="0"/>
+              </a:rPr>
+              <a:t>insights.</a:t>
+            </a:r>
+          </a:p>
+          <a:p>
+            <a:pPr marL="457200" lvl="1" indent="0">
+              <a:lnSpc>
+                <a:spcPct val="150000"/>
+              </a:lnSpc>
+              <a:buNone/>
+            </a:pPr>
+            <a:r>
+              <a:rPr lang="en-US" sz="1800" b="1" dirty="0" smtClean="0">
+                <a:solidFill>
+                  <a:schemeClr val="tx1"/>
+                </a:solidFill>
+                <a:latin typeface="Arial" panose="020B0604020202020204" pitchFamily="34" charset="0"/>
+                <a:cs typeface="Arial" panose="020B0604020202020204" pitchFamily="34" charset="0"/>
+              </a:rPr>
+              <a:t>Presenter </a:t>
+            </a:r>
+            <a:r>
+              <a:rPr lang="en-US" sz="1800" b="1" dirty="0">
+                <a:solidFill>
+                  <a:schemeClr val="tx1"/>
+                </a:solidFill>
+                <a:latin typeface="Arial" panose="020B0604020202020204" pitchFamily="34" charset="0"/>
+                <a:cs typeface="Arial" panose="020B0604020202020204" pitchFamily="34" charset="0"/>
+              </a:rPr>
+              <a:t>Contact </a:t>
+            </a:r>
+            <a:r>
+              <a:rPr lang="en-US" sz="1800" b="1" dirty="0" smtClean="0">
+                <a:solidFill>
+                  <a:schemeClr val="tx1"/>
+                </a:solidFill>
+                <a:latin typeface="Arial" panose="020B0604020202020204" pitchFamily="34" charset="0"/>
+                <a:cs typeface="Arial" panose="020B0604020202020204" pitchFamily="34" charset="0"/>
+              </a:rPr>
+              <a:t>Information :</a:t>
+            </a:r>
+            <a:endParaRPr lang="en-US" sz="1800" b="1" dirty="0">
+              <a:solidFill>
+                <a:schemeClr val="tx1"/>
+              </a:solidFill>
+              <a:latin typeface="Arial" panose="020B0604020202020204" pitchFamily="34" charset="0"/>
+              <a:cs typeface="Arial" panose="020B0604020202020204" pitchFamily="34" charset="0"/>
+            </a:endParaRPr>
+          </a:p>
+          <a:p>
+            <a:r>
               <a:rPr lang="en-US" dirty="0" smtClean="0">
                 <a:solidFill>
-                  <a:schemeClr val="accent2">
-                    <a:lumMod val="75000"/>
-                  </a:schemeClr>
-                </a:solidFill>
+                  <a:schemeClr val="tx1"/>
+                </a:solidFill>
+                <a:latin typeface="Arial" panose="020B0604020202020204" pitchFamily="34" charset="0"/>
+                <a:cs typeface="Arial" panose="020B0604020202020204" pitchFamily="34" charset="0"/>
+              </a:rPr>
+              <a:t>Name :</a:t>
+            </a:r>
+            <a:r>
+              <a:rPr lang="en-US" b="0" dirty="0" smtClean="0">
+                <a:solidFill>
+                  <a:schemeClr val="tx1"/>
+                </a:solidFill>
+                <a:latin typeface="Arial" panose="020B0604020202020204" pitchFamily="34" charset="0"/>
+                <a:cs typeface="Arial" panose="020B0604020202020204" pitchFamily="34" charset="0"/>
+              </a:rPr>
+              <a:t> </a:t>
+            </a:r>
+            <a:r>
+              <a:rPr lang="en-US" b="0" dirty="0" err="1" smtClean="0">
+                <a:solidFill>
+                  <a:schemeClr val="tx1"/>
+                </a:solidFill>
+                <a:latin typeface="Arial" panose="020B0604020202020204" pitchFamily="34" charset="0"/>
+                <a:cs typeface="Arial" panose="020B0604020202020204" pitchFamily="34" charset="0"/>
+              </a:rPr>
+              <a:t>Yash</a:t>
+            </a:r>
+            <a:r>
+              <a:rPr lang="en-US" b="0" dirty="0" smtClean="0">
+                <a:solidFill>
+                  <a:schemeClr val="tx1"/>
+                </a:solidFill>
+                <a:latin typeface="Arial" panose="020B0604020202020204" pitchFamily="34" charset="0"/>
+                <a:cs typeface="Arial" panose="020B0604020202020204" pitchFamily="34" charset="0"/>
+              </a:rPr>
+              <a:t> Sanjay Monde</a:t>
+            </a:r>
+            <a:endParaRPr lang="en-US" b="0" dirty="0">
+              <a:solidFill>
+                <a:schemeClr val="tx1"/>
+              </a:solidFill>
+              <a:latin typeface="Arial" panose="020B0604020202020204" pitchFamily="34" charset="0"/>
+              <a:cs typeface="Arial" panose="020B0604020202020204" pitchFamily="34" charset="0"/>
+            </a:endParaRPr>
+          </a:p>
+          <a:p>
+            <a:r>
+              <a:rPr lang="en-US" dirty="0" smtClean="0">
+                <a:solidFill>
+                  <a:schemeClr val="tx1"/>
+                </a:solidFill>
+                <a:latin typeface="Arial" panose="020B0604020202020204" pitchFamily="34" charset="0"/>
+                <a:cs typeface="Arial" panose="020B0604020202020204" pitchFamily="34" charset="0"/>
+              </a:rPr>
+              <a:t>Email :</a:t>
+            </a:r>
+            <a:r>
+              <a:rPr lang="en-US" b="0" dirty="0" smtClean="0">
+                <a:solidFill>
+                  <a:schemeClr val="tx1"/>
+                </a:solidFill>
+                <a:latin typeface="Arial" panose="020B0604020202020204" pitchFamily="34" charset="0"/>
+                <a:cs typeface="Arial" panose="020B0604020202020204" pitchFamily="34" charset="0"/>
+              </a:rPr>
+              <a:t> realyashmonde956@gmail.com</a:t>
+            </a:r>
+            <a:endParaRPr lang="en-US" b="0" dirty="0">
+              <a:solidFill>
+                <a:schemeClr val="tx1"/>
+              </a:solidFill>
+              <a:latin typeface="Arial" panose="020B0604020202020204" pitchFamily="34" charset="0"/>
+              <a:cs typeface="Arial" panose="020B0604020202020204" pitchFamily="34" charset="0"/>
+            </a:endParaRPr>
+          </a:p>
+          <a:p>
+            <a:r>
+              <a:rPr lang="en-US" dirty="0">
+                <a:solidFill>
+                  <a:schemeClr val="tx1"/>
+                </a:solidFill>
+                <a:latin typeface="Arial" panose="020B0604020202020204" pitchFamily="34" charset="0"/>
+                <a:cs typeface="Arial" panose="020B0604020202020204" pitchFamily="34" charset="0"/>
+              </a:rPr>
+              <a:t>GitHub / </a:t>
+            </a:r>
+            <a:r>
+              <a:rPr lang="en-US" dirty="0" smtClean="0">
+                <a:solidFill>
+                  <a:schemeClr val="tx1"/>
+                </a:solidFill>
+                <a:latin typeface="Arial" panose="020B0604020202020204" pitchFamily="34" charset="0"/>
+                <a:cs typeface="Arial" panose="020B0604020202020204" pitchFamily="34" charset="0"/>
+              </a:rPr>
+              <a:t>Portfolio : </a:t>
+            </a:r>
+            <a:r>
+              <a:rPr lang="en-US" b="0" dirty="0" smtClean="0">
+                <a:solidFill>
+                  <a:schemeClr val="tx1"/>
+                </a:solidFill>
+                <a:latin typeface="Arial" panose="020B0604020202020204" pitchFamily="34" charset="0"/>
+                <a:cs typeface="Arial" panose="020B0604020202020204" pitchFamily="34" charset="0"/>
+              </a:rPr>
+              <a:t> </a:t>
+            </a:r>
+            <a:r>
+              <a:rPr lang="en-US" sz="1800" b="0" dirty="0">
+                <a:solidFill>
+                  <a:schemeClr val="tx1"/>
+                </a:solidFill>
+                <a:latin typeface="Arial" panose="020B0604020202020204" pitchFamily="34" charset="0"/>
+                <a:cs typeface="Arial" panose="020B0604020202020204" pitchFamily="34" charset="0"/>
                 <a:hlinkClick r:id="rId3"/>
               </a:rPr>
-              <a:t>Demo Link - Click it</a:t>
-            </a:r>
-            <a:endParaRPr lang="en-IN" dirty="0">
+              <a:t>https://</a:t>
+            </a:r>
+            <a:r>
+              <a:rPr lang="en-US" sz="1800" b="0" dirty="0" smtClean="0">
+                <a:solidFill>
+                  <a:schemeClr val="tx1"/>
+                </a:solidFill>
+                <a:latin typeface="Arial" panose="020B0604020202020204" pitchFamily="34" charset="0"/>
+                <a:cs typeface="Arial" panose="020B0604020202020204" pitchFamily="34" charset="0"/>
+                <a:hlinkClick r:id="rId3"/>
+              </a:rPr>
+              <a:t>github.com/yashmonde24</a:t>
+            </a:r>
+            <a:endParaRPr lang="en-US" sz="1800" b="0" dirty="0">
               <a:solidFill>
-                <a:schemeClr val="accent2">
-                  <a:lumMod val="75000"/>
-                </a:schemeClr>
+                <a:schemeClr val="tx1"/>
               </a:solidFill>
+              <a:latin typeface="Arial" panose="020B0604020202020204" pitchFamily="34" charset="0"/>
+              <a:cs typeface="Arial" panose="020B0604020202020204" pitchFamily="34" charset="0"/>
             </a:endParaRPr>
+          </a:p>
+          <a:p>
+            <a:endParaRPr lang="en-US" b="0" dirty="0">
+              <a:solidFill>
+                <a:schemeClr val="tx1"/>
+              </a:solidFill>
+              <a:latin typeface="Arial" panose="020B0604020202020204" pitchFamily="34" charset="0"/>
+              <a:cs typeface="Arial" panose="020B0604020202020204" pitchFamily="34" charset="0"/>
+            </a:endParaRPr>
+          </a:p>
+          <a:p>
+            <a:pPr marL="457200" lvl="1" indent="0">
+              <a:lnSpc>
+                <a:spcPct val="150000"/>
+              </a:lnSpc>
+              <a:buNone/>
+            </a:pPr>
+            <a:endParaRPr lang="en-US" sz="1400" b="0" dirty="0">
+              <a:solidFill>
+                <a:schemeClr val="tx1"/>
+              </a:solidFill>
+              <a:latin typeface="Arial" panose="020B0604020202020204" pitchFamily="34" charset="0"/>
+              <a:cs typeface="Arial" panose="020B0604020202020204" pitchFamily="34" charset="0"/>
+            </a:endParaRPr>
+          </a:p>
+          <a:p>
+            <a:pPr marL="457200" lvl="1" indent="0">
+              <a:lnSpc>
+                <a:spcPct val="150000"/>
+              </a:lnSpc>
+              <a:buNone/>
+            </a:pPr>
+            <a:endParaRPr lang="en-IN" sz="1400" dirty="0">
+              <a:solidFill>
+                <a:schemeClr val="tx1"/>
+              </a:solidFill>
+              <a:latin typeface="Arial" panose="020B0604020202020204" pitchFamily="34" charset="0"/>
+              <a:cs typeface="Arial" panose="020B0604020202020204" pitchFamily="34" charset="0"/>
+            </a:endParaRPr>
+          </a:p>
+        </p:txBody>
+      </p:sp>
+      <p:sp>
+        <p:nvSpPr>
+          <p:cNvPr id="18" name="Rectangle 17"/>
+          <p:cNvSpPr/>
+          <p:nvPr/>
+        </p:nvSpPr>
+        <p:spPr>
+          <a:xfrm>
+            <a:off x="2819082" y="659424"/>
+            <a:ext cx="3871456" cy="914400"/>
+          </a:xfrm>
+          <a:prstGeom prst="rect">
+            <a:avLst/>
+          </a:prstGeom>
+          <a:noFill/>
+        </p:spPr>
+        <p:style>
+          <a:lnRef idx="2">
+            <a:schemeClr val="accent1">
+              <a:shade val="50000"/>
+            </a:schemeClr>
+          </a:lnRef>
+          <a:fillRef idx="1">
+            <a:schemeClr val="accent1"/>
+          </a:fillRef>
+          <a:effectRef idx="0">
+            <a:schemeClr val="accent1"/>
+          </a:effectRef>
+          <a:fontRef idx="minor">
+            <a:schemeClr val="lt1"/>
+          </a:fontRef>
+        </p:style>
+        <p:txBody>
+          <a:bodyPr rtlCol="0" anchor="ctr"/>
+          <a:lstStyle/>
+          <a:p>
+            <a:pPr algn="ctr"/>
+            <a:endParaRPr lang="en-IN"/>
           </a:p>
         </p:txBody>
       </p:sp>
     </p:spTree>
     <p:extLst>
       <p:ext uri="{BB962C8B-B14F-4D97-AF65-F5344CB8AC3E}">
-        <p14:creationId xmlns:p14="http://schemas.microsoft.com/office/powerpoint/2010/main" val="3401748718"/>
+        <p14:creationId xmlns:p14="http://schemas.microsoft.com/office/powerpoint/2010/main" val="398787476"/>
       </p:ext>
     </p:extLst>
   </p:cSld>
@@ -15556,15 +16835,10 @@
                             </p:stCondLst>
                             <p:childTnLst>
                               <p:par>
-                                <p:cTn id="18" presetID="12" presetClass="entr" presetSubtype="4" fill="hold" grpId="0" nodeType="clickEffect" nodePh="1">
+                                <p:cTn id="18" presetID="12" presetClass="entr" presetSubtype="4" fill="hold" grpId="0" nodeType="clickEffect">
                                   <p:stCondLst>
                                     <p:cond delay="0"/>
                                   </p:stCondLst>
-                                  <p:endCondLst>
-                                    <p:cond evt="begin" delay="0">
-                                      <p:tn val="18"/>
-                                    </p:cond>
-                                  </p:endCondLst>
                                   <p:childTnLst>
                                     <p:set>
                                       <p:cBhvr>
@@ -15574,7 +16848,11 @@
                                           </p:stCondLst>
                                         </p:cTn>
                                         <p:tgtEl>
-                                          <p:spTgt spid="20"/>
+                                          <p:spTgt spid="31">
+                                            <p:txEl>
+                                              <p:pRg st="0" end="0"/>
+                                            </p:txEl>
+                                          </p:spTgt>
                                         </p:tgtEl>
                                         <p:attrNameLst>
                                           <p:attrName>style.visibility</p:attrName>
@@ -15588,7 +16866,11 @@
                                       <p:cBhvr additive="base">
                                         <p:cTn id="20" dur="500"/>
                                         <p:tgtEl>
-                                          <p:spTgt spid="20"/>
+                                          <p:spTgt spid="31">
+                                            <p:txEl>
+                                              <p:pRg st="0" end="0"/>
+                                            </p:txEl>
+                                          </p:spTgt>
                                         </p:tgtEl>
                                         <p:attrNameLst>
                                           <p:attrName>ppt_y</p:attrName>
@@ -15611,7 +16893,11 @@
                                       <p:cBhvr>
                                         <p:cTn id="21" dur="500"/>
                                         <p:tgtEl>
-                                          <p:spTgt spid="20"/>
+                                          <p:spTgt spid="31">
+                                            <p:txEl>
+                                              <p:pRg st="0" end="0"/>
+                                            </p:txEl>
+                                          </p:spTgt>
                                         </p:tgtEl>
                                       </p:cBhvr>
                                     </p:animEffect>
@@ -15655,7 +16941,7 @@
                                           </p:stCondLst>
                                         </p:cTn>
                                         <p:tgtEl>
-                                          <p:spTgt spid="30"/>
+                                          <p:spTgt spid="20"/>
                                         </p:tgtEl>
                                         <p:attrNameLst>
                                           <p:attrName>style.visibility</p:attrName>
@@ -15669,7 +16955,7 @@
                                       <p:cBhvr additive="base">
                                         <p:cTn id="26" dur="500"/>
                                         <p:tgtEl>
-                                          <p:spTgt spid="30"/>
+                                          <p:spTgt spid="20"/>
                                         </p:tgtEl>
                                         <p:attrNameLst>
                                           <p:attrName>ppt_y</p:attrName>
@@ -15692,7 +16978,7 @@
                                       <p:cBhvr>
                                         <p:cTn id="27" dur="500"/>
                                         <p:tgtEl>
-                                          <p:spTgt spid="30"/>
+                                          <p:spTgt spid="20"/>
                                         </p:tgtEl>
                                       </p:cBhvr>
                                     </p:animEffect>
@@ -15736,7 +17022,7 @@
                                           </p:stCondLst>
                                         </p:cTn>
                                         <p:tgtEl>
-                                          <p:spTgt spid="23"/>
+                                          <p:spTgt spid="30"/>
                                         </p:tgtEl>
                                         <p:attrNameLst>
                                           <p:attrName>style.visibility</p:attrName>
@@ -15750,7 +17036,7 @@
                                       <p:cBhvr additive="base">
                                         <p:cTn id="32" dur="500"/>
                                         <p:tgtEl>
-                                          <p:spTgt spid="23"/>
+                                          <p:spTgt spid="30"/>
                                         </p:tgtEl>
                                         <p:attrNameLst>
                                           <p:attrName>ppt_y</p:attrName>
@@ -15773,7 +17059,7 @@
                                       <p:cBhvr>
                                         <p:cTn id="33" dur="500"/>
                                         <p:tgtEl>
-                                          <p:spTgt spid="23"/>
+                                          <p:spTgt spid="30"/>
                                         </p:tgtEl>
                                       </p:cBhvr>
                                     </p:animEffect>
@@ -15799,14 +17085,95 @@
                             </p:stCondLst>
                             <p:childTnLst>
                               <p:par>
-                                <p:cTn id="36" presetID="12" presetClass="entr" presetSubtype="4" fill="hold" grpId="0" nodeType="clickEffect">
+                                <p:cTn id="36" presetID="12" presetClass="entr" presetSubtype="4" fill="hold" grpId="0" nodeType="clickEffect" nodePh="1">
+                                  <p:stCondLst>
+                                    <p:cond delay="0"/>
+                                  </p:stCondLst>
+                                  <p:endCondLst>
+                                    <p:cond evt="begin" delay="0">
+                                      <p:tn val="36"/>
+                                    </p:cond>
+                                  </p:endCondLst>
+                                  <p:childTnLst>
+                                    <p:set>
+                                      <p:cBhvr>
+                                        <p:cTn id="37" dur="1" fill="hold">
+                                          <p:stCondLst>
+                                            <p:cond delay="0"/>
+                                          </p:stCondLst>
+                                        </p:cTn>
+                                        <p:tgtEl>
+                                          <p:spTgt spid="23"/>
+                                        </p:tgtEl>
+                                        <p:attrNameLst>
+                                          <p:attrName>style.visibility</p:attrName>
+                                        </p:attrNameLst>
+                                      </p:cBhvr>
+                                      <p:to>
+                                        <p:strVal val="visible"/>
+                                      </p:to>
+                                    </p:set>
+                                    <p:anim calcmode="lin" valueType="num">
+                                      <p:cBhvr additive="base">
+                                        <p:cTn id="38" dur="500"/>
+                                        <p:tgtEl>
+                                          <p:spTgt spid="23"/>
+                                        </p:tgtEl>
+                                        <p:attrNameLst>
+                                          <p:attrName>ppt_y</p:attrName>
+                                        </p:attrNameLst>
+                                      </p:cBhvr>
+                                      <p:tavLst>
+                                        <p:tav tm="0">
+                                          <p:val>
+                                            <p:strVal val="#ppt_y+#ppt_h*1.125000"/>
+                                          </p:val>
+                                        </p:tav>
+                                        <p:tav tm="100000">
+                                          <p:val>
+                                            <p:strVal val="#ppt_y"/>
+                                          </p:val>
+                                        </p:tav>
+                                      </p:tavLst>
+                                    </p:anim>
+                                    <p:animEffect transition="in" filter="wipe(up)">
+                                      <p:cBhvr>
+                                        <p:cTn id="39" dur="500"/>
+                                        <p:tgtEl>
+                                          <p:spTgt spid="23"/>
+                                        </p:tgtEl>
+                                      </p:cBhvr>
+                                    </p:animEffect>
+                                  </p:childTnLst>
+                                </p:cTn>
+                              </p:par>
+                            </p:childTnLst>
+                          </p:cTn>
+                        </p:par>
+                      </p:childTnLst>
+                    </p:cTn>
+                  </p:par>
+                  <p:par>
+                    <p:cTn id="40" fill="hold">
+                      <p:stCondLst>
+                        <p:cond delay="indefinite"/>
+                      </p:stCondLst>
+                      <p:childTnLst>
+                        <p:par>
+                          <p:cTn id="41" fill="hold">
+                            <p:stCondLst>
+                              <p:cond delay="0"/>
+                            </p:stCondLst>
+                            <p:childTnLst>
+                              <p:par>
+                                <p:cTn id="42" presetID="12" presetClass="entr" presetSubtype="4" fill="hold" grpId="0" nodeType="clickEffect">
                                   <p:stCondLst>
                                     <p:cond delay="0"/>
                                   </p:stCondLst>
                                   <p:childTnLst>
                                     <p:set>
                                       <p:cBhvr>
-                                        <p:cTn id="37" dur="1" fill="hold">
+                                        <p:cTn id="43" dur="1" fill="hold">
                                           <p:stCondLst>
                                             <p:cond delay="0"/>
                                           </p:stCondLst>
@@ -15824,7 +17191,7 @@
                                     </p:set>
                                     <p:anim calcmode="lin" valueType="num">
                                       <p:cBhvr additive="base">
-                                        <p:cTn id="38" dur="500"/>
+                                        <p:cTn id="44" dur="500"/>
                                         <p:tgtEl>
                                           <p:spTgt spid="32"/>
                                         </p:tgtEl>
@@ -15847,7 +17214,7 @@
                                     </p:anim>
                                     <p:animEffect transition="in" filter="wipe(up)">
                                       <p:cBhvr>
-                                        <p:cTn id="39" dur="500"/>
+                                        <p:cTn id="45" dur="500"/>
                                         <p:tgtEl>
                                           <p:spTgt spid="32"/>
                                         </p:tgtEl>
@@ -15885,6 +17252,7 @@
     </p:tnLst>
     <p:bldLst>
       <p:bldP spid="3" grpId="0"/>
+      <p:bldP spid="31" grpId="0" build="p"/>
       <p:bldP spid="17" grpId="0"/>
       <p:bldP spid="20" grpId="0"/>
       <p:bldP spid="23" grpId="0"/>
@@ -15914,254 +17282,10 @@
       </p:grpSpPr>
       <p:sp>
         <p:nvSpPr>
-          <p:cNvPr id="2" name="Text Placeholder 1">
-            <a:extLst>
-              <a:ext uri="{FF2B5EF4-FFF2-40B4-BE49-F238E27FC236}">
-                <a16:creationId xmlns="" xmlns:a16="http://schemas.microsoft.com/office/drawing/2014/main" id="{E46E4DD1-270B-4C80-AFF0-EB26F132AF36}"/>
-              </a:ext>
-            </a:extLst>
-          </p:cNvPr>
-          <p:cNvSpPr>
-            <a:spLocks noGrp="1"/>
-          </p:cNvSpPr>
-          <p:nvPr>
-            <p:ph type="body" sz="quarter" idx="12"/>
-          </p:nvPr>
-        </p:nvSpPr>
-        <p:spPr>
-          <a:xfrm>
-            <a:off x="754602" y="2102230"/>
-            <a:ext cx="7786969" cy="3607987"/>
-          </a:xfrm>
-        </p:spPr>
-        <p:txBody>
-          <a:bodyPr>
-            <a:normAutofit/>
-          </a:bodyPr>
-          <a:lstStyle/>
-          <a:p>
-            <a:pPr>
-              <a:lnSpc>
-                <a:spcPct val="150000"/>
-              </a:lnSpc>
-            </a:pPr>
-            <a:r>
-              <a:rPr lang="en-US" sz="1600" b="1" dirty="0">
-                <a:solidFill>
-                  <a:schemeClr val="tx1"/>
-                </a:solidFill>
-                <a:latin typeface="Calibri" pitchFamily="34" charset="0"/>
-                <a:ea typeface="Calibri" pitchFamily="34" charset="-122"/>
-                <a:cs typeface="Calibri" pitchFamily="34" charset="-120"/>
-              </a:rPr>
-              <a:t>Used-car prices are shaped by several interacting factors </a:t>
-            </a:r>
-            <a:r>
-              <a:rPr lang="en-US" sz="1600" b="1" dirty="0" smtClean="0">
-                <a:solidFill>
-                  <a:schemeClr val="tx1"/>
-                </a:solidFill>
-                <a:latin typeface="Calibri" pitchFamily="34" charset="0"/>
-                <a:ea typeface="Calibri" pitchFamily="34" charset="-122"/>
-                <a:cs typeface="Calibri" pitchFamily="34" charset="-120"/>
-              </a:rPr>
-              <a:t>- </a:t>
-            </a:r>
-            <a:r>
-              <a:rPr lang="en-US" sz="1600" b="1" dirty="0">
-                <a:solidFill>
-                  <a:schemeClr val="tx1"/>
-                </a:solidFill>
-                <a:latin typeface="Calibri" pitchFamily="34" charset="0"/>
-                <a:ea typeface="Calibri" pitchFamily="34" charset="-122"/>
-                <a:cs typeface="Calibri" pitchFamily="34" charset="-120"/>
-              </a:rPr>
-              <a:t>age, mileage, fuel type, ownership history, seller type </a:t>
-            </a:r>
-            <a:r>
-              <a:rPr lang="en-US" sz="1600" b="1" dirty="0" smtClean="0">
-                <a:solidFill>
-                  <a:schemeClr val="tx1"/>
-                </a:solidFill>
-                <a:latin typeface="Calibri" pitchFamily="34" charset="0"/>
-                <a:ea typeface="Calibri" pitchFamily="34" charset="-122"/>
-                <a:cs typeface="Calibri" pitchFamily="34" charset="-120"/>
-              </a:rPr>
-              <a:t>- </a:t>
-            </a:r>
-            <a:r>
-              <a:rPr lang="en-US" sz="1600" b="1" dirty="0">
-                <a:solidFill>
-                  <a:schemeClr val="tx1"/>
-                </a:solidFill>
-                <a:latin typeface="Calibri" pitchFamily="34" charset="0"/>
-                <a:ea typeface="Calibri" pitchFamily="34" charset="-122"/>
-                <a:cs typeface="Calibri" pitchFamily="34" charset="-120"/>
-              </a:rPr>
-              <a:t>but listings rarely price consistently against them.</a:t>
-            </a:r>
-            <a:endParaRPr lang="en-US" sz="1600" b="1" dirty="0">
-              <a:solidFill>
-                <a:schemeClr val="tx1"/>
-              </a:solidFill>
-            </a:endParaRPr>
-          </a:p>
-          <a:p>
-            <a:r>
-              <a:rPr lang="en-US" sz="1600" b="1" dirty="0">
-                <a:solidFill>
-                  <a:srgbClr val="000000"/>
-                </a:solidFill>
-                <a:latin typeface="Calibri" pitchFamily="34" charset="0"/>
-                <a:ea typeface="Calibri" pitchFamily="34" charset="-122"/>
-                <a:cs typeface="Calibri" pitchFamily="34" charset="-120"/>
-              </a:rPr>
-              <a:t>This analysis uses </a:t>
-            </a:r>
-            <a:r>
-              <a:rPr lang="en-US" sz="1600" b="1" dirty="0" err="1" smtClean="0">
-                <a:solidFill>
-                  <a:srgbClr val="000000"/>
-                </a:solidFill>
-                <a:latin typeface="Calibri" pitchFamily="34" charset="0"/>
-                <a:ea typeface="Calibri" pitchFamily="34" charset="-122"/>
-                <a:cs typeface="Calibri" pitchFamily="34" charset="-120"/>
-              </a:rPr>
-              <a:t>CarDekho</a:t>
-            </a:r>
-            <a:r>
-              <a:rPr lang="en-US" sz="1600" b="1" dirty="0" smtClean="0">
-                <a:solidFill>
-                  <a:srgbClr val="000000"/>
-                </a:solidFill>
-                <a:latin typeface="Calibri" pitchFamily="34" charset="0"/>
-                <a:ea typeface="Calibri" pitchFamily="34" charset="-122"/>
-                <a:cs typeface="Calibri" pitchFamily="34" charset="-120"/>
-              </a:rPr>
-              <a:t> </a:t>
-            </a:r>
-            <a:r>
-              <a:rPr lang="en-US" sz="1600" b="1" dirty="0">
-                <a:solidFill>
-                  <a:srgbClr val="000000"/>
-                </a:solidFill>
-                <a:latin typeface="Calibri" pitchFamily="34" charset="0"/>
-                <a:ea typeface="Calibri" pitchFamily="34" charset="-122"/>
-                <a:cs typeface="Calibri" pitchFamily="34" charset="-120"/>
-              </a:rPr>
-              <a:t>listings to answer one </a:t>
-            </a:r>
-            <a:r>
-              <a:rPr lang="en-US" sz="1600" b="1" dirty="0" smtClean="0">
-                <a:solidFill>
-                  <a:srgbClr val="000000"/>
-                </a:solidFill>
-                <a:latin typeface="Calibri" pitchFamily="34" charset="0"/>
-                <a:ea typeface="Calibri" pitchFamily="34" charset="-122"/>
-                <a:cs typeface="Calibri" pitchFamily="34" charset="-120"/>
-              </a:rPr>
-              <a:t>question :</a:t>
-            </a:r>
-          </a:p>
-          <a:p>
-            <a:pPr marL="0" indent="0" algn="just">
-              <a:buNone/>
-            </a:pPr>
-            <a:r>
-              <a:rPr lang="en-US" sz="1600" b="1" i="1" dirty="0" smtClean="0">
-                <a:solidFill>
-                  <a:srgbClr val="000000"/>
-                </a:solidFill>
-                <a:latin typeface="Calibri" pitchFamily="34" charset="0"/>
-                <a:ea typeface="Calibri" pitchFamily="34" charset="-122"/>
-                <a:cs typeface="Calibri" pitchFamily="34" charset="-120"/>
-              </a:rPr>
-              <a:t>         </a:t>
-            </a:r>
-            <a:r>
-              <a:rPr lang="en-US" sz="1600" i="1" dirty="0" smtClean="0">
-                <a:solidFill>
-                  <a:srgbClr val="2E83C3"/>
-                </a:solidFill>
-                <a:latin typeface="Calibri" pitchFamily="34" charset="0"/>
-                <a:ea typeface="Calibri" pitchFamily="34" charset="-122"/>
-                <a:cs typeface="Calibri" pitchFamily="34" charset="-120"/>
-              </a:rPr>
-              <a:t>Which </a:t>
-            </a:r>
-            <a:r>
-              <a:rPr lang="en-US" sz="1600" i="1" dirty="0">
-                <a:solidFill>
-                  <a:srgbClr val="2E83C3"/>
-                </a:solidFill>
-                <a:latin typeface="Calibri" pitchFamily="34" charset="0"/>
-                <a:ea typeface="Calibri" pitchFamily="34" charset="-122"/>
-                <a:cs typeface="Calibri" pitchFamily="34" charset="-120"/>
-              </a:rPr>
-              <a:t>variables actually move resale price </a:t>
-            </a:r>
-            <a:r>
-              <a:rPr lang="en-US" sz="1600" i="1" dirty="0" smtClean="0">
-                <a:solidFill>
-                  <a:srgbClr val="2E83C3"/>
-                </a:solidFill>
-                <a:latin typeface="Calibri" pitchFamily="34" charset="0"/>
-                <a:ea typeface="Calibri" pitchFamily="34" charset="-122"/>
-                <a:cs typeface="Calibri" pitchFamily="34" charset="-120"/>
-              </a:rPr>
-              <a:t> </a:t>
-            </a:r>
-            <a:r>
-              <a:rPr lang="en-US" sz="1600" i="1" dirty="0">
-                <a:solidFill>
-                  <a:srgbClr val="2E83C3"/>
-                </a:solidFill>
-                <a:latin typeface="Calibri" pitchFamily="34" charset="0"/>
-                <a:ea typeface="Calibri" pitchFamily="34" charset="-122"/>
-                <a:cs typeface="Calibri" pitchFamily="34" charset="-120"/>
-              </a:rPr>
-              <a:t>and which ones, despite intuition, </a:t>
-            </a:r>
-            <a:r>
-              <a:rPr lang="en-US" sz="1600" i="1" dirty="0" smtClean="0">
-                <a:solidFill>
-                  <a:srgbClr val="2E83C3"/>
-                </a:solidFill>
-                <a:latin typeface="Calibri" pitchFamily="34" charset="0"/>
-                <a:ea typeface="Calibri" pitchFamily="34" charset="-122"/>
-                <a:cs typeface="Calibri" pitchFamily="34" charset="-120"/>
-              </a:rPr>
-              <a:t>don’t</a:t>
-            </a:r>
-            <a:r>
-              <a:rPr lang="en-US" sz="1600" i="1" dirty="0">
-                <a:solidFill>
-                  <a:srgbClr val="2E83C3"/>
-                </a:solidFill>
-                <a:latin typeface="Calibri" pitchFamily="34" charset="0"/>
-                <a:ea typeface="Calibri" pitchFamily="34" charset="-122"/>
-                <a:cs typeface="Calibri" pitchFamily="34" charset="-120"/>
-              </a:rPr>
-              <a:t>?</a:t>
-            </a:r>
-            <a:endParaRPr lang="en-US" sz="1600" dirty="0"/>
-          </a:p>
-          <a:p>
-            <a:pPr>
-              <a:lnSpc>
-                <a:spcPct val="150000"/>
-              </a:lnSpc>
-            </a:pPr>
-            <a:endParaRPr lang="en-IN" sz="2800" dirty="0"/>
-          </a:p>
-        </p:txBody>
-      </p:sp>
-      <p:sp>
-        <p:nvSpPr>
           <p:cNvPr id="4" name="Title 3">
             <a:extLst>
               <a:ext uri="{FF2B5EF4-FFF2-40B4-BE49-F238E27FC236}">
-                <a16:creationId xmlns="" xmlns:a16="http://schemas.microsoft.com/office/drawing/2014/main" id="{777CC02B-F7C6-47A8-8C3E-C57C417D9EA3}"/>
+                <a16:creationId xmlns:a16="http://schemas.microsoft.com/office/drawing/2014/main" xmlns="" id="{777CC02B-F7C6-47A8-8C3E-C57C417D9EA3}"/>
               </a:ext>
             </a:extLst>
           </p:cNvPr>
@@ -16197,7 +17321,7 @@
           <p:cNvPr id="5" name="Picture 4">
             <a:extLst>
               <a:ext uri="{FF2B5EF4-FFF2-40B4-BE49-F238E27FC236}">
-                <a16:creationId xmlns="" xmlns:a16="http://schemas.microsoft.com/office/drawing/2014/main" id="{C8FE02DE-D7B2-433D-BFE4-2F564022AD89}"/>
+                <a16:creationId xmlns:a16="http://schemas.microsoft.com/office/drawing/2014/main" xmlns="" id="{C8FE02DE-D7B2-433D-BFE4-2F564022AD89}"/>
               </a:ext>
             </a:extLst>
           </p:cNvPr>
@@ -16214,7 +17338,7 @@
         </p:blipFill>
         <p:spPr>
           <a:xfrm>
-            <a:off x="7995684" y="2930834"/>
+            <a:off x="8030853" y="2948418"/>
             <a:ext cx="2760758" cy="3264409"/>
           </a:xfrm>
           <a:prstGeom prst="rect">
@@ -16227,7 +17351,7 @@
           <p:cNvPr id="6" name="Picture 5">
             <a:extLst>
               <a:ext uri="{FF2B5EF4-FFF2-40B4-BE49-F238E27FC236}">
-                <a16:creationId xmlns="" xmlns:a16="http://schemas.microsoft.com/office/drawing/2014/main" id="{736DEFE3-051A-494A-949C-BB2FF86F9ED7}"/>
+                <a16:creationId xmlns:a16="http://schemas.microsoft.com/office/drawing/2014/main" xmlns="" id="{736DEFE3-051A-494A-949C-BB2FF86F9ED7}"/>
               </a:ext>
             </a:extLst>
           </p:cNvPr>
@@ -16251,6 +17375,180 @@
           </a:prstGeom>
         </p:spPr>
       </p:pic>
+      <p:sp>
+        <p:nvSpPr>
+          <p:cNvPr id="3" name="Rectangle 1"/>
+          <p:cNvSpPr>
+            <a:spLocks noChangeArrowheads="1"/>
+          </p:cNvSpPr>
+          <p:nvPr/>
+        </p:nvSpPr>
+        <p:spPr bwMode="auto">
+          <a:xfrm>
+            <a:off x="754602" y="2359390"/>
+            <a:ext cx="7716538" cy="1569660"/>
+          </a:xfrm>
+          <a:prstGeom prst="rect">
+            <a:avLst/>
+          </a:prstGeom>
+          <a:noFill/>
+          <a:ln>
+            <a:noFill/>
+          </a:ln>
+          <a:effectLst/>
+          <a:extLst>
+            <a:ext uri="{909E8E84-426E-40DD-AFC4-6F175D3DCCD1}">
+              <a14:hiddenFill xmlns:a14="http://schemas.microsoft.com/office/drawing/2010/main">
+                <a:solidFill>
+                  <a:schemeClr val="accent1"/>
+                </a:solidFill>
+              </a14:hiddenFill>
+            </a:ext>
+            <a:ext uri="{91240B29-F687-4F45-9708-019B960494DF}">
+              <a14:hiddenLine xmlns:a14="http://schemas.microsoft.com/office/drawing/2010/main" w="9525">
+                <a:solidFill>
+                  <a:schemeClr val="tx1"/>
+                </a:solidFill>
+                <a:miter lim="800000"/>
+                <a:headEnd/>
+                <a:tailEnd/>
+              </a14:hiddenLine>
+            </a:ext>
+            <a:ext uri="{AF507438-7753-43E0-B8FC-AC1667EBCBE1}">
+              <a14:hiddenEffects xmlns:a14="http://schemas.microsoft.com/office/drawing/2010/main">
+                <a:effectLst>
+                  <a:outerShdw dist="35921" dir="2700000" algn="ctr" rotWithShape="0">
+                    <a:schemeClr val="bg2"/>
+                  </a:outerShdw>
+                </a:effectLst>
+              </a14:hiddenEffects>
+            </a:ext>
+          </a:extLst>
+        </p:spPr>
+        <p:txBody>
+          <a:bodyPr vert="horz" wrap="square" lIns="91440" tIns="45720" rIns="91440" bIns="45720" numCol="1" anchor="ctr" anchorCtr="0" compatLnSpc="1">
+            <a:prstTxWarp prst="textNoShape">
+              <a:avLst/>
+            </a:prstTxWarp>
+            <a:spAutoFit/>
+          </a:bodyPr>
+          <a:lstStyle/>
+          <a:p>
+            <a:pPr marL="285750" marR="0" lvl="0" indent="-285750" algn="l" defTabSz="914400" rtl="0" eaLnBrk="0" fontAlgn="base" latinLnBrk="0" hangingPunct="0">
+              <a:lnSpc>
+                <a:spcPct val="150000"/>
+              </a:lnSpc>
+              <a:spcBef>
+                <a:spcPct val="0"/>
+              </a:spcBef>
+              <a:spcAft>
+                <a:spcPct val="0"/>
+              </a:spcAft>
+              <a:buClrTx/>
+              <a:buSzTx/>
+              <a:buFont typeface="Arial" panose="020B0604020202020204" pitchFamily="34" charset="0"/>
+              <a:buChar char="•"/>
+              <a:tabLst/>
+            </a:pPr>
+            <a:r>
+              <a:rPr kumimoji="0" lang="en-US" altLang="en-US" sz="1600" b="1" i="0" u="none" strike="noStrike" cap="none" normalizeH="0" baseline="0" dirty="0" smtClean="0">
+                <a:ln>
+                  <a:noFill/>
+                </a:ln>
+                <a:solidFill>
+                  <a:schemeClr val="tx1"/>
+                </a:solidFill>
+                <a:effectLst/>
+                <a:latin typeface="Arial" panose="020B0604020202020204" pitchFamily="34" charset="0"/>
+              </a:rPr>
+              <a:t>The Challenge:</a:t>
+            </a:r>
+            <a:r>
+              <a:rPr kumimoji="0" lang="en-US" altLang="en-US" sz="1600" b="0" i="0" u="none" strike="noStrike" cap="none" normalizeH="0" baseline="0" dirty="0" smtClean="0">
+                <a:ln>
+                  <a:noFill/>
+                </a:ln>
+                <a:solidFill>
+                  <a:schemeClr val="tx1"/>
+                </a:solidFill>
+                <a:effectLst/>
+                <a:latin typeface="Arial" panose="020B0604020202020204" pitchFamily="34" charset="0"/>
+              </a:rPr>
+              <a:t> Used car prices depend on age, </a:t>
+            </a:r>
+            <a:r>
+              <a:rPr kumimoji="0" lang="en-US" altLang="en-US" sz="1600" b="0" i="0" u="none" strike="noStrike" cap="none" normalizeH="0" baseline="0" dirty="0" err="1" smtClean="0">
+                <a:ln>
+                  <a:noFill/>
+                </a:ln>
+                <a:solidFill>
+                  <a:schemeClr val="tx1"/>
+                </a:solidFill>
+                <a:effectLst/>
+                <a:latin typeface="Arial" panose="020B0604020202020204" pitchFamily="34" charset="0"/>
+              </a:rPr>
+              <a:t>mileage,fuel</a:t>
+            </a:r>
+            <a:r>
+              <a:rPr kumimoji="0" lang="en-US" altLang="en-US" sz="1600" b="0" i="0" u="none" strike="noStrike" cap="none" normalizeH="0" baseline="0" dirty="0" smtClean="0">
+                <a:ln>
+                  <a:noFill/>
+                </a:ln>
+                <a:solidFill>
+                  <a:schemeClr val="tx1"/>
+                </a:solidFill>
+                <a:effectLst/>
+                <a:latin typeface="Arial" panose="020B0604020202020204" pitchFamily="34" charset="0"/>
+              </a:rPr>
+              <a:t> type, ownership, and seller type, but listings are rarely priced consistently.</a:t>
+            </a:r>
+          </a:p>
+          <a:p>
+            <a:pPr marL="285750" marR="0" lvl="0" indent="-285750" algn="l" defTabSz="914400" rtl="0" eaLnBrk="0" fontAlgn="base" latinLnBrk="0" hangingPunct="0">
+              <a:lnSpc>
+                <a:spcPct val="150000"/>
+              </a:lnSpc>
+              <a:spcBef>
+                <a:spcPct val="0"/>
+              </a:spcBef>
+              <a:spcAft>
+                <a:spcPct val="0"/>
+              </a:spcAft>
+              <a:buClrTx/>
+              <a:buSzTx/>
+              <a:buFont typeface="Arial" panose="020B0604020202020204" pitchFamily="34" charset="0"/>
+              <a:buChar char="•"/>
+              <a:tabLst/>
+            </a:pPr>
+            <a:r>
+              <a:rPr kumimoji="0" lang="en-US" altLang="en-US" sz="1600" b="1" i="0" u="none" strike="noStrike" cap="none" normalizeH="0" baseline="0" dirty="0" smtClean="0">
+                <a:ln>
+                  <a:noFill/>
+                </a:ln>
+                <a:solidFill>
+                  <a:schemeClr val="tx1"/>
+                </a:solidFill>
+                <a:effectLst/>
+                <a:latin typeface="Arial" panose="020B0604020202020204" pitchFamily="34" charset="0"/>
+              </a:rPr>
+              <a:t>Core Question:</a:t>
+            </a:r>
+            <a:r>
+              <a:rPr kumimoji="0" lang="en-US" altLang="en-US" sz="1600" b="0" i="0" u="none" strike="noStrike" cap="none" normalizeH="0" baseline="0" dirty="0" smtClean="0">
+                <a:ln>
+                  <a:noFill/>
+                </a:ln>
+                <a:solidFill>
+                  <a:schemeClr val="tx1"/>
+                </a:solidFill>
+                <a:effectLst/>
+                <a:latin typeface="Arial" panose="020B0604020202020204" pitchFamily="34" charset="0"/>
+              </a:rPr>
+              <a:t> Which car features actually drive resale prices and which ones do not?</a:t>
+            </a:r>
+          </a:p>
+        </p:txBody>
+      </p:sp>
     </p:spTree>
     <p:extLst>
       <p:ext uri="{BB962C8B-B14F-4D97-AF65-F5344CB8AC3E}">
@@ -16368,351 +17666,6 @@
                       </p:childTnLst>
                     </p:cTn>
                   </p:par>
-                  <p:par>
-                    <p:cTn id="10" fill="hold">
-                      <p:stCondLst>
-                        <p:cond delay="indefinite"/>
-                      </p:stCondLst>
-                      <p:childTnLst>
-                        <p:par>
-                          <p:cTn id="11" fill="hold">
-                            <p:stCondLst>
-                              <p:cond delay="0"/>
-                            </p:stCondLst>
-                            <p:childTnLst>
-                              <p:par>
-                                <p:cTn id="12" presetID="42" presetClass="entr" presetSubtype="0" fill="hold" grpId="0" nodeType="clickEffect">
-                                  <p:stCondLst>
-                                    <p:cond delay="0"/>
-                                  </p:stCondLst>
-                                  <p:childTnLst>
-                                    <p:set>
-                                      <p:cBhvr>
-                                        <p:cTn id="13" dur="1" fill="hold">
-                                          <p:stCondLst>
-                                            <p:cond delay="0"/>
-                                          </p:stCondLst>
-                                        </p:cTn>
-                                        <p:tgtEl>
-                                          <p:spTgt spid="2">
-                                            <p:txEl>
-                                              <p:pRg st="0" end="0"/>
-                                            </p:txEl>
-                                          </p:spTgt>
-                                        </p:tgtEl>
-                                        <p:attrNameLst>
-                                          <p:attrName>style.visibility</p:attrName>
-                                        </p:attrNameLst>
-                                      </p:cBhvr>
-                                      <p:to>
-                                        <p:strVal val="visible"/>
-                                      </p:to>
-                                    </p:set>
-                                    <p:animEffect transition="in" filter="fade">
-                                      <p:cBhvr>
-                                        <p:cTn id="14" dur="1000"/>
-                                        <p:tgtEl>
-                                          <p:spTgt spid="2">
-                                            <p:txEl>
-                                              <p:pRg st="0" end="0"/>
-                                            </p:txEl>
-                                          </p:spTgt>
-                                        </p:tgtEl>
-                                      </p:cBhvr>
-                                    </p:animEffect>
-                                    <p:anim calcmode="lin" valueType="num">
-                                      <p:cBhvr>
-                                        <p:cTn id="15" dur="1000" fill="hold"/>
-                                        <p:tgtEl>
-                                          <p:spTgt spid="2">
-                                            <p:txEl>
-                                              <p:pRg st="0" end="0"/>
-                                            </p:txEl>
-                                          </p:spTgt>
-                                        </p:tgtEl>
-                                        <p:attrNameLst>
-                                          <p:attrName>ppt_x</p:attrName>
-                                        </p:attrNameLst>
-                                      </p:cBhvr>
-                                      <p:tavLst>
-                                        <p:tav tm="0">
-                                          <p:val>
-                                            <p:strVal val="#ppt_x"/>
-                                          </p:val>
-                                        </p:tav>
-                                        <p:tav tm="100000">
-                                          <p:val>
-                                            <p:strVal val="#ppt_x"/>
-                                          </p:val>
-                                        </p:tav>
-                                      </p:tavLst>
-                                    </p:anim>
-                                    <p:anim calcmode="lin" valueType="num">
-                                      <p:cBhvr>
-                                        <p:cTn id="16" dur="1000" fill="hold"/>
-                                        <p:tgtEl>
-                                          <p:spTgt spid="2">
-                                            <p:txEl>
-                                              <p:pRg st="0" end="0"/>
-                                            </p:txEl>
-                                          </p:spTgt>
-                                        </p:tgtEl>
-                                        <p:attrNameLst>
-                                          <p:attrName>ppt_y</p:attrName>
-                                        </p:attrNameLst>
-                                      </p:cBhvr>
-                                      <p:tavLst>
-                                        <p:tav tm="0">
-                                          <p:val>
-                                            <p:strVal val="#ppt_y+.1"/>
-                                          </p:val>
-                                        </p:tav>
-                                        <p:tav tm="100000">
-                                          <p:val>
-                                            <p:strVal val="#ppt_y"/>
-                                          </p:val>
-                                        </p:tav>
-                                      </p:tavLst>
-                                    </p:anim>
-                                  </p:childTnLst>
-                                </p:cTn>
-                              </p:par>
-                            </p:childTnLst>
-                          </p:cTn>
-                        </p:par>
-                      </p:childTnLst>
-                    </p:cTn>
-                  </p:par>
-                  <p:par>
-                    <p:cTn id="17" fill="hold">
-                      <p:stCondLst>
-                        <p:cond delay="indefinite"/>
-                      </p:stCondLst>
-                      <p:childTnLst>
-                        <p:par>
-                          <p:cTn id="18" fill="hold">
-                            <p:stCondLst>
-                              <p:cond delay="0"/>
-                            </p:stCondLst>
-                            <p:childTnLst>
-                              <p:par>
-                                <p:cTn id="19" presetID="42" presetClass="entr" presetSubtype="0" fill="hold" grpId="0" nodeType="clickEffect">
-                                  <p:stCondLst>
-                                    <p:cond delay="0"/>
-                                  </p:stCondLst>
-                                  <p:childTnLst>
-                                    <p:set>
-                                      <p:cBhvr>
-                                        <p:cTn id="20" dur="1" fill="hold">
-                                          <p:stCondLst>
-                                            <p:cond delay="0"/>
-                                          </p:stCondLst>
-                                        </p:cTn>
-                                        <p:tgtEl>
-                                          <p:spTgt spid="2">
-                                            <p:txEl>
-                                              <p:pRg st="1" end="1"/>
-                                            </p:txEl>
-                                          </p:spTgt>
-                                        </p:tgtEl>
-                                        <p:attrNameLst>
-                                          <p:attrName>style.visibility</p:attrName>
-                                        </p:attrNameLst>
-                                      </p:cBhvr>
-                                      <p:to>
-                                        <p:strVal val="visible"/>
-                                      </p:to>
-                                    </p:set>
-                                    <p:animEffect transition="in" filter="fade">
-                                      <p:cBhvr>
-                                        <p:cTn id="21" dur="1000"/>
-                                        <p:tgtEl>
-                                          <p:spTgt spid="2">
-                                            <p:txEl>
-                                              <p:pRg st="1" end="1"/>
-                                            </p:txEl>
-                                          </p:spTgt>
-                                        </p:tgtEl>
-                                      </p:cBhvr>
-                                    </p:animEffect>
-                                    <p:anim calcmode="lin" valueType="num">
-                                      <p:cBhvr>
-                                        <p:cTn id="22" dur="1000" fill="hold"/>
-                                        <p:tgtEl>
-                                          <p:spTgt spid="2">
-                                            <p:txEl>
-                                              <p:pRg st="1" end="1"/>
-                                            </p:txEl>
-                                          </p:spTgt>
-                                        </p:tgtEl>
-                                        <p:attrNameLst>
-                                          <p:attrName>ppt_x</p:attrName>
-                                        </p:attrNameLst>
-                                      </p:cBhvr>
-                                      <p:tavLst>
-                                        <p:tav tm="0">
-                                          <p:val>
-                                            <p:strVal val="#ppt_x"/>
-                                          </p:val>
-                                        </p:tav>
-                                        <p:tav tm="100000">
-                                          <p:val>
-                                            <p:strVal val="#ppt_x"/>
-                                          </p:val>
-                                        </p:tav>
-                                      </p:tavLst>
-                                    </p:anim>
-                                    <p:anim calcmode="lin" valueType="num">
-                                      <p:cBhvr>
-                                        <p:cTn id="23" dur="1000" fill="hold"/>
-                                        <p:tgtEl>
-                                          <p:spTgt spid="2">
-                                            <p:txEl>
-                                              <p:pRg st="1" end="1"/>
-                                            </p:txEl>
-                                          </p:spTgt>
-                                        </p:tgtEl>
-                                        <p:attrNameLst>
-                                          <p:attrName>ppt_y</p:attrName>
-                                        </p:attrNameLst>
-                                      </p:cBhvr>
-                                      <p:tavLst>
-                                        <p:tav tm="0">
-                                          <p:val>
-                                            <p:strVal val="#ppt_y+.1"/>
-                                          </p:val>
-                                        </p:tav>
-                                        <p:tav tm="100000">
-                                          <p:val>
-                                            <p:strVal val="#ppt_y"/>
-                                          </p:val>
-                                        </p:tav>
-                                      </p:tavLst>
-                                    </p:anim>
-                                  </p:childTnLst>
-                                </p:cTn>
-                              </p:par>
-                            </p:childTnLst>
-                          </p:cTn>
-                        </p:par>
-                      </p:childTnLst>
-                    </p:cTn>
-                  </p:par>
-                  <p:par>
-                    <p:cTn id="24" fill="hold">
-                      <p:stCondLst>
-                        <p:cond delay="indefinite"/>
-                      </p:stCondLst>
-                      <p:childTnLst>
-                        <p:par>
-                          <p:cTn id="25" fill="hold">
-                            <p:stCondLst>
-                              <p:cond delay="0"/>
-                            </p:stCondLst>
-                            <p:childTnLst>
-                              <p:par>
-                                <p:cTn id="26" presetID="42" presetClass="entr" presetSubtype="0" fill="hold" grpId="0" nodeType="clickEffect">
-                                  <p:stCondLst>
-                                    <p:cond delay="0"/>
-                                  </p:stCondLst>
-                                  <p:childTnLst>
-                                    <p:set>
-                                      <p:cBhvr>
-                                        <p:cTn id="27" dur="1" fill="hold">
-                                          <p:stCondLst>
-                                            <p:cond delay="0"/>
-                                          </p:stCondLst>
-                                        </p:cTn>
-                                        <p:tgtEl>
-                                          <p:spTgt spid="2">
-                                            <p:txEl>
-                                              <p:pRg st="2" end="2"/>
-                                            </p:txEl>
-                                          </p:spTgt>
-                                        </p:tgtEl>
-                                        <p:attrNameLst>
-                                          <p:attrName>style.visibility</p:attrName>
-                                        </p:attrNameLst>
-                                      </p:cBhvr>
-                                      <p:to>
-                                        <p:strVal val="visible"/>
-                                      </p:to>
-                                    </p:set>
-                                    <p:animEffect transition="in" filter="fade">
-                                      <p:cBhvr>
-                                        <p:cTn id="28" dur="1000"/>
-                                        <p:tgtEl>
-                                          <p:spTgt spid="2">
-                                            <p:txEl>
-                                              <p:pRg st="2" end="2"/>
-                                            </p:txEl>
-                                          </p:spTgt>
-                                        </p:tgtEl>
-                                      </p:cBhvr>
-                                    </p:animEffect>
-                                    <p:anim calcmode="lin" valueType="num">
-                                      <p:cBhvr>
-                                        <p:cTn id="29" dur="1000" fill="hold"/>
-                                        <p:tgtEl>
-                                          <p:spTgt spid="2">
-                                            <p:txEl>
-                                              <p:pRg st="2" end="2"/>
-                                            </p:txEl>
-                                          </p:spTgt>
-                                        </p:tgtEl>
-                                        <p:attrNameLst>
-                                          <p:attrName>ppt_x</p:attrName>
-                                        </p:attrNameLst>
-                                      </p:cBhvr>
-                                      <p:tavLst>
-                                        <p:tav tm="0">
-                                          <p:val>
-                                            <p:strVal val="#ppt_x"/>
-                                          </p:val>
-                                        </p:tav>
-                                        <p:tav tm="100000">
-                                          <p:val>
-                                            <p:strVal val="#ppt_x"/>
-                                          </p:val>
-                                        </p:tav>
-                                      </p:tavLst>
-                                    </p:anim>
-                                    <p:anim calcmode="lin" valueType="num">
-                                      <p:cBhvr>
-                                        <p:cTn id="30" dur="1000" fill="hold"/>
-                                        <p:tgtEl>
-                                          <p:spTgt spid="2">
-                                            <p:txEl>
-                                              <p:pRg st="2" end="2"/>
-                                            </p:txEl>
-                                          </p:spTgt>
-                                        </p:tgtEl>
-                                        <p:attrNameLst>
-                                          <p:attrName>ppt_y</p:attrName>
-                                        </p:attrNameLst>
-                                      </p:cBhvr>
-                                      <p:tavLst>
-                                        <p:tav tm="0">
-                                          <p:val>
-                                            <p:strVal val="#ppt_y+.1"/>
-                                          </p:val>
-                                        </p:tav>
-                                        <p:tav tm="100000">
-                                          <p:val>
-                                            <p:strVal val="#ppt_y"/>
-                                          </p:val>
-                                        </p:tav>
-                                      </p:tavLst>
-                                    </p:anim>
-                                  </p:childTnLst>
-                                </p:cTn>
-                              </p:par>
-                            </p:childTnLst>
-                          </p:cTn>
-                        </p:par>
-                      </p:childTnLst>
-                    </p:cTn>
-                  </p:par>
                 </p:childTnLst>
               </p:cTn>
               <p:prevCondLst>
@@ -16735,7 +17688,6 @@
       </p:par>
     </p:tnLst>
     <p:bldLst>
-      <p:bldP spid="2" grpId="0" build="p"/>
       <p:bldP spid="4" grpId="0"/>
     </p:bldLst>
   </p:timing>
@@ -16774,7 +17726,7 @@
           <p:cNvPr id="3" name="Title 2">
             <a:extLst>
               <a:ext uri="{FF2B5EF4-FFF2-40B4-BE49-F238E27FC236}">
-                <a16:creationId xmlns="" xmlns:a16="http://schemas.microsoft.com/office/drawing/2014/main" id="{EBF2FBC7-3552-4F01-BB27-8BEEE74F7277}"/>
+                <a16:creationId xmlns:a16="http://schemas.microsoft.com/office/drawing/2014/main" xmlns="" id="{EBF2FBC7-3552-4F01-BB27-8BEEE74F7277}"/>
               </a:ext>
             </a:extLst>
           </p:cNvPr>
@@ -16836,7 +17788,7 @@
           <p:cNvPr id="5" name="Picture 4">
             <a:extLst>
               <a:ext uri="{FF2B5EF4-FFF2-40B4-BE49-F238E27FC236}">
-                <a16:creationId xmlns="" xmlns:a16="http://schemas.microsoft.com/office/drawing/2014/main" id="{09D8A2BA-6C1D-4A33-85F2-E44A4FF54A1C}"/>
+                <a16:creationId xmlns:a16="http://schemas.microsoft.com/office/drawing/2014/main" xmlns="" id="{09D8A2BA-6C1D-4A33-85F2-E44A4FF54A1C}"/>
               </a:ext>
             </a:extLst>
           </p:cNvPr>
@@ -16865,7 +17817,7 @@
           <p:cNvPr id="6" name="Picture 5">
             <a:extLst>
               <a:ext uri="{FF2B5EF4-FFF2-40B4-BE49-F238E27FC236}">
-                <a16:creationId xmlns="" xmlns:a16="http://schemas.microsoft.com/office/drawing/2014/main" id="{6BED3D6A-DC10-4985-B01B-735F2CBA6E47}"/>
+                <a16:creationId xmlns:a16="http://schemas.microsoft.com/office/drawing/2014/main" xmlns="" id="{6BED3D6A-DC10-4985-B01B-735F2CBA6E47}"/>
               </a:ext>
             </a:extLst>
           </p:cNvPr>
@@ -16892,314 +17844,245 @@
       </p:pic>
       <p:sp>
         <p:nvSpPr>
-          <p:cNvPr id="4" name="Rectangle 3"/>
-          <p:cNvSpPr/>
+          <p:cNvPr id="2" name="Rectangle 1"/>
+          <p:cNvSpPr>
+            <a:spLocks noChangeArrowheads="1"/>
+          </p:cNvSpPr>
           <p:nvPr/>
         </p:nvSpPr>
-        <p:spPr>
+        <p:spPr bwMode="auto">
           <a:xfrm>
-            <a:off x="750452" y="2061410"/>
-            <a:ext cx="10696801" cy="2169825"/>
+            <a:off x="820379" y="2588099"/>
+            <a:ext cx="8685929" cy="1569660"/>
           </a:xfrm>
           <a:prstGeom prst="rect">
             <a:avLst/>
           </a:prstGeom>
+          <a:noFill/>
+          <a:ln>
+            <a:noFill/>
+          </a:ln>
+          <a:effectLst/>
+          <a:extLst>
+            <a:ext uri="{909E8E84-426E-40DD-AFC4-6F175D3DCCD1}">
+              <a14:hiddenFill xmlns:a14="http://schemas.microsoft.com/office/drawing/2010/main">
+                <a:solidFill>
+                  <a:schemeClr val="accent1"/>
+                </a:solidFill>
+              </a14:hiddenFill>
+            </a:ext>
+            <a:ext uri="{91240B29-F687-4F45-9708-019B960494DF}">
+              <a14:hiddenLine xmlns:a14="http://schemas.microsoft.com/office/drawing/2010/main" w="9525">
+                <a:solidFill>
+                  <a:schemeClr val="tx1"/>
+                </a:solidFill>
+                <a:miter lim="800000"/>
+                <a:headEnd/>
+                <a:tailEnd/>
+              </a14:hiddenLine>
+            </a:ext>
+            <a:ext uri="{AF507438-7753-43E0-B8FC-AC1667EBCBE1}">
+              <a14:hiddenEffects xmlns:a14="http://schemas.microsoft.com/office/drawing/2010/main">
+                <a:effectLst>
+                  <a:outerShdw dist="35921" dir="2700000" algn="ctr" rotWithShape="0">
+                    <a:schemeClr val="bg2"/>
+                  </a:outerShdw>
+                </a:effectLst>
+              </a14:hiddenEffects>
+            </a:ext>
+          </a:extLst>
         </p:spPr>
         <p:txBody>
-          <a:bodyPr wrap="square">
+          <a:bodyPr vert="horz" wrap="square" lIns="91440" tIns="45720" rIns="91440" bIns="45720" numCol="1" anchor="ctr" anchorCtr="0" compatLnSpc="1">
+            <a:prstTxWarp prst="textNoShape">
+              <a:avLst/>
+            </a:prstTxWarp>
             <a:spAutoFit/>
           </a:bodyPr>
           <a:lstStyle/>
           <a:p>
-            <a:pPr>
+            <a:pPr marL="285750" marR="0" lvl="0" indent="-285750" algn="l" defTabSz="914400" rtl="0" eaLnBrk="0" fontAlgn="base" latinLnBrk="0" hangingPunct="0">
               <a:lnSpc>
                 <a:spcPct val="150000"/>
               </a:lnSpc>
+              <a:spcBef>
+                <a:spcPct val="0"/>
+              </a:spcBef>
+              <a:spcAft>
+                <a:spcPct val="0"/>
+              </a:spcAft>
+              <a:buClrTx/>
+              <a:buSzTx/>
+              <a:buFont typeface="Arial" panose="020B0604020202020204" pitchFamily="34" charset="0"/>
+              <a:buChar char="•"/>
+              <a:tabLst/>
             </a:pPr>
             <a:r>
-              <a:rPr lang="en-US" b="1" dirty="0" smtClean="0">
-                <a:latin typeface="Calibri" pitchFamily="34" charset="0"/>
-                <a:ea typeface="Calibri" pitchFamily="34" charset="-122"/>
-                <a:cs typeface="Calibri" pitchFamily="34" charset="-120"/>
+              <a:rPr kumimoji="0" lang="en-US" altLang="en-US" sz="1600" b="1" i="0" u="none" strike="noStrike" cap="none" normalizeH="0" baseline="0" dirty="0" smtClean="0">
+                <a:ln>
+                  <a:noFill/>
+                </a:ln>
+                <a:solidFill>
+                  <a:schemeClr val="tx1"/>
+                </a:solidFill>
+                <a:effectLst/>
+                <a:latin typeface="Arial" panose="020B0604020202020204" pitchFamily="34" charset="0"/>
               </a:rPr>
-              <a:t>-  Source</a:t>
-            </a:r>
-            <a:r>
-              <a:rPr lang="en-US" b="1" dirty="0">
-                <a:latin typeface="Calibri" pitchFamily="34" charset="0"/>
-                <a:ea typeface="Calibri" pitchFamily="34" charset="-122"/>
-                <a:cs typeface="Calibri" pitchFamily="34" charset="-120"/>
+              <a:t>Source:</a:t>
+            </a:r>
+            <a:r>
+              <a:rPr kumimoji="0" lang="en-US" altLang="en-US" sz="1600" b="0" i="0" u="none" strike="noStrike" cap="none" normalizeH="0" baseline="0" dirty="0" smtClean="0">
+                <a:ln>
+                  <a:noFill/>
+                </a:ln>
+                <a:solidFill>
+                  <a:schemeClr val="tx1"/>
+                </a:solidFill>
+                <a:effectLst/>
+                <a:latin typeface="Arial" panose="020B0604020202020204" pitchFamily="34" charset="0"/>
               </a:rPr>
-              <a:t>: </a:t>
-            </a:r>
-            <a:r>
-              <a:rPr lang="en-US" b="1" dirty="0" err="1">
-                <a:latin typeface="Calibri" pitchFamily="34" charset="0"/>
-                <a:ea typeface="Calibri" pitchFamily="34" charset="-122"/>
-                <a:cs typeface="Calibri" pitchFamily="34" charset="-120"/>
+              <a:t> </a:t>
+            </a:r>
+            <a:r>
+              <a:rPr kumimoji="0" lang="en-US" altLang="en-US" sz="1600" b="0" i="0" u="none" strike="noStrike" cap="none" normalizeH="0" baseline="0" dirty="0" err="1" smtClean="0">
+                <a:ln>
+                  <a:noFill/>
+                </a:ln>
+                <a:solidFill>
+                  <a:schemeClr val="tx1"/>
+                </a:solidFill>
+                <a:effectLst/>
+                <a:latin typeface="Arial" panose="020B0604020202020204" pitchFamily="34" charset="0"/>
               </a:rPr>
               <a:t>CarDekho</a:t>
             </a:r>
             <a:r>
-              <a:rPr lang="en-US" b="1" dirty="0">
-                <a:latin typeface="Calibri" pitchFamily="34" charset="0"/>
-                <a:ea typeface="Calibri" pitchFamily="34" charset="-122"/>
-                <a:cs typeface="Calibri" pitchFamily="34" charset="-120"/>
+              <a:rPr kumimoji="0" lang="en-US" altLang="en-US" sz="1600" b="0" i="0" u="none" strike="noStrike" cap="none" normalizeH="0" baseline="0" dirty="0" smtClean="0">
+                <a:ln>
+                  <a:noFill/>
+                </a:ln>
+                <a:solidFill>
+                  <a:schemeClr val="tx1"/>
+                </a:solidFill>
+                <a:effectLst/>
+                <a:latin typeface="Arial" panose="020B0604020202020204" pitchFamily="34" charset="0"/>
               </a:rPr>
-              <a:t> used-car </a:t>
-            </a:r>
-            <a:r>
-              <a:rPr lang="en-US" b="1" dirty="0" smtClean="0">
-                <a:latin typeface="Calibri" pitchFamily="34" charset="0"/>
-                <a:ea typeface="Calibri" pitchFamily="34" charset="-122"/>
-                <a:cs typeface="Calibri" pitchFamily="34" charset="-120"/>
-              </a:rPr>
-              <a:t>listings.</a:t>
-            </a:r>
-            <a:r>
-              <a:rPr lang="en-US" b="1" dirty="0"/>
-              <a:t/>
-            </a:r>
-            <a:br>
-              <a:rPr lang="en-US" b="1" dirty="0"/>
-            </a:br>
-            <a:r>
-              <a:rPr lang="en-US" b="1" dirty="0" smtClean="0"/>
-              <a:t>- </a:t>
-            </a:r>
-            <a:r>
-              <a:rPr lang="en-US" b="1" dirty="0" smtClean="0">
-                <a:latin typeface="Calibri" pitchFamily="34" charset="0"/>
-                <a:ea typeface="Calibri" pitchFamily="34" charset="-122"/>
-                <a:cs typeface="Calibri" pitchFamily="34" charset="-120"/>
-              </a:rPr>
-              <a:t>Records</a:t>
-            </a:r>
-            <a:r>
-              <a:rPr lang="en-US" b="1" dirty="0">
-                <a:latin typeface="Calibri" pitchFamily="34" charset="0"/>
-                <a:ea typeface="Calibri" pitchFamily="34" charset="-122"/>
-                <a:cs typeface="Calibri" pitchFamily="34" charset="-120"/>
-              </a:rPr>
-              <a:t>: 301 (299 after removing 2 duplicates</a:t>
-            </a:r>
-            <a:r>
-              <a:rPr lang="en-US" b="1" dirty="0" smtClean="0">
-                <a:latin typeface="Calibri" pitchFamily="34" charset="0"/>
-                <a:ea typeface="Calibri" pitchFamily="34" charset="-122"/>
-                <a:cs typeface="Calibri" pitchFamily="34" charset="-120"/>
-              </a:rPr>
-              <a:t>).</a:t>
-            </a:r>
-            <a:r>
-              <a:rPr lang="en-US" b="1" dirty="0"/>
-              <a:t/>
-            </a:r>
-            <a:br>
-              <a:rPr lang="en-US" b="1" dirty="0"/>
-            </a:br>
-            <a:r>
-              <a:rPr lang="en-US" b="1" dirty="0" smtClean="0"/>
-              <a:t>- </a:t>
-            </a:r>
-            <a:r>
-              <a:rPr lang="en-US" b="1" dirty="0" smtClean="0">
-                <a:latin typeface="Calibri" pitchFamily="34" charset="0"/>
-                <a:ea typeface="Calibri" pitchFamily="34" charset="-122"/>
-                <a:cs typeface="Calibri" pitchFamily="34" charset="-120"/>
-              </a:rPr>
-              <a:t>Columns</a:t>
-            </a:r>
-            <a:r>
-              <a:rPr lang="en-US" b="1" dirty="0">
-                <a:latin typeface="Calibri" pitchFamily="34" charset="0"/>
-                <a:ea typeface="Calibri" pitchFamily="34" charset="-122"/>
-                <a:cs typeface="Calibri" pitchFamily="34" charset="-120"/>
-              </a:rPr>
-              <a:t>: </a:t>
-            </a:r>
-            <a:r>
-              <a:rPr lang="en-US" b="1" dirty="0" err="1">
-                <a:latin typeface="Calibri" pitchFamily="34" charset="0"/>
-                <a:ea typeface="Calibri" pitchFamily="34" charset="-122"/>
-                <a:cs typeface="Calibri" pitchFamily="34" charset="-120"/>
-              </a:rPr>
-              <a:t>Car_Name</a:t>
-            </a:r>
-            <a:r>
-              <a:rPr lang="en-US" b="1" dirty="0">
-                <a:latin typeface="Calibri" pitchFamily="34" charset="0"/>
-                <a:ea typeface="Calibri" pitchFamily="34" charset="-122"/>
-                <a:cs typeface="Calibri" pitchFamily="34" charset="-120"/>
-              </a:rPr>
-              <a:t>, Year, </a:t>
-            </a:r>
-            <a:r>
-              <a:rPr lang="en-US" b="1" dirty="0" err="1">
-                <a:latin typeface="Calibri" pitchFamily="34" charset="0"/>
-                <a:ea typeface="Calibri" pitchFamily="34" charset="-122"/>
-                <a:cs typeface="Calibri" pitchFamily="34" charset="-120"/>
-              </a:rPr>
-              <a:t>Selling_Price</a:t>
-            </a:r>
-            <a:r>
-              <a:rPr lang="en-US" b="1" dirty="0">
-                <a:latin typeface="Calibri" pitchFamily="34" charset="0"/>
-                <a:ea typeface="Calibri" pitchFamily="34" charset="-122"/>
-                <a:cs typeface="Calibri" pitchFamily="34" charset="-120"/>
-              </a:rPr>
-              <a:t>, </a:t>
-            </a:r>
-            <a:r>
-              <a:rPr lang="en-US" b="1" dirty="0" err="1">
-                <a:latin typeface="Calibri" pitchFamily="34" charset="0"/>
-                <a:ea typeface="Calibri" pitchFamily="34" charset="-122"/>
-                <a:cs typeface="Calibri" pitchFamily="34" charset="-120"/>
-              </a:rPr>
-              <a:t>Present_Price</a:t>
-            </a:r>
-            <a:r>
-              <a:rPr lang="en-US" b="1" dirty="0" smtClean="0">
-                <a:latin typeface="Calibri" pitchFamily="34" charset="0"/>
-                <a:ea typeface="Calibri" pitchFamily="34" charset="-122"/>
-                <a:cs typeface="Calibri" pitchFamily="34" charset="-120"/>
-              </a:rPr>
-              <a:t>, </a:t>
-            </a:r>
-            <a:r>
-              <a:rPr lang="en-US" b="1" dirty="0" err="1" smtClean="0">
-                <a:latin typeface="Calibri" pitchFamily="34" charset="0"/>
-                <a:ea typeface="Calibri" pitchFamily="34" charset="-122"/>
-                <a:cs typeface="Calibri" pitchFamily="34" charset="-120"/>
-              </a:rPr>
-              <a:t>Kms_Driven</a:t>
-            </a:r>
-            <a:r>
-              <a:rPr lang="en-US" b="1" dirty="0">
-                <a:latin typeface="Calibri" pitchFamily="34" charset="0"/>
-                <a:ea typeface="Calibri" pitchFamily="34" charset="-122"/>
-                <a:cs typeface="Calibri" pitchFamily="34" charset="-120"/>
-              </a:rPr>
-              <a:t>, </a:t>
-            </a:r>
-            <a:r>
-              <a:rPr lang="en-US" b="1" dirty="0" err="1">
-                <a:latin typeface="Calibri" pitchFamily="34" charset="0"/>
-                <a:ea typeface="Calibri" pitchFamily="34" charset="-122"/>
-                <a:cs typeface="Calibri" pitchFamily="34" charset="-120"/>
-              </a:rPr>
-              <a:t>Fuel_Type</a:t>
-            </a:r>
-            <a:r>
-              <a:rPr lang="en-US" b="1" dirty="0">
-                <a:latin typeface="Calibri" pitchFamily="34" charset="0"/>
-                <a:ea typeface="Calibri" pitchFamily="34" charset="-122"/>
-                <a:cs typeface="Calibri" pitchFamily="34" charset="-120"/>
-              </a:rPr>
-              <a:t>, </a:t>
-            </a:r>
-            <a:r>
-              <a:rPr lang="en-US" b="1" dirty="0" err="1">
-                <a:latin typeface="Calibri" pitchFamily="34" charset="0"/>
-                <a:ea typeface="Calibri" pitchFamily="34" charset="-122"/>
-                <a:cs typeface="Calibri" pitchFamily="34" charset="-120"/>
-              </a:rPr>
-              <a:t>Seller_Type</a:t>
-            </a:r>
-            <a:r>
-              <a:rPr lang="en-US" b="1" dirty="0">
-                <a:latin typeface="Calibri" pitchFamily="34" charset="0"/>
-                <a:ea typeface="Calibri" pitchFamily="34" charset="-122"/>
-                <a:cs typeface="Calibri" pitchFamily="34" charset="-120"/>
-              </a:rPr>
-              <a:t>, </a:t>
-            </a:r>
-            <a:endParaRPr lang="en-US" b="1" dirty="0" smtClean="0">
-              <a:latin typeface="Calibri" pitchFamily="34" charset="0"/>
-              <a:ea typeface="Calibri" pitchFamily="34" charset="-122"/>
-              <a:cs typeface="Calibri" pitchFamily="34" charset="-120"/>
-            </a:endParaRPr>
-          </a:p>
-          <a:p>
-            <a:pPr>
+              <a:t> used-car listings (299 clean records after removing duplicates).</a:t>
+            </a:r>
+          </a:p>
+          <a:p>
+            <a:pPr marL="285750" marR="0" lvl="0" indent="-285750" algn="l" defTabSz="914400" rtl="0" eaLnBrk="0" fontAlgn="base" latinLnBrk="0" hangingPunct="0">
               <a:lnSpc>
                 <a:spcPct val="150000"/>
               </a:lnSpc>
+              <a:spcBef>
+                <a:spcPct val="0"/>
+              </a:spcBef>
+              <a:spcAft>
+                <a:spcPct val="0"/>
+              </a:spcAft>
+              <a:buClrTx/>
+              <a:buSzTx/>
+              <a:buFont typeface="Arial" panose="020B0604020202020204" pitchFamily="34" charset="0"/>
+              <a:buChar char="•"/>
+              <a:tabLst/>
             </a:pPr>
             <a:r>
-              <a:rPr lang="en-US" b="1" dirty="0" smtClean="0">
-                <a:latin typeface="Calibri" pitchFamily="34" charset="0"/>
-                <a:ea typeface="Calibri" pitchFamily="34" charset="-122"/>
-                <a:cs typeface="Calibri" pitchFamily="34" charset="-120"/>
+              <a:rPr kumimoji="0" lang="en-US" altLang="en-US" sz="1600" b="1" i="0" u="none" strike="noStrike" cap="none" normalizeH="0" baseline="0" dirty="0" smtClean="0">
+                <a:ln>
+                  <a:noFill/>
+                </a:ln>
+                <a:solidFill>
+                  <a:schemeClr val="tx1"/>
+                </a:solidFill>
+                <a:effectLst/>
+                <a:latin typeface="Arial" panose="020B0604020202020204" pitchFamily="34" charset="0"/>
               </a:rPr>
-              <a:t>                  </a:t>
-            </a:r>
-            <a:r>
-              <a:rPr lang="en-US" b="1" dirty="0">
-                <a:latin typeface="Calibri" pitchFamily="34" charset="0"/>
-                <a:ea typeface="Calibri" pitchFamily="34" charset="-122"/>
-                <a:cs typeface="Calibri" pitchFamily="34" charset="-120"/>
+              <a:t>Data Quality:</a:t>
+            </a:r>
+            <a:r>
+              <a:rPr kumimoji="0" lang="en-US" altLang="en-US" sz="1600" b="0" i="0" u="none" strike="noStrike" cap="none" normalizeH="0" baseline="0" dirty="0" smtClean="0">
+                <a:ln>
+                  <a:noFill/>
+                </a:ln>
+                <a:solidFill>
+                  <a:schemeClr val="tx1"/>
+                </a:solidFill>
+                <a:effectLst/>
+                <a:latin typeface="Arial" panose="020B0604020202020204" pitchFamily="34" charset="0"/>
               </a:rPr>
-              <a:t> </a:t>
-            </a:r>
-            <a:r>
-              <a:rPr lang="en-US" b="1" dirty="0" smtClean="0">
-                <a:latin typeface="Calibri" pitchFamily="34" charset="0"/>
-                <a:ea typeface="Calibri" pitchFamily="34" charset="-122"/>
-                <a:cs typeface="Calibri" pitchFamily="34" charset="-120"/>
+              <a:t> Complete dataset with zero missing values across all columns.</a:t>
+            </a:r>
+          </a:p>
+          <a:p>
+            <a:pPr marL="285750" marR="0" lvl="0" indent="-285750" algn="l" defTabSz="914400" rtl="0" eaLnBrk="0" fontAlgn="base" latinLnBrk="0" hangingPunct="0">
+              <a:lnSpc>
+                <a:spcPct val="150000"/>
+              </a:lnSpc>
+              <a:spcBef>
+                <a:spcPct val="0"/>
+              </a:spcBef>
+              <a:spcAft>
+                <a:spcPct val="0"/>
+              </a:spcAft>
+              <a:buClrTx/>
+              <a:buSzTx/>
+              <a:buFont typeface="Arial" panose="020B0604020202020204" pitchFamily="34" charset="0"/>
+              <a:buChar char="•"/>
+              <a:tabLst/>
+            </a:pPr>
+            <a:r>
+              <a:rPr kumimoji="0" lang="en-US" altLang="en-US" sz="1600" b="1" i="0" u="none" strike="noStrike" cap="none" normalizeH="0" baseline="0" dirty="0" smtClean="0">
+                <a:ln>
+                  <a:noFill/>
+                </a:ln>
+                <a:solidFill>
+                  <a:schemeClr val="tx1"/>
+                </a:solidFill>
+                <a:effectLst/>
+                <a:latin typeface="Arial" panose="020B0604020202020204" pitchFamily="34" charset="0"/>
               </a:rPr>
-              <a:t>  Transmission</a:t>
-            </a:r>
-            <a:r>
-              <a:rPr lang="en-US" b="1" dirty="0">
-                <a:latin typeface="Calibri" pitchFamily="34" charset="0"/>
-                <a:ea typeface="Calibri" pitchFamily="34" charset="-122"/>
-                <a:cs typeface="Calibri" pitchFamily="34" charset="-120"/>
+              <a:t>Key Columns:</a:t>
+            </a:r>
+            <a:r>
+              <a:rPr kumimoji="0" lang="en-US" altLang="en-US" sz="1600" b="0" i="0" u="none" strike="noStrike" cap="none" normalizeH="0" baseline="0" dirty="0" smtClean="0">
+                <a:ln>
+                  <a:noFill/>
+                </a:ln>
+                <a:solidFill>
+                  <a:schemeClr val="tx1"/>
+                </a:solidFill>
+                <a:effectLst/>
+                <a:latin typeface="Arial" panose="020B0604020202020204" pitchFamily="34" charset="0"/>
               </a:rPr>
-              <a:t>,  </a:t>
-            </a:r>
-            <a:r>
-              <a:rPr lang="en-US" b="1" dirty="0" smtClean="0">
-                <a:latin typeface="Calibri" pitchFamily="34" charset="0"/>
-                <a:ea typeface="Calibri" pitchFamily="34" charset="-122"/>
-                <a:cs typeface="Calibri" pitchFamily="34" charset="-120"/>
+              <a:t> Car Name, Year, Selling Price, Present Price, </a:t>
+            </a:r>
+            <a:r>
+              <a:rPr kumimoji="0" lang="en-US" altLang="en-US" sz="1600" b="0" i="0" u="none" strike="noStrike" cap="none" normalizeH="0" baseline="0" dirty="0" err="1" smtClean="0">
+                <a:ln>
+                  <a:noFill/>
+                </a:ln>
+                <a:solidFill>
+                  <a:schemeClr val="tx1"/>
+                </a:solidFill>
+                <a:effectLst/>
+                <a:latin typeface="Arial" panose="020B0604020202020204" pitchFamily="34" charset="0"/>
               </a:rPr>
-              <a:t>Owner.</a:t>
-            </a:r>
-            <a:r>
-              <a:rPr lang="en-US" b="1" dirty="0">
-                <a:latin typeface="Calibri" pitchFamily="34" charset="0"/>
-                <a:ea typeface="Calibri" pitchFamily="34" charset="-122"/>
-                <a:cs typeface="Calibri" pitchFamily="34" charset="-120"/>
+              <a:t>Kms</a:t>
+            </a:r>
+            <a:r>
+              <a:rPr kumimoji="0" lang="en-US" altLang="en-US" sz="1600" b="0" i="0" u="none" strike="noStrike" cap="none" normalizeH="0" baseline="0" dirty="0" smtClean="0">
+                <a:ln>
+                  <a:noFill/>
+                </a:ln>
+                <a:solidFill>
+                  <a:schemeClr val="tx1"/>
+                </a:solidFill>
+                <a:effectLst/>
+                <a:latin typeface="Arial" panose="020B0604020202020204" pitchFamily="34" charset="0"/>
               </a:rPr>
-              <a:t>
-</a:t>
-            </a:r>
-            <a:r>
-              <a:rPr lang="en-US" b="1" dirty="0" smtClean="0">
-                <a:latin typeface="Calibri" pitchFamily="34" charset="0"/>
-                <a:ea typeface="Calibri" pitchFamily="34" charset="-122"/>
-                <a:cs typeface="Calibri" pitchFamily="34" charset="-120"/>
-              </a:rPr>
-              <a:t>-  Missing </a:t>
-            </a:r>
-            <a:r>
-              <a:rPr lang="en-US" b="1" dirty="0">
-                <a:latin typeface="Calibri" pitchFamily="34" charset="0"/>
-                <a:ea typeface="Calibri" pitchFamily="34" charset="-122"/>
-                <a:cs typeface="Calibri" pitchFamily="34" charset="-120"/>
-              </a:rPr>
-              <a:t>values: 0 across all </a:t>
-            </a:r>
-            <a:r>
-              <a:rPr lang="en-US" b="1" dirty="0" smtClean="0">
-                <a:latin typeface="Calibri" pitchFamily="34" charset="0"/>
-                <a:ea typeface="Calibri" pitchFamily="34" charset="-122"/>
-                <a:cs typeface="Calibri" pitchFamily="34" charset="-120"/>
-              </a:rPr>
-              <a:t>columns.</a:t>
-            </a:r>
-            <a:endParaRPr lang="en-IN" b="1" dirty="0"/>
+              <a:t> Driven, Fuel Type, Seller Type, Transmission, and Owner.</a:t>
+            </a:r>
           </a:p>
         </p:txBody>
       </p:sp>
@@ -17370,7 +18253,7 @@
           <p:cNvPr id="4" name="Title 3">
             <a:extLst>
               <a:ext uri="{FF2B5EF4-FFF2-40B4-BE49-F238E27FC236}">
-                <a16:creationId xmlns="" xmlns:a16="http://schemas.microsoft.com/office/drawing/2014/main" id="{1A4A072B-83C6-4607-AE6A-5AD61CC72C44}"/>
+                <a16:creationId xmlns:a16="http://schemas.microsoft.com/office/drawing/2014/main" xmlns="" id="{1A4A072B-83C6-4607-AE6A-5AD61CC72C44}"/>
               </a:ext>
             </a:extLst>
           </p:cNvPr>
@@ -17406,7 +18289,7 @@
           <p:cNvPr id="6" name="Picture 5">
             <a:extLst>
               <a:ext uri="{FF2B5EF4-FFF2-40B4-BE49-F238E27FC236}">
-                <a16:creationId xmlns="" xmlns:a16="http://schemas.microsoft.com/office/drawing/2014/main" id="{E8B153BB-61B9-403F-8AE5-F75400450AC0}"/>
+                <a16:creationId xmlns:a16="http://schemas.microsoft.com/office/drawing/2014/main" xmlns="" id="{E8B153BB-61B9-403F-8AE5-F75400450AC0}"/>
               </a:ext>
             </a:extLst>
           </p:cNvPr>
@@ -17529,7 +18412,7 @@
                 <a:effectLst/>
                 <a:latin typeface="Arial" panose="020B0604020202020204" pitchFamily="34" charset="0"/>
               </a:rPr>
-              <a:t> - Benchmark whether an asking price is fair given age, mileage, and ownership history. </a:t>
+              <a:t> - Benchmark whether an asking price is fair given age, mileage and ownership history. </a:t>
             </a:r>
           </a:p>
           <a:p>
@@ -17980,7 +18863,7 @@
           <p:cNvPr id="6" name="Picture 5">
             <a:extLst>
               <a:ext uri="{FF2B5EF4-FFF2-40B4-BE49-F238E27FC236}">
-                <a16:creationId xmlns="" xmlns:a16="http://schemas.microsoft.com/office/drawing/2014/main" id="{0B7C27C4-3E14-490A-B132-CBBEDA1E905A}"/>
+                <a16:creationId xmlns:a16="http://schemas.microsoft.com/office/drawing/2014/main" xmlns="" id="{0B7C27C4-3E14-490A-B132-CBBEDA1E905A}"/>
               </a:ext>
             </a:extLst>
           </p:cNvPr>
@@ -18010,7 +18893,7 @@
           <p:cNvPr id="2" name="Picture 1">
             <a:extLst>
               <a:ext uri="{FF2B5EF4-FFF2-40B4-BE49-F238E27FC236}">
-                <a16:creationId xmlns="" xmlns:a16="http://schemas.microsoft.com/office/drawing/2014/main" id="{F1FC3E39-8C60-4F64-9838-2A683F25B8C4}"/>
+                <a16:creationId xmlns:a16="http://schemas.microsoft.com/office/drawing/2014/main" xmlns="" id="{F1FC3E39-8C60-4F64-9838-2A683F25B8C4}"/>
               </a:ext>
             </a:extLst>
           </p:cNvPr>
@@ -18037,129 +18920,10 @@
       </p:pic>
       <p:sp>
         <p:nvSpPr>
-          <p:cNvPr id="7" name="Text Placeholder 6">
-            <a:extLst>
-              <a:ext uri="{FF2B5EF4-FFF2-40B4-BE49-F238E27FC236}">
-                <a16:creationId xmlns="" xmlns:a16="http://schemas.microsoft.com/office/drawing/2014/main" id="{B21C28F5-3CA3-4B78-B5C9-550C00BB3174}"/>
-              </a:ext>
-            </a:extLst>
-          </p:cNvPr>
-          <p:cNvSpPr>
-            <a:spLocks noGrp="1"/>
-          </p:cNvSpPr>
-          <p:nvPr>
-            <p:ph type="body" sz="quarter" idx="12"/>
-          </p:nvPr>
-        </p:nvSpPr>
-        <p:spPr>
-          <a:xfrm>
-            <a:off x="390618" y="1432560"/>
-            <a:ext cx="9027702" cy="5243448"/>
-          </a:xfrm>
-        </p:spPr>
-        <p:txBody>
-          <a:bodyPr/>
-          <a:lstStyle/>
-          <a:p>
-            <a:pPr lvl="1">
-              <a:lnSpc>
-                <a:spcPct val="150000"/>
-              </a:lnSpc>
-            </a:pPr>
-            <a:r>
-              <a:rPr lang="en-US" dirty="0" smtClean="0">
-                <a:solidFill>
-                  <a:schemeClr val="tx1"/>
-                </a:solidFill>
-              </a:rPr>
-              <a:t>Python Library : </a:t>
-            </a:r>
-          </a:p>
-          <a:p>
-            <a:pPr marL="457200" lvl="1" indent="0">
-              <a:lnSpc>
-                <a:spcPct val="150000"/>
-              </a:lnSpc>
-              <a:buNone/>
-            </a:pPr>
-            <a:r>
-              <a:rPr lang="en-US" dirty="0" smtClean="0">
-                <a:solidFill>
-                  <a:schemeClr val="tx1"/>
-                </a:solidFill>
-              </a:rPr>
-              <a:t>-   Pandas for data loading and manipulation.</a:t>
-            </a:r>
-          </a:p>
-          <a:p>
-            <a:pPr lvl="1">
-              <a:lnSpc>
-                <a:spcPct val="150000"/>
-              </a:lnSpc>
-              <a:buFontTx/>
-              <a:buChar char="-"/>
-            </a:pPr>
-            <a:r>
-              <a:rPr lang="en-US" dirty="0" err="1" smtClean="0">
-                <a:solidFill>
-                  <a:schemeClr val="tx1"/>
-                </a:solidFill>
-              </a:rPr>
-              <a:t>Matplotlib</a:t>
-            </a:r>
-            <a:r>
-              <a:rPr lang="en-US" dirty="0" smtClean="0">
-                <a:solidFill>
-                  <a:schemeClr val="tx1"/>
-                </a:solidFill>
-              </a:rPr>
-              <a:t> and </a:t>
-            </a:r>
-            <a:r>
-              <a:rPr lang="en-US" dirty="0" err="1" smtClean="0">
-                <a:solidFill>
-                  <a:schemeClr val="tx1"/>
-                </a:solidFill>
-              </a:rPr>
-              <a:t>Seaborn</a:t>
-            </a:r>
-            <a:r>
-              <a:rPr lang="en-US" dirty="0" smtClean="0">
-                <a:solidFill>
-                  <a:schemeClr val="tx1"/>
-                </a:solidFill>
-              </a:rPr>
-              <a:t> for data visualization.</a:t>
-            </a:r>
-          </a:p>
-          <a:p>
-            <a:pPr lvl="1">
-              <a:lnSpc>
-                <a:spcPct val="150000"/>
-              </a:lnSpc>
-            </a:pPr>
-            <a:r>
-              <a:rPr lang="en-US" dirty="0" smtClean="0">
-                <a:solidFill>
-                  <a:schemeClr val="tx1"/>
-                </a:solidFill>
-              </a:rPr>
-              <a:t>Microsoft Power Point for analysis reports and presentation.</a:t>
-            </a:r>
-            <a:endParaRPr lang="en-US" dirty="0">
-              <a:solidFill>
-                <a:schemeClr val="tx1"/>
-              </a:solidFill>
-            </a:endParaRPr>
-          </a:p>
-        </p:txBody>
-      </p:sp>
-      <p:sp>
-        <p:nvSpPr>
           <p:cNvPr id="9" name="Title 8">
             <a:extLst>
               <a:ext uri="{FF2B5EF4-FFF2-40B4-BE49-F238E27FC236}">
-                <a16:creationId xmlns="" xmlns:a16="http://schemas.microsoft.com/office/drawing/2014/main" id="{FEF304F5-32C5-4869-B185-859B567855A8}"/>
+                <a16:creationId xmlns:a16="http://schemas.microsoft.com/office/drawing/2014/main" xmlns="" id="{FEF304F5-32C5-4869-B185-859B567855A8}"/>
               </a:ext>
             </a:extLst>
           </p:cNvPr>
@@ -18187,6 +18951,237 @@
               <a:t>Technology Used</a:t>
             </a:r>
             <a:endParaRPr lang="en-US" dirty="0"/>
+          </a:p>
+        </p:txBody>
+      </p:sp>
+      <p:sp>
+        <p:nvSpPr>
+          <p:cNvPr id="3" name="Rectangle 1"/>
+          <p:cNvSpPr>
+            <a:spLocks noChangeArrowheads="1"/>
+          </p:cNvSpPr>
+          <p:nvPr/>
+        </p:nvSpPr>
+        <p:spPr bwMode="auto">
+          <a:xfrm>
+            <a:off x="810883" y="2116687"/>
+            <a:ext cx="7359707" cy="1287532"/>
+          </a:xfrm>
+          <a:prstGeom prst="rect">
+            <a:avLst/>
+          </a:prstGeom>
+          <a:noFill/>
+          <a:ln>
+            <a:noFill/>
+          </a:ln>
+          <a:effectLst/>
+          <a:extLst>
+            <a:ext uri="{909E8E84-426E-40DD-AFC4-6F175D3DCCD1}">
+              <a14:hiddenFill xmlns:a14="http://schemas.microsoft.com/office/drawing/2010/main">
+                <a:solidFill>
+                  <a:schemeClr val="accent1"/>
+                </a:solidFill>
+              </a14:hiddenFill>
+            </a:ext>
+            <a:ext uri="{91240B29-F687-4F45-9708-019B960494DF}">
+              <a14:hiddenLine xmlns:a14="http://schemas.microsoft.com/office/drawing/2010/main" w="9525">
+                <a:solidFill>
+                  <a:schemeClr val="tx1"/>
+                </a:solidFill>
+                <a:miter lim="800000"/>
+                <a:headEnd/>
+                <a:tailEnd/>
+              </a14:hiddenLine>
+            </a:ext>
+            <a:ext uri="{AF507438-7753-43E0-B8FC-AC1667EBCBE1}">
+              <a14:hiddenEffects xmlns:a14="http://schemas.microsoft.com/office/drawing/2010/main">
+                <a:effectLst>
+                  <a:outerShdw dist="35921" dir="2700000" algn="ctr" rotWithShape="0">
+                    <a:schemeClr val="bg2"/>
+                  </a:outerShdw>
+                </a:effectLst>
+              </a14:hiddenEffects>
+            </a:ext>
+          </a:extLst>
+        </p:spPr>
+        <p:txBody>
+          <a:bodyPr vert="horz" wrap="none" lIns="91440" tIns="45720" rIns="91440" bIns="45720" numCol="1" anchor="ctr" anchorCtr="0" compatLnSpc="1">
+            <a:prstTxWarp prst="textNoShape">
+              <a:avLst/>
+            </a:prstTxWarp>
+            <a:spAutoFit/>
+          </a:bodyPr>
+          <a:lstStyle/>
+          <a:p>
+            <a:pPr marL="285750" marR="0" lvl="0" indent="-285750" algn="l" defTabSz="914400" rtl="0" eaLnBrk="0" fontAlgn="base" latinLnBrk="0" hangingPunct="0">
+              <a:lnSpc>
+                <a:spcPct val="150000"/>
+              </a:lnSpc>
+              <a:spcBef>
+                <a:spcPct val="0"/>
+              </a:spcBef>
+              <a:spcAft>
+                <a:spcPct val="0"/>
+              </a:spcAft>
+              <a:buClrTx/>
+              <a:buSzTx/>
+              <a:buFont typeface="Arial" panose="020B0604020202020204" pitchFamily="34" charset="0"/>
+              <a:buChar char="•"/>
+              <a:tabLst/>
+            </a:pPr>
+            <a:r>
+              <a:rPr kumimoji="0" lang="en-US" altLang="en-US" sz="1800" b="1" i="0" u="none" strike="noStrike" cap="none" normalizeH="0" baseline="0" dirty="0" smtClean="0">
+                <a:ln>
+                  <a:noFill/>
+                </a:ln>
+                <a:solidFill>
+                  <a:schemeClr val="tx1"/>
+                </a:solidFill>
+                <a:effectLst/>
+                <a:latin typeface="Arial" panose="020B0604020202020204" pitchFamily="34" charset="0"/>
+              </a:rPr>
+              <a:t>Pandas:</a:t>
+            </a:r>
+            <a:r>
+              <a:rPr kumimoji="0" lang="en-US" altLang="en-US" sz="1800" b="0" i="0" u="none" strike="noStrike" cap="none" normalizeH="0" baseline="0" dirty="0" smtClean="0">
+                <a:ln>
+                  <a:noFill/>
+                </a:ln>
+                <a:solidFill>
+                  <a:schemeClr val="tx1"/>
+                </a:solidFill>
+                <a:effectLst/>
+                <a:latin typeface="Arial" panose="020B0604020202020204" pitchFamily="34" charset="0"/>
+              </a:rPr>
+              <a:t> Data loading, cleaning, and manipulation.</a:t>
+            </a:r>
+          </a:p>
+          <a:p>
+            <a:pPr marL="285750" marR="0" lvl="0" indent="-285750" algn="l" defTabSz="914400" rtl="0" eaLnBrk="0" fontAlgn="base" latinLnBrk="0" hangingPunct="0">
+              <a:lnSpc>
+                <a:spcPct val="150000"/>
+              </a:lnSpc>
+              <a:spcBef>
+                <a:spcPct val="0"/>
+              </a:spcBef>
+              <a:spcAft>
+                <a:spcPct val="0"/>
+              </a:spcAft>
+              <a:buClrTx/>
+              <a:buSzTx/>
+              <a:buFont typeface="Arial" panose="020B0604020202020204" pitchFamily="34" charset="0"/>
+              <a:buChar char="•"/>
+              <a:tabLst/>
+            </a:pPr>
+            <a:r>
+              <a:rPr kumimoji="0" lang="en-US" altLang="en-US" sz="1800" b="1" i="0" u="none" strike="noStrike" cap="none" normalizeH="0" baseline="0" dirty="0" err="1" smtClean="0">
+                <a:ln>
+                  <a:noFill/>
+                </a:ln>
+                <a:solidFill>
+                  <a:schemeClr val="tx1"/>
+                </a:solidFill>
+                <a:effectLst/>
+                <a:latin typeface="Arial" panose="020B0604020202020204" pitchFamily="34" charset="0"/>
+              </a:rPr>
+              <a:t>Matplotlib</a:t>
+            </a:r>
+            <a:r>
+              <a:rPr kumimoji="0" lang="en-US" altLang="en-US" sz="1800" b="1" i="0" u="none" strike="noStrike" cap="none" normalizeH="0" baseline="0" dirty="0" smtClean="0">
+                <a:ln>
+                  <a:noFill/>
+                </a:ln>
+                <a:solidFill>
+                  <a:schemeClr val="tx1"/>
+                </a:solidFill>
+                <a:effectLst/>
+                <a:latin typeface="Arial" panose="020B0604020202020204" pitchFamily="34" charset="0"/>
+              </a:rPr>
+              <a:t> &amp; </a:t>
+            </a:r>
+            <a:r>
+              <a:rPr kumimoji="0" lang="en-US" altLang="en-US" sz="1800" b="1" i="0" u="none" strike="noStrike" cap="none" normalizeH="0" baseline="0" dirty="0" err="1" smtClean="0">
+                <a:ln>
+                  <a:noFill/>
+                </a:ln>
+                <a:solidFill>
+                  <a:schemeClr val="tx1"/>
+                </a:solidFill>
+                <a:effectLst/>
+                <a:latin typeface="Arial" panose="020B0604020202020204" pitchFamily="34" charset="0"/>
+              </a:rPr>
+              <a:t>Seaborn</a:t>
+            </a:r>
+            <a:r>
+              <a:rPr kumimoji="0" lang="en-US" altLang="en-US" sz="1800" b="1" i="0" u="none" strike="noStrike" cap="none" normalizeH="0" baseline="0" dirty="0" smtClean="0">
+                <a:ln>
+                  <a:noFill/>
+                </a:ln>
+                <a:solidFill>
+                  <a:schemeClr val="tx1"/>
+                </a:solidFill>
+                <a:effectLst/>
+                <a:latin typeface="Arial" panose="020B0604020202020204" pitchFamily="34" charset="0"/>
+              </a:rPr>
+              <a:t>:</a:t>
+            </a:r>
+            <a:r>
+              <a:rPr kumimoji="0" lang="en-US" altLang="en-US" sz="1800" b="0" i="0" u="none" strike="noStrike" cap="none" normalizeH="0" baseline="0" dirty="0" smtClean="0">
+                <a:ln>
+                  <a:noFill/>
+                </a:ln>
+                <a:solidFill>
+                  <a:schemeClr val="tx1"/>
+                </a:solidFill>
+                <a:effectLst/>
+                <a:latin typeface="Arial" panose="020B0604020202020204" pitchFamily="34" charset="0"/>
+              </a:rPr>
+              <a:t> Data visualization and chart generation.</a:t>
+            </a:r>
+          </a:p>
+          <a:p>
+            <a:pPr marL="285750" marR="0" lvl="0" indent="-285750" algn="l" defTabSz="914400" rtl="0" eaLnBrk="0" fontAlgn="base" latinLnBrk="0" hangingPunct="0">
+              <a:lnSpc>
+                <a:spcPct val="150000"/>
+              </a:lnSpc>
+              <a:spcBef>
+                <a:spcPct val="0"/>
+              </a:spcBef>
+              <a:spcAft>
+                <a:spcPct val="0"/>
+              </a:spcAft>
+              <a:buClrTx/>
+              <a:buSzTx/>
+              <a:buFont typeface="Arial" panose="020B0604020202020204" pitchFamily="34" charset="0"/>
+              <a:buChar char="•"/>
+              <a:tabLst/>
+            </a:pPr>
+            <a:r>
+              <a:rPr kumimoji="0" lang="en-US" altLang="en-US" sz="1800" b="1" i="0" u="none" strike="noStrike" cap="none" normalizeH="0" baseline="0" dirty="0" smtClean="0">
+                <a:ln>
+                  <a:noFill/>
+                </a:ln>
+                <a:solidFill>
+                  <a:schemeClr val="tx1"/>
+                </a:solidFill>
+                <a:effectLst/>
+                <a:latin typeface="Arial" panose="020B0604020202020204" pitchFamily="34" charset="0"/>
+              </a:rPr>
+              <a:t>Microsoft PowerPoint:</a:t>
+            </a:r>
+            <a:r>
+              <a:rPr kumimoji="0" lang="en-US" altLang="en-US" sz="1800" b="0" i="0" u="none" strike="noStrike" cap="none" normalizeH="0" baseline="0" dirty="0" smtClean="0">
+                <a:ln>
+                  <a:noFill/>
+                </a:ln>
+                <a:solidFill>
+                  <a:schemeClr val="tx1"/>
+                </a:solidFill>
+                <a:effectLst/>
+                <a:latin typeface="Arial" panose="020B0604020202020204" pitchFamily="34" charset="0"/>
+              </a:rPr>
+              <a:t> Reporting and presentation of key insights.</a:t>
+            </a:r>
           </a:p>
         </p:txBody>
       </p:sp>
@@ -18307,412 +19302,6 @@
                       </p:childTnLst>
                     </p:cTn>
                   </p:par>
-                  <p:par>
-                    <p:cTn id="10" fill="hold">
-                      <p:stCondLst>
-                        <p:cond delay="indefinite"/>
-                      </p:stCondLst>
-                      <p:childTnLst>
-                        <p:par>
-                          <p:cTn id="11" fill="hold">
-                            <p:stCondLst>
-                              <p:cond delay="0"/>
-                            </p:stCondLst>
-                            <p:childTnLst>
-                              <p:par>
-                                <p:cTn id="12" presetID="42" presetClass="entr" presetSubtype="0" fill="hold" grpId="0" nodeType="clickEffect">
-                                  <p:stCondLst>
-                                    <p:cond delay="0"/>
-                                  </p:stCondLst>
-                                  <p:childTnLst>
-                                    <p:set>
-                                      <p:cBhvr>
-                                        <p:cTn id="13" dur="1" fill="hold">
-                                          <p:stCondLst>
-                                            <p:cond delay="0"/>
-                                          </p:stCondLst>
-                                        </p:cTn>
-                                        <p:tgtEl>
-                                          <p:spTgt spid="7">
-                                            <p:txEl>
-                                              <p:pRg st="0" end="0"/>
-                                            </p:txEl>
-                                          </p:spTgt>
-                                        </p:tgtEl>
-                                        <p:attrNameLst>
-                                          <p:attrName>style.visibility</p:attrName>
-                                        </p:attrNameLst>
-                                      </p:cBhvr>
-                                      <p:to>
-                                        <p:strVal val="visible"/>
-                                      </p:to>
-                                    </p:set>
-                                    <p:animEffect transition="in" filter="fade">
-                                      <p:cBhvr>
-                                        <p:cTn id="14" dur="1000"/>
-                                        <p:tgtEl>
-                                          <p:spTgt spid="7">
-                                            <p:txEl>
-                                              <p:pRg st="0" end="0"/>
-                                            </p:txEl>
-                                          </p:spTgt>
-                                        </p:tgtEl>
-                                      </p:cBhvr>
-                                    </p:animEffect>
-                                    <p:anim calcmode="lin" valueType="num">
-                                      <p:cBhvr>
-                                        <p:cTn id="15" dur="1000" fill="hold"/>
-                                        <p:tgtEl>
-                                          <p:spTgt spid="7">
-                                            <p:txEl>
-                                              <p:pRg st="0" end="0"/>
-                                            </p:txEl>
-                                          </p:spTgt>
-                                        </p:tgtEl>
-                                        <p:attrNameLst>
-                                          <p:attrName>ppt_x</p:attrName>
-                                        </p:attrNameLst>
-                                      </p:cBhvr>
-                                      <p:tavLst>
-                                        <p:tav tm="0">
-                                          <p:val>
-                                            <p:strVal val="#ppt_x"/>
-                                          </p:val>
-                                        </p:tav>
-                                        <p:tav tm="100000">
-                                          <p:val>
-                                            <p:strVal val="#ppt_x"/>
-                                          </p:val>
-                                        </p:tav>
-                                      </p:tavLst>
-                                    </p:anim>
-                                    <p:anim calcmode="lin" valueType="num">
-                                      <p:cBhvr>
-                                        <p:cTn id="16" dur="1000" fill="hold"/>
-                                        <p:tgtEl>
-                                          <p:spTgt spid="7">
-                                            <p:txEl>
-                                              <p:pRg st="0" end="0"/>
-                                            </p:txEl>
-                                          </p:spTgt>
-                                        </p:tgtEl>
-                                        <p:attrNameLst>
-                                          <p:attrName>ppt_y</p:attrName>
-                                        </p:attrNameLst>
-                                      </p:cBhvr>
-                                      <p:tavLst>
-                                        <p:tav tm="0">
-                                          <p:val>
-                                            <p:strVal val="#ppt_y+.1"/>
-                                          </p:val>
-                                        </p:tav>
-                                        <p:tav tm="100000">
-                                          <p:val>
-                                            <p:strVal val="#ppt_y"/>
-                                          </p:val>
-                                        </p:tav>
-                                      </p:tavLst>
-                                    </p:anim>
-                                  </p:childTnLst>
-                                </p:cTn>
-                              </p:par>
-                              <p:par>
-                                <p:cTn id="17" presetID="42" presetClass="entr" presetSubtype="0" fill="hold" grpId="0" nodeType="withEffect">
-                                  <p:stCondLst>
-                                    <p:cond delay="0"/>
-                                  </p:stCondLst>
-                                  <p:childTnLst>
-                                    <p:set>
-                                      <p:cBhvr>
-                                        <p:cTn id="18" dur="1" fill="hold">
-                                          <p:stCondLst>
-                                            <p:cond delay="0"/>
-                                          </p:stCondLst>
-                                        </p:cTn>
-                                        <p:tgtEl>
-                                          <p:spTgt spid="7">
-                                            <p:txEl>
-                                              <p:pRg st="1" end="1"/>
-                                            </p:txEl>
-                                          </p:spTgt>
-                                        </p:tgtEl>
-                                        <p:attrNameLst>
-                                          <p:attrName>style.visibility</p:attrName>
-                                        </p:attrNameLst>
-                                      </p:cBhvr>
-                                      <p:to>
-                                        <p:strVal val="visible"/>
-                                      </p:to>
-                                    </p:set>
-                                    <p:animEffect transition="in" filter="fade">
-                                      <p:cBhvr>
-                                        <p:cTn id="19" dur="1000"/>
-                                        <p:tgtEl>
-                                          <p:spTgt spid="7">
-                                            <p:txEl>
-                                              <p:pRg st="1" end="1"/>
-                                            </p:txEl>
-                                          </p:spTgt>
-                                        </p:tgtEl>
-                                      </p:cBhvr>
-                                    </p:animEffect>
-                                    <p:anim calcmode="lin" valueType="num">
-                                      <p:cBhvr>
-                                        <p:cTn id="20" dur="1000" fill="hold"/>
-                                        <p:tgtEl>
-                                          <p:spTgt spid="7">
-                                            <p:txEl>
-                                              <p:pRg st="1" end="1"/>
-                                            </p:txEl>
-                                          </p:spTgt>
-                                        </p:tgtEl>
-                                        <p:attrNameLst>
-                                          <p:attrName>ppt_x</p:attrName>
-                                        </p:attrNameLst>
-                                      </p:cBhvr>
-                                      <p:tavLst>
-                                        <p:tav tm="0">
-                                          <p:val>
-                                            <p:strVal val="#ppt_x"/>
-                                          </p:val>
-                                        </p:tav>
-                                        <p:tav tm="100000">
-                                          <p:val>
-                                            <p:strVal val="#ppt_x"/>
-                                          </p:val>
-                                        </p:tav>
-                                      </p:tavLst>
-                                    </p:anim>
-                                    <p:anim calcmode="lin" valueType="num">
-                                      <p:cBhvr>
-                                        <p:cTn id="21" dur="1000" fill="hold"/>
-                                        <p:tgtEl>
-                                          <p:spTgt spid="7">
-                                            <p:txEl>
-                                              <p:pRg st="1" end="1"/>
-                                            </p:txEl>
-                                          </p:spTgt>
-                                        </p:tgtEl>
-                                        <p:attrNameLst>
-                                          <p:attrName>ppt_y</p:attrName>
-                                        </p:attrNameLst>
-                                      </p:cBhvr>
-                                      <p:tavLst>
-                                        <p:tav tm="0">
-                                          <p:val>
-                                            <p:strVal val="#ppt_y+.1"/>
-                                          </p:val>
-                                        </p:tav>
-                                        <p:tav tm="100000">
-                                          <p:val>
-                                            <p:strVal val="#ppt_y"/>
-                                          </p:val>
-                                        </p:tav>
-                                      </p:tavLst>
-                                    </p:anim>
-                                  </p:childTnLst>
-                                </p:cTn>
-                              </p:par>
-                              <p:par>
-                                <p:cTn id="22" presetID="42" presetClass="entr" presetSubtype="0" fill="hold" grpId="0" nodeType="withEffect">
-                                  <p:stCondLst>
-                                    <p:cond delay="0"/>
-                                  </p:stCondLst>
-                                  <p:childTnLst>
-                                    <p:set>
-                                      <p:cBhvr>
-                                        <p:cTn id="23" dur="1" fill="hold">
-                                          <p:stCondLst>
-                                            <p:cond delay="0"/>
-                                          </p:stCondLst>
-                                        </p:cTn>
-                                        <p:tgtEl>
-                                          <p:spTgt spid="7">
-                                            <p:txEl>
-                                              <p:pRg st="2" end="2"/>
-                                            </p:txEl>
-                                          </p:spTgt>
-                                        </p:tgtEl>
-                                        <p:attrNameLst>
-                                          <p:attrName>style.visibility</p:attrName>
-                                        </p:attrNameLst>
-                                      </p:cBhvr>
-                                      <p:to>
-                                        <p:strVal val="visible"/>
-                                      </p:to>
-                                    </p:set>
-                                    <p:animEffect transition="in" filter="fade">
-                                      <p:cBhvr>
-                                        <p:cTn id="24" dur="1000"/>
-                                        <p:tgtEl>
-                                          <p:spTgt spid="7">
-                                            <p:txEl>
-                                              <p:pRg st="2" end="2"/>
-                                            </p:txEl>
-                                          </p:spTgt>
-                                        </p:tgtEl>
-                                      </p:cBhvr>
-                                    </p:animEffect>
-                                    <p:anim calcmode="lin" valueType="num">
-                                      <p:cBhvr>
-                                        <p:cTn id="25" dur="1000" fill="hold"/>
-                                        <p:tgtEl>
-                                          <p:spTgt spid="7">
-                                            <p:txEl>
-                                              <p:pRg st="2" end="2"/>
-                                            </p:txEl>
-                                          </p:spTgt>
-                                        </p:tgtEl>
-                                        <p:attrNameLst>
-                                          <p:attrName>ppt_x</p:attrName>
-                                        </p:attrNameLst>
-                                      </p:cBhvr>
-                                      <p:tavLst>
-                                        <p:tav tm="0">
-                                          <p:val>
-                                            <p:strVal val="#ppt_x"/>
-                                          </p:val>
-                                        </p:tav>
-                                        <p:tav tm="100000">
-                                          <p:val>
-                                            <p:strVal val="#ppt_x"/>
-                                          </p:val>
-                                        </p:tav>
-                                      </p:tavLst>
-                                    </p:anim>
-                                    <p:anim calcmode="lin" valueType="num">
-                                      <p:cBhvr>
-                                        <p:cTn id="26" dur="1000" fill="hold"/>
-                                        <p:tgtEl>
-                                          <p:spTgt spid="7">
-                                            <p:txEl>
-                                              <p:pRg st="2" end="2"/>
-                                            </p:txEl>
-                                          </p:spTgt>
-                                        </p:tgtEl>
-                                        <p:attrNameLst>
-                                          <p:attrName>ppt_y</p:attrName>
-                                        </p:attrNameLst>
-                                      </p:cBhvr>
-                                      <p:tavLst>
-                                        <p:tav tm="0">
-                                          <p:val>
-                                            <p:strVal val="#ppt_y+.1"/>
-                                          </p:val>
-                                        </p:tav>
-                                        <p:tav tm="100000">
-                                          <p:val>
-                                            <p:strVal val="#ppt_y"/>
-                                          </p:val>
-                                        </p:tav>
-                                      </p:tavLst>
-                                    </p:anim>
-                                  </p:childTnLst>
-                                </p:cTn>
-                              </p:par>
-                              <p:par>
-                                <p:cTn id="27" presetID="42" presetClass="entr" presetSubtype="0" fill="hold" grpId="0" nodeType="withEffect">
-                                  <p:stCondLst>
-                                    <p:cond delay="0"/>
-                                  </p:stCondLst>
-                                  <p:childTnLst>
-                                    <p:set>
-                                      <p:cBhvr>
-                                        <p:cTn id="28" dur="1" fill="hold">
-                                          <p:stCondLst>
-                                            <p:cond delay="0"/>
-                                          </p:stCondLst>
-                                        </p:cTn>
-                                        <p:tgtEl>
-                                          <p:spTgt spid="7">
-                                            <p:txEl>
-                                              <p:pRg st="3" end="3"/>
-                                            </p:txEl>
-                                          </p:spTgt>
-                                        </p:tgtEl>
-                                        <p:attrNameLst>
-                                          <p:attrName>style.visibility</p:attrName>
-                                        </p:attrNameLst>
-                                      </p:cBhvr>
-                                      <p:to>
-                                        <p:strVal val="visible"/>
-                                      </p:to>
-                                    </p:set>
-                                    <p:animEffect transition="in" filter="fade">
-                                      <p:cBhvr>
-                                        <p:cTn id="29" dur="1000"/>
-                                        <p:tgtEl>
-                                          <p:spTgt spid="7">
-                                            <p:txEl>
-                                              <p:pRg st="3" end="3"/>
-                                            </p:txEl>
-                                          </p:spTgt>
-                                        </p:tgtEl>
-                                      </p:cBhvr>
-                                    </p:animEffect>
-                                    <p:anim calcmode="lin" valueType="num">
-                                      <p:cBhvr>
-                                        <p:cTn id="30" dur="1000" fill="hold"/>
-                                        <p:tgtEl>
-                                          <p:spTgt spid="7">
-                                            <p:txEl>
-                                              <p:pRg st="3" end="3"/>
-                                            </p:txEl>
-                                          </p:spTgt>
-                                        </p:tgtEl>
-                                        <p:attrNameLst>
-                                          <p:attrName>ppt_x</p:attrName>
-                                        </p:attrNameLst>
-                                      </p:cBhvr>
-                                      <p:tavLst>
-                                        <p:tav tm="0">
-                                          <p:val>
-                                            <p:strVal val="#ppt_x"/>
-                                          </p:val>
-                                        </p:tav>
-                                        <p:tav tm="100000">
-                                          <p:val>
-                                            <p:strVal val="#ppt_x"/>
-                                          </p:val>
-                                        </p:tav>
-                                      </p:tavLst>
-                                    </p:anim>
-                                    <p:anim calcmode="lin" valueType="num">
-                                      <p:cBhvr>
-                                        <p:cTn id="31" dur="1000" fill="hold"/>
-                                        <p:tgtEl>
-                                          <p:spTgt spid="7">
-                                            <p:txEl>
-                                              <p:pRg st="3" end="3"/>
-                                            </p:txEl>
-                                          </p:spTgt>
-                                        </p:tgtEl>
-                                        <p:attrNameLst>
-                                          <p:attrName>ppt_y</p:attrName>
-                                        </p:attrNameLst>
-                                      </p:cBhvr>
-                                      <p:tavLst>
-                                        <p:tav tm="0">
-                                          <p:val>
-                                            <p:strVal val="#ppt_y+.1"/>
-                                          </p:val>
-                                        </p:tav>
-                                        <p:tav tm="100000">
-                                          <p:val>
-                                            <p:strVal val="#ppt_y"/>
-                                          </p:val>
-                                        </p:tav>
-                                      </p:tavLst>
-                                    </p:anim>
-                                  </p:childTnLst>
-                                </p:cTn>
-                              </p:par>
-                            </p:childTnLst>
-                          </p:cTn>
-                        </p:par>
-                      </p:childTnLst>
-                    </p:cTn>
-                  </p:par>
                 </p:childTnLst>
               </p:cTn>
               <p:prevCondLst>
@@ -18735,7 +19324,6 @@
       </p:par>
     </p:tnLst>
     <p:bldLst>
-      <p:bldP spid="7" grpId="0" build="p"/>
       <p:bldP spid="9" grpId="0"/>
     </p:bldLst>
   </p:timing>
@@ -18764,7 +19352,7 @@
           <p:cNvPr id="5" name="Picture 4">
             <a:extLst>
               <a:ext uri="{FF2B5EF4-FFF2-40B4-BE49-F238E27FC236}">
-                <a16:creationId xmlns="" xmlns:a16="http://schemas.microsoft.com/office/drawing/2014/main" id="{BBB0C869-7C5C-4070-BD4D-F3FC2DA8F301}"/>
+                <a16:creationId xmlns:a16="http://schemas.microsoft.com/office/drawing/2014/main" xmlns="" id="{BBB0C869-7C5C-4070-BD4D-F3FC2DA8F301}"/>
               </a:ext>
             </a:extLst>
           </p:cNvPr>
@@ -18793,7 +19381,7 @@
           <p:cNvPr id="4" name="Title 3">
             <a:extLst>
               <a:ext uri="{FF2B5EF4-FFF2-40B4-BE49-F238E27FC236}">
-                <a16:creationId xmlns="" xmlns:a16="http://schemas.microsoft.com/office/drawing/2014/main" id="{AFE3A2AF-177E-45E6-A191-0F8523DB7FFA}"/>
+                <a16:creationId xmlns:a16="http://schemas.microsoft.com/office/drawing/2014/main" xmlns="" id="{AFE3A2AF-177E-45E6-A191-0F8523DB7FFA}"/>
               </a:ext>
             </a:extLst>
           </p:cNvPr>
@@ -18833,7 +19421,7 @@
           <p:cNvPr id="7" name="Text Placeholder 30">
             <a:extLst>
               <a:ext uri="{FF2B5EF4-FFF2-40B4-BE49-F238E27FC236}">
-                <a16:creationId xmlns="" xmlns:a16="http://schemas.microsoft.com/office/drawing/2014/main" id="{372426BE-BEE7-4A6D-BCD2-059615BBCE25}"/>
+                <a16:creationId xmlns:a16="http://schemas.microsoft.com/office/drawing/2014/main" xmlns="" id="{372426BE-BEE7-4A6D-BCD2-059615BBCE25}"/>
               </a:ext>
             </a:extLst>
           </p:cNvPr>
@@ -19089,7 +19677,7 @@
           <p:cNvPr id="8" name="Text Placeholder 30">
             <a:extLst>
               <a:ext uri="{FF2B5EF4-FFF2-40B4-BE49-F238E27FC236}">
-                <a16:creationId xmlns="" xmlns:a16="http://schemas.microsoft.com/office/drawing/2014/main" id="{E61E227A-5883-4C77-B25A-46A22FFDF41F}"/>
+                <a16:creationId xmlns:a16="http://schemas.microsoft.com/office/drawing/2014/main" xmlns="" id="{E61E227A-5883-4C77-B25A-46A22FFDF41F}"/>
               </a:ext>
             </a:extLst>
           </p:cNvPr>
@@ -19345,7 +19933,7 @@
           <p:cNvPr id="9" name="Title 3">
             <a:extLst>
               <a:ext uri="{FF2B5EF4-FFF2-40B4-BE49-F238E27FC236}">
-                <a16:creationId xmlns="" xmlns:a16="http://schemas.microsoft.com/office/drawing/2014/main" id="{E25373E9-1A26-4A40-9897-E42DE485D8E3}"/>
+                <a16:creationId xmlns:a16="http://schemas.microsoft.com/office/drawing/2014/main" xmlns="" id="{E25373E9-1A26-4A40-9897-E42DE485D8E3}"/>
               </a:ext>
             </a:extLst>
           </p:cNvPr>
@@ -19457,7 +20045,7 @@
           <p:cNvPr id="10" name="Text Placeholder 1">
             <a:extLst>
               <a:ext uri="{FF2B5EF4-FFF2-40B4-BE49-F238E27FC236}">
-                <a16:creationId xmlns="" xmlns:a16="http://schemas.microsoft.com/office/drawing/2014/main" id="{B19D8AC7-3787-4ADB-9212-0808F015C2DD}"/>
+                <a16:creationId xmlns:a16="http://schemas.microsoft.com/office/drawing/2014/main" xmlns="" id="{B19D8AC7-3787-4ADB-9212-0808F015C2DD}"/>
               </a:ext>
             </a:extLst>
           </p:cNvPr>
@@ -19524,7 +20112,7 @@
         <p:spPr>
           <a:xfrm>
             <a:off x="320981" y="4767601"/>
-            <a:ext cx="8012135" cy="2169825"/>
+            <a:ext cx="8012135" cy="2185214"/>
           </a:xfrm>
           <a:prstGeom prst="rect">
             <a:avLst/>
@@ -19537,106 +20125,73 @@
           </a:bodyPr>
           <a:lstStyle/>
           <a:p>
-            <a:pPr marL="342900" indent="-342900">
-              <a:spcAft>
-                <a:spcPts val="1400"/>
-              </a:spcAft>
-              <a:buSzPct val="100000"/>
+            <a:pPr marL="285750" lvl="0" indent="-285750">
+              <a:lnSpc>
+                <a:spcPct val="150000"/>
+              </a:lnSpc>
+              <a:buFont typeface="Arial" panose="020B0604020202020204" pitchFamily="34" charset="0"/>
               <a:buChar char="•"/>
             </a:pPr>
             <a:r>
-              <a:rPr lang="en-US" sz="1600" dirty="0">
-                <a:latin typeface="Calibri" pitchFamily="34" charset="0"/>
-                <a:ea typeface="Calibri" pitchFamily="34" charset="-122"/>
-                <a:cs typeface="Calibri" pitchFamily="34" charset="-120"/>
+              <a:rPr lang="en-IN" sz="1600" b="1" dirty="0">
+                <a:latin typeface="Arial" panose="020B0604020202020204" pitchFamily="34" charset="0"/>
+                <a:cs typeface="Arial" panose="020B0604020202020204" pitchFamily="34" charset="0"/>
               </a:rPr>
-              <a:t>Right-skewed distribution </a:t>
-            </a:r>
-            <a:r>
-              <a:rPr lang="en-US" sz="1600" dirty="0" smtClean="0">
-                <a:latin typeface="Calibri" pitchFamily="34" charset="0"/>
-                <a:ea typeface="Calibri" pitchFamily="34" charset="-122"/>
-                <a:cs typeface="Calibri" pitchFamily="34" charset="-120"/>
+              <a:t>Most cars are affordable:</a:t>
+            </a:r>
+            <a:r>
+              <a:rPr lang="en-IN" sz="1600" dirty="0">
+                <a:latin typeface="Arial" panose="020B0604020202020204" pitchFamily="34" charset="0"/>
+                <a:cs typeface="Arial" panose="020B0604020202020204" pitchFamily="34" charset="0"/>
               </a:rPr>
-              <a:t>- </a:t>
-            </a:r>
-            <a:r>
-              <a:rPr lang="en-US" sz="1600" dirty="0">
-                <a:latin typeface="Calibri" pitchFamily="34" charset="0"/>
-                <a:ea typeface="Calibri" pitchFamily="34" charset="-122"/>
-                <a:cs typeface="Calibri" pitchFamily="34" charset="-120"/>
-              </a:rPr>
-              <a:t>most cars cluster in the ₹</a:t>
-            </a:r>
-            <a:r>
-              <a:rPr lang="en-US" sz="1600" dirty="0" smtClean="0">
-                <a:latin typeface="Calibri" pitchFamily="34" charset="0"/>
-                <a:ea typeface="Calibri" pitchFamily="34" charset="-122"/>
-                <a:cs typeface="Calibri" pitchFamily="34" charset="-120"/>
-              </a:rPr>
-              <a:t>0-2L </a:t>
-            </a:r>
-            <a:r>
-              <a:rPr lang="en-US" sz="1600" dirty="0">
-                <a:latin typeface="Calibri" pitchFamily="34" charset="0"/>
-                <a:ea typeface="Calibri" pitchFamily="34" charset="-122"/>
-                <a:cs typeface="Calibri" pitchFamily="34" charset="-120"/>
-              </a:rPr>
-              <a:t>range, with a long tail out to ₹35L.</a:t>
-            </a:r>
-            <a:endParaRPr lang="en-US" sz="1600" dirty="0"/>
-          </a:p>
-          <a:p>
-            <a:pPr marL="342900" indent="-342900">
-              <a:spcAft>
-                <a:spcPts val="1400"/>
-              </a:spcAft>
-              <a:buSzPct val="100000"/>
+              <a:t> The majority of cars sell in the ₹0–5 Lakh range.</a:t>
+            </a:r>
+          </a:p>
+          <a:p>
+            <a:pPr marL="285750" lvl="0" indent="-285750">
+              <a:lnSpc>
+                <a:spcPct val="150000"/>
+              </a:lnSpc>
+              <a:buFont typeface="Arial" panose="020B0604020202020204" pitchFamily="34" charset="0"/>
               <a:buChar char="•"/>
             </a:pPr>
             <a:r>
-              <a:rPr lang="en-US" sz="1600" dirty="0">
-                <a:latin typeface="Calibri" pitchFamily="34" charset="0"/>
-                <a:ea typeface="Calibri" pitchFamily="34" charset="-122"/>
-                <a:cs typeface="Calibri" pitchFamily="34" charset="-120"/>
+              <a:rPr lang="en-IN" sz="1600" b="1" dirty="0">
+                <a:latin typeface="Arial" panose="020B0604020202020204" pitchFamily="34" charset="0"/>
+                <a:cs typeface="Arial" panose="020B0604020202020204" pitchFamily="34" charset="0"/>
               </a:rPr>
-              <a:t>Median (₹3.60L) sits well below the mean (₹4.66L) </a:t>
-            </a:r>
-            <a:r>
-              <a:rPr lang="en-US" sz="1600" dirty="0" smtClean="0">
-                <a:latin typeface="Calibri" pitchFamily="34" charset="0"/>
-                <a:ea typeface="Calibri" pitchFamily="34" charset="-122"/>
-                <a:cs typeface="Calibri" pitchFamily="34" charset="-120"/>
+              <a:t>Averages can be misleading:</a:t>
+            </a:r>
+            <a:r>
+              <a:rPr lang="en-IN" sz="1600" dirty="0">
+                <a:latin typeface="Arial" panose="020B0604020202020204" pitchFamily="34" charset="0"/>
+                <a:cs typeface="Arial" panose="020B0604020202020204" pitchFamily="34" charset="0"/>
               </a:rPr>
-              <a:t>- </a:t>
-            </a:r>
-            <a:r>
-              <a:rPr lang="en-US" sz="1600" dirty="0">
-                <a:latin typeface="Calibri" pitchFamily="34" charset="0"/>
-                <a:ea typeface="Calibri" pitchFamily="34" charset="-122"/>
-                <a:cs typeface="Calibri" pitchFamily="34" charset="-120"/>
-              </a:rPr>
-              <a:t>a small number of high-value listings pull the average up.</a:t>
-            </a:r>
-            <a:endParaRPr lang="en-US" sz="1600" dirty="0"/>
-          </a:p>
-          <a:p>
-            <a:pPr marL="342900" indent="-342900">
-              <a:spcAft>
-                <a:spcPts val="1400"/>
-              </a:spcAft>
-              <a:buSzPct val="100000"/>
+              <a:t> The average price (₹4.66L) is pulled up by a few high-value listings.</a:t>
+            </a:r>
+          </a:p>
+          <a:p>
+            <a:pPr marL="285750" lvl="0" indent="-285750">
+              <a:lnSpc>
+                <a:spcPct val="150000"/>
+              </a:lnSpc>
+              <a:buFont typeface="Arial" panose="020B0604020202020204" pitchFamily="34" charset="0"/>
               <a:buChar char="•"/>
             </a:pPr>
             <a:r>
-              <a:rPr lang="en-US" sz="1600" dirty="0">
-                <a:latin typeface="Calibri" pitchFamily="34" charset="0"/>
-                <a:ea typeface="Calibri" pitchFamily="34" charset="-122"/>
-                <a:cs typeface="Calibri" pitchFamily="34" charset="-120"/>
+              <a:rPr lang="en-IN" sz="1600" b="1" dirty="0">
+                <a:latin typeface="Arial" panose="020B0604020202020204" pitchFamily="34" charset="0"/>
+                <a:cs typeface="Arial" panose="020B0604020202020204" pitchFamily="34" charset="0"/>
               </a:rPr>
-              <a:t>Implication: benchmark typical pricing against the median, not the mean.</a:t>
-            </a:r>
-            <a:endParaRPr lang="en-US" sz="1600" dirty="0"/>
+              <a:t>Key takeaway:</a:t>
+            </a:r>
+            <a:r>
+              <a:rPr lang="en-IN" sz="1600" dirty="0">
+                <a:latin typeface="Arial" panose="020B0604020202020204" pitchFamily="34" charset="0"/>
+                <a:cs typeface="Arial" panose="020B0604020202020204" pitchFamily="34" charset="0"/>
+              </a:rPr>
+              <a:t> Use the median price (₹3.60L) as a realistic benchmark for typical car pricing.</a:t>
+            </a:r>
           </a:p>
           <a:p>
             <a:endParaRPr lang="en-IN" sz="1600" dirty="0"/>
@@ -20184,7 +20739,7 @@
           <p:cNvPr id="5" name="Picture 4">
             <a:extLst>
               <a:ext uri="{FF2B5EF4-FFF2-40B4-BE49-F238E27FC236}">
-                <a16:creationId xmlns="" xmlns:a16="http://schemas.microsoft.com/office/drawing/2014/main" id="{BBB0C869-7C5C-4070-BD4D-F3FC2DA8F301}"/>
+                <a16:creationId xmlns:a16="http://schemas.microsoft.com/office/drawing/2014/main" xmlns="" id="{BBB0C869-7C5C-4070-BD4D-F3FC2DA8F301}"/>
               </a:ext>
             </a:extLst>
           </p:cNvPr>
@@ -20213,7 +20768,7 @@
           <p:cNvPr id="4" name="Title 3">
             <a:extLst>
               <a:ext uri="{FF2B5EF4-FFF2-40B4-BE49-F238E27FC236}">
-                <a16:creationId xmlns="" xmlns:a16="http://schemas.microsoft.com/office/drawing/2014/main" id="{AFE3A2AF-177E-45E6-A191-0F8523DB7FFA}"/>
+                <a16:creationId xmlns:a16="http://schemas.microsoft.com/office/drawing/2014/main" xmlns="" id="{AFE3A2AF-177E-45E6-A191-0F8523DB7FFA}"/>
               </a:ext>
             </a:extLst>
           </p:cNvPr>
@@ -20226,13 +20781,13 @@
         </p:nvSpPr>
         <p:spPr>
           <a:xfrm>
-            <a:off x="675957" y="327805"/>
-            <a:ext cx="8045349" cy="873782"/>
+            <a:off x="675957" y="378225"/>
+            <a:ext cx="8752715" cy="873782"/>
           </a:xfrm>
         </p:spPr>
         <p:txBody>
           <a:bodyPr>
-            <a:normAutofit/>
+            <a:normAutofit fontScale="90000"/>
           </a:bodyPr>
           <a:lstStyle/>
           <a:p>
@@ -20242,7 +20797,15 @@
                 <a:ea typeface="Trebuchet MS" pitchFamily="34" charset="-122"/>
                 <a:cs typeface="Trebuchet MS" pitchFamily="34" charset="-120"/>
               </a:rPr>
-              <a:t>Depreciation Trend by Car Age</a:t>
+              <a:t>Depreciation Trend by Car </a:t>
+            </a:r>
+            <a:r>
+              <a:rPr lang="en-US" sz="3200" dirty="0" smtClean="0">
+                <a:latin typeface="Trebuchet MS" pitchFamily="34" charset="0"/>
+                <a:ea typeface="Trebuchet MS" pitchFamily="34" charset="-122"/>
+                <a:cs typeface="Trebuchet MS" pitchFamily="34" charset="-120"/>
+              </a:rPr>
+              <a:t>Age and Transmission</a:t>
             </a:r>
             <a:endParaRPr lang="en-US" sz="3200" dirty="0"/>
           </a:p>
@@ -20253,7 +20816,7 @@
           <p:cNvPr id="7" name="Text Placeholder 30">
             <a:extLst>
               <a:ext uri="{FF2B5EF4-FFF2-40B4-BE49-F238E27FC236}">
-                <a16:creationId xmlns="" xmlns:a16="http://schemas.microsoft.com/office/drawing/2014/main" id="{372426BE-BEE7-4A6D-BCD2-059615BBCE25}"/>
+                <a16:creationId xmlns:a16="http://schemas.microsoft.com/office/drawing/2014/main" xmlns="" id="{372426BE-BEE7-4A6D-BCD2-059615BBCE25}"/>
               </a:ext>
             </a:extLst>
           </p:cNvPr>
@@ -20509,7 +21072,7 @@
           <p:cNvPr id="8" name="Text Placeholder 30">
             <a:extLst>
               <a:ext uri="{FF2B5EF4-FFF2-40B4-BE49-F238E27FC236}">
-                <a16:creationId xmlns="" xmlns:a16="http://schemas.microsoft.com/office/drawing/2014/main" id="{E61E227A-5883-4C77-B25A-46A22FFDF41F}"/>
+                <a16:creationId xmlns:a16="http://schemas.microsoft.com/office/drawing/2014/main" xmlns="" id="{E61E227A-5883-4C77-B25A-46A22FFDF41F}"/>
               </a:ext>
             </a:extLst>
           </p:cNvPr>
@@ -20765,7 +21328,7 @@
           <p:cNvPr id="9" name="Title 3">
             <a:extLst>
               <a:ext uri="{FF2B5EF4-FFF2-40B4-BE49-F238E27FC236}">
-                <a16:creationId xmlns="" xmlns:a16="http://schemas.microsoft.com/office/drawing/2014/main" id="{E25373E9-1A26-4A40-9897-E42DE485D8E3}"/>
+                <a16:creationId xmlns:a16="http://schemas.microsoft.com/office/drawing/2014/main" xmlns="" id="{E25373E9-1A26-4A40-9897-E42DE485D8E3}"/>
               </a:ext>
             </a:extLst>
           </p:cNvPr>
@@ -20877,7 +21440,7 @@
           <p:cNvPr id="10" name="Text Placeholder 1">
             <a:extLst>
               <a:ext uri="{FF2B5EF4-FFF2-40B4-BE49-F238E27FC236}">
-                <a16:creationId xmlns="" xmlns:a16="http://schemas.microsoft.com/office/drawing/2014/main" id="{B19D8AC7-3787-4ADB-9212-0808F015C2DD}"/>
+                <a16:creationId xmlns:a16="http://schemas.microsoft.com/office/drawing/2014/main" xmlns="" id="{B19D8AC7-3787-4ADB-9212-0808F015C2DD}"/>
               </a:ext>
             </a:extLst>
           </p:cNvPr>
@@ -20927,122 +21490,14 @@
         </p:blipFill>
         <p:spPr>
           <a:xfrm>
-            <a:off x="320981" y="1201587"/>
-            <a:ext cx="7511803" cy="3353160"/>
+            <a:off x="320982" y="1201587"/>
+            <a:ext cx="4138876" cy="3353160"/>
           </a:xfrm>
           <a:prstGeom prst="rect">
             <a:avLst/>
           </a:prstGeom>
         </p:spPr>
       </p:pic>
-      <p:sp>
-        <p:nvSpPr>
-          <p:cNvPr id="6" name="Rectangle 5"/>
-          <p:cNvSpPr/>
-          <p:nvPr/>
-        </p:nvSpPr>
-        <p:spPr>
-          <a:xfrm>
-            <a:off x="675957" y="4628531"/>
-            <a:ext cx="7156828" cy="2236510"/>
-          </a:xfrm>
-          <a:prstGeom prst="rect">
-            <a:avLst/>
-          </a:prstGeom>
-        </p:spPr>
-        <p:txBody>
-          <a:bodyPr wrap="square">
-            <a:spAutoFit/>
-          </a:bodyPr>
-          <a:lstStyle/>
-          <a:p>
-            <a:pPr marL="342900" indent="-342900">
-              <a:spcAft>
-                <a:spcPts val="1400"/>
-              </a:spcAft>
-              <a:buSzPct val="100000"/>
-              <a:buChar char="•"/>
-            </a:pPr>
-            <a:r>
-              <a:rPr lang="en-US" sz="1600" dirty="0">
-                <a:latin typeface="Calibri" pitchFamily="34" charset="0"/>
-                <a:ea typeface="Calibri" pitchFamily="34" charset="-122"/>
-                <a:cs typeface="Calibri" pitchFamily="34" charset="-120"/>
-              </a:rPr>
-              <a:t>Price falls from ~₹9.3L at 8 years old to under ₹1L by 18–19 years </a:t>
-            </a:r>
-            <a:r>
-              <a:rPr lang="en-US" sz="1600" dirty="0" smtClean="0">
-                <a:latin typeface="Calibri" pitchFamily="34" charset="0"/>
-                <a:ea typeface="Calibri" pitchFamily="34" charset="-122"/>
-                <a:cs typeface="Calibri" pitchFamily="34" charset="-120"/>
-              </a:rPr>
-              <a:t>- </a:t>
-            </a:r>
-            <a:r>
-              <a:rPr lang="en-US" sz="1600" dirty="0">
-                <a:latin typeface="Calibri" pitchFamily="34" charset="0"/>
-                <a:ea typeface="Calibri" pitchFamily="34" charset="-122"/>
-                <a:cs typeface="Calibri" pitchFamily="34" charset="-120"/>
-              </a:rPr>
-              <a:t>the expected depreciation curve.</a:t>
-            </a:r>
-            <a:endParaRPr lang="en-US" sz="1600" dirty="0"/>
-          </a:p>
-          <a:p>
-            <a:pPr marL="342900" indent="-342900">
-              <a:spcAft>
-                <a:spcPts val="1400"/>
-              </a:spcAft>
-              <a:buSzPct val="100000"/>
-              <a:buChar char="•"/>
-            </a:pPr>
-            <a:r>
-              <a:rPr lang="en-US" sz="1600" dirty="0">
-                <a:latin typeface="Calibri" pitchFamily="34" charset="0"/>
-                <a:ea typeface="Calibri" pitchFamily="34" charset="-122"/>
-                <a:cs typeface="Calibri" pitchFamily="34" charset="-120"/>
-              </a:rPr>
-              <a:t>The trend gets noisy past 15 years </a:t>
-            </a:r>
-            <a:r>
-              <a:rPr lang="en-US" sz="1600" dirty="0" smtClean="0">
-                <a:latin typeface="Calibri" pitchFamily="34" charset="0"/>
-                <a:ea typeface="Calibri" pitchFamily="34" charset="-122"/>
-                <a:cs typeface="Calibri" pitchFamily="34" charset="-120"/>
-              </a:rPr>
-              <a:t>- </a:t>
-            </a:r>
-            <a:r>
-              <a:rPr lang="en-US" sz="1600" dirty="0">
-                <a:latin typeface="Calibri" pitchFamily="34" charset="0"/>
-                <a:ea typeface="Calibri" pitchFamily="34" charset="-122"/>
-                <a:cs typeface="Calibri" pitchFamily="34" charset="-120"/>
-              </a:rPr>
-              <a:t>each age bucket has very few listings, so late-life upticks (e.g. age 21) likely reflect a handful of well-kept or rare cars, not a market reversal.</a:t>
-            </a:r>
-            <a:endParaRPr lang="en-US" sz="1600" dirty="0"/>
-          </a:p>
-          <a:p>
-            <a:pPr marL="342900" indent="-342900">
-              <a:spcAft>
-                <a:spcPts val="1400"/>
-              </a:spcAft>
-              <a:buSzPct val="100000"/>
-              <a:buChar char="•"/>
-            </a:pPr>
-            <a:r>
-              <a:rPr lang="en-US" sz="1600" dirty="0">
-                <a:latin typeface="Calibri" pitchFamily="34" charset="0"/>
-                <a:ea typeface="Calibri" pitchFamily="34" charset="-122"/>
-                <a:cs typeface="Calibri" pitchFamily="34" charset="-120"/>
-              </a:rPr>
-              <a:t>Recommendation: treat age-based pricing beyond ~15 years as low-confidence given sample size.</a:t>
-            </a:r>
-            <a:endParaRPr lang="en-US" sz="1600" dirty="0"/>
-          </a:p>
-        </p:txBody>
-      </p:sp>
       <p:sp>
         <p:nvSpPr>
           <p:cNvPr id="11" name="TextBox 10"/>
@@ -21083,6 +21538,228 @@
               <a:t>Finding No -2</a:t>
             </a:r>
             <a:endParaRPr lang="en-IN" sz="1400" dirty="0"/>
+          </a:p>
+        </p:txBody>
+      </p:sp>
+      <p:pic>
+        <p:nvPicPr>
+          <p:cNvPr id="2" name="Picture 1"/>
+          <p:cNvPicPr>
+            <a:picLocks noChangeAspect="1"/>
+          </p:cNvPicPr>
+          <p:nvPr/>
+        </p:nvPicPr>
+        <p:blipFill>
+          <a:blip r:embed="rId4">
+            <a:extLst>
+              <a:ext uri="{28A0092B-C50C-407E-A947-70E740481C1C}">
+                <a14:useLocalDpi xmlns:a14="http://schemas.microsoft.com/office/drawing/2010/main" val="0"/>
+              </a:ext>
+            </a:extLst>
+          </a:blip>
+          <a:stretch>
+            <a:fillRect/>
+          </a:stretch>
+        </p:blipFill>
+        <p:spPr>
+          <a:xfrm>
+            <a:off x="4583748" y="1201587"/>
+            <a:ext cx="4456736" cy="3426944"/>
+          </a:xfrm>
+          <a:prstGeom prst="rect">
+            <a:avLst/>
+          </a:prstGeom>
+        </p:spPr>
+      </p:pic>
+      <p:sp>
+        <p:nvSpPr>
+          <p:cNvPr id="12" name="Rectangle 1"/>
+          <p:cNvSpPr>
+            <a:spLocks noChangeArrowheads="1"/>
+          </p:cNvSpPr>
+          <p:nvPr/>
+        </p:nvSpPr>
+        <p:spPr bwMode="auto">
+          <a:xfrm>
+            <a:off x="422959" y="4653608"/>
+            <a:ext cx="8721969" cy="2031325"/>
+          </a:xfrm>
+          <a:prstGeom prst="rect">
+            <a:avLst/>
+          </a:prstGeom>
+          <a:noFill/>
+          <a:ln>
+            <a:noFill/>
+          </a:ln>
+          <a:effectLst/>
+          <a:extLst>
+            <a:ext uri="{909E8E84-426E-40DD-AFC4-6F175D3DCCD1}">
+              <a14:hiddenFill xmlns:a14="http://schemas.microsoft.com/office/drawing/2010/main">
+                <a:solidFill>
+                  <a:schemeClr val="accent1"/>
+                </a:solidFill>
+              </a14:hiddenFill>
+            </a:ext>
+            <a:ext uri="{91240B29-F687-4F45-9708-019B960494DF}">
+              <a14:hiddenLine xmlns:a14="http://schemas.microsoft.com/office/drawing/2010/main" w="9525">
+                <a:solidFill>
+                  <a:schemeClr val="tx1"/>
+                </a:solidFill>
+                <a:miter lim="800000"/>
+                <a:headEnd/>
+                <a:tailEnd/>
+              </a14:hiddenLine>
+            </a:ext>
+            <a:ext uri="{AF507438-7753-43E0-B8FC-AC1667EBCBE1}">
+              <a14:hiddenEffects xmlns:a14="http://schemas.microsoft.com/office/drawing/2010/main">
+                <a:effectLst>
+                  <a:outerShdw dist="35921" dir="2700000" algn="ctr" rotWithShape="0">
+                    <a:schemeClr val="bg2"/>
+                  </a:outerShdw>
+                </a:effectLst>
+              </a14:hiddenEffects>
+            </a:ext>
+          </a:extLst>
+        </p:spPr>
+        <p:txBody>
+          <a:bodyPr vert="horz" wrap="square" lIns="91440" tIns="45720" rIns="91440" bIns="45720" numCol="1" anchor="ctr" anchorCtr="0" compatLnSpc="1">
+            <a:prstTxWarp prst="textNoShape">
+              <a:avLst/>
+            </a:prstTxWarp>
+            <a:spAutoFit/>
+          </a:bodyPr>
+          <a:lstStyle/>
+          <a:p>
+            <a:pPr marL="285750" marR="0" lvl="0" indent="-285750" algn="l" defTabSz="914400" rtl="0" eaLnBrk="0" fontAlgn="base" latinLnBrk="0" hangingPunct="0">
+              <a:lnSpc>
+                <a:spcPct val="150000"/>
+              </a:lnSpc>
+              <a:spcBef>
+                <a:spcPct val="0"/>
+              </a:spcBef>
+              <a:spcAft>
+                <a:spcPct val="0"/>
+              </a:spcAft>
+              <a:buClrTx/>
+              <a:buSzTx/>
+              <a:buFont typeface="Arial" panose="020B0604020202020204" pitchFamily="34" charset="0"/>
+              <a:buChar char="•"/>
+              <a:tabLst/>
+            </a:pPr>
+            <a:r>
+              <a:rPr kumimoji="0" lang="en-US" altLang="en-US" sz="1400" b="1" i="0" u="none" strike="noStrike" cap="none" normalizeH="0" baseline="0" dirty="0" smtClean="0">
+                <a:ln>
+                  <a:noFill/>
+                </a:ln>
+                <a:solidFill>
+                  <a:schemeClr val="tx1"/>
+                </a:solidFill>
+                <a:effectLst/>
+                <a:latin typeface="Arial" panose="020B0604020202020204" pitchFamily="34" charset="0"/>
+              </a:rPr>
+              <a:t>Steep Early Price Drop:</a:t>
+            </a:r>
+            <a:r>
+              <a:rPr kumimoji="0" lang="en-US" altLang="en-US" sz="1400" b="0" i="0" u="none" strike="noStrike" cap="none" normalizeH="0" baseline="0" dirty="0" smtClean="0">
+                <a:ln>
+                  <a:noFill/>
+                </a:ln>
+                <a:solidFill>
+                  <a:schemeClr val="tx1"/>
+                </a:solidFill>
+                <a:effectLst/>
+                <a:latin typeface="Arial" panose="020B0604020202020204" pitchFamily="34" charset="0"/>
+              </a:rPr>
+              <a:t> Car prices decline sharply from age 8 to 15, dropping from ~9.8L down to under 3L.</a:t>
+            </a:r>
+          </a:p>
+          <a:p>
+            <a:pPr marL="285750" marR="0" lvl="0" indent="-285750" algn="l" defTabSz="914400" rtl="0" eaLnBrk="0" fontAlgn="base" latinLnBrk="0" hangingPunct="0">
+              <a:lnSpc>
+                <a:spcPct val="150000"/>
+              </a:lnSpc>
+              <a:spcBef>
+                <a:spcPct val="0"/>
+              </a:spcBef>
+              <a:spcAft>
+                <a:spcPct val="0"/>
+              </a:spcAft>
+              <a:buClrTx/>
+              <a:buSzTx/>
+              <a:buFont typeface="Arial" panose="020B0604020202020204" pitchFamily="34" charset="0"/>
+              <a:buChar char="•"/>
+              <a:tabLst/>
+            </a:pPr>
+            <a:r>
+              <a:rPr kumimoji="0" lang="en-US" altLang="en-US" sz="1400" b="1" i="0" u="none" strike="noStrike" cap="none" normalizeH="0" baseline="0" dirty="0" smtClean="0">
+                <a:ln>
+                  <a:noFill/>
+                </a:ln>
+                <a:solidFill>
+                  <a:schemeClr val="tx1"/>
+                </a:solidFill>
+                <a:effectLst/>
+                <a:latin typeface="Arial" panose="020B0604020202020204" pitchFamily="34" charset="0"/>
+              </a:rPr>
+              <a:t>Strong Automatic Premium:</a:t>
+            </a:r>
+            <a:r>
+              <a:rPr kumimoji="0" lang="en-US" altLang="en-US" sz="1400" b="0" i="0" u="none" strike="noStrike" cap="none" normalizeH="0" baseline="0" dirty="0" smtClean="0">
+                <a:ln>
+                  <a:noFill/>
+                </a:ln>
+                <a:solidFill>
+                  <a:schemeClr val="tx1"/>
+                </a:solidFill>
+                <a:effectLst/>
+                <a:latin typeface="Arial" panose="020B0604020202020204" pitchFamily="34" charset="0"/>
+              </a:rPr>
+              <a:t> Automatic cars retain significantly higher market values than manual cars up to 14 years of age.</a:t>
+            </a:r>
+          </a:p>
+          <a:p>
+            <a:pPr marL="285750" marR="0" lvl="0" indent="-285750" algn="l" defTabSz="914400" rtl="0" eaLnBrk="0" fontAlgn="base" latinLnBrk="0" hangingPunct="0">
+              <a:lnSpc>
+                <a:spcPct val="150000"/>
+              </a:lnSpc>
+              <a:spcBef>
+                <a:spcPct val="0"/>
+              </a:spcBef>
+              <a:spcAft>
+                <a:spcPct val="0"/>
+              </a:spcAft>
+              <a:buClrTx/>
+              <a:buSzTx/>
+              <a:buFont typeface="Arial" panose="020B0604020202020204" pitchFamily="34" charset="0"/>
+              <a:buChar char="•"/>
+              <a:tabLst/>
+            </a:pPr>
+            <a:r>
+              <a:rPr kumimoji="0" lang="en-US" altLang="en-US" sz="1400" b="1" i="0" u="none" strike="noStrike" cap="none" normalizeH="0" baseline="0" dirty="0" smtClean="0">
+                <a:ln>
+                  <a:noFill/>
+                </a:ln>
+                <a:solidFill>
+                  <a:schemeClr val="tx1"/>
+                </a:solidFill>
+                <a:effectLst/>
+                <a:latin typeface="Arial" panose="020B0604020202020204" pitchFamily="34" charset="0"/>
+              </a:rPr>
+              <a:t>Convergence After 15 Years:</a:t>
+            </a:r>
+            <a:r>
+              <a:rPr kumimoji="0" lang="en-US" altLang="en-US" sz="1400" b="0" i="0" u="none" strike="noStrike" cap="none" normalizeH="0" baseline="0" dirty="0" smtClean="0">
+                <a:ln>
+                  <a:noFill/>
+                </a:ln>
+                <a:solidFill>
+                  <a:schemeClr val="tx1"/>
+                </a:solidFill>
+                <a:effectLst/>
+                <a:latin typeface="Arial" panose="020B0604020202020204" pitchFamily="34" charset="0"/>
+              </a:rPr>
+              <a:t> Beyond 15 years, the price gap between automatic and manual models disappears, and values fluctuate due to fewer listings.</a:t>
+            </a:r>
           </a:p>
         </p:txBody>
       </p:sp>
@@ -21584,7 +22261,7 @@
           <p:cNvPr id="5" name="Picture 4">
             <a:extLst>
               <a:ext uri="{FF2B5EF4-FFF2-40B4-BE49-F238E27FC236}">
-                <a16:creationId xmlns="" xmlns:a16="http://schemas.microsoft.com/office/drawing/2014/main" id="{BBB0C869-7C5C-4070-BD4D-F3FC2DA8F301}"/>
+                <a16:creationId xmlns:a16="http://schemas.microsoft.com/office/drawing/2014/main" xmlns="" id="{BBB0C869-7C5C-4070-BD4D-F3FC2DA8F301}"/>
               </a:ext>
             </a:extLst>
           </p:cNvPr>
@@ -21613,7 +22290,7 @@
           <p:cNvPr id="4" name="Title 3">
             <a:extLst>
               <a:ext uri="{FF2B5EF4-FFF2-40B4-BE49-F238E27FC236}">
-                <a16:creationId xmlns="" xmlns:a16="http://schemas.microsoft.com/office/drawing/2014/main" id="{AFE3A2AF-177E-45E6-A191-0F8523DB7FFA}"/>
+                <a16:creationId xmlns:a16="http://schemas.microsoft.com/office/drawing/2014/main" xmlns="" id="{AFE3A2AF-177E-45E6-A191-0F8523DB7FFA}"/>
               </a:ext>
             </a:extLst>
           </p:cNvPr>
@@ -21669,7 +22346,7 @@
           <p:cNvPr id="7" name="Text Placeholder 30">
             <a:extLst>
               <a:ext uri="{FF2B5EF4-FFF2-40B4-BE49-F238E27FC236}">
-                <a16:creationId xmlns="" xmlns:a16="http://schemas.microsoft.com/office/drawing/2014/main" id="{372426BE-BEE7-4A6D-BCD2-059615BBCE25}"/>
+                <a16:creationId xmlns:a16="http://schemas.microsoft.com/office/drawing/2014/main" xmlns="" id="{372426BE-BEE7-4A6D-BCD2-059615BBCE25}"/>
               </a:ext>
             </a:extLst>
           </p:cNvPr>
@@ -21925,7 +22602,7 @@
           <p:cNvPr id="8" name="Text Placeholder 30">
             <a:extLst>
               <a:ext uri="{FF2B5EF4-FFF2-40B4-BE49-F238E27FC236}">
-                <a16:creationId xmlns="" xmlns:a16="http://schemas.microsoft.com/office/drawing/2014/main" id="{E61E227A-5883-4C77-B25A-46A22FFDF41F}"/>
+                <a16:creationId xmlns:a16="http://schemas.microsoft.com/office/drawing/2014/main" xmlns="" id="{E61E227A-5883-4C77-B25A-46A22FFDF41F}"/>
               </a:ext>
             </a:extLst>
           </p:cNvPr>
@@ -22181,7 +22858,7 @@
           <p:cNvPr id="9" name="Title 3">
             <a:extLst>
               <a:ext uri="{FF2B5EF4-FFF2-40B4-BE49-F238E27FC236}">
-                <a16:creationId xmlns="" xmlns:a16="http://schemas.microsoft.com/office/drawing/2014/main" id="{E25373E9-1A26-4A40-9897-E42DE485D8E3}"/>
+                <a16:creationId xmlns:a16="http://schemas.microsoft.com/office/drawing/2014/main" xmlns="" id="{E25373E9-1A26-4A40-9897-E42DE485D8E3}"/>
               </a:ext>
             </a:extLst>
           </p:cNvPr>
@@ -22293,7 +22970,7 @@
           <p:cNvPr id="10" name="Text Placeholder 1">
             <a:extLst>
               <a:ext uri="{FF2B5EF4-FFF2-40B4-BE49-F238E27FC236}">
-                <a16:creationId xmlns="" xmlns:a16="http://schemas.microsoft.com/office/drawing/2014/main" id="{B19D8AC7-3787-4ADB-9212-0808F015C2DD}"/>
+                <a16:creationId xmlns:a16="http://schemas.microsoft.com/office/drawing/2014/main" xmlns="" id="{B19D8AC7-3787-4ADB-9212-0808F015C2DD}"/>
               </a:ext>
             </a:extLst>
           </p:cNvPr>
@@ -22343,7 +23020,7 @@
         </p:blipFill>
         <p:spPr>
           <a:xfrm>
-            <a:off x="5082302" y="1201586"/>
+            <a:off x="5082302" y="928112"/>
             <a:ext cx="4234226" cy="3604816"/>
           </a:xfrm>
           <a:prstGeom prst="rect">
@@ -22373,7 +23050,7 @@
         </p:blipFill>
         <p:spPr>
           <a:xfrm>
-            <a:off x="478522" y="1201585"/>
+            <a:off x="513873" y="928111"/>
             <a:ext cx="4766338" cy="3604817"/>
           </a:xfrm>
           <a:prstGeom prst="rect">
@@ -22389,8 +23066,8 @@
         </p:nvSpPr>
         <p:spPr>
           <a:xfrm>
-            <a:off x="874143" y="4902923"/>
-            <a:ext cx="7666008" cy="1282402"/>
+            <a:off x="675957" y="4639033"/>
+            <a:ext cx="8155557" cy="1938992"/>
           </a:xfrm>
           <a:prstGeom prst="rect">
             <a:avLst/>
@@ -22402,90 +23079,73 @@
           </a:bodyPr>
           <a:lstStyle/>
           <a:p>
-            <a:pPr marL="342900" indent="-342900">
-              <a:spcAft>
-                <a:spcPts val="800"/>
-              </a:spcAft>
-              <a:buSzPct val="100000"/>
+            <a:pPr marL="285750" lvl="0" indent="-285750">
+              <a:lnSpc>
+                <a:spcPct val="150000"/>
+              </a:lnSpc>
+              <a:buFont typeface="Arial" panose="020B0604020202020204" pitchFamily="34" charset="0"/>
               <a:buChar char="•"/>
             </a:pPr>
             <a:r>
-              <a:rPr lang="en-US" sz="1600" dirty="0">
-                <a:latin typeface="Calibri" pitchFamily="34" charset="0"/>
-                <a:ea typeface="Calibri" pitchFamily="34" charset="-122"/>
-                <a:cs typeface="Calibri" pitchFamily="34" charset="-120"/>
+              <a:rPr lang="en-IN" sz="1600" b="1" dirty="0">
+                <a:latin typeface="Arial" panose="020B0604020202020204" pitchFamily="34" charset="0"/>
+                <a:cs typeface="Arial" panose="020B0604020202020204" pitchFamily="34" charset="0"/>
               </a:rPr>
-              <a:t>Diesel cars average ~₹6.9L vs ~₹3.0L (Petrol) and ~₹3.1L (CNG) </a:t>
-            </a:r>
-            <a:r>
-              <a:rPr lang="en-US" sz="1600" dirty="0" smtClean="0">
-                <a:latin typeface="Calibri" pitchFamily="34" charset="0"/>
-                <a:ea typeface="Calibri" pitchFamily="34" charset="-122"/>
-                <a:cs typeface="Calibri" pitchFamily="34" charset="-120"/>
+              <a:t>Diesel commands a higher price:</a:t>
+            </a:r>
+            <a:r>
+              <a:rPr lang="en-IN" sz="1600" dirty="0">
+                <a:latin typeface="Arial" panose="020B0604020202020204" pitchFamily="34" charset="0"/>
+                <a:cs typeface="Arial" panose="020B0604020202020204" pitchFamily="34" charset="0"/>
               </a:rPr>
-              <a:t>- </a:t>
-            </a:r>
-            <a:r>
-              <a:rPr lang="en-US" sz="1600" dirty="0">
-                <a:latin typeface="Calibri" pitchFamily="34" charset="0"/>
-                <a:ea typeface="Calibri" pitchFamily="34" charset="-122"/>
-                <a:cs typeface="Calibri" pitchFamily="34" charset="-120"/>
-              </a:rPr>
-              <a:t>more than double.</a:t>
-            </a:r>
-            <a:endParaRPr lang="en-US" sz="1600" dirty="0"/>
-          </a:p>
-          <a:p>
-            <a:pPr marL="342900" indent="-342900">
-              <a:spcAft>
-                <a:spcPts val="800"/>
-              </a:spcAft>
-              <a:buSzPct val="100000"/>
+              <a:t> Diesel cars sell for more than double the price of Petrol and CNG models (~₹6.9L vs ~₹3.0L).</a:t>
+            </a:r>
+          </a:p>
+          <a:p>
+            <a:pPr marL="285750" lvl="0" indent="-285750">
+              <a:lnSpc>
+                <a:spcPct val="150000"/>
+              </a:lnSpc>
+              <a:buFont typeface="Arial" panose="020B0604020202020204" pitchFamily="34" charset="0"/>
               <a:buChar char="•"/>
             </a:pPr>
             <a:r>
-              <a:rPr lang="en-US" sz="1600" dirty="0">
-                <a:latin typeface="Calibri" pitchFamily="34" charset="0"/>
-                <a:ea typeface="Calibri" pitchFamily="34" charset="-122"/>
-                <a:cs typeface="Calibri" pitchFamily="34" charset="-120"/>
+              <a:rPr lang="en-IN" sz="1600" b="1" dirty="0">
+                <a:latin typeface="Arial" panose="020B0604020202020204" pitchFamily="34" charset="0"/>
+                <a:cs typeface="Arial" panose="020B0604020202020204" pitchFamily="34" charset="0"/>
               </a:rPr>
-              <a:t>Automatic transmission adds a premium within Petrol (₹4.0L vs ₹3.0L manual).</a:t>
-            </a:r>
-            <a:endParaRPr lang="en-US" sz="1600" dirty="0"/>
-          </a:p>
-          <a:p>
-            <a:pPr marL="342900" indent="-342900">
-              <a:spcAft>
-                <a:spcPts val="800"/>
-              </a:spcAft>
-              <a:buSzPct val="100000"/>
+              <a:t>Automatics cost more:</a:t>
+            </a:r>
+            <a:r>
+              <a:rPr lang="en-IN" sz="1600" dirty="0">
+                <a:latin typeface="Arial" panose="020B0604020202020204" pitchFamily="34" charset="0"/>
+                <a:cs typeface="Arial" panose="020B0604020202020204" pitchFamily="34" charset="0"/>
+              </a:rPr>
+              <a:t> Automatic transmissions add an extra value premium over manual options.</a:t>
+            </a:r>
+          </a:p>
+          <a:p>
+            <a:pPr marL="285750" lvl="0" indent="-285750">
+              <a:lnSpc>
+                <a:spcPct val="150000"/>
+              </a:lnSpc>
+              <a:buFont typeface="Arial" panose="020B0604020202020204" pitchFamily="34" charset="0"/>
               <a:buChar char="•"/>
             </a:pPr>
             <a:r>
-              <a:rPr lang="en-US" sz="1600" dirty="0">
-                <a:latin typeface="Calibri" pitchFamily="34" charset="0"/>
-                <a:ea typeface="Calibri" pitchFamily="34" charset="-122"/>
-                <a:cs typeface="Calibri" pitchFamily="34" charset="-120"/>
+              <a:rPr lang="en-IN" sz="1600" b="1" dirty="0">
+                <a:latin typeface="Arial" panose="020B0604020202020204" pitchFamily="34" charset="0"/>
+                <a:cs typeface="Arial" panose="020B0604020202020204" pitchFamily="34" charset="0"/>
               </a:rPr>
-              <a:t>Caveat: no diesel or CNG automatics exist in this dataset </a:t>
-            </a:r>
-            <a:r>
-              <a:rPr lang="en-US" sz="1600" dirty="0" smtClean="0">
-                <a:latin typeface="Calibri" pitchFamily="34" charset="0"/>
-                <a:ea typeface="Calibri" pitchFamily="34" charset="-122"/>
-                <a:cs typeface="Calibri" pitchFamily="34" charset="-120"/>
+              <a:t>Key takeaway:</a:t>
+            </a:r>
+            <a:r>
+              <a:rPr lang="en-IN" sz="1600" dirty="0">
+                <a:latin typeface="Arial" panose="020B0604020202020204" pitchFamily="34" charset="0"/>
+                <a:cs typeface="Arial" panose="020B0604020202020204" pitchFamily="34" charset="0"/>
               </a:rPr>
-              <a:t>- </a:t>
-            </a:r>
-            <a:r>
-              <a:rPr lang="en-US" sz="1600" dirty="0">
-                <a:latin typeface="Calibri" pitchFamily="34" charset="0"/>
-                <a:ea typeface="Calibri" pitchFamily="34" charset="-122"/>
-                <a:cs typeface="Calibri" pitchFamily="34" charset="-120"/>
-              </a:rPr>
-              <a:t>this reads fuel type, not transmission, in isolation.</a:t>
-            </a:r>
-            <a:endParaRPr lang="en-US" sz="1600" dirty="0"/>
+              <a:t> Fuel type and transmission are major drivers of higher selling prices.</a:t>
+            </a:r>
           </a:p>
         </p:txBody>
       </p:sp>
@@ -23030,7 +23690,7 @@
           <p:cNvPr id="5" name="Picture 4">
             <a:extLst>
               <a:ext uri="{FF2B5EF4-FFF2-40B4-BE49-F238E27FC236}">
-                <a16:creationId xmlns="" xmlns:a16="http://schemas.microsoft.com/office/drawing/2014/main" id="{BBB0C869-7C5C-4070-BD4D-F3FC2DA8F301}"/>
+                <a16:creationId xmlns:a16="http://schemas.microsoft.com/office/drawing/2014/main" xmlns="" id="{BBB0C869-7C5C-4070-BD4D-F3FC2DA8F301}"/>
               </a:ext>
             </a:extLst>
           </p:cNvPr>
@@ -23059,7 +23719,7 @@
           <p:cNvPr id="4" name="Title 3">
             <a:extLst>
               <a:ext uri="{FF2B5EF4-FFF2-40B4-BE49-F238E27FC236}">
-                <a16:creationId xmlns="" xmlns:a16="http://schemas.microsoft.com/office/drawing/2014/main" id="{AFE3A2AF-177E-45E6-A191-0F8523DB7FFA}"/>
+                <a16:creationId xmlns:a16="http://schemas.microsoft.com/office/drawing/2014/main" xmlns="" id="{AFE3A2AF-177E-45E6-A191-0F8523DB7FFA}"/>
               </a:ext>
             </a:extLst>
           </p:cNvPr>
@@ -23099,7 +23759,7 @@
           <p:cNvPr id="7" name="Text Placeholder 30">
             <a:extLst>
               <a:ext uri="{FF2B5EF4-FFF2-40B4-BE49-F238E27FC236}">
-                <a16:creationId xmlns="" xmlns:a16="http://schemas.microsoft.com/office/drawing/2014/main" id="{372426BE-BEE7-4A6D-BCD2-059615BBCE25}"/>
+                <a16:creationId xmlns:a16="http://schemas.microsoft.com/office/drawing/2014/main" xmlns="" id="{372426BE-BEE7-4A6D-BCD2-059615BBCE25}"/>
               </a:ext>
             </a:extLst>
           </p:cNvPr>
@@ -23355,7 +24015,7 @@
           <p:cNvPr id="8" name="Text Placeholder 30">
             <a:extLst>
               <a:ext uri="{FF2B5EF4-FFF2-40B4-BE49-F238E27FC236}">
-                <a16:creationId xmlns="" xmlns:a16="http://schemas.microsoft.com/office/drawing/2014/main" id="{E61E227A-5883-4C77-B25A-46A22FFDF41F}"/>
+                <a16:creationId xmlns:a16="http://schemas.microsoft.com/office/drawing/2014/main" xmlns="" id="{E61E227A-5883-4C77-B25A-46A22FFDF41F}"/>
               </a:ext>
             </a:extLst>
           </p:cNvPr>
@@ -23611,7 +24271,7 @@
           <p:cNvPr id="9" name="Title 3">
             <a:extLst>
               <a:ext uri="{FF2B5EF4-FFF2-40B4-BE49-F238E27FC236}">
-                <a16:creationId xmlns="" xmlns:a16="http://schemas.microsoft.com/office/drawing/2014/main" id="{E25373E9-1A26-4A40-9897-E42DE485D8E3}"/>
+                <a16:creationId xmlns:a16="http://schemas.microsoft.com/office/drawing/2014/main" xmlns="" id="{E25373E9-1A26-4A40-9897-E42DE485D8E3}"/>
               </a:ext>
             </a:extLst>
           </p:cNvPr>
@@ -23723,7 +24383,7 @@
           <p:cNvPr id="10" name="Text Placeholder 1">
             <a:extLst>
               <a:ext uri="{FF2B5EF4-FFF2-40B4-BE49-F238E27FC236}">
-                <a16:creationId xmlns="" xmlns:a16="http://schemas.microsoft.com/office/drawing/2014/main" id="{B19D8AC7-3787-4ADB-9212-0808F015C2DD}"/>
+                <a16:creationId xmlns:a16="http://schemas.microsoft.com/office/drawing/2014/main" xmlns="" id="{B19D8AC7-3787-4ADB-9212-0808F015C2DD}"/>
               </a:ext>
             </a:extLst>
           </p:cNvPr>
@@ -23759,8 +24419,8 @@
         </p:nvSpPr>
         <p:spPr>
           <a:xfrm>
-            <a:off x="512690" y="4915947"/>
-            <a:ext cx="7666008" cy="1723549"/>
+            <a:off x="422959" y="4743449"/>
+            <a:ext cx="8223096" cy="1938992"/>
           </a:xfrm>
           <a:prstGeom prst="rect">
             <a:avLst/>
@@ -23772,98 +24432,87 @@
           </a:bodyPr>
           <a:lstStyle/>
           <a:p>
-            <a:pPr marL="342900" indent="-342900">
-              <a:spcAft>
-                <a:spcPts val="600"/>
-              </a:spcAft>
-              <a:buSzPct val="100000"/>
+            <a:pPr marL="285750" lvl="0" indent="-285750">
+              <a:lnSpc>
+                <a:spcPct val="150000"/>
+              </a:lnSpc>
+              <a:buFont typeface="Arial" panose="020B0604020202020204" pitchFamily="34" charset="0"/>
               <a:buChar char="•"/>
             </a:pPr>
             <a:r>
-              <a:rPr lang="en-US" sz="1600" dirty="0" err="1">
-                <a:latin typeface="Calibri" pitchFamily="34" charset="0"/>
-                <a:ea typeface="Calibri" pitchFamily="34" charset="-122"/>
-                <a:cs typeface="Calibri" pitchFamily="34" charset="-120"/>
+              <a:rPr lang="en-IN" sz="1600" b="1" dirty="0">
+                <a:latin typeface="Arial" panose="020B0604020202020204" pitchFamily="34" charset="0"/>
+                <a:cs typeface="Arial" panose="020B0604020202020204" pitchFamily="34" charset="0"/>
               </a:rPr>
-              <a:t>Kms</a:t>
-            </a:r>
-            <a:r>
-              <a:rPr lang="en-US" sz="1600" dirty="0">
-                <a:latin typeface="Calibri" pitchFamily="34" charset="0"/>
-                <a:ea typeface="Calibri" pitchFamily="34" charset="-122"/>
-                <a:cs typeface="Calibri" pitchFamily="34" charset="-120"/>
+              <a:t>Total </a:t>
+            </a:r>
+            <a:r>
+              <a:rPr lang="en-IN" sz="1600" b="1" dirty="0" err="1">
+                <a:latin typeface="Arial" panose="020B0604020202020204" pitchFamily="34" charset="0"/>
+                <a:cs typeface="Arial" panose="020B0604020202020204" pitchFamily="34" charset="0"/>
               </a:rPr>
-              <a:t> Driven vs Selling Price correlation is ≈ 0.00 </a:t>
-            </a:r>
-            <a:r>
-              <a:rPr lang="en-US" sz="1600" dirty="0" smtClean="0">
-                <a:latin typeface="Calibri" pitchFamily="34" charset="0"/>
-                <a:ea typeface="Calibri" pitchFamily="34" charset="-122"/>
-                <a:cs typeface="Calibri" pitchFamily="34" charset="-120"/>
+              <a:t>kilometers</a:t>
+            </a:r>
+            <a:r>
+              <a:rPr lang="en-IN" sz="1600" b="1" dirty="0">
+                <a:latin typeface="Arial" panose="020B0604020202020204" pitchFamily="34" charset="0"/>
+                <a:cs typeface="Arial" panose="020B0604020202020204" pitchFamily="34" charset="0"/>
               </a:rPr>
-              <a:t>- </a:t>
-            </a:r>
-            <a:r>
-              <a:rPr lang="en-US" sz="1600" dirty="0">
-                <a:latin typeface="Calibri" pitchFamily="34" charset="0"/>
-                <a:ea typeface="Calibri" pitchFamily="34" charset="-122"/>
-                <a:cs typeface="Calibri" pitchFamily="34" charset="-120"/>
+              <a:t> don't tell the whole story:</a:t>
+            </a:r>
+            <a:r>
+              <a:rPr lang="en-IN" sz="1600" dirty="0">
+                <a:latin typeface="Arial" panose="020B0604020202020204" pitchFamily="34" charset="0"/>
+                <a:cs typeface="Arial" panose="020B0604020202020204" pitchFamily="34" charset="0"/>
               </a:rPr>
-              <a:t>raw mileage barely moves price in a straight line.</a:t>
-            </a:r>
-            <a:endParaRPr lang="en-US" sz="1600" dirty="0"/>
-          </a:p>
-          <a:p>
-            <a:pPr marL="342900" indent="-342900">
-              <a:spcAft>
-                <a:spcPts val="600"/>
-              </a:spcAft>
-              <a:buSzPct val="100000"/>
+              <a:t> Raw mileage alone does not cause a direct, straight-line price drop.</a:t>
+            </a:r>
+          </a:p>
+          <a:p>
+            <a:pPr marL="285750" lvl="0" indent="-285750">
+              <a:lnSpc>
+                <a:spcPct val="150000"/>
+              </a:lnSpc>
+              <a:buFont typeface="Arial" panose="020B0604020202020204" pitchFamily="34" charset="0"/>
               <a:buChar char="•"/>
             </a:pPr>
             <a:r>
-              <a:rPr lang="en-US" sz="1600" dirty="0">
-                <a:latin typeface="Calibri" pitchFamily="34" charset="0"/>
-                <a:ea typeface="Calibri" pitchFamily="34" charset="-122"/>
-                <a:cs typeface="Calibri" pitchFamily="34" charset="-120"/>
+              <a:rPr lang="en-IN" sz="1600" b="1" dirty="0">
+                <a:latin typeface="Arial" panose="020B0604020202020204" pitchFamily="34" charset="0"/>
+                <a:cs typeface="Arial" panose="020B0604020202020204" pitchFamily="34" charset="0"/>
               </a:rPr>
-              <a:t>But depreciation rises steadily across mileage buckets (0–25k → 75k–100k) </a:t>
-            </a:r>
-            <a:r>
-              <a:rPr lang="en-US" sz="1600" dirty="0" smtClean="0">
-                <a:latin typeface="Calibri" pitchFamily="34" charset="0"/>
-                <a:ea typeface="Calibri" pitchFamily="34" charset="-122"/>
-                <a:cs typeface="Calibri" pitchFamily="34" charset="-120"/>
+              <a:t>Price drops happen in brackets:</a:t>
+            </a:r>
+            <a:r>
+              <a:rPr lang="en-IN" sz="1600" dirty="0">
+                <a:latin typeface="Arial" panose="020B0604020202020204" pitchFamily="34" charset="0"/>
+                <a:cs typeface="Arial" panose="020B0604020202020204" pitchFamily="34" charset="0"/>
               </a:rPr>
-              <a:t>- the </a:t>
-            </a:r>
-            <a:r>
-              <a:rPr lang="en-US" sz="1600" dirty="0">
-                <a:latin typeface="Calibri" pitchFamily="34" charset="0"/>
-                <a:ea typeface="Calibri" pitchFamily="34" charset="-122"/>
-                <a:cs typeface="Calibri" pitchFamily="34" charset="-120"/>
-              </a:rPr>
-              <a:t>relationship is non-linear, not absent.</a:t>
-            </a:r>
-            <a:endParaRPr lang="en-US" sz="1600" dirty="0"/>
-          </a:p>
-          <a:p>
-            <a:pPr marL="342900" indent="-342900">
-              <a:spcAft>
-                <a:spcPts val="600"/>
-              </a:spcAft>
-              <a:buSzPct val="100000"/>
+              <a:t> Significant depreciation occurs once a car crosses key mileage thresholds, especially between 75k–100k km.</a:t>
+            </a:r>
+          </a:p>
+          <a:p>
+            <a:pPr marL="285750" lvl="0" indent="-285750">
+              <a:lnSpc>
+                <a:spcPct val="150000"/>
+              </a:lnSpc>
+              <a:buFont typeface="Arial" panose="020B0604020202020204" pitchFamily="34" charset="0"/>
               <a:buChar char="•"/>
             </a:pPr>
             <a:r>
-              <a:rPr lang="en-US" sz="1600" dirty="0">
-                <a:latin typeface="Calibri" pitchFamily="34" charset="0"/>
-                <a:ea typeface="Calibri" pitchFamily="34" charset="-122"/>
-                <a:cs typeface="Calibri" pitchFamily="34" charset="-120"/>
+              <a:rPr lang="en-IN" sz="1600" b="1" dirty="0">
+                <a:latin typeface="Arial" panose="020B0604020202020204" pitchFamily="34" charset="0"/>
+                <a:cs typeface="Arial" panose="020B0604020202020204" pitchFamily="34" charset="0"/>
               </a:rPr>
-              <a:t>One 500,000 km outlier distorts the raw scatter; bucketed mileage is the safer lens for pricing.</a:t>
-            </a:r>
-            <a:endParaRPr lang="en-US" sz="1600" dirty="0"/>
+              <a:t>Key takeaway:</a:t>
+            </a:r>
+            <a:r>
+              <a:rPr lang="en-IN" sz="1600" dirty="0">
+                <a:latin typeface="Arial" panose="020B0604020202020204" pitchFamily="34" charset="0"/>
+                <a:cs typeface="Arial" panose="020B0604020202020204" pitchFamily="34" charset="0"/>
+              </a:rPr>
+              <a:t> Grouping mileage into ranges is a safer way to evaluate value loss.</a:t>
+            </a:r>
           </a:p>
         </p:txBody>
       </p:sp>
@@ -25515,21 +26164,21 @@
 </file>
 
 <file path=customXml/item2.xml><?xml version="1.0" encoding="utf-8"?>
+<p:properties xmlns:p="http://schemas.microsoft.com/office/2006/metadata/properties" xmlns:xsi="http://www.w3.org/2001/XMLSchema-instance" xmlns:pc="http://schemas.microsoft.com/office/infopath/2007/PartnerControls">
+  <documentManagement>
+    <Status xmlns="71af3243-3dd4-4a8d-8c0d-dd76da1f02a5">Not started</Status>
+    <MediaServiceKeyPoints xmlns="71af3243-3dd4-4a8d-8c0d-dd76da1f02a5" xsi:nil="true"/>
+  </documentManagement>
+</p:properties>
+</file>
+
+<file path=customXml/item3.xml><?xml version="1.0" encoding="utf-8"?>
 <?mso-contentType ?>
 <FormTemplates xmlns="http://schemas.microsoft.com/sharepoint/v3/contenttype/forms">
   <Display>DocumentLibraryForm</Display>
   <Edit>DocumentLibraryForm</Edit>
   <New>DocumentLibraryForm</New>
 </FormTemplates>
-</file>
-
-<file path=customXml/item3.xml><?xml version="1.0" encoding="utf-8"?>
-<p:properties xmlns:p="http://schemas.microsoft.com/office/2006/metadata/properties" xmlns:xsi="http://www.w3.org/2001/XMLSchema-instance" xmlns:pc="http://schemas.microsoft.com/office/infopath/2007/PartnerControls">
-  <documentManagement>
-    <Status xmlns="71af3243-3dd4-4a8d-8c0d-dd76da1f02a5">Not started</Status>
-    <MediaServiceKeyPoints xmlns="71af3243-3dd4-4a8d-8c0d-dd76da1f02a5" xsi:nil="true"/>
-  </documentManagement>
-</p:properties>
 </file>
 
 <file path=customXml/itemProps1.xml><?xml version="1.0" encoding="utf-8"?>
@@ -25552,14 +26201,6 @@
 </file>
 
 <file path=customXml/itemProps2.xml><?xml version="1.0" encoding="utf-8"?>
-<ds:datastoreItem xmlns:ds="http://schemas.openxmlformats.org/officeDocument/2006/customXml" ds:itemID="{05D99ABA-76CE-4A8E-B5F0-C051B96628DE}">
-  <ds:schemaRefs>
-    <ds:schemaRef ds:uri="http://schemas.microsoft.com/sharepoint/v3/contenttype/forms"/>
-  </ds:schemaRefs>
-</ds:datastoreItem>
-</file>
-
-<file path=customXml/itemProps3.xml><?xml version="1.0" encoding="utf-8"?>
 <ds:datastoreItem xmlns:ds="http://schemas.openxmlformats.org/officeDocument/2006/customXml" ds:itemID="{4DEA9014-ED64-4558-B1E1-D03F0EE32BEB}">
   <ds:schemaRefs>
     <ds:schemaRef ds:uri="http://schemas.microsoft.com/office/2006/metadata/properties"/>
@@ -25567,4 +26208,12 @@
     <ds:schemaRef ds:uri="71af3243-3dd4-4a8d-8c0d-dd76da1f02a5"/>
   </ds:schemaRefs>
 </ds:datastoreItem>
+</file>
+
+<file path=customXml/itemProps3.xml><?xml version="1.0" encoding="utf-8"?>
+<ds:datastoreItem xmlns:ds="http://schemas.openxmlformats.org/officeDocument/2006/customXml" ds:itemID="{05D99ABA-76CE-4A8E-B5F0-C051B96628DE}">
+  <ds:schemaRefs>
+    <ds:schemaRef ds:uri="http://schemas.microsoft.com/sharepoint/v3/contenttype/forms"/>
+  </ds:schemaRefs>
+</ds:datastoreItem>
 </file>
--- a/docs/Car Market Trends Analysis - Presentation.pptx
+++ b/docs/Car Market Trends Analysis - Presentation.pptx
@@ -194,7 +194,7 @@
           <p:cNvPr id="2" name="Header Placeholder 1">
             <a:extLst>
               <a:ext uri="{FF2B5EF4-FFF2-40B4-BE49-F238E27FC236}">
-                <a16:creationId xmlns:a16="http://schemas.microsoft.com/office/drawing/2014/main" xmlns="" id="{B76F666D-E0C2-435B-BAA8-9287F9E5D38A}"/>
+                <a16:creationId xmlns="" xmlns:a16="http://schemas.microsoft.com/office/drawing/2014/main" id="{B76F666D-E0C2-435B-BAA8-9287F9E5D38A}"/>
               </a:ext>
             </a:extLst>
           </p:cNvPr>
@@ -231,7 +231,7 @@
           <p:cNvPr id="3" name="Date Placeholder 2">
             <a:extLst>
               <a:ext uri="{FF2B5EF4-FFF2-40B4-BE49-F238E27FC236}">
-                <a16:creationId xmlns:a16="http://schemas.microsoft.com/office/drawing/2014/main" xmlns="" id="{19FEBCAF-CB3F-4928-91AA-D61472F880C0}"/>
+                <a16:creationId xmlns="" xmlns:a16="http://schemas.microsoft.com/office/drawing/2014/main" id="{19FEBCAF-CB3F-4928-91AA-D61472F880C0}"/>
               </a:ext>
             </a:extLst>
           </p:cNvPr>
@@ -261,7 +261,7 @@
           <a:p>
             <a:fld id="{EF1077DB-935E-4A0A-947A-D283B9F9F452}" type="datetimeFigureOut">
               <a:rPr lang="en-US" smtClean="0"/>
-              <a:t>9/9/2026</a:t>
+              <a:t>9/10/2026</a:t>
             </a:fld>
             <a:endParaRPr lang="en-US" dirty="0"/>
           </a:p>
@@ -272,7 +272,7 @@
           <p:cNvPr id="4" name="Footer Placeholder 3">
             <a:extLst>
               <a:ext uri="{FF2B5EF4-FFF2-40B4-BE49-F238E27FC236}">
-                <a16:creationId xmlns:a16="http://schemas.microsoft.com/office/drawing/2014/main" xmlns="" id="{69256698-63C6-4CCC-81CB-EA5604C30F1E}"/>
+                <a16:creationId xmlns="" xmlns:a16="http://schemas.microsoft.com/office/drawing/2014/main" id="{69256698-63C6-4CCC-81CB-EA5604C30F1E}"/>
               </a:ext>
             </a:extLst>
           </p:cNvPr>
@@ -309,7 +309,7 @@
           <p:cNvPr id="5" name="Slide Number Placeholder 4">
             <a:extLst>
               <a:ext uri="{FF2B5EF4-FFF2-40B4-BE49-F238E27FC236}">
-                <a16:creationId xmlns:a16="http://schemas.microsoft.com/office/drawing/2014/main" xmlns="" id="{B2467FDA-05D7-4760-A373-5D6AEAAF4278}"/>
+                <a16:creationId xmlns="" xmlns:a16="http://schemas.microsoft.com/office/drawing/2014/main" id="{B2467FDA-05D7-4760-A373-5D6AEAAF4278}"/>
               </a:ext>
             </a:extLst>
           </p:cNvPr>
@@ -438,7 +438,7 @@
           <a:p>
             <a:fld id="{2D9EC30E-1A71-4188-9BE7-E2A64929A436}" type="datetimeFigureOut">
               <a:rPr lang="en-US" noProof="0" smtClean="0"/>
-              <a:t>9/9/2026</a:t>
+              <a:t>9/10/2026</a:t>
             </a:fld>
             <a:endParaRPr lang="en-US" noProof="0" dirty="0"/>
           </a:p>
@@ -1535,7 +1535,7 @@
             <a:fld id="{B61BEF0D-F0BB-DE4B-95CE-6DB70DBA9567}" type="datetimeFigureOut">
               <a:rPr lang="en-US" smtClean="0"/>
               <a:pPr/>
-              <a:t>9/9/2026</a:t>
+              <a:t>9/10/2026</a:t>
             </a:fld>
             <a:endParaRPr lang="en-US" dirty="0"/>
           </a:p>
@@ -1789,7 +1789,7 @@
             <a:fld id="{B61BEF0D-F0BB-DE4B-95CE-6DB70DBA9567}" type="datetimeFigureOut">
               <a:rPr lang="en-US" smtClean="0"/>
               <a:pPr/>
-              <a:t>9/9/2026</a:t>
+              <a:t>9/10/2026</a:t>
             </a:fld>
             <a:endParaRPr lang="en-US" dirty="0"/>
           </a:p>
@@ -2106,7 +2106,7 @@
             <a:fld id="{B61BEF0D-F0BB-DE4B-95CE-6DB70DBA9567}" type="datetimeFigureOut">
               <a:rPr lang="en-US" smtClean="0"/>
               <a:pPr/>
-              <a:t>9/9/2026</a:t>
+              <a:t>9/10/2026</a:t>
             </a:fld>
             <a:endParaRPr lang="en-US" dirty="0"/>
           </a:p>
@@ -2442,7 +2442,7 @@
             <a:fld id="{B61BEF0D-F0BB-DE4B-95CE-6DB70DBA9567}" type="datetimeFigureOut">
               <a:rPr lang="en-US" smtClean="0"/>
               <a:pPr/>
-              <a:t>9/9/2026</a:t>
+              <a:t>9/10/2026</a:t>
             </a:fld>
             <a:endParaRPr lang="en-US" dirty="0"/>
           </a:p>
@@ -2759,7 +2759,7 @@
             <a:fld id="{B61BEF0D-F0BB-DE4B-95CE-6DB70DBA9567}" type="datetimeFigureOut">
               <a:rPr lang="en-US" smtClean="0"/>
               <a:pPr/>
-              <a:t>9/9/2026</a:t>
+              <a:t>9/10/2026</a:t>
             </a:fld>
             <a:endParaRPr lang="en-US" dirty="0"/>
           </a:p>
@@ -3155,7 +3155,7 @@
             <a:fld id="{B61BEF0D-F0BB-DE4B-95CE-6DB70DBA9567}" type="datetimeFigureOut">
               <a:rPr lang="en-US" smtClean="0"/>
               <a:pPr/>
-              <a:t>9/9/2026</a:t>
+              <a:t>9/10/2026</a:t>
             </a:fld>
             <a:endParaRPr lang="en-US" dirty="0"/>
           </a:p>
@@ -3327,7 +3327,7 @@
           <a:p>
             <a:fld id="{55C6B4A9-1611-4792-9094-5F34BCA07E0B}" type="datetimeFigureOut">
               <a:rPr lang="en-US" smtClean="0"/>
-              <a:t>9/9/2026</a:t>
+              <a:t>9/10/2026</a:t>
             </a:fld>
             <a:endParaRPr lang="en-US" dirty="0"/>
           </a:p>
@@ -3509,7 +3509,7 @@
             <a:fld id="{B61BEF0D-F0BB-DE4B-95CE-6DB70DBA9567}" type="datetimeFigureOut">
               <a:rPr lang="en-US" smtClean="0"/>
               <a:pPr/>
-              <a:t>9/9/2026</a:t>
+              <a:t>9/10/2026</a:t>
             </a:fld>
             <a:endParaRPr lang="en-US" dirty="0"/>
           </a:p>
@@ -3594,7 +3594,7 @@
           <p:cNvPr id="11" name="Text Placeholder 10">
             <a:extLst>
               <a:ext uri="{FF2B5EF4-FFF2-40B4-BE49-F238E27FC236}">
-                <a16:creationId xmlns:a16="http://schemas.microsoft.com/office/drawing/2014/main" xmlns="" id="{6FDA3C6F-5F6A-4D64-8BFE-AFFF58B1A047}"/>
+                <a16:creationId xmlns="" xmlns:a16="http://schemas.microsoft.com/office/drawing/2014/main" id="{6FDA3C6F-5F6A-4D64-8BFE-AFFF58B1A047}"/>
               </a:ext>
             </a:extLst>
           </p:cNvPr>
@@ -3652,7 +3652,7 @@
           <p:cNvPr id="15" name="Hexagon 14">
             <a:extLst>
               <a:ext uri="{FF2B5EF4-FFF2-40B4-BE49-F238E27FC236}">
-                <a16:creationId xmlns:a16="http://schemas.microsoft.com/office/drawing/2014/main" xmlns="" id="{AC159667-7690-4645-986D-BE501438455F}"/>
+                <a16:creationId xmlns="" xmlns:a16="http://schemas.microsoft.com/office/drawing/2014/main" id="{AC159667-7690-4645-986D-BE501438455F}"/>
               </a:ext>
             </a:extLst>
           </p:cNvPr>
@@ -3704,7 +3704,7 @@
           <p:cNvPr id="16" name="Hexagon 15">
             <a:extLst>
               <a:ext uri="{FF2B5EF4-FFF2-40B4-BE49-F238E27FC236}">
-                <a16:creationId xmlns:a16="http://schemas.microsoft.com/office/drawing/2014/main" xmlns="" id="{54667EE4-E77F-453B-BF8B-B1EE2AE80715}"/>
+                <a16:creationId xmlns="" xmlns:a16="http://schemas.microsoft.com/office/drawing/2014/main" id="{54667EE4-E77F-453B-BF8B-B1EE2AE80715}"/>
               </a:ext>
             </a:extLst>
           </p:cNvPr>
@@ -3756,7 +3756,7 @@
           <p:cNvPr id="17" name="Hexagon 16">
             <a:extLst>
               <a:ext uri="{FF2B5EF4-FFF2-40B4-BE49-F238E27FC236}">
-                <a16:creationId xmlns:a16="http://schemas.microsoft.com/office/drawing/2014/main" xmlns="" id="{FC050232-A229-425F-BFC8-D50374F2D171}"/>
+                <a16:creationId xmlns="" xmlns:a16="http://schemas.microsoft.com/office/drawing/2014/main" id="{FC050232-A229-425F-BFC8-D50374F2D171}"/>
               </a:ext>
             </a:extLst>
           </p:cNvPr>
@@ -3808,7 +3808,7 @@
           <p:cNvPr id="18" name="Hexagon 17">
             <a:extLst>
               <a:ext uri="{FF2B5EF4-FFF2-40B4-BE49-F238E27FC236}">
-                <a16:creationId xmlns:a16="http://schemas.microsoft.com/office/drawing/2014/main" xmlns="" id="{53E4EBC7-340A-43A5-9E23-4B73A6F700B6}"/>
+                <a16:creationId xmlns="" xmlns:a16="http://schemas.microsoft.com/office/drawing/2014/main" id="{53E4EBC7-340A-43A5-9E23-4B73A6F700B6}"/>
               </a:ext>
             </a:extLst>
           </p:cNvPr>
@@ -3860,7 +3860,7 @@
           <p:cNvPr id="19" name="Picture Placeholder 18">
             <a:extLst>
               <a:ext uri="{FF2B5EF4-FFF2-40B4-BE49-F238E27FC236}">
-                <a16:creationId xmlns:a16="http://schemas.microsoft.com/office/drawing/2014/main" xmlns="" id="{1ED0E31A-F0A3-481D-8D9C-E3C4531FD21D}"/>
+                <a16:creationId xmlns="" xmlns:a16="http://schemas.microsoft.com/office/drawing/2014/main" id="{1ED0E31A-F0A3-481D-8D9C-E3C4531FD21D}"/>
               </a:ext>
             </a:extLst>
           </p:cNvPr>
@@ -4061,7 +4061,7 @@
           <p:cNvPr id="2" name="Title 1">
             <a:extLst>
               <a:ext uri="{FF2B5EF4-FFF2-40B4-BE49-F238E27FC236}">
-                <a16:creationId xmlns:a16="http://schemas.microsoft.com/office/drawing/2014/main" xmlns="" id="{03E68100-C56F-4515-A4FD-3F301797E78F}"/>
+                <a16:creationId xmlns="" xmlns:a16="http://schemas.microsoft.com/office/drawing/2014/main" id="{03E68100-C56F-4515-A4FD-3F301797E78F}"/>
               </a:ext>
             </a:extLst>
           </p:cNvPr>
@@ -4147,7 +4147,7 @@
           <p:cNvPr id="10" name="Oval 9">
             <a:extLst>
               <a:ext uri="{FF2B5EF4-FFF2-40B4-BE49-F238E27FC236}">
-                <a16:creationId xmlns:a16="http://schemas.microsoft.com/office/drawing/2014/main" xmlns="" id="{24FAA9D0-7C9C-4043-9931-A15819ABB9B5}"/>
+                <a16:creationId xmlns="" xmlns:a16="http://schemas.microsoft.com/office/drawing/2014/main" id="{24FAA9D0-7C9C-4043-9931-A15819ABB9B5}"/>
               </a:ext>
             </a:extLst>
           </p:cNvPr>
@@ -4203,7 +4203,7 @@
           <p:cNvPr id="14" name="Oval 13">
             <a:extLst>
               <a:ext uri="{FF2B5EF4-FFF2-40B4-BE49-F238E27FC236}">
-                <a16:creationId xmlns:a16="http://schemas.microsoft.com/office/drawing/2014/main" xmlns="" id="{E232AB2D-843E-4B5F-8793-6A263DA356BB}"/>
+                <a16:creationId xmlns="" xmlns:a16="http://schemas.microsoft.com/office/drawing/2014/main" id="{E232AB2D-843E-4B5F-8793-6A263DA356BB}"/>
               </a:ext>
             </a:extLst>
           </p:cNvPr>
@@ -4259,7 +4259,7 @@
           <p:cNvPr id="16" name="Oval 15">
             <a:extLst>
               <a:ext uri="{FF2B5EF4-FFF2-40B4-BE49-F238E27FC236}">
-                <a16:creationId xmlns:a16="http://schemas.microsoft.com/office/drawing/2014/main" xmlns="" id="{FA75A12B-C399-4072-BD69-D872D2C2AD1F}"/>
+                <a16:creationId xmlns="" xmlns:a16="http://schemas.microsoft.com/office/drawing/2014/main" id="{FA75A12B-C399-4072-BD69-D872D2C2AD1F}"/>
               </a:ext>
             </a:extLst>
           </p:cNvPr>
@@ -4315,7 +4315,7 @@
           <p:cNvPr id="23" name="Picture Placeholder 22">
             <a:extLst>
               <a:ext uri="{FF2B5EF4-FFF2-40B4-BE49-F238E27FC236}">
-                <a16:creationId xmlns:a16="http://schemas.microsoft.com/office/drawing/2014/main" xmlns="" id="{423AE48B-50E9-4BEA-B66A-B2D2B9CCFE9C}"/>
+                <a16:creationId xmlns="" xmlns:a16="http://schemas.microsoft.com/office/drawing/2014/main" id="{423AE48B-50E9-4BEA-B66A-B2D2B9CCFE9C}"/>
               </a:ext>
             </a:extLst>
           </p:cNvPr>
@@ -4467,7 +4467,7 @@
           <p:cNvPr id="27" name="Text Placeholder 26">
             <a:extLst>
               <a:ext uri="{FF2B5EF4-FFF2-40B4-BE49-F238E27FC236}">
-                <a16:creationId xmlns:a16="http://schemas.microsoft.com/office/drawing/2014/main" xmlns="" id="{282D3E62-6D1A-4E9D-BE54-2EED9BF429A4}"/>
+                <a16:creationId xmlns="" xmlns:a16="http://schemas.microsoft.com/office/drawing/2014/main" id="{282D3E62-6D1A-4E9D-BE54-2EED9BF429A4}"/>
               </a:ext>
             </a:extLst>
           </p:cNvPr>
@@ -4548,7 +4548,7 @@
           <p:cNvPr id="8" name="Title 1">
             <a:extLst>
               <a:ext uri="{FF2B5EF4-FFF2-40B4-BE49-F238E27FC236}">
-                <a16:creationId xmlns:a16="http://schemas.microsoft.com/office/drawing/2014/main" xmlns="" id="{DEB8F0E5-B89F-48AD-87BD-534EA9463CD3}"/>
+                <a16:creationId xmlns="" xmlns:a16="http://schemas.microsoft.com/office/drawing/2014/main" id="{DEB8F0E5-B89F-48AD-87BD-534EA9463CD3}"/>
               </a:ext>
             </a:extLst>
           </p:cNvPr>
@@ -4634,7 +4634,7 @@
           <p:cNvPr id="10" name="Text Placeholder 26">
             <a:extLst>
               <a:ext uri="{FF2B5EF4-FFF2-40B4-BE49-F238E27FC236}">
-                <a16:creationId xmlns:a16="http://schemas.microsoft.com/office/drawing/2014/main" xmlns="" id="{4AA38E8C-A334-4183-8ABC-112B8517F487}"/>
+                <a16:creationId xmlns="" xmlns:a16="http://schemas.microsoft.com/office/drawing/2014/main" id="{4AA38E8C-A334-4183-8ABC-112B8517F487}"/>
               </a:ext>
             </a:extLst>
           </p:cNvPr>
@@ -4712,7 +4712,7 @@
           <p:cNvPr id="19" name="Rectangle 18">
             <a:extLst>
               <a:ext uri="{FF2B5EF4-FFF2-40B4-BE49-F238E27FC236}">
-                <a16:creationId xmlns:a16="http://schemas.microsoft.com/office/drawing/2014/main" xmlns="" id="{B80624A4-5116-4AAF-8C31-C25D1DB16FEC}"/>
+                <a16:creationId xmlns="" xmlns:a16="http://schemas.microsoft.com/office/drawing/2014/main" id="{B80624A4-5116-4AAF-8C31-C25D1DB16FEC}"/>
               </a:ext>
             </a:extLst>
           </p:cNvPr>
@@ -4764,7 +4764,7 @@
           <p:cNvPr id="21" name="Rectangle 20">
             <a:extLst>
               <a:ext uri="{FF2B5EF4-FFF2-40B4-BE49-F238E27FC236}">
-                <a16:creationId xmlns:a16="http://schemas.microsoft.com/office/drawing/2014/main" xmlns="" id="{1D07EC8A-6024-4DEA-9C4D-AE4228E17854}"/>
+                <a16:creationId xmlns="" xmlns:a16="http://schemas.microsoft.com/office/drawing/2014/main" id="{1D07EC8A-6024-4DEA-9C4D-AE4228E17854}"/>
               </a:ext>
             </a:extLst>
           </p:cNvPr>
@@ -4816,7 +4816,7 @@
           <p:cNvPr id="23" name="Rectangle 22">
             <a:extLst>
               <a:ext uri="{FF2B5EF4-FFF2-40B4-BE49-F238E27FC236}">
-                <a16:creationId xmlns:a16="http://schemas.microsoft.com/office/drawing/2014/main" xmlns="" id="{D1C8FAEF-DF78-48CC-AEEF-F9B802055C05}"/>
+                <a16:creationId xmlns="" xmlns:a16="http://schemas.microsoft.com/office/drawing/2014/main" id="{D1C8FAEF-DF78-48CC-AEEF-F9B802055C05}"/>
               </a:ext>
             </a:extLst>
           </p:cNvPr>
@@ -4868,7 +4868,7 @@
           <p:cNvPr id="11" name="Picture Placeholder 10">
             <a:extLst>
               <a:ext uri="{FF2B5EF4-FFF2-40B4-BE49-F238E27FC236}">
-                <a16:creationId xmlns:a16="http://schemas.microsoft.com/office/drawing/2014/main" xmlns="" id="{566F72D6-AEEE-4CF3-8136-F6782F1E489E}"/>
+                <a16:creationId xmlns="" xmlns:a16="http://schemas.microsoft.com/office/drawing/2014/main" id="{566F72D6-AEEE-4CF3-8136-F6782F1E489E}"/>
               </a:ext>
             </a:extLst>
           </p:cNvPr>
@@ -5054,7 +5054,7 @@
           <p:cNvPr id="2" name="Title 1">
             <a:extLst>
               <a:ext uri="{FF2B5EF4-FFF2-40B4-BE49-F238E27FC236}">
-                <a16:creationId xmlns:a16="http://schemas.microsoft.com/office/drawing/2014/main" xmlns="" id="{459DADC7-BE21-4434-A6E4-BAF809005389}"/>
+                <a16:creationId xmlns="" xmlns:a16="http://schemas.microsoft.com/office/drawing/2014/main" id="{459DADC7-BE21-4434-A6E4-BAF809005389}"/>
               </a:ext>
             </a:extLst>
           </p:cNvPr>
@@ -5238,7 +5238,7 @@
             <a:fld id="{B61BEF0D-F0BB-DE4B-95CE-6DB70DBA9567}" type="datetimeFigureOut">
               <a:rPr lang="en-US" smtClean="0"/>
               <a:pPr/>
-              <a:t>9/9/2026</a:t>
+              <a:t>9/10/2026</a:t>
             </a:fld>
             <a:endParaRPr lang="en-US" dirty="0"/>
           </a:p>
@@ -5323,7 +5323,7 @@
           <p:cNvPr id="39" name="Picture Placeholder 38">
             <a:extLst>
               <a:ext uri="{FF2B5EF4-FFF2-40B4-BE49-F238E27FC236}">
-                <a16:creationId xmlns:a16="http://schemas.microsoft.com/office/drawing/2014/main" xmlns="" id="{CF421413-161E-4B36-B693-FB38DF14EDAB}"/>
+                <a16:creationId xmlns="" xmlns:a16="http://schemas.microsoft.com/office/drawing/2014/main" id="{CF421413-161E-4B36-B693-FB38DF14EDAB}"/>
               </a:ext>
             </a:extLst>
           </p:cNvPr>
@@ -5426,7 +5426,7 @@
           <p:cNvPr id="38" name="Picture Placeholder 37">
             <a:extLst>
               <a:ext uri="{FF2B5EF4-FFF2-40B4-BE49-F238E27FC236}">
-                <a16:creationId xmlns:a16="http://schemas.microsoft.com/office/drawing/2014/main" xmlns="" id="{B5D207AE-9C9C-410A-9F31-2402BAD6DDFF}"/>
+                <a16:creationId xmlns="" xmlns:a16="http://schemas.microsoft.com/office/drawing/2014/main" id="{B5D207AE-9C9C-410A-9F31-2402BAD6DDFF}"/>
               </a:ext>
             </a:extLst>
           </p:cNvPr>
@@ -5529,7 +5529,7 @@
           <p:cNvPr id="40" name="Picture Placeholder 39">
             <a:extLst>
               <a:ext uri="{FF2B5EF4-FFF2-40B4-BE49-F238E27FC236}">
-                <a16:creationId xmlns:a16="http://schemas.microsoft.com/office/drawing/2014/main" xmlns="" id="{DE3344FC-C4DE-481F-9C31-667EDD563C47}"/>
+                <a16:creationId xmlns="" xmlns:a16="http://schemas.microsoft.com/office/drawing/2014/main" id="{DE3344FC-C4DE-481F-9C31-667EDD563C47}"/>
               </a:ext>
             </a:extLst>
           </p:cNvPr>
@@ -5632,7 +5632,7 @@
           <p:cNvPr id="41" name="Picture Placeholder 40">
             <a:extLst>
               <a:ext uri="{FF2B5EF4-FFF2-40B4-BE49-F238E27FC236}">
-                <a16:creationId xmlns:a16="http://schemas.microsoft.com/office/drawing/2014/main" xmlns="" id="{59094D7D-3613-49C1-BB58-A65B41A9738D}"/>
+                <a16:creationId xmlns="" xmlns:a16="http://schemas.microsoft.com/office/drawing/2014/main" id="{59094D7D-3613-49C1-BB58-A65B41A9738D}"/>
               </a:ext>
             </a:extLst>
           </p:cNvPr>
@@ -5735,7 +5735,7 @@
           <p:cNvPr id="8" name="Title 1">
             <a:extLst>
               <a:ext uri="{FF2B5EF4-FFF2-40B4-BE49-F238E27FC236}">
-                <a16:creationId xmlns:a16="http://schemas.microsoft.com/office/drawing/2014/main" xmlns="" id="{69FE87B7-32A4-4C7F-9AAF-37688E640456}"/>
+                <a16:creationId xmlns="" xmlns:a16="http://schemas.microsoft.com/office/drawing/2014/main" id="{69FE87B7-32A4-4C7F-9AAF-37688E640456}"/>
               </a:ext>
             </a:extLst>
           </p:cNvPr>
@@ -5781,7 +5781,7 @@
           <p:cNvPr id="9" name="Hexagon 8">
             <a:extLst>
               <a:ext uri="{FF2B5EF4-FFF2-40B4-BE49-F238E27FC236}">
-                <a16:creationId xmlns:a16="http://schemas.microsoft.com/office/drawing/2014/main" xmlns="" id="{476CA45F-A66A-4AD8-A004-10DB55A5D7B2}"/>
+                <a16:creationId xmlns="" xmlns:a16="http://schemas.microsoft.com/office/drawing/2014/main" id="{476CA45F-A66A-4AD8-A004-10DB55A5D7B2}"/>
               </a:ext>
             </a:extLst>
           </p:cNvPr>
@@ -5833,7 +5833,7 @@
           <p:cNvPr id="10" name="Hexagon 9">
             <a:extLst>
               <a:ext uri="{FF2B5EF4-FFF2-40B4-BE49-F238E27FC236}">
-                <a16:creationId xmlns:a16="http://schemas.microsoft.com/office/drawing/2014/main" xmlns="" id="{27A66A3D-2437-4015-9F5F-380C4D23D83C}"/>
+                <a16:creationId xmlns="" xmlns:a16="http://schemas.microsoft.com/office/drawing/2014/main" id="{27A66A3D-2437-4015-9F5F-380C4D23D83C}"/>
               </a:ext>
             </a:extLst>
           </p:cNvPr>
@@ -5885,7 +5885,7 @@
           <p:cNvPr id="11" name="Hexagon 10">
             <a:extLst>
               <a:ext uri="{FF2B5EF4-FFF2-40B4-BE49-F238E27FC236}">
-                <a16:creationId xmlns:a16="http://schemas.microsoft.com/office/drawing/2014/main" xmlns="" id="{FFB14F3B-E7EF-4546-8D74-71FFB45C77C0}"/>
+                <a16:creationId xmlns="" xmlns:a16="http://schemas.microsoft.com/office/drawing/2014/main" id="{FFB14F3B-E7EF-4546-8D74-71FFB45C77C0}"/>
               </a:ext>
             </a:extLst>
           </p:cNvPr>
@@ -5937,7 +5937,7 @@
           <p:cNvPr id="23" name="Text Placeholder 22">
             <a:extLst>
               <a:ext uri="{FF2B5EF4-FFF2-40B4-BE49-F238E27FC236}">
-                <a16:creationId xmlns:a16="http://schemas.microsoft.com/office/drawing/2014/main" xmlns="" id="{591F943B-ED0D-49A1-844A-E23BA9A4871B}"/>
+                <a16:creationId xmlns="" xmlns:a16="http://schemas.microsoft.com/office/drawing/2014/main" id="{591F943B-ED0D-49A1-844A-E23BA9A4871B}"/>
               </a:ext>
             </a:extLst>
           </p:cNvPr>
@@ -5986,7 +5986,7 @@
           <p:cNvPr id="24" name="Text Placeholder 22">
             <a:extLst>
               <a:ext uri="{FF2B5EF4-FFF2-40B4-BE49-F238E27FC236}">
-                <a16:creationId xmlns:a16="http://schemas.microsoft.com/office/drawing/2014/main" xmlns="" id="{9AC6B9A8-053C-4828-B705-901C6018F30D}"/>
+                <a16:creationId xmlns="" xmlns:a16="http://schemas.microsoft.com/office/drawing/2014/main" id="{9AC6B9A8-053C-4828-B705-901C6018F30D}"/>
               </a:ext>
             </a:extLst>
           </p:cNvPr>
@@ -6035,7 +6035,7 @@
           <p:cNvPr id="27" name="Text Placeholder 22">
             <a:extLst>
               <a:ext uri="{FF2B5EF4-FFF2-40B4-BE49-F238E27FC236}">
-                <a16:creationId xmlns:a16="http://schemas.microsoft.com/office/drawing/2014/main" xmlns="" id="{BBA6FD52-E179-41F8-AE78-9AF3D65F28B6}"/>
+                <a16:creationId xmlns="" xmlns:a16="http://schemas.microsoft.com/office/drawing/2014/main" id="{BBA6FD52-E179-41F8-AE78-9AF3D65F28B6}"/>
               </a:ext>
             </a:extLst>
           </p:cNvPr>
@@ -6084,7 +6084,7 @@
           <p:cNvPr id="28" name="Text Placeholder 22">
             <a:extLst>
               <a:ext uri="{FF2B5EF4-FFF2-40B4-BE49-F238E27FC236}">
-                <a16:creationId xmlns:a16="http://schemas.microsoft.com/office/drawing/2014/main" xmlns="" id="{C49A82AB-D328-4DB0-841B-186884119EBF}"/>
+                <a16:creationId xmlns="" xmlns:a16="http://schemas.microsoft.com/office/drawing/2014/main" id="{C49A82AB-D328-4DB0-841B-186884119EBF}"/>
               </a:ext>
             </a:extLst>
           </p:cNvPr>
@@ -6133,7 +6133,7 @@
           <p:cNvPr id="29" name="Text Placeholder 22">
             <a:extLst>
               <a:ext uri="{FF2B5EF4-FFF2-40B4-BE49-F238E27FC236}">
-                <a16:creationId xmlns:a16="http://schemas.microsoft.com/office/drawing/2014/main" xmlns="" id="{84E23D5D-9866-48F9-8E08-DD2DBE4C4E32}"/>
+                <a16:creationId xmlns="" xmlns:a16="http://schemas.microsoft.com/office/drawing/2014/main" id="{84E23D5D-9866-48F9-8E08-DD2DBE4C4E32}"/>
               </a:ext>
             </a:extLst>
           </p:cNvPr>
@@ -6182,7 +6182,7 @@
           <p:cNvPr id="30" name="Text Placeholder 22">
             <a:extLst>
               <a:ext uri="{FF2B5EF4-FFF2-40B4-BE49-F238E27FC236}">
-                <a16:creationId xmlns:a16="http://schemas.microsoft.com/office/drawing/2014/main" xmlns="" id="{E671C9E6-A1A5-4EE5-8642-94AA7635DB05}"/>
+                <a16:creationId xmlns="" xmlns:a16="http://schemas.microsoft.com/office/drawing/2014/main" id="{E671C9E6-A1A5-4EE5-8642-94AA7635DB05}"/>
               </a:ext>
             </a:extLst>
           </p:cNvPr>
@@ -6231,7 +6231,7 @@
           <p:cNvPr id="31" name="Text Placeholder 22">
             <a:extLst>
               <a:ext uri="{FF2B5EF4-FFF2-40B4-BE49-F238E27FC236}">
-                <a16:creationId xmlns:a16="http://schemas.microsoft.com/office/drawing/2014/main" xmlns="" id="{DF6BB5C9-B678-435A-830F-4C10EB1A957C}"/>
+                <a16:creationId xmlns="" xmlns:a16="http://schemas.microsoft.com/office/drawing/2014/main" id="{DF6BB5C9-B678-435A-830F-4C10EB1A957C}"/>
               </a:ext>
             </a:extLst>
           </p:cNvPr>
@@ -6280,7 +6280,7 @@
           <p:cNvPr id="32" name="Text Placeholder 22">
             <a:extLst>
               <a:ext uri="{FF2B5EF4-FFF2-40B4-BE49-F238E27FC236}">
-                <a16:creationId xmlns:a16="http://schemas.microsoft.com/office/drawing/2014/main" xmlns="" id="{1861EC87-A9E2-4FC3-B8BC-06C520B8A17F}"/>
+                <a16:creationId xmlns="" xmlns:a16="http://schemas.microsoft.com/office/drawing/2014/main" id="{1861EC87-A9E2-4FC3-B8BC-06C520B8A17F}"/>
               </a:ext>
             </a:extLst>
           </p:cNvPr>
@@ -6329,7 +6329,7 @@
           <p:cNvPr id="33" name="Text Placeholder 22">
             <a:extLst>
               <a:ext uri="{FF2B5EF4-FFF2-40B4-BE49-F238E27FC236}">
-                <a16:creationId xmlns:a16="http://schemas.microsoft.com/office/drawing/2014/main" xmlns="" id="{FC3EDE91-631F-4947-94DC-557685FD23E0}"/>
+                <a16:creationId xmlns="" xmlns:a16="http://schemas.microsoft.com/office/drawing/2014/main" id="{FC3EDE91-631F-4947-94DC-557685FD23E0}"/>
               </a:ext>
             </a:extLst>
           </p:cNvPr>
@@ -6378,7 +6378,7 @@
           <p:cNvPr id="34" name="Text Placeholder 22">
             <a:extLst>
               <a:ext uri="{FF2B5EF4-FFF2-40B4-BE49-F238E27FC236}">
-                <a16:creationId xmlns:a16="http://schemas.microsoft.com/office/drawing/2014/main" xmlns="" id="{8FDDBEF4-1329-49DF-B043-D51B34F5EE34}"/>
+                <a16:creationId xmlns="" xmlns:a16="http://schemas.microsoft.com/office/drawing/2014/main" id="{8FDDBEF4-1329-49DF-B043-D51B34F5EE34}"/>
               </a:ext>
             </a:extLst>
           </p:cNvPr>
@@ -6427,7 +6427,7 @@
           <p:cNvPr id="37" name="Picture Placeholder 36">
             <a:extLst>
               <a:ext uri="{FF2B5EF4-FFF2-40B4-BE49-F238E27FC236}">
-                <a16:creationId xmlns:a16="http://schemas.microsoft.com/office/drawing/2014/main" xmlns="" id="{FBDB3FD3-4F52-4E28-B639-5F73070E47D9}"/>
+                <a16:creationId xmlns="" xmlns:a16="http://schemas.microsoft.com/office/drawing/2014/main" id="{FBDB3FD3-4F52-4E28-B639-5F73070E47D9}"/>
               </a:ext>
             </a:extLst>
           </p:cNvPr>
@@ -6584,7 +6584,7 @@
           <p:cNvPr id="22" name="Picture Placeholder 21">
             <a:extLst>
               <a:ext uri="{FF2B5EF4-FFF2-40B4-BE49-F238E27FC236}">
-                <a16:creationId xmlns:a16="http://schemas.microsoft.com/office/drawing/2014/main" xmlns="" id="{DFA57703-9E4A-48E0-A123-3A5EDC76475C}"/>
+                <a16:creationId xmlns="" xmlns:a16="http://schemas.microsoft.com/office/drawing/2014/main" id="{DFA57703-9E4A-48E0-A123-3A5EDC76475C}"/>
               </a:ext>
             </a:extLst>
           </p:cNvPr>
@@ -6621,7 +6621,7 @@
           <p:cNvPr id="2" name="Rectangle 1" descr="Tall office building looking up">
             <a:extLst>
               <a:ext uri="{FF2B5EF4-FFF2-40B4-BE49-F238E27FC236}">
-                <a16:creationId xmlns:a16="http://schemas.microsoft.com/office/drawing/2014/main" xmlns="" id="{AF7FA146-2A75-4EA7-A9AD-EBCE6F17FB42}"/>
+                <a16:creationId xmlns="" xmlns:a16="http://schemas.microsoft.com/office/drawing/2014/main" id="{AF7FA146-2A75-4EA7-A9AD-EBCE6F17FB42}"/>
               </a:ext>
             </a:extLst>
           </p:cNvPr>
@@ -6677,7 +6677,7 @@
           <p:cNvPr id="24" name="Text Placeholder 23">
             <a:extLst>
               <a:ext uri="{FF2B5EF4-FFF2-40B4-BE49-F238E27FC236}">
-                <a16:creationId xmlns:a16="http://schemas.microsoft.com/office/drawing/2014/main" xmlns="" id="{340C15AA-E296-48AE-857F-0589EEA69DC6}"/>
+                <a16:creationId xmlns="" xmlns:a16="http://schemas.microsoft.com/office/drawing/2014/main" id="{340C15AA-E296-48AE-857F-0589EEA69DC6}"/>
               </a:ext>
             </a:extLst>
           </p:cNvPr>
@@ -6730,7 +6730,7 @@
           <p:cNvPr id="6" name="Title 1">
             <a:extLst>
               <a:ext uri="{FF2B5EF4-FFF2-40B4-BE49-F238E27FC236}">
-                <a16:creationId xmlns:a16="http://schemas.microsoft.com/office/drawing/2014/main" xmlns="" id="{162BE5D7-9E35-49F8-A8E4-2093183A6404}"/>
+                <a16:creationId xmlns="" xmlns:a16="http://schemas.microsoft.com/office/drawing/2014/main" id="{162BE5D7-9E35-49F8-A8E4-2093183A6404}"/>
               </a:ext>
             </a:extLst>
           </p:cNvPr>
@@ -6973,7 +6973,7 @@
             <a:fld id="{B61BEF0D-F0BB-DE4B-95CE-6DB70DBA9567}" type="datetimeFigureOut">
               <a:rPr lang="en-US" smtClean="0"/>
               <a:pPr/>
-              <a:t>9/9/2026</a:t>
+              <a:t>9/10/2026</a:t>
             </a:fld>
             <a:endParaRPr lang="en-US" dirty="0"/>
           </a:p>
@@ -7207,7 +7207,7 @@
           <a:p>
             <a:fld id="{EB712588-04B1-427B-82EE-E8DB90309F08}" type="datetimeFigureOut">
               <a:rPr lang="en-US" smtClean="0"/>
-              <a:t>9/9/2026</a:t>
+              <a:t>9/10/2026</a:t>
             </a:fld>
             <a:endParaRPr lang="en-US" dirty="0"/>
           </a:p>
@@ -7583,7 +7583,7 @@
             <a:fld id="{B61BEF0D-F0BB-DE4B-95CE-6DB70DBA9567}" type="datetimeFigureOut">
               <a:rPr lang="en-US" smtClean="0"/>
               <a:pPr/>
-              <a:t>9/9/2026</a:t>
+              <a:t>9/10/2026</a:t>
             </a:fld>
             <a:endParaRPr lang="en-US" dirty="0"/>
           </a:p>
@@ -7709,7 +7709,7 @@
             <a:fld id="{B61BEF0D-F0BB-DE4B-95CE-6DB70DBA9567}" type="datetimeFigureOut">
               <a:rPr lang="en-US" smtClean="0"/>
               <a:pPr/>
-              <a:t>9/9/2026</a:t>
+              <a:t>9/10/2026</a:t>
             </a:fld>
             <a:endParaRPr lang="en-US" dirty="0"/>
           </a:p>
@@ -7807,7 +7807,7 @@
             <a:fld id="{B61BEF0D-F0BB-DE4B-95CE-6DB70DBA9567}" type="datetimeFigureOut">
               <a:rPr lang="en-US" smtClean="0"/>
               <a:pPr/>
-              <a:t>9/9/2026</a:t>
+              <a:t>9/10/2026</a:t>
             </a:fld>
             <a:endParaRPr lang="en-US" dirty="0"/>
           </a:p>
@@ -8064,7 +8064,7 @@
           <a:p>
             <a:fld id="{42A54C80-263E-416B-A8E0-580EDEADCBDC}" type="datetimeFigureOut">
               <a:rPr lang="en-US" smtClean="0"/>
-              <a:t>9/9/2026</a:t>
+              <a:t>9/10/2026</a:t>
             </a:fld>
             <a:endParaRPr lang="en-US" dirty="0"/>
           </a:p>
@@ -8372,7 +8372,7 @@
             <a:fld id="{B61BEF0D-F0BB-DE4B-95CE-6DB70DBA9567}" type="datetimeFigureOut">
               <a:rPr lang="en-US" smtClean="0"/>
               <a:pPr/>
-              <a:t>9/9/2026</a:t>
+              <a:t>9/10/2026</a:t>
             </a:fld>
             <a:endParaRPr lang="en-US" dirty="0"/>
           </a:p>
@@ -9076,7 +9076,7 @@
             <a:fld id="{B61BEF0D-F0BB-DE4B-95CE-6DB70DBA9567}" type="datetimeFigureOut">
               <a:rPr lang="en-US" smtClean="0"/>
               <a:pPr/>
-              <a:t>9/9/2026</a:t>
+              <a:t>9/10/2026</a:t>
             </a:fld>
             <a:endParaRPr lang="en-US" dirty="0"/>
           </a:p>
@@ -9164,7 +9164,7 @@
           <p:cNvPr id="18" name="Date Placeholder 3">
             <a:extLst>
               <a:ext uri="{FF2B5EF4-FFF2-40B4-BE49-F238E27FC236}">
-                <a16:creationId xmlns:a16="http://schemas.microsoft.com/office/drawing/2014/main" xmlns="" id="{2CD6B789-4B66-4BD0-9623-80E9542A65FE}"/>
+                <a16:creationId xmlns="" xmlns:a16="http://schemas.microsoft.com/office/drawing/2014/main" id="{2CD6B789-4B66-4BD0-9623-80E9542A65FE}"/>
               </a:ext>
             </a:extLst>
           </p:cNvPr>
@@ -9287,7 +9287,7 @@
                 </a:solidFill>
               </a:rPr>
               <a:pPr/>
-              <a:t>9/9/2026</a:t>
+              <a:t>9/10/2026</a:t>
             </a:fld>
             <a:endParaRPr lang="en-US" sz="1100" dirty="0">
               <a:solidFill>
@@ -9302,7 +9302,7 @@
           <p:cNvPr id="29" name="Footer Placeholder 4">
             <a:extLst>
               <a:ext uri="{FF2B5EF4-FFF2-40B4-BE49-F238E27FC236}">
-                <a16:creationId xmlns:a16="http://schemas.microsoft.com/office/drawing/2014/main" xmlns="" id="{A3BB5234-44A4-4506-BD19-5808475EBB7F}"/>
+                <a16:creationId xmlns="" xmlns:a16="http://schemas.microsoft.com/office/drawing/2014/main" id="{A3BB5234-44A4-4506-BD19-5808475EBB7F}"/>
               </a:ext>
             </a:extLst>
           </p:cNvPr>
@@ -9435,7 +9435,7 @@
           <p:cNvPr id="30" name="Slide Number Placeholder 5">
             <a:extLst>
               <a:ext uri="{FF2B5EF4-FFF2-40B4-BE49-F238E27FC236}">
-                <a16:creationId xmlns:a16="http://schemas.microsoft.com/office/drawing/2014/main" xmlns="" id="{68D89618-7EE9-46BF-BEAC-45E6F98ACA1A}"/>
+                <a16:creationId xmlns="" xmlns:a16="http://schemas.microsoft.com/office/drawing/2014/main" id="{68D89618-7EE9-46BF-BEAC-45E6F98ACA1A}"/>
               </a:ext>
             </a:extLst>
           </p:cNvPr>
@@ -10024,96 +10024,10 @@
       </p:grpSpPr>
       <p:sp>
         <p:nvSpPr>
-          <p:cNvPr id="2" name="Text Placeholder 1">
-            <a:extLst>
-              <a:ext uri="{FF2B5EF4-FFF2-40B4-BE49-F238E27FC236}">
-                <a16:creationId xmlns:a16="http://schemas.microsoft.com/office/drawing/2014/main" xmlns="" id="{7201737A-B873-4D1D-8A41-5ABF5184BC8F}"/>
-              </a:ext>
-            </a:extLst>
-          </p:cNvPr>
-          <p:cNvSpPr>
-            <a:spLocks noGrp="1"/>
-          </p:cNvSpPr>
-          <p:nvPr>
-            <p:ph type="body" sz="quarter" idx="11"/>
-          </p:nvPr>
-        </p:nvSpPr>
-        <p:spPr>
-          <a:xfrm>
-            <a:off x="5848709" y="4402083"/>
-            <a:ext cx="3717985" cy="596447"/>
-          </a:xfrm>
-        </p:spPr>
-        <p:txBody>
-          <a:bodyPr>
-            <a:noAutofit/>
-          </a:bodyPr>
-          <a:lstStyle/>
-          <a:p>
-            <a:pPr algn="r"/>
-            <a:r>
-              <a:rPr lang="en-US" sz="1100" dirty="0" smtClean="0">
-                <a:solidFill>
-                  <a:schemeClr val="tx1"/>
-                </a:solidFill>
-                <a:latin typeface="Arial Black" panose="020B0A04020102020204" pitchFamily="34" charset="0"/>
-              </a:rPr>
-              <a:t>Name : </a:t>
-            </a:r>
-            <a:r>
-              <a:rPr lang="en-US" sz="1100" dirty="0" err="1" smtClean="0">
-                <a:solidFill>
-                  <a:schemeClr val="tx1"/>
-                </a:solidFill>
-                <a:latin typeface="Arial Black" panose="020B0A04020102020204" pitchFamily="34" charset="0"/>
-              </a:rPr>
-              <a:t>Yash</a:t>
-            </a:r>
-            <a:r>
-              <a:rPr lang="en-US" sz="1100" dirty="0" smtClean="0">
-                <a:solidFill>
-                  <a:schemeClr val="tx1"/>
-                </a:solidFill>
-                <a:latin typeface="Arial Black" panose="020B0A04020102020204" pitchFamily="34" charset="0"/>
-              </a:rPr>
-              <a:t> Sanjay Monde </a:t>
-            </a:r>
-          </a:p>
-          <a:p>
-            <a:pPr algn="r"/>
-            <a:r>
-              <a:rPr lang="en-IN" sz="1100" dirty="0" err="1" smtClean="0">
-                <a:solidFill>
-                  <a:schemeClr val="tx1"/>
-                </a:solidFill>
-                <a:latin typeface="Arial Black" panose="020B0A04020102020204" pitchFamily="34" charset="0"/>
-              </a:rPr>
-              <a:t>Aicte</a:t>
-            </a:r>
-            <a:r>
-              <a:rPr lang="en-IN" sz="1100" dirty="0" smtClean="0">
-                <a:solidFill>
-                  <a:schemeClr val="tx1"/>
-                </a:solidFill>
-                <a:latin typeface="Arial Black" panose="020B0A04020102020204" pitchFamily="34" charset="0"/>
-              </a:rPr>
-              <a:t> ID : STU69f055805a3e71777358208</a:t>
-            </a:r>
-            <a:endParaRPr lang="en-IN" sz="1100" dirty="0">
-              <a:solidFill>
-                <a:schemeClr val="tx1"/>
-              </a:solidFill>
-              <a:latin typeface="Arial Black" panose="020B0A04020102020204" pitchFamily="34" charset="0"/>
-            </a:endParaRPr>
-          </a:p>
-        </p:txBody>
-      </p:sp>
-      <p:sp>
-        <p:nvSpPr>
           <p:cNvPr id="4" name="Title 3">
             <a:extLst>
               <a:ext uri="{FF2B5EF4-FFF2-40B4-BE49-F238E27FC236}">
-                <a16:creationId xmlns:a16="http://schemas.microsoft.com/office/drawing/2014/main" xmlns="" id="{92056599-CDAA-4367-BEF8-31D6E32518C8}"/>
+                <a16:creationId xmlns="" xmlns:a16="http://schemas.microsoft.com/office/drawing/2014/main" id="{92056599-CDAA-4367-BEF8-31D6E32518C8}"/>
               </a:ext>
             </a:extLst>
           </p:cNvPr>
@@ -10126,7 +10040,7 @@
         </p:nvSpPr>
         <p:spPr>
           <a:xfrm>
-            <a:off x="2216991" y="2788944"/>
+            <a:off x="2208364" y="3250257"/>
             <a:ext cx="5391508" cy="1613139"/>
           </a:xfrm>
         </p:spPr>
@@ -10155,7 +10069,7 @@
           <p:cNvPr id="6" name="Picture 5">
             <a:extLst>
               <a:ext uri="{FF2B5EF4-FFF2-40B4-BE49-F238E27FC236}">
-                <a16:creationId xmlns:a16="http://schemas.microsoft.com/office/drawing/2014/main" xmlns="" id="{E30DEFF0-8DEE-4B0B-9B30-675FE9E288A2}"/>
+                <a16:creationId xmlns="" xmlns:a16="http://schemas.microsoft.com/office/drawing/2014/main" id="{E30DEFF0-8DEE-4B0B-9B30-675FE9E288A2}"/>
               </a:ext>
             </a:extLst>
           </p:cNvPr>
@@ -10187,7 +10101,7 @@
         </p:nvSpPr>
         <p:spPr>
           <a:xfrm>
-            <a:off x="2777705" y="3410848"/>
+            <a:off x="2725947" y="3872161"/>
             <a:ext cx="6788989" cy="369332"/>
           </a:xfrm>
           <a:prstGeom prst="rect">
@@ -10208,6 +10122,47 @@
               </a:rPr>
               <a:t>What Makes a Used Car Worth More?</a:t>
             </a:r>
+          </a:p>
+        </p:txBody>
+      </p:sp>
+      <p:sp>
+        <p:nvSpPr>
+          <p:cNvPr id="7" name="Rectangle 6"/>
+          <p:cNvSpPr/>
+          <p:nvPr/>
+        </p:nvSpPr>
+        <p:spPr>
+          <a:xfrm>
+            <a:off x="554247" y="3212636"/>
+            <a:ext cx="8503489" cy="1117824"/>
+          </a:xfrm>
+          <a:prstGeom prst="rect">
+            <a:avLst/>
+          </a:prstGeom>
+          <a:noFill/>
+        </p:spPr>
+        <p:style>
+          <a:lnRef idx="2">
+            <a:schemeClr val="accent1">
+              <a:shade val="50000"/>
+            </a:schemeClr>
+          </a:lnRef>
+          <a:fillRef idx="1">
+            <a:schemeClr val="accent1"/>
+          </a:fillRef>
+          <a:effectRef idx="0">
+            <a:schemeClr val="accent1"/>
+          </a:effectRef>
+          <a:fontRef idx="minor">
+            <a:schemeClr val="lt1"/>
+          </a:fontRef>
+        </p:style>
+        <p:txBody>
+          <a:bodyPr rtlCol="0" anchor="ctr"/>
+          <a:lstStyle/>
+          <a:p>
+            <a:pPr algn="ctr"/>
+            <a:endParaRPr lang="en-IN"/>
           </a:p>
         </p:txBody>
       </p:sp>
@@ -10525,128 +10480,6 @@
                       </p:childTnLst>
                     </p:cTn>
                   </p:par>
-                  <p:par>
-                    <p:cTn id="21" fill="hold">
-                      <p:stCondLst>
-                        <p:cond delay="indefinite"/>
-                      </p:stCondLst>
-                      <p:childTnLst>
-                        <p:par>
-                          <p:cTn id="22" fill="hold">
-                            <p:stCondLst>
-                              <p:cond delay="0"/>
-                            </p:stCondLst>
-                            <p:childTnLst>
-                              <p:par>
-                                <p:cTn id="23" presetID="14" presetClass="entr" presetSubtype="10" fill="hold" grpId="0" nodeType="clickEffect">
-                                  <p:stCondLst>
-                                    <p:cond delay="0"/>
-                                  </p:stCondLst>
-                                  <p:childTnLst>
-                                    <p:set>
-                                      <p:cBhvr>
-                                        <p:cTn id="24" dur="1" fill="hold">
-                                          <p:stCondLst>
-                                            <p:cond delay="0"/>
-                                          </p:stCondLst>
-                                        </p:cTn>
-                                        <p:tgtEl>
-                                          <p:spTgt spid="2">
-                                            <p:txEl>
-                                              <p:pRg st="0" end="0"/>
-                                            </p:txEl>
-                                          </p:spTgt>
-                                        </p:tgtEl>
-                                        <p:attrNameLst>
-                                          <p:attrName>style.visibility</p:attrName>
-                                        </p:attrNameLst>
-                                      </p:cBhvr>
-                                      <p:to>
-                                        <p:strVal val="visible"/>
-                                      </p:to>
-                                    </p:set>
-                                    <p:animEffect transition="in" filter="randombar(horizontal)">
-                                      <p:cBhvr>
-                                        <p:cTn id="25" dur="500"/>
-                                        <p:tgtEl>
-                                          <p:spTgt spid="2">
-                                            <p:txEl>
-                                              <p:pRg st="0" end="0"/>
-                                            </p:txEl>
-                                          </p:spTgt>
-                                        </p:tgtEl>
-                                      </p:cBhvr>
-                                    </p:animEffect>
-                                  </p:childTnLst>
-                                </p:cTn>
-                              </p:par>
-                            </p:childTnLst>
-                          </p:cTn>
-                        </p:par>
-                      </p:childTnLst>
-                    </p:cTn>
-                  </p:par>
-                  <p:par>
-                    <p:cTn id="26" fill="hold">
-                      <p:stCondLst>
-                        <p:cond delay="indefinite"/>
-                      </p:stCondLst>
-                      <p:childTnLst>
-                        <p:par>
-                          <p:cTn id="27" fill="hold">
-                            <p:stCondLst>
-                              <p:cond delay="0"/>
-                            </p:stCondLst>
-                            <p:childTnLst>
-                              <p:par>
-                                <p:cTn id="28" presetID="14" presetClass="entr" presetSubtype="10" fill="hold" grpId="0" nodeType="clickEffect">
-                                  <p:stCondLst>
-                                    <p:cond delay="0"/>
-                                  </p:stCondLst>
-                                  <p:childTnLst>
-                                    <p:set>
-                                      <p:cBhvr>
-                                        <p:cTn id="29" dur="1" fill="hold">
-                                          <p:stCondLst>
-                                            <p:cond delay="0"/>
-                                          </p:stCondLst>
-                                        </p:cTn>
-                                        <p:tgtEl>
-                                          <p:spTgt spid="2">
-                                            <p:txEl>
-                                              <p:pRg st="1" end="1"/>
-                                            </p:txEl>
-                                          </p:spTgt>
-                                        </p:tgtEl>
-                                        <p:attrNameLst>
-                                          <p:attrName>style.visibility</p:attrName>
-                                        </p:attrNameLst>
-                                      </p:cBhvr>
-                                      <p:to>
-                                        <p:strVal val="visible"/>
-                                      </p:to>
-                                    </p:set>
-                                    <p:animEffect transition="in" filter="randombar(horizontal)">
-                                      <p:cBhvr>
-                                        <p:cTn id="30" dur="500"/>
-                                        <p:tgtEl>
-                                          <p:spTgt spid="2">
-                                            <p:txEl>
-                                              <p:pRg st="1" end="1"/>
-                                            </p:txEl>
-                                          </p:spTgt>
-                                        </p:tgtEl>
-                                      </p:cBhvr>
-                                    </p:animEffect>
-                                  </p:childTnLst>
-                                </p:cTn>
-                              </p:par>
-                            </p:childTnLst>
-                          </p:cTn>
-                        </p:par>
-                      </p:childTnLst>
-                    </p:cTn>
-                  </p:par>
                 </p:childTnLst>
               </p:cTn>
               <p:prevCondLst>
@@ -10669,7 +10502,6 @@
       </p:par>
     </p:tnLst>
     <p:bldLst>
-      <p:bldP spid="2" grpId="0" build="p"/>
       <p:bldP spid="4" grpId="0"/>
     </p:bldLst>
   </p:timing>
@@ -10698,7 +10530,7 @@
           <p:cNvPr id="5" name="Picture 4">
             <a:extLst>
               <a:ext uri="{FF2B5EF4-FFF2-40B4-BE49-F238E27FC236}">
-                <a16:creationId xmlns:a16="http://schemas.microsoft.com/office/drawing/2014/main" xmlns="" id="{BBB0C869-7C5C-4070-BD4D-F3FC2DA8F301}"/>
+                <a16:creationId xmlns="" xmlns:a16="http://schemas.microsoft.com/office/drawing/2014/main" id="{BBB0C869-7C5C-4070-BD4D-F3FC2DA8F301}"/>
               </a:ext>
             </a:extLst>
           </p:cNvPr>
@@ -10727,7 +10559,7 @@
           <p:cNvPr id="4" name="Title 3">
             <a:extLst>
               <a:ext uri="{FF2B5EF4-FFF2-40B4-BE49-F238E27FC236}">
-                <a16:creationId xmlns:a16="http://schemas.microsoft.com/office/drawing/2014/main" xmlns="" id="{AFE3A2AF-177E-45E6-A191-0F8523DB7FFA}"/>
+                <a16:creationId xmlns="" xmlns:a16="http://schemas.microsoft.com/office/drawing/2014/main" id="{AFE3A2AF-177E-45E6-A191-0F8523DB7FFA}"/>
               </a:ext>
             </a:extLst>
           </p:cNvPr>
@@ -10767,7 +10599,7 @@
           <p:cNvPr id="7" name="Text Placeholder 30">
             <a:extLst>
               <a:ext uri="{FF2B5EF4-FFF2-40B4-BE49-F238E27FC236}">
-                <a16:creationId xmlns:a16="http://schemas.microsoft.com/office/drawing/2014/main" xmlns="" id="{372426BE-BEE7-4A6D-BCD2-059615BBCE25}"/>
+                <a16:creationId xmlns="" xmlns:a16="http://schemas.microsoft.com/office/drawing/2014/main" id="{372426BE-BEE7-4A6D-BCD2-059615BBCE25}"/>
               </a:ext>
             </a:extLst>
           </p:cNvPr>
@@ -11023,7 +10855,7 @@
           <p:cNvPr id="8" name="Text Placeholder 30">
             <a:extLst>
               <a:ext uri="{FF2B5EF4-FFF2-40B4-BE49-F238E27FC236}">
-                <a16:creationId xmlns:a16="http://schemas.microsoft.com/office/drawing/2014/main" xmlns="" id="{E61E227A-5883-4C77-B25A-46A22FFDF41F}"/>
+                <a16:creationId xmlns="" xmlns:a16="http://schemas.microsoft.com/office/drawing/2014/main" id="{E61E227A-5883-4C77-B25A-46A22FFDF41F}"/>
               </a:ext>
             </a:extLst>
           </p:cNvPr>
@@ -11279,7 +11111,7 @@
           <p:cNvPr id="9" name="Title 3">
             <a:extLst>
               <a:ext uri="{FF2B5EF4-FFF2-40B4-BE49-F238E27FC236}">
-                <a16:creationId xmlns:a16="http://schemas.microsoft.com/office/drawing/2014/main" xmlns="" id="{E25373E9-1A26-4A40-9897-E42DE485D8E3}"/>
+                <a16:creationId xmlns="" xmlns:a16="http://schemas.microsoft.com/office/drawing/2014/main" id="{E25373E9-1A26-4A40-9897-E42DE485D8E3}"/>
               </a:ext>
             </a:extLst>
           </p:cNvPr>
@@ -11391,7 +11223,7 @@
           <p:cNvPr id="10" name="Text Placeholder 1">
             <a:extLst>
               <a:ext uri="{FF2B5EF4-FFF2-40B4-BE49-F238E27FC236}">
-                <a16:creationId xmlns:a16="http://schemas.microsoft.com/office/drawing/2014/main" xmlns="" id="{B19D8AC7-3787-4ADB-9212-0808F015C2DD}"/>
+                <a16:creationId xmlns="" xmlns:a16="http://schemas.microsoft.com/office/drawing/2014/main" id="{B19D8AC7-3787-4ADB-9212-0808F015C2DD}"/>
               </a:ext>
             </a:extLst>
           </p:cNvPr>
@@ -12125,7 +11957,7 @@
           <p:cNvPr id="5" name="Picture 4">
             <a:extLst>
               <a:ext uri="{FF2B5EF4-FFF2-40B4-BE49-F238E27FC236}">
-                <a16:creationId xmlns:a16="http://schemas.microsoft.com/office/drawing/2014/main" xmlns="" id="{BBB0C869-7C5C-4070-BD4D-F3FC2DA8F301}"/>
+                <a16:creationId xmlns="" xmlns:a16="http://schemas.microsoft.com/office/drawing/2014/main" id="{BBB0C869-7C5C-4070-BD4D-F3FC2DA8F301}"/>
               </a:ext>
             </a:extLst>
           </p:cNvPr>
@@ -12154,7 +11986,7 @@
           <p:cNvPr id="4" name="Title 3">
             <a:extLst>
               <a:ext uri="{FF2B5EF4-FFF2-40B4-BE49-F238E27FC236}">
-                <a16:creationId xmlns:a16="http://schemas.microsoft.com/office/drawing/2014/main" xmlns="" id="{AFE3A2AF-177E-45E6-A191-0F8523DB7FFA}"/>
+                <a16:creationId xmlns="" xmlns:a16="http://schemas.microsoft.com/office/drawing/2014/main" id="{AFE3A2AF-177E-45E6-A191-0F8523DB7FFA}"/>
               </a:ext>
             </a:extLst>
           </p:cNvPr>
@@ -12210,7 +12042,7 @@
           <p:cNvPr id="7" name="Text Placeholder 30">
             <a:extLst>
               <a:ext uri="{FF2B5EF4-FFF2-40B4-BE49-F238E27FC236}">
-                <a16:creationId xmlns:a16="http://schemas.microsoft.com/office/drawing/2014/main" xmlns="" id="{372426BE-BEE7-4A6D-BCD2-059615BBCE25}"/>
+                <a16:creationId xmlns="" xmlns:a16="http://schemas.microsoft.com/office/drawing/2014/main" id="{372426BE-BEE7-4A6D-BCD2-059615BBCE25}"/>
               </a:ext>
             </a:extLst>
           </p:cNvPr>
@@ -12466,7 +12298,7 @@
           <p:cNvPr id="8" name="Text Placeholder 30">
             <a:extLst>
               <a:ext uri="{FF2B5EF4-FFF2-40B4-BE49-F238E27FC236}">
-                <a16:creationId xmlns:a16="http://schemas.microsoft.com/office/drawing/2014/main" xmlns="" id="{E61E227A-5883-4C77-B25A-46A22FFDF41F}"/>
+                <a16:creationId xmlns="" xmlns:a16="http://schemas.microsoft.com/office/drawing/2014/main" id="{E61E227A-5883-4C77-B25A-46A22FFDF41F}"/>
               </a:ext>
             </a:extLst>
           </p:cNvPr>
@@ -12722,7 +12554,7 @@
           <p:cNvPr id="10" name="Text Placeholder 1">
             <a:extLst>
               <a:ext uri="{FF2B5EF4-FFF2-40B4-BE49-F238E27FC236}">
-                <a16:creationId xmlns:a16="http://schemas.microsoft.com/office/drawing/2014/main" xmlns="" id="{B19D8AC7-3787-4ADB-9212-0808F015C2DD}"/>
+                <a16:creationId xmlns="" xmlns:a16="http://schemas.microsoft.com/office/drawing/2014/main" id="{B19D8AC7-3787-4ADB-9212-0808F015C2DD}"/>
               </a:ext>
             </a:extLst>
           </p:cNvPr>
@@ -13493,7 +13325,7 @@
         <p:cNvPr id="1" name="">
           <a:extLst>
             <a:ext uri="{FF2B5EF4-FFF2-40B4-BE49-F238E27FC236}">
-              <a16:creationId xmlns:a16="http://schemas.microsoft.com/office/drawing/2014/main" xmlns="" id="{327316CE-193E-3D5D-C15A-98517303A13F}"/>
+              <a16:creationId xmlns="" xmlns:a16="http://schemas.microsoft.com/office/drawing/2014/main" id="{327316CE-193E-3D5D-C15A-98517303A13F}"/>
             </a:ext>
           </a:extLst>
         </p:cNvPr>
@@ -13513,7 +13345,7 @@
           <p:cNvPr id="5" name="Picture 4">
             <a:extLst>
               <a:ext uri="{FF2B5EF4-FFF2-40B4-BE49-F238E27FC236}">
-                <a16:creationId xmlns:a16="http://schemas.microsoft.com/office/drawing/2014/main" xmlns="" id="{3D44118A-0276-9E2F-E0E8-85CEE9F1E0C7}"/>
+                <a16:creationId xmlns="" xmlns:a16="http://schemas.microsoft.com/office/drawing/2014/main" id="{3D44118A-0276-9E2F-E0E8-85CEE9F1E0C7}"/>
               </a:ext>
             </a:extLst>
           </p:cNvPr>
@@ -13542,7 +13374,7 @@
           <p:cNvPr id="4" name="Title 3">
             <a:extLst>
               <a:ext uri="{FF2B5EF4-FFF2-40B4-BE49-F238E27FC236}">
-                <a16:creationId xmlns:a16="http://schemas.microsoft.com/office/drawing/2014/main" xmlns="" id="{901A2257-2F98-CB88-038E-C0F1D0A1A363}"/>
+                <a16:creationId xmlns="" xmlns:a16="http://schemas.microsoft.com/office/drawing/2014/main" id="{901A2257-2F98-CB88-038E-C0F1D0A1A363}"/>
               </a:ext>
             </a:extLst>
           </p:cNvPr>
@@ -13577,7 +13409,7 @@
           <p:cNvPr id="7" name="Text Placeholder 30">
             <a:extLst>
               <a:ext uri="{FF2B5EF4-FFF2-40B4-BE49-F238E27FC236}">
-                <a16:creationId xmlns:a16="http://schemas.microsoft.com/office/drawing/2014/main" xmlns="" id="{AF1C8809-654A-4DD1-BB18-87B8B6C020B9}"/>
+                <a16:creationId xmlns="" xmlns:a16="http://schemas.microsoft.com/office/drawing/2014/main" id="{AF1C8809-654A-4DD1-BB18-87B8B6C020B9}"/>
               </a:ext>
             </a:extLst>
           </p:cNvPr>
@@ -13833,7 +13665,7 @@
           <p:cNvPr id="8" name="Text Placeholder 30">
             <a:extLst>
               <a:ext uri="{FF2B5EF4-FFF2-40B4-BE49-F238E27FC236}">
-                <a16:creationId xmlns:a16="http://schemas.microsoft.com/office/drawing/2014/main" xmlns="" id="{0F7D0B46-DEEA-1B5E-FE84-59D11F3B1105}"/>
+                <a16:creationId xmlns="" xmlns:a16="http://schemas.microsoft.com/office/drawing/2014/main" id="{0F7D0B46-DEEA-1B5E-FE84-59D11F3B1105}"/>
               </a:ext>
             </a:extLst>
           </p:cNvPr>
@@ -14838,7 +14670,7 @@
           <p:cNvPr id="3" name="Title 1">
             <a:extLst>
               <a:ext uri="{FF2B5EF4-FFF2-40B4-BE49-F238E27FC236}">
-                <a16:creationId xmlns:a16="http://schemas.microsoft.com/office/drawing/2014/main" xmlns="" id="{D88C20CF-C1EE-4092-B52D-FD4AB2AB2508}"/>
+                <a16:creationId xmlns="" xmlns:a16="http://schemas.microsoft.com/office/drawing/2014/main" id="{D88C20CF-C1EE-4092-B52D-FD4AB2AB2508}"/>
               </a:ext>
             </a:extLst>
           </p:cNvPr>
@@ -14881,7 +14713,7 @@
           <p:cNvPr id="31" name="Text Placeholder 30">
             <a:extLst>
               <a:ext uri="{FF2B5EF4-FFF2-40B4-BE49-F238E27FC236}">
-                <a16:creationId xmlns:a16="http://schemas.microsoft.com/office/drawing/2014/main" xmlns="" id="{97AB1F14-3A1E-4057-A473-9975BA59F012}"/>
+                <a16:creationId xmlns="" xmlns:a16="http://schemas.microsoft.com/office/drawing/2014/main" id="{97AB1F14-3A1E-4057-A473-9975BA59F012}"/>
               </a:ext>
             </a:extLst>
           </p:cNvPr>
@@ -14916,7 +14748,7 @@
           <p:cNvPr id="17" name="Text Placeholder 28">
             <a:extLst>
               <a:ext uri="{FF2B5EF4-FFF2-40B4-BE49-F238E27FC236}">
-                <a16:creationId xmlns:a16="http://schemas.microsoft.com/office/drawing/2014/main" xmlns="" id="{E212CE24-374D-44D0-8F39-0F5A36E42ED7}"/>
+                <a16:creationId xmlns="" xmlns:a16="http://schemas.microsoft.com/office/drawing/2014/main" id="{E212CE24-374D-44D0-8F39-0F5A36E42ED7}"/>
               </a:ext>
             </a:extLst>
           </p:cNvPr>
@@ -15172,7 +15004,7 @@
           <p:cNvPr id="20" name="Text Placeholder 28">
             <a:extLst>
               <a:ext uri="{FF2B5EF4-FFF2-40B4-BE49-F238E27FC236}">
-                <a16:creationId xmlns:a16="http://schemas.microsoft.com/office/drawing/2014/main" xmlns="" id="{A09A5BC1-0E62-4E6B-A590-951A87D4B4FE}"/>
+                <a16:creationId xmlns="" xmlns:a16="http://schemas.microsoft.com/office/drawing/2014/main" id="{A09A5BC1-0E62-4E6B-A590-951A87D4B4FE}"/>
               </a:ext>
             </a:extLst>
           </p:cNvPr>
@@ -15428,7 +15260,7 @@
           <p:cNvPr id="23" name="Text Placeholder 28">
             <a:extLst>
               <a:ext uri="{FF2B5EF4-FFF2-40B4-BE49-F238E27FC236}">
-                <a16:creationId xmlns:a16="http://schemas.microsoft.com/office/drawing/2014/main" xmlns="" id="{9E6B148F-F3B6-4E6B-9B85-645C039858E8}"/>
+                <a16:creationId xmlns="" xmlns:a16="http://schemas.microsoft.com/office/drawing/2014/main" id="{9E6B148F-F3B6-4E6B-9B85-645C039858E8}"/>
               </a:ext>
             </a:extLst>
           </p:cNvPr>
@@ -15684,7 +15516,7 @@
           <p:cNvPr id="30" name="Text Placeholder 30">
             <a:extLst>
               <a:ext uri="{FF2B5EF4-FFF2-40B4-BE49-F238E27FC236}">
-                <a16:creationId xmlns:a16="http://schemas.microsoft.com/office/drawing/2014/main" xmlns="" id="{D3BF02F6-2753-476A-8046-A85AE3A49748}"/>
+                <a16:creationId xmlns="" xmlns:a16="http://schemas.microsoft.com/office/drawing/2014/main" id="{D3BF02F6-2753-476A-8046-A85AE3A49748}"/>
               </a:ext>
             </a:extLst>
           </p:cNvPr>
@@ -15940,7 +15772,7 @@
           <p:cNvPr id="32" name="Text Placeholder 30">
             <a:extLst>
               <a:ext uri="{FF2B5EF4-FFF2-40B4-BE49-F238E27FC236}">
-                <a16:creationId xmlns:a16="http://schemas.microsoft.com/office/drawing/2014/main" xmlns="" id="{B993AB29-3A3A-4473-8AC8-86E859C97321}"/>
+                <a16:creationId xmlns="" xmlns:a16="http://schemas.microsoft.com/office/drawing/2014/main" id="{B993AB29-3A3A-4473-8AC8-86E859C97321}"/>
               </a:ext>
             </a:extLst>
           </p:cNvPr>
@@ -16199,7 +16031,7 @@
           <p:cNvPr id="15" name="Picture 14">
             <a:extLst>
               <a:ext uri="{FF2B5EF4-FFF2-40B4-BE49-F238E27FC236}">
-                <a16:creationId xmlns:a16="http://schemas.microsoft.com/office/drawing/2014/main" xmlns="" id="{BD3F9E86-2FB3-4DB3-9343-59D594F350A0}"/>
+                <a16:creationId xmlns="" xmlns:a16="http://schemas.microsoft.com/office/drawing/2014/main" id="{BD3F9E86-2FB3-4DB3-9343-59D594F350A0}"/>
               </a:ext>
             </a:extLst>
           </p:cNvPr>
@@ -16228,7 +16060,7 @@
           <p:cNvPr id="12" name="Text Placeholder 11">
             <a:extLst>
               <a:ext uri="{FF2B5EF4-FFF2-40B4-BE49-F238E27FC236}">
-                <a16:creationId xmlns:a16="http://schemas.microsoft.com/office/drawing/2014/main" xmlns="" id="{BC277FD7-925B-4C3D-A364-118403201507}"/>
+                <a16:creationId xmlns="" xmlns:a16="http://schemas.microsoft.com/office/drawing/2014/main" id="{BC277FD7-925B-4C3D-A364-118403201507}"/>
               </a:ext>
             </a:extLst>
           </p:cNvPr>
@@ -17285,7 +17117,7 @@
           <p:cNvPr id="4" name="Title 3">
             <a:extLst>
               <a:ext uri="{FF2B5EF4-FFF2-40B4-BE49-F238E27FC236}">
-                <a16:creationId xmlns:a16="http://schemas.microsoft.com/office/drawing/2014/main" xmlns="" id="{777CC02B-F7C6-47A8-8C3E-C57C417D9EA3}"/>
+                <a16:creationId xmlns="" xmlns:a16="http://schemas.microsoft.com/office/drawing/2014/main" id="{777CC02B-F7C6-47A8-8C3E-C57C417D9EA3}"/>
               </a:ext>
             </a:extLst>
           </p:cNvPr>
@@ -17321,7 +17153,7 @@
           <p:cNvPr id="5" name="Picture 4">
             <a:extLst>
               <a:ext uri="{FF2B5EF4-FFF2-40B4-BE49-F238E27FC236}">
-                <a16:creationId xmlns:a16="http://schemas.microsoft.com/office/drawing/2014/main" xmlns="" id="{C8FE02DE-D7B2-433D-BFE4-2F564022AD89}"/>
+                <a16:creationId xmlns="" xmlns:a16="http://schemas.microsoft.com/office/drawing/2014/main" id="{C8FE02DE-D7B2-433D-BFE4-2F564022AD89}"/>
               </a:ext>
             </a:extLst>
           </p:cNvPr>
@@ -17351,7 +17183,7 @@
           <p:cNvPr id="6" name="Picture 5">
             <a:extLst>
               <a:ext uri="{FF2B5EF4-FFF2-40B4-BE49-F238E27FC236}">
-                <a16:creationId xmlns:a16="http://schemas.microsoft.com/office/drawing/2014/main" xmlns="" id="{736DEFE3-051A-494A-949C-BB2FF86F9ED7}"/>
+                <a16:creationId xmlns="" xmlns:a16="http://schemas.microsoft.com/office/drawing/2014/main" id="{736DEFE3-051A-494A-949C-BB2FF86F9ED7}"/>
               </a:ext>
             </a:extLst>
           </p:cNvPr>
@@ -17726,7 +17558,7 @@
           <p:cNvPr id="3" name="Title 2">
             <a:extLst>
               <a:ext uri="{FF2B5EF4-FFF2-40B4-BE49-F238E27FC236}">
-                <a16:creationId xmlns:a16="http://schemas.microsoft.com/office/drawing/2014/main" xmlns="" id="{EBF2FBC7-3552-4F01-BB27-8BEEE74F7277}"/>
+                <a16:creationId xmlns="" xmlns:a16="http://schemas.microsoft.com/office/drawing/2014/main" id="{EBF2FBC7-3552-4F01-BB27-8BEEE74F7277}"/>
               </a:ext>
             </a:extLst>
           </p:cNvPr>
@@ -17788,7 +17620,7 @@
           <p:cNvPr id="5" name="Picture 4">
             <a:extLst>
               <a:ext uri="{FF2B5EF4-FFF2-40B4-BE49-F238E27FC236}">
-                <a16:creationId xmlns:a16="http://schemas.microsoft.com/office/drawing/2014/main" xmlns="" id="{09D8A2BA-6C1D-4A33-85F2-E44A4FF54A1C}"/>
+                <a16:creationId xmlns="" xmlns:a16="http://schemas.microsoft.com/office/drawing/2014/main" id="{09D8A2BA-6C1D-4A33-85F2-E44A4FF54A1C}"/>
               </a:ext>
             </a:extLst>
           </p:cNvPr>
@@ -17817,7 +17649,7 @@
           <p:cNvPr id="6" name="Picture 5">
             <a:extLst>
               <a:ext uri="{FF2B5EF4-FFF2-40B4-BE49-F238E27FC236}">
-                <a16:creationId xmlns:a16="http://schemas.microsoft.com/office/drawing/2014/main" xmlns="" id="{6BED3D6A-DC10-4985-B01B-735F2CBA6E47}"/>
+                <a16:creationId xmlns="" xmlns:a16="http://schemas.microsoft.com/office/drawing/2014/main" id="{6BED3D6A-DC10-4985-B01B-735F2CBA6E47}"/>
               </a:ext>
             </a:extLst>
           </p:cNvPr>
@@ -18253,7 +18085,7 @@
           <p:cNvPr id="4" name="Title 3">
             <a:extLst>
               <a:ext uri="{FF2B5EF4-FFF2-40B4-BE49-F238E27FC236}">
-                <a16:creationId xmlns:a16="http://schemas.microsoft.com/office/drawing/2014/main" xmlns="" id="{1A4A072B-83C6-4607-AE6A-5AD61CC72C44}"/>
+                <a16:creationId xmlns="" xmlns:a16="http://schemas.microsoft.com/office/drawing/2014/main" id="{1A4A072B-83C6-4607-AE6A-5AD61CC72C44}"/>
               </a:ext>
             </a:extLst>
           </p:cNvPr>
@@ -18289,7 +18121,7 @@
           <p:cNvPr id="6" name="Picture 5">
             <a:extLst>
               <a:ext uri="{FF2B5EF4-FFF2-40B4-BE49-F238E27FC236}">
-                <a16:creationId xmlns:a16="http://schemas.microsoft.com/office/drawing/2014/main" xmlns="" id="{E8B153BB-61B9-403F-8AE5-F75400450AC0}"/>
+                <a16:creationId xmlns="" xmlns:a16="http://schemas.microsoft.com/office/drawing/2014/main" id="{E8B153BB-61B9-403F-8AE5-F75400450AC0}"/>
               </a:ext>
             </a:extLst>
           </p:cNvPr>
@@ -18863,7 +18695,7 @@
           <p:cNvPr id="6" name="Picture 5">
             <a:extLst>
               <a:ext uri="{FF2B5EF4-FFF2-40B4-BE49-F238E27FC236}">
-                <a16:creationId xmlns:a16="http://schemas.microsoft.com/office/drawing/2014/main" xmlns="" id="{0B7C27C4-3E14-490A-B132-CBBEDA1E905A}"/>
+                <a16:creationId xmlns="" xmlns:a16="http://schemas.microsoft.com/office/drawing/2014/main" id="{0B7C27C4-3E14-490A-B132-CBBEDA1E905A}"/>
               </a:ext>
             </a:extLst>
           </p:cNvPr>
@@ -18893,7 +18725,7 @@
           <p:cNvPr id="2" name="Picture 1">
             <a:extLst>
               <a:ext uri="{FF2B5EF4-FFF2-40B4-BE49-F238E27FC236}">
-                <a16:creationId xmlns:a16="http://schemas.microsoft.com/office/drawing/2014/main" xmlns="" id="{F1FC3E39-8C60-4F64-9838-2A683F25B8C4}"/>
+                <a16:creationId xmlns="" xmlns:a16="http://schemas.microsoft.com/office/drawing/2014/main" id="{F1FC3E39-8C60-4F64-9838-2A683F25B8C4}"/>
               </a:ext>
             </a:extLst>
           </p:cNvPr>
@@ -18923,7 +18755,7 @@
           <p:cNvPr id="9" name="Title 8">
             <a:extLst>
               <a:ext uri="{FF2B5EF4-FFF2-40B4-BE49-F238E27FC236}">
-                <a16:creationId xmlns:a16="http://schemas.microsoft.com/office/drawing/2014/main" xmlns="" id="{FEF304F5-32C5-4869-B185-859B567855A8}"/>
+                <a16:creationId xmlns="" xmlns:a16="http://schemas.microsoft.com/office/drawing/2014/main" id="{FEF304F5-32C5-4869-B185-859B567855A8}"/>
               </a:ext>
             </a:extLst>
           </p:cNvPr>
@@ -19352,7 +19184,7 @@
           <p:cNvPr id="5" name="Picture 4">
             <a:extLst>
               <a:ext uri="{FF2B5EF4-FFF2-40B4-BE49-F238E27FC236}">
-                <a16:creationId xmlns:a16="http://schemas.microsoft.com/office/drawing/2014/main" xmlns="" id="{BBB0C869-7C5C-4070-BD4D-F3FC2DA8F301}"/>
+                <a16:creationId xmlns="" xmlns:a16="http://schemas.microsoft.com/office/drawing/2014/main" id="{BBB0C869-7C5C-4070-BD4D-F3FC2DA8F301}"/>
               </a:ext>
             </a:extLst>
           </p:cNvPr>
@@ -19381,7 +19213,7 @@
           <p:cNvPr id="4" name="Title 3">
             <a:extLst>
               <a:ext uri="{FF2B5EF4-FFF2-40B4-BE49-F238E27FC236}">
-                <a16:creationId xmlns:a16="http://schemas.microsoft.com/office/drawing/2014/main" xmlns="" id="{AFE3A2AF-177E-45E6-A191-0F8523DB7FFA}"/>
+                <a16:creationId xmlns="" xmlns:a16="http://schemas.microsoft.com/office/drawing/2014/main" id="{AFE3A2AF-177E-45E6-A191-0F8523DB7FFA}"/>
               </a:ext>
             </a:extLst>
           </p:cNvPr>
@@ -19421,7 +19253,7 @@
           <p:cNvPr id="7" name="Text Placeholder 30">
             <a:extLst>
               <a:ext uri="{FF2B5EF4-FFF2-40B4-BE49-F238E27FC236}">
-                <a16:creationId xmlns:a16="http://schemas.microsoft.com/office/drawing/2014/main" xmlns="" id="{372426BE-BEE7-4A6D-BCD2-059615BBCE25}"/>
+                <a16:creationId xmlns="" xmlns:a16="http://schemas.microsoft.com/office/drawing/2014/main" id="{372426BE-BEE7-4A6D-BCD2-059615BBCE25}"/>
               </a:ext>
             </a:extLst>
           </p:cNvPr>
@@ -19677,7 +19509,7 @@
           <p:cNvPr id="8" name="Text Placeholder 30">
             <a:extLst>
               <a:ext uri="{FF2B5EF4-FFF2-40B4-BE49-F238E27FC236}">
-                <a16:creationId xmlns:a16="http://schemas.microsoft.com/office/drawing/2014/main" xmlns="" id="{E61E227A-5883-4C77-B25A-46A22FFDF41F}"/>
+                <a16:creationId xmlns="" xmlns:a16="http://schemas.microsoft.com/office/drawing/2014/main" id="{E61E227A-5883-4C77-B25A-46A22FFDF41F}"/>
               </a:ext>
             </a:extLst>
           </p:cNvPr>
@@ -19933,7 +19765,7 @@
           <p:cNvPr id="9" name="Title 3">
             <a:extLst>
               <a:ext uri="{FF2B5EF4-FFF2-40B4-BE49-F238E27FC236}">
-                <a16:creationId xmlns:a16="http://schemas.microsoft.com/office/drawing/2014/main" xmlns="" id="{E25373E9-1A26-4A40-9897-E42DE485D8E3}"/>
+                <a16:creationId xmlns="" xmlns:a16="http://schemas.microsoft.com/office/drawing/2014/main" id="{E25373E9-1A26-4A40-9897-E42DE485D8E3}"/>
               </a:ext>
             </a:extLst>
           </p:cNvPr>
@@ -20045,7 +19877,7 @@
           <p:cNvPr id="10" name="Text Placeholder 1">
             <a:extLst>
               <a:ext uri="{FF2B5EF4-FFF2-40B4-BE49-F238E27FC236}">
-                <a16:creationId xmlns:a16="http://schemas.microsoft.com/office/drawing/2014/main" xmlns="" id="{B19D8AC7-3787-4ADB-9212-0808F015C2DD}"/>
+                <a16:creationId xmlns="" xmlns:a16="http://schemas.microsoft.com/office/drawing/2014/main" id="{B19D8AC7-3787-4ADB-9212-0808F015C2DD}"/>
               </a:ext>
             </a:extLst>
           </p:cNvPr>
@@ -20739,7 +20571,7 @@
           <p:cNvPr id="5" name="Picture 4">
             <a:extLst>
               <a:ext uri="{FF2B5EF4-FFF2-40B4-BE49-F238E27FC236}">
-                <a16:creationId xmlns:a16="http://schemas.microsoft.com/office/drawing/2014/main" xmlns="" id="{BBB0C869-7C5C-4070-BD4D-F3FC2DA8F301}"/>
+                <a16:creationId xmlns="" xmlns:a16="http://schemas.microsoft.com/office/drawing/2014/main" id="{BBB0C869-7C5C-4070-BD4D-F3FC2DA8F301}"/>
               </a:ext>
             </a:extLst>
           </p:cNvPr>
@@ -20768,7 +20600,7 @@
           <p:cNvPr id="4" name="Title 3">
             <a:extLst>
               <a:ext uri="{FF2B5EF4-FFF2-40B4-BE49-F238E27FC236}">
-                <a16:creationId xmlns:a16="http://schemas.microsoft.com/office/drawing/2014/main" xmlns="" id="{AFE3A2AF-177E-45E6-A191-0F8523DB7FFA}"/>
+                <a16:creationId xmlns="" xmlns:a16="http://schemas.microsoft.com/office/drawing/2014/main" id="{AFE3A2AF-177E-45E6-A191-0F8523DB7FFA}"/>
               </a:ext>
             </a:extLst>
           </p:cNvPr>
@@ -20816,7 +20648,7 @@
           <p:cNvPr id="7" name="Text Placeholder 30">
             <a:extLst>
               <a:ext uri="{FF2B5EF4-FFF2-40B4-BE49-F238E27FC236}">
-                <a16:creationId xmlns:a16="http://schemas.microsoft.com/office/drawing/2014/main" xmlns="" id="{372426BE-BEE7-4A6D-BCD2-059615BBCE25}"/>
+                <a16:creationId xmlns="" xmlns:a16="http://schemas.microsoft.com/office/drawing/2014/main" id="{372426BE-BEE7-4A6D-BCD2-059615BBCE25}"/>
               </a:ext>
             </a:extLst>
           </p:cNvPr>
@@ -21072,7 +20904,7 @@
           <p:cNvPr id="8" name="Text Placeholder 30">
             <a:extLst>
               <a:ext uri="{FF2B5EF4-FFF2-40B4-BE49-F238E27FC236}">
-                <a16:creationId xmlns:a16="http://schemas.microsoft.com/office/drawing/2014/main" xmlns="" id="{E61E227A-5883-4C77-B25A-46A22FFDF41F}"/>
+                <a16:creationId xmlns="" xmlns:a16="http://schemas.microsoft.com/office/drawing/2014/main" id="{E61E227A-5883-4C77-B25A-46A22FFDF41F}"/>
               </a:ext>
             </a:extLst>
           </p:cNvPr>
@@ -21328,7 +21160,7 @@
           <p:cNvPr id="9" name="Title 3">
             <a:extLst>
               <a:ext uri="{FF2B5EF4-FFF2-40B4-BE49-F238E27FC236}">
-                <a16:creationId xmlns:a16="http://schemas.microsoft.com/office/drawing/2014/main" xmlns="" id="{E25373E9-1A26-4A40-9897-E42DE485D8E3}"/>
+                <a16:creationId xmlns="" xmlns:a16="http://schemas.microsoft.com/office/drawing/2014/main" id="{E25373E9-1A26-4A40-9897-E42DE485D8E3}"/>
               </a:ext>
             </a:extLst>
           </p:cNvPr>
@@ -21440,7 +21272,7 @@
           <p:cNvPr id="10" name="Text Placeholder 1">
             <a:extLst>
               <a:ext uri="{FF2B5EF4-FFF2-40B4-BE49-F238E27FC236}">
-                <a16:creationId xmlns:a16="http://schemas.microsoft.com/office/drawing/2014/main" xmlns="" id="{B19D8AC7-3787-4ADB-9212-0808F015C2DD}"/>
+                <a16:creationId xmlns="" xmlns:a16="http://schemas.microsoft.com/office/drawing/2014/main" id="{B19D8AC7-3787-4ADB-9212-0808F015C2DD}"/>
               </a:ext>
             </a:extLst>
           </p:cNvPr>
@@ -22261,7 +22093,7 @@
           <p:cNvPr id="5" name="Picture 4">
             <a:extLst>
               <a:ext uri="{FF2B5EF4-FFF2-40B4-BE49-F238E27FC236}">
-                <a16:creationId xmlns:a16="http://schemas.microsoft.com/office/drawing/2014/main" xmlns="" id="{BBB0C869-7C5C-4070-BD4D-F3FC2DA8F301}"/>
+                <a16:creationId xmlns="" xmlns:a16="http://schemas.microsoft.com/office/drawing/2014/main" id="{BBB0C869-7C5C-4070-BD4D-F3FC2DA8F301}"/>
               </a:ext>
             </a:extLst>
           </p:cNvPr>
@@ -22290,7 +22122,7 @@
           <p:cNvPr id="4" name="Title 3">
             <a:extLst>
               <a:ext uri="{FF2B5EF4-FFF2-40B4-BE49-F238E27FC236}">
-                <a16:creationId xmlns:a16="http://schemas.microsoft.com/office/drawing/2014/main" xmlns="" id="{AFE3A2AF-177E-45E6-A191-0F8523DB7FFA}"/>
+                <a16:creationId xmlns="" xmlns:a16="http://schemas.microsoft.com/office/drawing/2014/main" id="{AFE3A2AF-177E-45E6-A191-0F8523DB7FFA}"/>
               </a:ext>
             </a:extLst>
           </p:cNvPr>
@@ -22346,7 +22178,7 @@
           <p:cNvPr id="7" name="Text Placeholder 30">
             <a:extLst>
               <a:ext uri="{FF2B5EF4-FFF2-40B4-BE49-F238E27FC236}">
-                <a16:creationId xmlns:a16="http://schemas.microsoft.com/office/drawing/2014/main" xmlns="" id="{372426BE-BEE7-4A6D-BCD2-059615BBCE25}"/>
+                <a16:creationId xmlns="" xmlns:a16="http://schemas.microsoft.com/office/drawing/2014/main" id="{372426BE-BEE7-4A6D-BCD2-059615BBCE25}"/>
               </a:ext>
             </a:extLst>
           </p:cNvPr>
@@ -22602,7 +22434,7 @@
           <p:cNvPr id="8" name="Text Placeholder 30">
             <a:extLst>
               <a:ext uri="{FF2B5EF4-FFF2-40B4-BE49-F238E27FC236}">
-                <a16:creationId xmlns:a16="http://schemas.microsoft.com/office/drawing/2014/main" xmlns="" id="{E61E227A-5883-4C77-B25A-46A22FFDF41F}"/>
+                <a16:creationId xmlns="" xmlns:a16="http://schemas.microsoft.com/office/drawing/2014/main" id="{E61E227A-5883-4C77-B25A-46A22FFDF41F}"/>
               </a:ext>
             </a:extLst>
           </p:cNvPr>
@@ -22858,7 +22690,7 @@
           <p:cNvPr id="9" name="Title 3">
             <a:extLst>
               <a:ext uri="{FF2B5EF4-FFF2-40B4-BE49-F238E27FC236}">
-                <a16:creationId xmlns:a16="http://schemas.microsoft.com/office/drawing/2014/main" xmlns="" id="{E25373E9-1A26-4A40-9897-E42DE485D8E3}"/>
+                <a16:creationId xmlns="" xmlns:a16="http://schemas.microsoft.com/office/drawing/2014/main" id="{E25373E9-1A26-4A40-9897-E42DE485D8E3}"/>
               </a:ext>
             </a:extLst>
           </p:cNvPr>
@@ -22970,7 +22802,7 @@
           <p:cNvPr id="10" name="Text Placeholder 1">
             <a:extLst>
               <a:ext uri="{FF2B5EF4-FFF2-40B4-BE49-F238E27FC236}">
-                <a16:creationId xmlns:a16="http://schemas.microsoft.com/office/drawing/2014/main" xmlns="" id="{B19D8AC7-3787-4ADB-9212-0808F015C2DD}"/>
+                <a16:creationId xmlns="" xmlns:a16="http://schemas.microsoft.com/office/drawing/2014/main" id="{B19D8AC7-3787-4ADB-9212-0808F015C2DD}"/>
               </a:ext>
             </a:extLst>
           </p:cNvPr>
@@ -23690,7 +23522,7 @@
           <p:cNvPr id="5" name="Picture 4">
             <a:extLst>
               <a:ext uri="{FF2B5EF4-FFF2-40B4-BE49-F238E27FC236}">
-                <a16:creationId xmlns:a16="http://schemas.microsoft.com/office/drawing/2014/main" xmlns="" id="{BBB0C869-7C5C-4070-BD4D-F3FC2DA8F301}"/>
+                <a16:creationId xmlns="" xmlns:a16="http://schemas.microsoft.com/office/drawing/2014/main" id="{BBB0C869-7C5C-4070-BD4D-F3FC2DA8F301}"/>
               </a:ext>
             </a:extLst>
           </p:cNvPr>
@@ -23719,7 +23551,7 @@
           <p:cNvPr id="4" name="Title 3">
             <a:extLst>
               <a:ext uri="{FF2B5EF4-FFF2-40B4-BE49-F238E27FC236}">
-                <a16:creationId xmlns:a16="http://schemas.microsoft.com/office/drawing/2014/main" xmlns="" id="{AFE3A2AF-177E-45E6-A191-0F8523DB7FFA}"/>
+                <a16:creationId xmlns="" xmlns:a16="http://schemas.microsoft.com/office/drawing/2014/main" id="{AFE3A2AF-177E-45E6-A191-0F8523DB7FFA}"/>
               </a:ext>
             </a:extLst>
           </p:cNvPr>
@@ -23759,7 +23591,7 @@
           <p:cNvPr id="7" name="Text Placeholder 30">
             <a:extLst>
               <a:ext uri="{FF2B5EF4-FFF2-40B4-BE49-F238E27FC236}">
-                <a16:creationId xmlns:a16="http://schemas.microsoft.com/office/drawing/2014/main" xmlns="" id="{372426BE-BEE7-4A6D-BCD2-059615BBCE25}"/>
+                <a16:creationId xmlns="" xmlns:a16="http://schemas.microsoft.com/office/drawing/2014/main" id="{372426BE-BEE7-4A6D-BCD2-059615BBCE25}"/>
               </a:ext>
             </a:extLst>
           </p:cNvPr>
@@ -24015,7 +23847,7 @@
           <p:cNvPr id="8" name="Text Placeholder 30">
             <a:extLst>
               <a:ext uri="{FF2B5EF4-FFF2-40B4-BE49-F238E27FC236}">
-                <a16:creationId xmlns:a16="http://schemas.microsoft.com/office/drawing/2014/main" xmlns="" id="{E61E227A-5883-4C77-B25A-46A22FFDF41F}"/>
+                <a16:creationId xmlns="" xmlns:a16="http://schemas.microsoft.com/office/drawing/2014/main" id="{E61E227A-5883-4C77-B25A-46A22FFDF41F}"/>
               </a:ext>
             </a:extLst>
           </p:cNvPr>
@@ -24271,7 +24103,7 @@
           <p:cNvPr id="9" name="Title 3">
             <a:extLst>
               <a:ext uri="{FF2B5EF4-FFF2-40B4-BE49-F238E27FC236}">
-                <a16:creationId xmlns:a16="http://schemas.microsoft.com/office/drawing/2014/main" xmlns="" id="{E25373E9-1A26-4A40-9897-E42DE485D8E3}"/>
+                <a16:creationId xmlns="" xmlns:a16="http://schemas.microsoft.com/office/drawing/2014/main" id="{E25373E9-1A26-4A40-9897-E42DE485D8E3}"/>
               </a:ext>
             </a:extLst>
           </p:cNvPr>
@@ -24383,7 +24215,7 @@
           <p:cNvPr id="10" name="Text Placeholder 1">
             <a:extLst>
               <a:ext uri="{FF2B5EF4-FFF2-40B4-BE49-F238E27FC236}">
-                <a16:creationId xmlns:a16="http://schemas.microsoft.com/office/drawing/2014/main" xmlns="" id="{B19D8AC7-3787-4ADB-9212-0808F015C2DD}"/>
+                <a16:creationId xmlns="" xmlns:a16="http://schemas.microsoft.com/office/drawing/2014/main" id="{B19D8AC7-3787-4ADB-9212-0808F015C2DD}"/>
               </a:ext>
             </a:extLst>
           </p:cNvPr>
@@ -26164,21 +25996,21 @@
 </file>
 
 <file path=customXml/item2.xml><?xml version="1.0" encoding="utf-8"?>
+<?mso-contentType ?>
+<FormTemplates xmlns="http://schemas.microsoft.com/sharepoint/v3/contenttype/forms">
+  <Display>DocumentLibraryForm</Display>
+  <Edit>DocumentLibraryForm</Edit>
+  <New>DocumentLibraryForm</New>
+</FormTemplates>
+</file>
+
+<file path=customXml/item3.xml><?xml version="1.0" encoding="utf-8"?>
 <p:properties xmlns:p="http://schemas.microsoft.com/office/2006/metadata/properties" xmlns:xsi="http://www.w3.org/2001/XMLSchema-instance" xmlns:pc="http://schemas.microsoft.com/office/infopath/2007/PartnerControls">
   <documentManagement>
     <Status xmlns="71af3243-3dd4-4a8d-8c0d-dd76da1f02a5">Not started</Status>
     <MediaServiceKeyPoints xmlns="71af3243-3dd4-4a8d-8c0d-dd76da1f02a5" xsi:nil="true"/>
   </documentManagement>
 </p:properties>
-</file>
-
-<file path=customXml/item3.xml><?xml version="1.0" encoding="utf-8"?>
-<?mso-contentType ?>
-<FormTemplates xmlns="http://schemas.microsoft.com/sharepoint/v3/contenttype/forms">
-  <Display>DocumentLibraryForm</Display>
-  <Edit>DocumentLibraryForm</Edit>
-  <New>DocumentLibraryForm</New>
-</FormTemplates>
 </file>
 
 <file path=customXml/itemProps1.xml><?xml version="1.0" encoding="utf-8"?>
@@ -26201,6 +26033,14 @@
 </file>
 
 <file path=customXml/itemProps2.xml><?xml version="1.0" encoding="utf-8"?>
+<ds:datastoreItem xmlns:ds="http://schemas.openxmlformats.org/officeDocument/2006/customXml" ds:itemID="{05D99ABA-76CE-4A8E-B5F0-C051B96628DE}">
+  <ds:schemaRefs>
+    <ds:schemaRef ds:uri="http://schemas.microsoft.com/sharepoint/v3/contenttype/forms"/>
+  </ds:schemaRefs>
+</ds:datastoreItem>
+</file>
+
+<file path=customXml/itemProps3.xml><?xml version="1.0" encoding="utf-8"?>
 <ds:datastoreItem xmlns:ds="http://schemas.openxmlformats.org/officeDocument/2006/customXml" ds:itemID="{4DEA9014-ED64-4558-B1E1-D03F0EE32BEB}">
   <ds:schemaRefs>
     <ds:schemaRef ds:uri="http://schemas.microsoft.com/office/2006/metadata/properties"/>
@@ -26208,12 +26048,4 @@
     <ds:schemaRef ds:uri="71af3243-3dd4-4a8d-8c0d-dd76da1f02a5"/>
   </ds:schemaRefs>
 </ds:datastoreItem>
-</file>
-
-<file path=customXml/itemProps3.xml><?xml version="1.0" encoding="utf-8"?>
-<ds:datastoreItem xmlns:ds="http://schemas.openxmlformats.org/officeDocument/2006/customXml" ds:itemID="{05D99ABA-76CE-4A8E-B5F0-C051B96628DE}">
-  <ds:schemaRefs>
-    <ds:schemaRef ds:uri="http://schemas.microsoft.com/sharepoint/v3/contenttype/forms"/>
-  </ds:schemaRefs>
-</ds:datastoreItem>
 </file>
--- a/docs/Car Market Trends Analysis - Presentation.pptx
+++ b/docs/Car Market Trends Analysis - Presentation.pptx
@@ -194,7 +194,7 @@
           <p:cNvPr id="2" name="Header Placeholder 1">
             <a:extLst>
               <a:ext uri="{FF2B5EF4-FFF2-40B4-BE49-F238E27FC236}">
-                <a16:creationId xmlns="" xmlns:a16="http://schemas.microsoft.com/office/drawing/2014/main" id="{B76F666D-E0C2-435B-BAA8-9287F9E5D38A}"/>
+                <a16:creationId xmlns:a16="http://schemas.microsoft.com/office/drawing/2014/main" xmlns="" id="{B76F666D-E0C2-435B-BAA8-9287F9E5D38A}"/>
               </a:ext>
             </a:extLst>
           </p:cNvPr>
@@ -231,7 +231,7 @@
           <p:cNvPr id="3" name="Date Placeholder 2">
             <a:extLst>
               <a:ext uri="{FF2B5EF4-FFF2-40B4-BE49-F238E27FC236}">
-                <a16:creationId xmlns="" xmlns:a16="http://schemas.microsoft.com/office/drawing/2014/main" id="{19FEBCAF-CB3F-4928-91AA-D61472F880C0}"/>
+                <a16:creationId xmlns:a16="http://schemas.microsoft.com/office/drawing/2014/main" xmlns="" id="{19FEBCAF-CB3F-4928-91AA-D61472F880C0}"/>
               </a:ext>
             </a:extLst>
           </p:cNvPr>
@@ -272,7 +272,7 @@
           <p:cNvPr id="4" name="Footer Placeholder 3">
             <a:extLst>
               <a:ext uri="{FF2B5EF4-FFF2-40B4-BE49-F238E27FC236}">
-                <a16:creationId xmlns="" xmlns:a16="http://schemas.microsoft.com/office/drawing/2014/main" id="{69256698-63C6-4CCC-81CB-EA5604C30F1E}"/>
+                <a16:creationId xmlns:a16="http://schemas.microsoft.com/office/drawing/2014/main" xmlns="" id="{69256698-63C6-4CCC-81CB-EA5604C30F1E}"/>
               </a:ext>
             </a:extLst>
           </p:cNvPr>
@@ -309,7 +309,7 @@
           <p:cNvPr id="5" name="Slide Number Placeholder 4">
             <a:extLst>
               <a:ext uri="{FF2B5EF4-FFF2-40B4-BE49-F238E27FC236}">
-                <a16:creationId xmlns="" xmlns:a16="http://schemas.microsoft.com/office/drawing/2014/main" id="{B2467FDA-05D7-4760-A373-5D6AEAAF4278}"/>
+                <a16:creationId xmlns:a16="http://schemas.microsoft.com/office/drawing/2014/main" xmlns="" id="{B2467FDA-05D7-4760-A373-5D6AEAAF4278}"/>
               </a:ext>
             </a:extLst>
           </p:cNvPr>
@@ -3594,7 +3594,7 @@
           <p:cNvPr id="11" name="Text Placeholder 10">
             <a:extLst>
               <a:ext uri="{FF2B5EF4-FFF2-40B4-BE49-F238E27FC236}">
-                <a16:creationId xmlns="" xmlns:a16="http://schemas.microsoft.com/office/drawing/2014/main" id="{6FDA3C6F-5F6A-4D64-8BFE-AFFF58B1A047}"/>
+                <a16:creationId xmlns:a16="http://schemas.microsoft.com/office/drawing/2014/main" xmlns="" id="{6FDA3C6F-5F6A-4D64-8BFE-AFFF58B1A047}"/>
               </a:ext>
             </a:extLst>
           </p:cNvPr>
@@ -3652,7 +3652,7 @@
           <p:cNvPr id="15" name="Hexagon 14">
             <a:extLst>
               <a:ext uri="{FF2B5EF4-FFF2-40B4-BE49-F238E27FC236}">
-                <a16:creationId xmlns="" xmlns:a16="http://schemas.microsoft.com/office/drawing/2014/main" id="{AC159667-7690-4645-986D-BE501438455F}"/>
+                <a16:creationId xmlns:a16="http://schemas.microsoft.com/office/drawing/2014/main" xmlns="" id="{AC159667-7690-4645-986D-BE501438455F}"/>
               </a:ext>
             </a:extLst>
           </p:cNvPr>
@@ -3704,7 +3704,7 @@
           <p:cNvPr id="16" name="Hexagon 15">
             <a:extLst>
               <a:ext uri="{FF2B5EF4-FFF2-40B4-BE49-F238E27FC236}">
-                <a16:creationId xmlns="" xmlns:a16="http://schemas.microsoft.com/office/drawing/2014/main" id="{54667EE4-E77F-453B-BF8B-B1EE2AE80715}"/>
+                <a16:creationId xmlns:a16="http://schemas.microsoft.com/office/drawing/2014/main" xmlns="" id="{54667EE4-E77F-453B-BF8B-B1EE2AE80715}"/>
               </a:ext>
             </a:extLst>
           </p:cNvPr>
@@ -3756,7 +3756,7 @@
           <p:cNvPr id="17" name="Hexagon 16">
             <a:extLst>
               <a:ext uri="{FF2B5EF4-FFF2-40B4-BE49-F238E27FC236}">
-                <a16:creationId xmlns="" xmlns:a16="http://schemas.microsoft.com/office/drawing/2014/main" id="{FC050232-A229-425F-BFC8-D50374F2D171}"/>
+                <a16:creationId xmlns:a16="http://schemas.microsoft.com/office/drawing/2014/main" xmlns="" id="{FC050232-A229-425F-BFC8-D50374F2D171}"/>
               </a:ext>
             </a:extLst>
           </p:cNvPr>
@@ -3808,7 +3808,7 @@
           <p:cNvPr id="18" name="Hexagon 17">
             <a:extLst>
               <a:ext uri="{FF2B5EF4-FFF2-40B4-BE49-F238E27FC236}">
-                <a16:creationId xmlns="" xmlns:a16="http://schemas.microsoft.com/office/drawing/2014/main" id="{53E4EBC7-340A-43A5-9E23-4B73A6F700B6}"/>
+                <a16:creationId xmlns:a16="http://schemas.microsoft.com/office/drawing/2014/main" xmlns="" id="{53E4EBC7-340A-43A5-9E23-4B73A6F700B6}"/>
               </a:ext>
             </a:extLst>
           </p:cNvPr>
@@ -3860,7 +3860,7 @@
           <p:cNvPr id="19" name="Picture Placeholder 18">
             <a:extLst>
               <a:ext uri="{FF2B5EF4-FFF2-40B4-BE49-F238E27FC236}">
-                <a16:creationId xmlns="" xmlns:a16="http://schemas.microsoft.com/office/drawing/2014/main" id="{1ED0E31A-F0A3-481D-8D9C-E3C4531FD21D}"/>
+                <a16:creationId xmlns:a16="http://schemas.microsoft.com/office/drawing/2014/main" xmlns="" id="{1ED0E31A-F0A3-481D-8D9C-E3C4531FD21D}"/>
               </a:ext>
             </a:extLst>
           </p:cNvPr>
@@ -4061,7 +4061,7 @@
           <p:cNvPr id="2" name="Title 1">
             <a:extLst>
               <a:ext uri="{FF2B5EF4-FFF2-40B4-BE49-F238E27FC236}">
-                <a16:creationId xmlns="" xmlns:a16="http://schemas.microsoft.com/office/drawing/2014/main" id="{03E68100-C56F-4515-A4FD-3F301797E78F}"/>
+                <a16:creationId xmlns:a16="http://schemas.microsoft.com/office/drawing/2014/main" xmlns="" id="{03E68100-C56F-4515-A4FD-3F301797E78F}"/>
               </a:ext>
             </a:extLst>
           </p:cNvPr>
@@ -4147,7 +4147,7 @@
           <p:cNvPr id="10" name="Oval 9">
             <a:extLst>
               <a:ext uri="{FF2B5EF4-FFF2-40B4-BE49-F238E27FC236}">
-                <a16:creationId xmlns="" xmlns:a16="http://schemas.microsoft.com/office/drawing/2014/main" id="{24FAA9D0-7C9C-4043-9931-A15819ABB9B5}"/>
+                <a16:creationId xmlns:a16="http://schemas.microsoft.com/office/drawing/2014/main" xmlns="" id="{24FAA9D0-7C9C-4043-9931-A15819ABB9B5}"/>
               </a:ext>
             </a:extLst>
           </p:cNvPr>
@@ -4203,7 +4203,7 @@
           <p:cNvPr id="14" name="Oval 13">
             <a:extLst>
               <a:ext uri="{FF2B5EF4-FFF2-40B4-BE49-F238E27FC236}">
-                <a16:creationId xmlns="" xmlns:a16="http://schemas.microsoft.com/office/drawing/2014/main" id="{E232AB2D-843E-4B5F-8793-6A263DA356BB}"/>
+                <a16:creationId xmlns:a16="http://schemas.microsoft.com/office/drawing/2014/main" xmlns="" id="{E232AB2D-843E-4B5F-8793-6A263DA356BB}"/>
               </a:ext>
             </a:extLst>
           </p:cNvPr>
@@ -4259,7 +4259,7 @@
           <p:cNvPr id="16" name="Oval 15">
             <a:extLst>
               <a:ext uri="{FF2B5EF4-FFF2-40B4-BE49-F238E27FC236}">
-                <a16:creationId xmlns="" xmlns:a16="http://schemas.microsoft.com/office/drawing/2014/main" id="{FA75A12B-C399-4072-BD69-D872D2C2AD1F}"/>
+                <a16:creationId xmlns:a16="http://schemas.microsoft.com/office/drawing/2014/main" xmlns="" id="{FA75A12B-C399-4072-BD69-D872D2C2AD1F}"/>
               </a:ext>
             </a:extLst>
           </p:cNvPr>
@@ -4315,7 +4315,7 @@
           <p:cNvPr id="23" name="Picture Placeholder 22">
             <a:extLst>
               <a:ext uri="{FF2B5EF4-FFF2-40B4-BE49-F238E27FC236}">
-                <a16:creationId xmlns="" xmlns:a16="http://schemas.microsoft.com/office/drawing/2014/main" id="{423AE48B-50E9-4BEA-B66A-B2D2B9CCFE9C}"/>
+                <a16:creationId xmlns:a16="http://schemas.microsoft.com/office/drawing/2014/main" xmlns="" id="{423AE48B-50E9-4BEA-B66A-B2D2B9CCFE9C}"/>
               </a:ext>
             </a:extLst>
           </p:cNvPr>
@@ -4467,7 +4467,7 @@
           <p:cNvPr id="27" name="Text Placeholder 26">
             <a:extLst>
               <a:ext uri="{FF2B5EF4-FFF2-40B4-BE49-F238E27FC236}">
-                <a16:creationId xmlns="" xmlns:a16="http://schemas.microsoft.com/office/drawing/2014/main" id="{282D3E62-6D1A-4E9D-BE54-2EED9BF429A4}"/>
+                <a16:creationId xmlns:a16="http://schemas.microsoft.com/office/drawing/2014/main" xmlns="" id="{282D3E62-6D1A-4E9D-BE54-2EED9BF429A4}"/>
               </a:ext>
             </a:extLst>
           </p:cNvPr>
@@ -4548,7 +4548,7 @@
           <p:cNvPr id="8" name="Title 1">
             <a:extLst>
               <a:ext uri="{FF2B5EF4-FFF2-40B4-BE49-F238E27FC236}">
-                <a16:creationId xmlns="" xmlns:a16="http://schemas.microsoft.com/office/drawing/2014/main" id="{DEB8F0E5-B89F-48AD-87BD-534EA9463CD3}"/>
+                <a16:creationId xmlns:a16="http://schemas.microsoft.com/office/drawing/2014/main" xmlns="" id="{DEB8F0E5-B89F-48AD-87BD-534EA9463CD3}"/>
               </a:ext>
             </a:extLst>
           </p:cNvPr>
@@ -4634,7 +4634,7 @@
           <p:cNvPr id="10" name="Text Placeholder 26">
             <a:extLst>
               <a:ext uri="{FF2B5EF4-FFF2-40B4-BE49-F238E27FC236}">
-                <a16:creationId xmlns="" xmlns:a16="http://schemas.microsoft.com/office/drawing/2014/main" id="{4AA38E8C-A334-4183-8ABC-112B8517F487}"/>
+                <a16:creationId xmlns:a16="http://schemas.microsoft.com/office/drawing/2014/main" xmlns="" id="{4AA38E8C-A334-4183-8ABC-112B8517F487}"/>
               </a:ext>
             </a:extLst>
           </p:cNvPr>
@@ -4712,7 +4712,7 @@
           <p:cNvPr id="19" name="Rectangle 18">
             <a:extLst>
               <a:ext uri="{FF2B5EF4-FFF2-40B4-BE49-F238E27FC236}">
-                <a16:creationId xmlns="" xmlns:a16="http://schemas.microsoft.com/office/drawing/2014/main" id="{B80624A4-5116-4AAF-8C31-C25D1DB16FEC}"/>
+                <a16:creationId xmlns:a16="http://schemas.microsoft.com/office/drawing/2014/main" xmlns="" id="{B80624A4-5116-4AAF-8C31-C25D1DB16FEC}"/>
               </a:ext>
             </a:extLst>
           </p:cNvPr>
@@ -4764,7 +4764,7 @@
           <p:cNvPr id="21" name="Rectangle 20">
             <a:extLst>
               <a:ext uri="{FF2B5EF4-FFF2-40B4-BE49-F238E27FC236}">
-                <a16:creationId xmlns="" xmlns:a16="http://schemas.microsoft.com/office/drawing/2014/main" id="{1D07EC8A-6024-4DEA-9C4D-AE4228E17854}"/>
+                <a16:creationId xmlns:a16="http://schemas.microsoft.com/office/drawing/2014/main" xmlns="" id="{1D07EC8A-6024-4DEA-9C4D-AE4228E17854}"/>
               </a:ext>
             </a:extLst>
           </p:cNvPr>
@@ -4816,7 +4816,7 @@
           <p:cNvPr id="23" name="Rectangle 22">
             <a:extLst>
               <a:ext uri="{FF2B5EF4-FFF2-40B4-BE49-F238E27FC236}">
-                <a16:creationId xmlns="" xmlns:a16="http://schemas.microsoft.com/office/drawing/2014/main" id="{D1C8FAEF-DF78-48CC-AEEF-F9B802055C05}"/>
+                <a16:creationId xmlns:a16="http://schemas.microsoft.com/office/drawing/2014/main" xmlns="" id="{D1C8FAEF-DF78-48CC-AEEF-F9B802055C05}"/>
               </a:ext>
             </a:extLst>
           </p:cNvPr>
@@ -4868,7 +4868,7 @@
           <p:cNvPr id="11" name="Picture Placeholder 10">
             <a:extLst>
               <a:ext uri="{FF2B5EF4-FFF2-40B4-BE49-F238E27FC236}">
-                <a16:creationId xmlns="" xmlns:a16="http://schemas.microsoft.com/office/drawing/2014/main" id="{566F72D6-AEEE-4CF3-8136-F6782F1E489E}"/>
+                <a16:creationId xmlns:a16="http://schemas.microsoft.com/office/drawing/2014/main" xmlns="" id="{566F72D6-AEEE-4CF3-8136-F6782F1E489E}"/>
               </a:ext>
             </a:extLst>
           </p:cNvPr>
@@ -5054,7 +5054,7 @@
           <p:cNvPr id="2" name="Title 1">
             <a:extLst>
               <a:ext uri="{FF2B5EF4-FFF2-40B4-BE49-F238E27FC236}">
-                <a16:creationId xmlns="" xmlns:a16="http://schemas.microsoft.com/office/drawing/2014/main" id="{459DADC7-BE21-4434-A6E4-BAF809005389}"/>
+                <a16:creationId xmlns:a16="http://schemas.microsoft.com/office/drawing/2014/main" xmlns="" id="{459DADC7-BE21-4434-A6E4-BAF809005389}"/>
               </a:ext>
             </a:extLst>
           </p:cNvPr>
@@ -5323,7 +5323,7 @@
           <p:cNvPr id="39" name="Picture Placeholder 38">
             <a:extLst>
               <a:ext uri="{FF2B5EF4-FFF2-40B4-BE49-F238E27FC236}">
-                <a16:creationId xmlns="" xmlns:a16="http://schemas.microsoft.com/office/drawing/2014/main" id="{CF421413-161E-4B36-B693-FB38DF14EDAB}"/>
+                <a16:creationId xmlns:a16="http://schemas.microsoft.com/office/drawing/2014/main" xmlns="" id="{CF421413-161E-4B36-B693-FB38DF14EDAB}"/>
               </a:ext>
             </a:extLst>
           </p:cNvPr>
@@ -5426,7 +5426,7 @@
           <p:cNvPr id="38" name="Picture Placeholder 37">
             <a:extLst>
               <a:ext uri="{FF2B5EF4-FFF2-40B4-BE49-F238E27FC236}">
-                <a16:creationId xmlns="" xmlns:a16="http://schemas.microsoft.com/office/drawing/2014/main" id="{B5D207AE-9C9C-410A-9F31-2402BAD6DDFF}"/>
+                <a16:creationId xmlns:a16="http://schemas.microsoft.com/office/drawing/2014/main" xmlns="" id="{B5D207AE-9C9C-410A-9F31-2402BAD6DDFF}"/>
               </a:ext>
             </a:extLst>
           </p:cNvPr>
@@ -5529,7 +5529,7 @@
           <p:cNvPr id="40" name="Picture Placeholder 39">
             <a:extLst>
               <a:ext uri="{FF2B5EF4-FFF2-40B4-BE49-F238E27FC236}">
-                <a16:creationId xmlns="" xmlns:a16="http://schemas.microsoft.com/office/drawing/2014/main" id="{DE3344FC-C4DE-481F-9C31-667EDD563C47}"/>
+                <a16:creationId xmlns:a16="http://schemas.microsoft.com/office/drawing/2014/main" xmlns="" id="{DE3344FC-C4DE-481F-9C31-667EDD563C47}"/>
               </a:ext>
             </a:extLst>
           </p:cNvPr>
@@ -5632,7 +5632,7 @@
           <p:cNvPr id="41" name="Picture Placeholder 40">
             <a:extLst>
               <a:ext uri="{FF2B5EF4-FFF2-40B4-BE49-F238E27FC236}">
-                <a16:creationId xmlns="" xmlns:a16="http://schemas.microsoft.com/office/drawing/2014/main" id="{59094D7D-3613-49C1-BB58-A65B41A9738D}"/>
+                <a16:creationId xmlns:a16="http://schemas.microsoft.com/office/drawing/2014/main" xmlns="" id="{59094D7D-3613-49C1-BB58-A65B41A9738D}"/>
               </a:ext>
             </a:extLst>
           </p:cNvPr>
@@ -5735,7 +5735,7 @@
           <p:cNvPr id="8" name="Title 1">
             <a:extLst>
               <a:ext uri="{FF2B5EF4-FFF2-40B4-BE49-F238E27FC236}">
-                <a16:creationId xmlns="" xmlns:a16="http://schemas.microsoft.com/office/drawing/2014/main" id="{69FE87B7-32A4-4C7F-9AAF-37688E640456}"/>
+                <a16:creationId xmlns:a16="http://schemas.microsoft.com/office/drawing/2014/main" xmlns="" id="{69FE87B7-32A4-4C7F-9AAF-37688E640456}"/>
               </a:ext>
             </a:extLst>
           </p:cNvPr>
@@ -5781,7 +5781,7 @@
           <p:cNvPr id="9" name="Hexagon 8">
             <a:extLst>
               <a:ext uri="{FF2B5EF4-FFF2-40B4-BE49-F238E27FC236}">
-                <a16:creationId xmlns="" xmlns:a16="http://schemas.microsoft.com/office/drawing/2014/main" id="{476CA45F-A66A-4AD8-A004-10DB55A5D7B2}"/>
+                <a16:creationId xmlns:a16="http://schemas.microsoft.com/office/drawing/2014/main" xmlns="" id="{476CA45F-A66A-4AD8-A004-10DB55A5D7B2}"/>
               </a:ext>
             </a:extLst>
           </p:cNvPr>
@@ -5833,7 +5833,7 @@
           <p:cNvPr id="10" name="Hexagon 9">
             <a:extLst>
               <a:ext uri="{FF2B5EF4-FFF2-40B4-BE49-F238E27FC236}">
-                <a16:creationId xmlns="" xmlns:a16="http://schemas.microsoft.com/office/drawing/2014/main" id="{27A66A3D-2437-4015-9F5F-380C4D23D83C}"/>
+                <a16:creationId xmlns:a16="http://schemas.microsoft.com/office/drawing/2014/main" xmlns="" id="{27A66A3D-2437-4015-9F5F-380C4D23D83C}"/>
               </a:ext>
             </a:extLst>
           </p:cNvPr>
@@ -5885,7 +5885,7 @@
           <p:cNvPr id="11" name="Hexagon 10">
             <a:extLst>
               <a:ext uri="{FF2B5EF4-FFF2-40B4-BE49-F238E27FC236}">
-                <a16:creationId xmlns="" xmlns:a16="http://schemas.microsoft.com/office/drawing/2014/main" id="{FFB14F3B-E7EF-4546-8D74-71FFB45C77C0}"/>
+                <a16:creationId xmlns:a16="http://schemas.microsoft.com/office/drawing/2014/main" xmlns="" id="{FFB14F3B-E7EF-4546-8D74-71FFB45C77C0}"/>
               </a:ext>
             </a:extLst>
           </p:cNvPr>
@@ -5937,7 +5937,7 @@
           <p:cNvPr id="23" name="Text Placeholder 22">
             <a:extLst>
               <a:ext uri="{FF2B5EF4-FFF2-40B4-BE49-F238E27FC236}">
-                <a16:creationId xmlns="" xmlns:a16="http://schemas.microsoft.com/office/drawing/2014/main" id="{591F943B-ED0D-49A1-844A-E23BA9A4871B}"/>
+                <a16:creationId xmlns:a16="http://schemas.microsoft.com/office/drawing/2014/main" xmlns="" id="{591F943B-ED0D-49A1-844A-E23BA9A4871B}"/>
               </a:ext>
             </a:extLst>
           </p:cNvPr>
@@ -5986,7 +5986,7 @@
           <p:cNvPr id="24" name="Text Placeholder 22">
             <a:extLst>
               <a:ext uri="{FF2B5EF4-FFF2-40B4-BE49-F238E27FC236}">
-                <a16:creationId xmlns="" xmlns:a16="http://schemas.microsoft.com/office/drawing/2014/main" id="{9AC6B9A8-053C-4828-B705-901C6018F30D}"/>
+                <a16:creationId xmlns:a16="http://schemas.microsoft.com/office/drawing/2014/main" xmlns="" id="{9AC6B9A8-053C-4828-B705-901C6018F30D}"/>
               </a:ext>
             </a:extLst>
           </p:cNvPr>
@@ -6035,7 +6035,7 @@
           <p:cNvPr id="27" name="Text Placeholder 22">
             <a:extLst>
               <a:ext uri="{FF2B5EF4-FFF2-40B4-BE49-F238E27FC236}">
-                <a16:creationId xmlns="" xmlns:a16="http://schemas.microsoft.com/office/drawing/2014/main" id="{BBA6FD52-E179-41F8-AE78-9AF3D65F28B6}"/>
+                <a16:creationId xmlns:a16="http://schemas.microsoft.com/office/drawing/2014/main" xmlns="" id="{BBA6FD52-E179-41F8-AE78-9AF3D65F28B6}"/>
               </a:ext>
             </a:extLst>
           </p:cNvPr>
@@ -6084,7 +6084,7 @@
           <p:cNvPr id="28" name="Text Placeholder 22">
             <a:extLst>
               <a:ext uri="{FF2B5EF4-FFF2-40B4-BE49-F238E27FC236}">
-                <a16:creationId xmlns="" xmlns:a16="http://schemas.microsoft.com/office/drawing/2014/main" id="{C49A82AB-D328-4DB0-841B-186884119EBF}"/>
+                <a16:creationId xmlns:a16="http://schemas.microsoft.com/office/drawing/2014/main" xmlns="" id="{C49A82AB-D328-4DB0-841B-186884119EBF}"/>
               </a:ext>
             </a:extLst>
           </p:cNvPr>
@@ -6133,7 +6133,7 @@
           <p:cNvPr id="29" name="Text Placeholder 22">
             <a:extLst>
               <a:ext uri="{FF2B5EF4-FFF2-40B4-BE49-F238E27FC236}">
-                <a16:creationId xmlns="" xmlns:a16="http://schemas.microsoft.com/office/drawing/2014/main" id="{84E23D5D-9866-48F9-8E08-DD2DBE4C4E32}"/>
+                <a16:creationId xmlns:a16="http://schemas.microsoft.com/office/drawing/2014/main" xmlns="" id="{84E23D5D-9866-48F9-8E08-DD2DBE4C4E32}"/>
               </a:ext>
             </a:extLst>
           </p:cNvPr>
@@ -6182,7 +6182,7 @@
           <p:cNvPr id="30" name="Text Placeholder 22">
             <a:extLst>
               <a:ext uri="{FF2B5EF4-FFF2-40B4-BE49-F238E27FC236}">
-                <a16:creationId xmlns="" xmlns:a16="http://schemas.microsoft.com/office/drawing/2014/main" id="{E671C9E6-A1A5-4EE5-8642-94AA7635DB05}"/>
+                <a16:creationId xmlns:a16="http://schemas.microsoft.com/office/drawing/2014/main" xmlns="" id="{E671C9E6-A1A5-4EE5-8642-94AA7635DB05}"/>
               </a:ext>
             </a:extLst>
           </p:cNvPr>
@@ -6231,7 +6231,7 @@
           <p:cNvPr id="31" name="Text Placeholder 22">
             <a:extLst>
               <a:ext uri="{FF2B5EF4-FFF2-40B4-BE49-F238E27FC236}">
-                <a16:creationId xmlns="" xmlns:a16="http://schemas.microsoft.com/office/drawing/2014/main" id="{DF6BB5C9-B678-435A-830F-4C10EB1A957C}"/>
+                <a16:creationId xmlns:a16="http://schemas.microsoft.com/office/drawing/2014/main" xmlns="" id="{DF6BB5C9-B678-435A-830F-4C10EB1A957C}"/>
               </a:ext>
             </a:extLst>
           </p:cNvPr>
@@ -6280,7 +6280,7 @@
           <p:cNvPr id="32" name="Text Placeholder 22">
             <a:extLst>
               <a:ext uri="{FF2B5EF4-FFF2-40B4-BE49-F238E27FC236}">
-                <a16:creationId xmlns="" xmlns:a16="http://schemas.microsoft.com/office/drawing/2014/main" id="{1861EC87-A9E2-4FC3-B8BC-06C520B8A17F}"/>
+                <a16:creationId xmlns:a16="http://schemas.microsoft.com/office/drawing/2014/main" xmlns="" id="{1861EC87-A9E2-4FC3-B8BC-06C520B8A17F}"/>
               </a:ext>
             </a:extLst>
           </p:cNvPr>
@@ -6329,7 +6329,7 @@
           <p:cNvPr id="33" name="Text Placeholder 22">
             <a:extLst>
               <a:ext uri="{FF2B5EF4-FFF2-40B4-BE49-F238E27FC236}">
-                <a16:creationId xmlns="" xmlns:a16="http://schemas.microsoft.com/office/drawing/2014/main" id="{FC3EDE91-631F-4947-94DC-557685FD23E0}"/>
+                <a16:creationId xmlns:a16="http://schemas.microsoft.com/office/drawing/2014/main" xmlns="" id="{FC3EDE91-631F-4947-94DC-557685FD23E0}"/>
               </a:ext>
             </a:extLst>
           </p:cNvPr>
@@ -6378,7 +6378,7 @@
           <p:cNvPr id="34" name="Text Placeholder 22">
             <a:extLst>
               <a:ext uri="{FF2B5EF4-FFF2-40B4-BE49-F238E27FC236}">
-                <a16:creationId xmlns="" xmlns:a16="http://schemas.microsoft.com/office/drawing/2014/main" id="{8FDDBEF4-1329-49DF-B043-D51B34F5EE34}"/>
+                <a16:creationId xmlns:a16="http://schemas.microsoft.com/office/drawing/2014/main" xmlns="" id="{8FDDBEF4-1329-49DF-B043-D51B34F5EE34}"/>
               </a:ext>
             </a:extLst>
           </p:cNvPr>
@@ -6427,7 +6427,7 @@
           <p:cNvPr id="37" name="Picture Placeholder 36">
             <a:extLst>
               <a:ext uri="{FF2B5EF4-FFF2-40B4-BE49-F238E27FC236}">
-                <a16:creationId xmlns="" xmlns:a16="http://schemas.microsoft.com/office/drawing/2014/main" id="{FBDB3FD3-4F52-4E28-B639-5F73070E47D9}"/>
+                <a16:creationId xmlns:a16="http://schemas.microsoft.com/office/drawing/2014/main" xmlns="" id="{FBDB3FD3-4F52-4E28-B639-5F73070E47D9}"/>
               </a:ext>
             </a:extLst>
           </p:cNvPr>
@@ -6584,7 +6584,7 @@
           <p:cNvPr id="22" name="Picture Placeholder 21">
             <a:extLst>
               <a:ext uri="{FF2B5EF4-FFF2-40B4-BE49-F238E27FC236}">
-                <a16:creationId xmlns="" xmlns:a16="http://schemas.microsoft.com/office/drawing/2014/main" id="{DFA57703-9E4A-48E0-A123-3A5EDC76475C}"/>
+                <a16:creationId xmlns:a16="http://schemas.microsoft.com/office/drawing/2014/main" xmlns="" id="{DFA57703-9E4A-48E0-A123-3A5EDC76475C}"/>
               </a:ext>
             </a:extLst>
           </p:cNvPr>
@@ -6621,7 +6621,7 @@
           <p:cNvPr id="2" name="Rectangle 1" descr="Tall office building looking up">
             <a:extLst>
               <a:ext uri="{FF2B5EF4-FFF2-40B4-BE49-F238E27FC236}">
-                <a16:creationId xmlns="" xmlns:a16="http://schemas.microsoft.com/office/drawing/2014/main" id="{AF7FA146-2A75-4EA7-A9AD-EBCE6F17FB42}"/>
+                <a16:creationId xmlns:a16="http://schemas.microsoft.com/office/drawing/2014/main" xmlns="" id="{AF7FA146-2A75-4EA7-A9AD-EBCE6F17FB42}"/>
               </a:ext>
             </a:extLst>
           </p:cNvPr>
@@ -6677,7 +6677,7 @@
           <p:cNvPr id="24" name="Text Placeholder 23">
             <a:extLst>
               <a:ext uri="{FF2B5EF4-FFF2-40B4-BE49-F238E27FC236}">
-                <a16:creationId xmlns="" xmlns:a16="http://schemas.microsoft.com/office/drawing/2014/main" id="{340C15AA-E296-48AE-857F-0589EEA69DC6}"/>
+                <a16:creationId xmlns:a16="http://schemas.microsoft.com/office/drawing/2014/main" xmlns="" id="{340C15AA-E296-48AE-857F-0589EEA69DC6}"/>
               </a:ext>
             </a:extLst>
           </p:cNvPr>
@@ -6730,7 +6730,7 @@
           <p:cNvPr id="6" name="Title 1">
             <a:extLst>
               <a:ext uri="{FF2B5EF4-FFF2-40B4-BE49-F238E27FC236}">
-                <a16:creationId xmlns="" xmlns:a16="http://schemas.microsoft.com/office/drawing/2014/main" id="{162BE5D7-9E35-49F8-A8E4-2093183A6404}"/>
+                <a16:creationId xmlns:a16="http://schemas.microsoft.com/office/drawing/2014/main" xmlns="" id="{162BE5D7-9E35-49F8-A8E4-2093183A6404}"/>
               </a:ext>
             </a:extLst>
           </p:cNvPr>
@@ -9164,7 +9164,7 @@
           <p:cNvPr id="18" name="Date Placeholder 3">
             <a:extLst>
               <a:ext uri="{FF2B5EF4-FFF2-40B4-BE49-F238E27FC236}">
-                <a16:creationId xmlns="" xmlns:a16="http://schemas.microsoft.com/office/drawing/2014/main" id="{2CD6B789-4B66-4BD0-9623-80E9542A65FE}"/>
+                <a16:creationId xmlns:a16="http://schemas.microsoft.com/office/drawing/2014/main" xmlns="" id="{2CD6B789-4B66-4BD0-9623-80E9542A65FE}"/>
               </a:ext>
             </a:extLst>
           </p:cNvPr>
@@ -9302,7 +9302,7 @@
           <p:cNvPr id="29" name="Footer Placeholder 4">
             <a:extLst>
               <a:ext uri="{FF2B5EF4-FFF2-40B4-BE49-F238E27FC236}">
-                <a16:creationId xmlns="" xmlns:a16="http://schemas.microsoft.com/office/drawing/2014/main" id="{A3BB5234-44A4-4506-BD19-5808475EBB7F}"/>
+                <a16:creationId xmlns:a16="http://schemas.microsoft.com/office/drawing/2014/main" xmlns="" id="{A3BB5234-44A4-4506-BD19-5808475EBB7F}"/>
               </a:ext>
             </a:extLst>
           </p:cNvPr>
@@ -9435,7 +9435,7 @@
           <p:cNvPr id="30" name="Slide Number Placeholder 5">
             <a:extLst>
               <a:ext uri="{FF2B5EF4-FFF2-40B4-BE49-F238E27FC236}">
-                <a16:creationId xmlns="" xmlns:a16="http://schemas.microsoft.com/office/drawing/2014/main" id="{68D89618-7EE9-46BF-BEAC-45E6F98ACA1A}"/>
+                <a16:creationId xmlns:a16="http://schemas.microsoft.com/office/drawing/2014/main" xmlns="" id="{68D89618-7EE9-46BF-BEAC-45E6F98ACA1A}"/>
               </a:ext>
             </a:extLst>
           </p:cNvPr>
@@ -10027,7 +10027,7 @@
           <p:cNvPr id="4" name="Title 3">
             <a:extLst>
               <a:ext uri="{FF2B5EF4-FFF2-40B4-BE49-F238E27FC236}">
-                <a16:creationId xmlns="" xmlns:a16="http://schemas.microsoft.com/office/drawing/2014/main" id="{92056599-CDAA-4367-BEF8-31D6E32518C8}"/>
+                <a16:creationId xmlns:a16="http://schemas.microsoft.com/office/drawing/2014/main" xmlns="" id="{92056599-CDAA-4367-BEF8-31D6E32518C8}"/>
               </a:ext>
             </a:extLst>
           </p:cNvPr>
@@ -10069,7 +10069,7 @@
           <p:cNvPr id="6" name="Picture 5">
             <a:extLst>
               <a:ext uri="{FF2B5EF4-FFF2-40B4-BE49-F238E27FC236}">
-                <a16:creationId xmlns="" xmlns:a16="http://schemas.microsoft.com/office/drawing/2014/main" id="{E30DEFF0-8DEE-4B0B-9B30-675FE9E288A2}"/>
+                <a16:creationId xmlns:a16="http://schemas.microsoft.com/office/drawing/2014/main" xmlns="" id="{E30DEFF0-8DEE-4B0B-9B30-675FE9E288A2}"/>
               </a:ext>
             </a:extLst>
           </p:cNvPr>
@@ -10163,6 +10163,87 @@
           <a:p>
             <a:pPr algn="ctr"/>
             <a:endParaRPr lang="en-IN"/>
+          </a:p>
+        </p:txBody>
+      </p:sp>
+      <p:sp>
+        <p:nvSpPr>
+          <p:cNvPr id="2" name="TextBox 1"/>
+          <p:cNvSpPr txBox="1"/>
+          <p:nvPr/>
+        </p:nvSpPr>
+        <p:spPr>
+          <a:xfrm>
+            <a:off x="488957" y="5866109"/>
+            <a:ext cx="4660250" cy="1077218"/>
+          </a:xfrm>
+          <a:prstGeom prst="rect">
+            <a:avLst/>
+          </a:prstGeom>
+          <a:noFill/>
+        </p:spPr>
+        <p:txBody>
+          <a:bodyPr wrap="none" rtlCol="0">
+            <a:spAutoFit/>
+          </a:bodyPr>
+          <a:lstStyle/>
+          <a:p>
+            <a:r>
+              <a:rPr lang="en-US" sz="1600" dirty="0" err="1">
+                <a:latin typeface="Arial" panose="020B0604020202020204" pitchFamily="34" charset="0"/>
+                <a:cs typeface="Arial" panose="020B0604020202020204" pitchFamily="34" charset="0"/>
+              </a:rPr>
+              <a:t>Yash</a:t>
+            </a:r>
+            <a:r>
+              <a:rPr lang="en-US" sz="1600" dirty="0">
+                <a:latin typeface="Arial" panose="020B0604020202020204" pitchFamily="34" charset="0"/>
+                <a:cs typeface="Arial" panose="020B0604020202020204" pitchFamily="34" charset="0"/>
+              </a:rPr>
+              <a:t> Sanjay Monde</a:t>
+            </a:r>
+          </a:p>
+          <a:p>
+            <a:r>
+              <a:rPr lang="en-US" sz="1600" dirty="0">
+                <a:latin typeface="Arial" panose="020B0604020202020204" pitchFamily="34" charset="0"/>
+                <a:cs typeface="Arial" panose="020B0604020202020204" pitchFamily="34" charset="0"/>
+              </a:rPr>
+              <a:t>AICTE STU ID : STU69f055805a3e71777358208</a:t>
+            </a:r>
+          </a:p>
+          <a:p>
+            <a:r>
+              <a:rPr lang="en-US" sz="1600" dirty="0">
+                <a:latin typeface="Arial" panose="020B0604020202020204" pitchFamily="34" charset="0"/>
+                <a:cs typeface="Arial" panose="020B0604020202020204" pitchFamily="34" charset="0"/>
+              </a:rPr>
+              <a:t>DG </a:t>
+            </a:r>
+            <a:r>
+              <a:rPr lang="en-US" sz="1600" dirty="0" err="1">
+                <a:latin typeface="Arial" panose="020B0604020202020204" pitchFamily="34" charset="0"/>
+                <a:cs typeface="Arial" panose="020B0604020202020204" pitchFamily="34" charset="0"/>
+              </a:rPr>
+              <a:t>Ruparel</a:t>
+            </a:r>
+            <a:r>
+              <a:rPr lang="en-US" sz="1600" dirty="0">
+                <a:latin typeface="Arial" panose="020B0604020202020204" pitchFamily="34" charset="0"/>
+                <a:cs typeface="Arial" panose="020B0604020202020204" pitchFamily="34" charset="0"/>
+              </a:rPr>
+              <a:t> College  </a:t>
+            </a:r>
+            <a:endParaRPr lang="en-IN" sz="1600" dirty="0">
+              <a:latin typeface="Arial" panose="020B0604020202020204" pitchFamily="34" charset="0"/>
+              <a:cs typeface="Arial" panose="020B0604020202020204" pitchFamily="34" charset="0"/>
+            </a:endParaRPr>
+          </a:p>
+          <a:p>
+            <a:endParaRPr lang="en-IN" sz="1600" dirty="0">
+              <a:latin typeface="Arial" panose="020B0604020202020204" pitchFamily="34" charset="0"/>
+              <a:cs typeface="Arial" panose="020B0604020202020204" pitchFamily="34" charset="0"/>
+            </a:endParaRPr>
           </a:p>
         </p:txBody>
       </p:sp>
@@ -10530,7 +10611,7 @@
           <p:cNvPr id="5" name="Picture 4">
             <a:extLst>
               <a:ext uri="{FF2B5EF4-FFF2-40B4-BE49-F238E27FC236}">
-                <a16:creationId xmlns="" xmlns:a16="http://schemas.microsoft.com/office/drawing/2014/main" id="{BBB0C869-7C5C-4070-BD4D-F3FC2DA8F301}"/>
+                <a16:creationId xmlns:a16="http://schemas.microsoft.com/office/drawing/2014/main" xmlns="" id="{BBB0C869-7C5C-4070-BD4D-F3FC2DA8F301}"/>
               </a:ext>
             </a:extLst>
           </p:cNvPr>
@@ -10559,7 +10640,7 @@
           <p:cNvPr id="4" name="Title 3">
             <a:extLst>
               <a:ext uri="{FF2B5EF4-FFF2-40B4-BE49-F238E27FC236}">
-                <a16:creationId xmlns="" xmlns:a16="http://schemas.microsoft.com/office/drawing/2014/main" id="{AFE3A2AF-177E-45E6-A191-0F8523DB7FFA}"/>
+                <a16:creationId xmlns:a16="http://schemas.microsoft.com/office/drawing/2014/main" xmlns="" id="{AFE3A2AF-177E-45E6-A191-0F8523DB7FFA}"/>
               </a:ext>
             </a:extLst>
           </p:cNvPr>
@@ -10599,7 +10680,7 @@
           <p:cNvPr id="7" name="Text Placeholder 30">
             <a:extLst>
               <a:ext uri="{FF2B5EF4-FFF2-40B4-BE49-F238E27FC236}">
-                <a16:creationId xmlns="" xmlns:a16="http://schemas.microsoft.com/office/drawing/2014/main" id="{372426BE-BEE7-4A6D-BCD2-059615BBCE25}"/>
+                <a16:creationId xmlns:a16="http://schemas.microsoft.com/office/drawing/2014/main" xmlns="" id="{372426BE-BEE7-4A6D-BCD2-059615BBCE25}"/>
               </a:ext>
             </a:extLst>
           </p:cNvPr>
@@ -10855,7 +10936,7 @@
           <p:cNvPr id="8" name="Text Placeholder 30">
             <a:extLst>
               <a:ext uri="{FF2B5EF4-FFF2-40B4-BE49-F238E27FC236}">
-                <a16:creationId xmlns="" xmlns:a16="http://schemas.microsoft.com/office/drawing/2014/main" id="{E61E227A-5883-4C77-B25A-46A22FFDF41F}"/>
+                <a16:creationId xmlns:a16="http://schemas.microsoft.com/office/drawing/2014/main" xmlns="" id="{E61E227A-5883-4C77-B25A-46A22FFDF41F}"/>
               </a:ext>
             </a:extLst>
           </p:cNvPr>
@@ -11111,7 +11192,7 @@
           <p:cNvPr id="9" name="Title 3">
             <a:extLst>
               <a:ext uri="{FF2B5EF4-FFF2-40B4-BE49-F238E27FC236}">
-                <a16:creationId xmlns="" xmlns:a16="http://schemas.microsoft.com/office/drawing/2014/main" id="{E25373E9-1A26-4A40-9897-E42DE485D8E3}"/>
+                <a16:creationId xmlns:a16="http://schemas.microsoft.com/office/drawing/2014/main" xmlns="" id="{E25373E9-1A26-4A40-9897-E42DE485D8E3}"/>
               </a:ext>
             </a:extLst>
           </p:cNvPr>
@@ -11223,7 +11304,7 @@
           <p:cNvPr id="10" name="Text Placeholder 1">
             <a:extLst>
               <a:ext uri="{FF2B5EF4-FFF2-40B4-BE49-F238E27FC236}">
-                <a16:creationId xmlns="" xmlns:a16="http://schemas.microsoft.com/office/drawing/2014/main" id="{B19D8AC7-3787-4ADB-9212-0808F015C2DD}"/>
+                <a16:creationId xmlns:a16="http://schemas.microsoft.com/office/drawing/2014/main" xmlns="" id="{B19D8AC7-3787-4ADB-9212-0808F015C2DD}"/>
               </a:ext>
             </a:extLst>
           </p:cNvPr>
@@ -11957,7 +12038,7 @@
           <p:cNvPr id="5" name="Picture 4">
             <a:extLst>
               <a:ext uri="{FF2B5EF4-FFF2-40B4-BE49-F238E27FC236}">
-                <a16:creationId xmlns="" xmlns:a16="http://schemas.microsoft.com/office/drawing/2014/main" id="{BBB0C869-7C5C-4070-BD4D-F3FC2DA8F301}"/>
+                <a16:creationId xmlns:a16="http://schemas.microsoft.com/office/drawing/2014/main" xmlns="" id="{BBB0C869-7C5C-4070-BD4D-F3FC2DA8F301}"/>
               </a:ext>
             </a:extLst>
           </p:cNvPr>
@@ -11986,7 +12067,7 @@
           <p:cNvPr id="4" name="Title 3">
             <a:extLst>
               <a:ext uri="{FF2B5EF4-FFF2-40B4-BE49-F238E27FC236}">
-                <a16:creationId xmlns="" xmlns:a16="http://schemas.microsoft.com/office/drawing/2014/main" id="{AFE3A2AF-177E-45E6-A191-0F8523DB7FFA}"/>
+                <a16:creationId xmlns:a16="http://schemas.microsoft.com/office/drawing/2014/main" xmlns="" id="{AFE3A2AF-177E-45E6-A191-0F8523DB7FFA}"/>
               </a:ext>
             </a:extLst>
           </p:cNvPr>
@@ -12042,7 +12123,7 @@
           <p:cNvPr id="7" name="Text Placeholder 30">
             <a:extLst>
               <a:ext uri="{FF2B5EF4-FFF2-40B4-BE49-F238E27FC236}">
-                <a16:creationId xmlns="" xmlns:a16="http://schemas.microsoft.com/office/drawing/2014/main" id="{372426BE-BEE7-4A6D-BCD2-059615BBCE25}"/>
+                <a16:creationId xmlns:a16="http://schemas.microsoft.com/office/drawing/2014/main" xmlns="" id="{372426BE-BEE7-4A6D-BCD2-059615BBCE25}"/>
               </a:ext>
             </a:extLst>
           </p:cNvPr>
@@ -12298,7 +12379,7 @@
           <p:cNvPr id="8" name="Text Placeholder 30">
             <a:extLst>
               <a:ext uri="{FF2B5EF4-FFF2-40B4-BE49-F238E27FC236}">
-                <a16:creationId xmlns="" xmlns:a16="http://schemas.microsoft.com/office/drawing/2014/main" id="{E61E227A-5883-4C77-B25A-46A22FFDF41F}"/>
+                <a16:creationId xmlns:a16="http://schemas.microsoft.com/office/drawing/2014/main" xmlns="" id="{E61E227A-5883-4C77-B25A-46A22FFDF41F}"/>
               </a:ext>
             </a:extLst>
           </p:cNvPr>
@@ -12554,7 +12635,7 @@
           <p:cNvPr id="10" name="Text Placeholder 1">
             <a:extLst>
               <a:ext uri="{FF2B5EF4-FFF2-40B4-BE49-F238E27FC236}">
-                <a16:creationId xmlns="" xmlns:a16="http://schemas.microsoft.com/office/drawing/2014/main" id="{B19D8AC7-3787-4ADB-9212-0808F015C2DD}"/>
+                <a16:creationId xmlns:a16="http://schemas.microsoft.com/office/drawing/2014/main" xmlns="" id="{B19D8AC7-3787-4ADB-9212-0808F015C2DD}"/>
               </a:ext>
             </a:extLst>
           </p:cNvPr>
@@ -13325,7 +13406,7 @@
         <p:cNvPr id="1" name="">
           <a:extLst>
             <a:ext uri="{FF2B5EF4-FFF2-40B4-BE49-F238E27FC236}">
-              <a16:creationId xmlns="" xmlns:a16="http://schemas.microsoft.com/office/drawing/2014/main" id="{327316CE-193E-3D5D-C15A-98517303A13F}"/>
+              <a16:creationId xmlns:a16="http://schemas.microsoft.com/office/drawing/2014/main" xmlns="" id="{327316CE-193E-3D5D-C15A-98517303A13F}"/>
             </a:ext>
           </a:extLst>
         </p:cNvPr>
@@ -13345,7 +13426,7 @@
           <p:cNvPr id="5" name="Picture 4">
             <a:extLst>
               <a:ext uri="{FF2B5EF4-FFF2-40B4-BE49-F238E27FC236}">
-                <a16:creationId xmlns="" xmlns:a16="http://schemas.microsoft.com/office/drawing/2014/main" id="{3D44118A-0276-9E2F-E0E8-85CEE9F1E0C7}"/>
+                <a16:creationId xmlns:a16="http://schemas.microsoft.com/office/drawing/2014/main" xmlns="" id="{3D44118A-0276-9E2F-E0E8-85CEE9F1E0C7}"/>
               </a:ext>
             </a:extLst>
           </p:cNvPr>
@@ -13374,7 +13455,7 @@
           <p:cNvPr id="4" name="Title 3">
             <a:extLst>
               <a:ext uri="{FF2B5EF4-FFF2-40B4-BE49-F238E27FC236}">
-                <a16:creationId xmlns="" xmlns:a16="http://schemas.microsoft.com/office/drawing/2014/main" id="{901A2257-2F98-CB88-038E-C0F1D0A1A363}"/>
+                <a16:creationId xmlns:a16="http://schemas.microsoft.com/office/drawing/2014/main" xmlns="" id="{901A2257-2F98-CB88-038E-C0F1D0A1A363}"/>
               </a:ext>
             </a:extLst>
           </p:cNvPr>
@@ -13409,7 +13490,7 @@
           <p:cNvPr id="7" name="Text Placeholder 30">
             <a:extLst>
               <a:ext uri="{FF2B5EF4-FFF2-40B4-BE49-F238E27FC236}">
-                <a16:creationId xmlns="" xmlns:a16="http://schemas.microsoft.com/office/drawing/2014/main" id="{AF1C8809-654A-4DD1-BB18-87B8B6C020B9}"/>
+                <a16:creationId xmlns:a16="http://schemas.microsoft.com/office/drawing/2014/main" xmlns="" id="{AF1C8809-654A-4DD1-BB18-87B8B6C020B9}"/>
               </a:ext>
             </a:extLst>
           </p:cNvPr>
@@ -13665,7 +13746,7 @@
           <p:cNvPr id="8" name="Text Placeholder 30">
             <a:extLst>
               <a:ext uri="{FF2B5EF4-FFF2-40B4-BE49-F238E27FC236}">
-                <a16:creationId xmlns="" xmlns:a16="http://schemas.microsoft.com/office/drawing/2014/main" id="{0F7D0B46-DEEA-1B5E-FE84-59D11F3B1105}"/>
+                <a16:creationId xmlns:a16="http://schemas.microsoft.com/office/drawing/2014/main" xmlns="" id="{0F7D0B46-DEEA-1B5E-FE84-59D11F3B1105}"/>
               </a:ext>
             </a:extLst>
           </p:cNvPr>
@@ -14670,7 +14751,7 @@
           <p:cNvPr id="3" name="Title 1">
             <a:extLst>
               <a:ext uri="{FF2B5EF4-FFF2-40B4-BE49-F238E27FC236}">
-                <a16:creationId xmlns="" xmlns:a16="http://schemas.microsoft.com/office/drawing/2014/main" id="{D88C20CF-C1EE-4092-B52D-FD4AB2AB2508}"/>
+                <a16:creationId xmlns:a16="http://schemas.microsoft.com/office/drawing/2014/main" xmlns="" id="{D88C20CF-C1EE-4092-B52D-FD4AB2AB2508}"/>
               </a:ext>
             </a:extLst>
           </p:cNvPr>
@@ -14713,7 +14794,7 @@
           <p:cNvPr id="31" name="Text Placeholder 30">
             <a:extLst>
               <a:ext uri="{FF2B5EF4-FFF2-40B4-BE49-F238E27FC236}">
-                <a16:creationId xmlns="" xmlns:a16="http://schemas.microsoft.com/office/drawing/2014/main" id="{97AB1F14-3A1E-4057-A473-9975BA59F012}"/>
+                <a16:creationId xmlns:a16="http://schemas.microsoft.com/office/drawing/2014/main" xmlns="" id="{97AB1F14-3A1E-4057-A473-9975BA59F012}"/>
               </a:ext>
             </a:extLst>
           </p:cNvPr>
@@ -14748,7 +14829,7 @@
           <p:cNvPr id="17" name="Text Placeholder 28">
             <a:extLst>
               <a:ext uri="{FF2B5EF4-FFF2-40B4-BE49-F238E27FC236}">
-                <a16:creationId xmlns="" xmlns:a16="http://schemas.microsoft.com/office/drawing/2014/main" id="{E212CE24-374D-44D0-8F39-0F5A36E42ED7}"/>
+                <a16:creationId xmlns:a16="http://schemas.microsoft.com/office/drawing/2014/main" xmlns="" id="{E212CE24-374D-44D0-8F39-0F5A36E42ED7}"/>
               </a:ext>
             </a:extLst>
           </p:cNvPr>
@@ -15004,7 +15085,7 @@
           <p:cNvPr id="20" name="Text Placeholder 28">
             <a:extLst>
               <a:ext uri="{FF2B5EF4-FFF2-40B4-BE49-F238E27FC236}">
-                <a16:creationId xmlns="" xmlns:a16="http://schemas.microsoft.com/office/drawing/2014/main" id="{A09A5BC1-0E62-4E6B-A590-951A87D4B4FE}"/>
+                <a16:creationId xmlns:a16="http://schemas.microsoft.com/office/drawing/2014/main" xmlns="" id="{A09A5BC1-0E62-4E6B-A590-951A87D4B4FE}"/>
               </a:ext>
             </a:extLst>
           </p:cNvPr>
@@ -15260,7 +15341,7 @@
           <p:cNvPr id="23" name="Text Placeholder 28">
             <a:extLst>
               <a:ext uri="{FF2B5EF4-FFF2-40B4-BE49-F238E27FC236}">
-                <a16:creationId xmlns="" xmlns:a16="http://schemas.microsoft.com/office/drawing/2014/main" id="{9E6B148F-F3B6-4E6B-9B85-645C039858E8}"/>
+                <a16:creationId xmlns:a16="http://schemas.microsoft.com/office/drawing/2014/main" xmlns="" id="{9E6B148F-F3B6-4E6B-9B85-645C039858E8}"/>
               </a:ext>
             </a:extLst>
           </p:cNvPr>
@@ -15516,7 +15597,7 @@
           <p:cNvPr id="30" name="Text Placeholder 30">
             <a:extLst>
               <a:ext uri="{FF2B5EF4-FFF2-40B4-BE49-F238E27FC236}">
-                <a16:creationId xmlns="" xmlns:a16="http://schemas.microsoft.com/office/drawing/2014/main" id="{D3BF02F6-2753-476A-8046-A85AE3A49748}"/>
+                <a16:creationId xmlns:a16="http://schemas.microsoft.com/office/drawing/2014/main" xmlns="" id="{D3BF02F6-2753-476A-8046-A85AE3A49748}"/>
               </a:ext>
             </a:extLst>
           </p:cNvPr>
@@ -15772,7 +15853,7 @@
           <p:cNvPr id="32" name="Text Placeholder 30">
             <a:extLst>
               <a:ext uri="{FF2B5EF4-FFF2-40B4-BE49-F238E27FC236}">
-                <a16:creationId xmlns="" xmlns:a16="http://schemas.microsoft.com/office/drawing/2014/main" id="{B993AB29-3A3A-4473-8AC8-86E859C97321}"/>
+                <a16:creationId xmlns:a16="http://schemas.microsoft.com/office/drawing/2014/main" xmlns="" id="{B993AB29-3A3A-4473-8AC8-86E859C97321}"/>
               </a:ext>
             </a:extLst>
           </p:cNvPr>
@@ -16031,7 +16112,7 @@
           <p:cNvPr id="15" name="Picture 14">
             <a:extLst>
               <a:ext uri="{FF2B5EF4-FFF2-40B4-BE49-F238E27FC236}">
-                <a16:creationId xmlns="" xmlns:a16="http://schemas.microsoft.com/office/drawing/2014/main" id="{BD3F9E86-2FB3-4DB3-9343-59D594F350A0}"/>
+                <a16:creationId xmlns:a16="http://schemas.microsoft.com/office/drawing/2014/main" xmlns="" id="{BD3F9E86-2FB3-4DB3-9343-59D594F350A0}"/>
               </a:ext>
             </a:extLst>
           </p:cNvPr>
@@ -16060,7 +16141,7 @@
           <p:cNvPr id="12" name="Text Placeholder 11">
             <a:extLst>
               <a:ext uri="{FF2B5EF4-FFF2-40B4-BE49-F238E27FC236}">
-                <a16:creationId xmlns="" xmlns:a16="http://schemas.microsoft.com/office/drawing/2014/main" id="{BC277FD7-925B-4C3D-A364-118403201507}"/>
+                <a16:creationId xmlns:a16="http://schemas.microsoft.com/office/drawing/2014/main" xmlns="" id="{BC277FD7-925B-4C3D-A364-118403201507}"/>
               </a:ext>
             </a:extLst>
           </p:cNvPr>
@@ -17117,7 +17198,7 @@
           <p:cNvPr id="4" name="Title 3">
             <a:extLst>
               <a:ext uri="{FF2B5EF4-FFF2-40B4-BE49-F238E27FC236}">
-                <a16:creationId xmlns="" xmlns:a16="http://schemas.microsoft.com/office/drawing/2014/main" id="{777CC02B-F7C6-47A8-8C3E-C57C417D9EA3}"/>
+                <a16:creationId xmlns:a16="http://schemas.microsoft.com/office/drawing/2014/main" xmlns="" id="{777CC02B-F7C6-47A8-8C3E-C57C417D9EA3}"/>
               </a:ext>
             </a:extLst>
           </p:cNvPr>
@@ -17153,7 +17234,7 @@
           <p:cNvPr id="5" name="Picture 4">
             <a:extLst>
               <a:ext uri="{FF2B5EF4-FFF2-40B4-BE49-F238E27FC236}">
-                <a16:creationId xmlns="" xmlns:a16="http://schemas.microsoft.com/office/drawing/2014/main" id="{C8FE02DE-D7B2-433D-BFE4-2F564022AD89}"/>
+                <a16:creationId xmlns:a16="http://schemas.microsoft.com/office/drawing/2014/main" xmlns="" id="{C8FE02DE-D7B2-433D-BFE4-2F564022AD89}"/>
               </a:ext>
             </a:extLst>
           </p:cNvPr>
@@ -17183,7 +17264,7 @@
           <p:cNvPr id="6" name="Picture 5">
             <a:extLst>
               <a:ext uri="{FF2B5EF4-FFF2-40B4-BE49-F238E27FC236}">
-                <a16:creationId xmlns="" xmlns:a16="http://schemas.microsoft.com/office/drawing/2014/main" id="{736DEFE3-051A-494A-949C-BB2FF86F9ED7}"/>
+                <a16:creationId xmlns:a16="http://schemas.microsoft.com/office/drawing/2014/main" xmlns="" id="{736DEFE3-051A-494A-949C-BB2FF86F9ED7}"/>
               </a:ext>
             </a:extLst>
           </p:cNvPr>
@@ -17558,7 +17639,7 @@
           <p:cNvPr id="3" name="Title 2">
             <a:extLst>
               <a:ext uri="{FF2B5EF4-FFF2-40B4-BE49-F238E27FC236}">
-                <a16:creationId xmlns="" xmlns:a16="http://schemas.microsoft.com/office/drawing/2014/main" id="{EBF2FBC7-3552-4F01-BB27-8BEEE74F7277}"/>
+                <a16:creationId xmlns:a16="http://schemas.microsoft.com/office/drawing/2014/main" xmlns="" id="{EBF2FBC7-3552-4F01-BB27-8BEEE74F7277}"/>
               </a:ext>
             </a:extLst>
           </p:cNvPr>
@@ -17620,7 +17701,7 @@
           <p:cNvPr id="5" name="Picture 4">
             <a:extLst>
               <a:ext uri="{FF2B5EF4-FFF2-40B4-BE49-F238E27FC236}">
-                <a16:creationId xmlns="" xmlns:a16="http://schemas.microsoft.com/office/drawing/2014/main" id="{09D8A2BA-6C1D-4A33-85F2-E44A4FF54A1C}"/>
+                <a16:creationId xmlns:a16="http://schemas.microsoft.com/office/drawing/2014/main" xmlns="" id="{09D8A2BA-6C1D-4A33-85F2-E44A4FF54A1C}"/>
               </a:ext>
             </a:extLst>
           </p:cNvPr>
@@ -17649,7 +17730,7 @@
           <p:cNvPr id="6" name="Picture 5">
             <a:extLst>
               <a:ext uri="{FF2B5EF4-FFF2-40B4-BE49-F238E27FC236}">
-                <a16:creationId xmlns="" xmlns:a16="http://schemas.microsoft.com/office/drawing/2014/main" id="{6BED3D6A-DC10-4985-B01B-735F2CBA6E47}"/>
+                <a16:creationId xmlns:a16="http://schemas.microsoft.com/office/drawing/2014/main" xmlns="" id="{6BED3D6A-DC10-4985-B01B-735F2CBA6E47}"/>
               </a:ext>
             </a:extLst>
           </p:cNvPr>
@@ -18085,7 +18166,7 @@
           <p:cNvPr id="4" name="Title 3">
             <a:extLst>
               <a:ext uri="{FF2B5EF4-FFF2-40B4-BE49-F238E27FC236}">
-                <a16:creationId xmlns="" xmlns:a16="http://schemas.microsoft.com/office/drawing/2014/main" id="{1A4A072B-83C6-4607-AE6A-5AD61CC72C44}"/>
+                <a16:creationId xmlns:a16="http://schemas.microsoft.com/office/drawing/2014/main" xmlns="" id="{1A4A072B-83C6-4607-AE6A-5AD61CC72C44}"/>
               </a:ext>
             </a:extLst>
           </p:cNvPr>
@@ -18121,7 +18202,7 @@
           <p:cNvPr id="6" name="Picture 5">
             <a:extLst>
               <a:ext uri="{FF2B5EF4-FFF2-40B4-BE49-F238E27FC236}">
-                <a16:creationId xmlns="" xmlns:a16="http://schemas.microsoft.com/office/drawing/2014/main" id="{E8B153BB-61B9-403F-8AE5-F75400450AC0}"/>
+                <a16:creationId xmlns:a16="http://schemas.microsoft.com/office/drawing/2014/main" xmlns="" id="{E8B153BB-61B9-403F-8AE5-F75400450AC0}"/>
               </a:ext>
             </a:extLst>
           </p:cNvPr>
@@ -18695,7 +18776,7 @@
           <p:cNvPr id="6" name="Picture 5">
             <a:extLst>
               <a:ext uri="{FF2B5EF4-FFF2-40B4-BE49-F238E27FC236}">
-                <a16:creationId xmlns="" xmlns:a16="http://schemas.microsoft.com/office/drawing/2014/main" id="{0B7C27C4-3E14-490A-B132-CBBEDA1E905A}"/>
+                <a16:creationId xmlns:a16="http://schemas.microsoft.com/office/drawing/2014/main" xmlns="" id="{0B7C27C4-3E14-490A-B132-CBBEDA1E905A}"/>
               </a:ext>
             </a:extLst>
           </p:cNvPr>
@@ -18725,7 +18806,7 @@
           <p:cNvPr id="2" name="Picture 1">
             <a:extLst>
               <a:ext uri="{FF2B5EF4-FFF2-40B4-BE49-F238E27FC236}">
-                <a16:creationId xmlns="" xmlns:a16="http://schemas.microsoft.com/office/drawing/2014/main" id="{F1FC3E39-8C60-4F64-9838-2A683F25B8C4}"/>
+                <a16:creationId xmlns:a16="http://schemas.microsoft.com/office/drawing/2014/main" xmlns="" id="{F1FC3E39-8C60-4F64-9838-2A683F25B8C4}"/>
               </a:ext>
             </a:extLst>
           </p:cNvPr>
@@ -18755,7 +18836,7 @@
           <p:cNvPr id="9" name="Title 8">
             <a:extLst>
               <a:ext uri="{FF2B5EF4-FFF2-40B4-BE49-F238E27FC236}">
-                <a16:creationId xmlns="" xmlns:a16="http://schemas.microsoft.com/office/drawing/2014/main" id="{FEF304F5-32C5-4869-B185-859B567855A8}"/>
+                <a16:creationId xmlns:a16="http://schemas.microsoft.com/office/drawing/2014/main" xmlns="" id="{FEF304F5-32C5-4869-B185-859B567855A8}"/>
               </a:ext>
             </a:extLst>
           </p:cNvPr>
@@ -19184,7 +19265,7 @@
           <p:cNvPr id="5" name="Picture 4">
             <a:extLst>
               <a:ext uri="{FF2B5EF4-FFF2-40B4-BE49-F238E27FC236}">
-                <a16:creationId xmlns="" xmlns:a16="http://schemas.microsoft.com/office/drawing/2014/main" id="{BBB0C869-7C5C-4070-BD4D-F3FC2DA8F301}"/>
+                <a16:creationId xmlns:a16="http://schemas.microsoft.com/office/drawing/2014/main" xmlns="" id="{BBB0C869-7C5C-4070-BD4D-F3FC2DA8F301}"/>
               </a:ext>
             </a:extLst>
           </p:cNvPr>
@@ -19213,7 +19294,7 @@
           <p:cNvPr id="4" name="Title 3">
             <a:extLst>
               <a:ext uri="{FF2B5EF4-FFF2-40B4-BE49-F238E27FC236}">
-                <a16:creationId xmlns="" xmlns:a16="http://schemas.microsoft.com/office/drawing/2014/main" id="{AFE3A2AF-177E-45E6-A191-0F8523DB7FFA}"/>
+                <a16:creationId xmlns:a16="http://schemas.microsoft.com/office/drawing/2014/main" xmlns="" id="{AFE3A2AF-177E-45E6-A191-0F8523DB7FFA}"/>
               </a:ext>
             </a:extLst>
           </p:cNvPr>
@@ -19253,7 +19334,7 @@
           <p:cNvPr id="7" name="Text Placeholder 30">
             <a:extLst>
               <a:ext uri="{FF2B5EF4-FFF2-40B4-BE49-F238E27FC236}">
-                <a16:creationId xmlns="" xmlns:a16="http://schemas.microsoft.com/office/drawing/2014/main" id="{372426BE-BEE7-4A6D-BCD2-059615BBCE25}"/>
+                <a16:creationId xmlns:a16="http://schemas.microsoft.com/office/drawing/2014/main" xmlns="" id="{372426BE-BEE7-4A6D-BCD2-059615BBCE25}"/>
               </a:ext>
             </a:extLst>
           </p:cNvPr>
@@ -19509,7 +19590,7 @@
           <p:cNvPr id="8" name="Text Placeholder 30">
             <a:extLst>
               <a:ext uri="{FF2B5EF4-FFF2-40B4-BE49-F238E27FC236}">
-                <a16:creationId xmlns="" xmlns:a16="http://schemas.microsoft.com/office/drawing/2014/main" id="{E61E227A-5883-4C77-B25A-46A22FFDF41F}"/>
+                <a16:creationId xmlns:a16="http://schemas.microsoft.com/office/drawing/2014/main" xmlns="" id="{E61E227A-5883-4C77-B25A-46A22FFDF41F}"/>
               </a:ext>
             </a:extLst>
           </p:cNvPr>
@@ -19765,7 +19846,7 @@
           <p:cNvPr id="9" name="Title 3">
             <a:extLst>
               <a:ext uri="{FF2B5EF4-FFF2-40B4-BE49-F238E27FC236}">
-                <a16:creationId xmlns="" xmlns:a16="http://schemas.microsoft.com/office/drawing/2014/main" id="{E25373E9-1A26-4A40-9897-E42DE485D8E3}"/>
+                <a16:creationId xmlns:a16="http://schemas.microsoft.com/office/drawing/2014/main" xmlns="" id="{E25373E9-1A26-4A40-9897-E42DE485D8E3}"/>
               </a:ext>
             </a:extLst>
           </p:cNvPr>
@@ -19877,7 +19958,7 @@
           <p:cNvPr id="10" name="Text Placeholder 1">
             <a:extLst>
               <a:ext uri="{FF2B5EF4-FFF2-40B4-BE49-F238E27FC236}">
-                <a16:creationId xmlns="" xmlns:a16="http://schemas.microsoft.com/office/drawing/2014/main" id="{B19D8AC7-3787-4ADB-9212-0808F015C2DD}"/>
+                <a16:creationId xmlns:a16="http://schemas.microsoft.com/office/drawing/2014/main" xmlns="" id="{B19D8AC7-3787-4ADB-9212-0808F015C2DD}"/>
               </a:ext>
             </a:extLst>
           </p:cNvPr>
@@ -20571,7 +20652,7 @@
           <p:cNvPr id="5" name="Picture 4">
             <a:extLst>
               <a:ext uri="{FF2B5EF4-FFF2-40B4-BE49-F238E27FC236}">
-                <a16:creationId xmlns="" xmlns:a16="http://schemas.microsoft.com/office/drawing/2014/main" id="{BBB0C869-7C5C-4070-BD4D-F3FC2DA8F301}"/>
+                <a16:creationId xmlns:a16="http://schemas.microsoft.com/office/drawing/2014/main" xmlns="" id="{BBB0C869-7C5C-4070-BD4D-F3FC2DA8F301}"/>
               </a:ext>
             </a:extLst>
           </p:cNvPr>
@@ -20600,7 +20681,7 @@
           <p:cNvPr id="4" name="Title 3">
             <a:extLst>
               <a:ext uri="{FF2B5EF4-FFF2-40B4-BE49-F238E27FC236}">
-                <a16:creationId xmlns="" xmlns:a16="http://schemas.microsoft.com/office/drawing/2014/main" id="{AFE3A2AF-177E-45E6-A191-0F8523DB7FFA}"/>
+                <a16:creationId xmlns:a16="http://schemas.microsoft.com/office/drawing/2014/main" xmlns="" id="{AFE3A2AF-177E-45E6-A191-0F8523DB7FFA}"/>
               </a:ext>
             </a:extLst>
           </p:cNvPr>
@@ -20648,7 +20729,7 @@
           <p:cNvPr id="7" name="Text Placeholder 30">
             <a:extLst>
               <a:ext uri="{FF2B5EF4-FFF2-40B4-BE49-F238E27FC236}">
-                <a16:creationId xmlns="" xmlns:a16="http://schemas.microsoft.com/office/drawing/2014/main" id="{372426BE-BEE7-4A6D-BCD2-059615BBCE25}"/>
+                <a16:creationId xmlns:a16="http://schemas.microsoft.com/office/drawing/2014/main" xmlns="" id="{372426BE-BEE7-4A6D-BCD2-059615BBCE25}"/>
               </a:ext>
             </a:extLst>
           </p:cNvPr>
@@ -20904,7 +20985,7 @@
           <p:cNvPr id="8" name="Text Placeholder 30">
             <a:extLst>
               <a:ext uri="{FF2B5EF4-FFF2-40B4-BE49-F238E27FC236}">
-                <a16:creationId xmlns="" xmlns:a16="http://schemas.microsoft.com/office/drawing/2014/main" id="{E61E227A-5883-4C77-B25A-46A22FFDF41F}"/>
+                <a16:creationId xmlns:a16="http://schemas.microsoft.com/office/drawing/2014/main" xmlns="" id="{E61E227A-5883-4C77-B25A-46A22FFDF41F}"/>
               </a:ext>
             </a:extLst>
           </p:cNvPr>
@@ -21160,7 +21241,7 @@
           <p:cNvPr id="9" name="Title 3">
             <a:extLst>
               <a:ext uri="{FF2B5EF4-FFF2-40B4-BE49-F238E27FC236}">
-                <a16:creationId xmlns="" xmlns:a16="http://schemas.microsoft.com/office/drawing/2014/main" id="{E25373E9-1A26-4A40-9897-E42DE485D8E3}"/>
+                <a16:creationId xmlns:a16="http://schemas.microsoft.com/office/drawing/2014/main" xmlns="" id="{E25373E9-1A26-4A40-9897-E42DE485D8E3}"/>
               </a:ext>
             </a:extLst>
           </p:cNvPr>
@@ -21272,7 +21353,7 @@
           <p:cNvPr id="10" name="Text Placeholder 1">
             <a:extLst>
               <a:ext uri="{FF2B5EF4-FFF2-40B4-BE49-F238E27FC236}">
-                <a16:creationId xmlns="" xmlns:a16="http://schemas.microsoft.com/office/drawing/2014/main" id="{B19D8AC7-3787-4ADB-9212-0808F015C2DD}"/>
+                <a16:creationId xmlns:a16="http://schemas.microsoft.com/office/drawing/2014/main" xmlns="" id="{B19D8AC7-3787-4ADB-9212-0808F015C2DD}"/>
               </a:ext>
             </a:extLst>
           </p:cNvPr>
@@ -22093,7 +22174,7 @@
           <p:cNvPr id="5" name="Picture 4">
             <a:extLst>
               <a:ext uri="{FF2B5EF4-FFF2-40B4-BE49-F238E27FC236}">
-                <a16:creationId xmlns="" xmlns:a16="http://schemas.microsoft.com/office/drawing/2014/main" id="{BBB0C869-7C5C-4070-BD4D-F3FC2DA8F301}"/>
+                <a16:creationId xmlns:a16="http://schemas.microsoft.com/office/drawing/2014/main" xmlns="" id="{BBB0C869-7C5C-4070-BD4D-F3FC2DA8F301}"/>
               </a:ext>
             </a:extLst>
           </p:cNvPr>
@@ -22122,7 +22203,7 @@
           <p:cNvPr id="4" name="Title 3">
             <a:extLst>
               <a:ext uri="{FF2B5EF4-FFF2-40B4-BE49-F238E27FC236}">
-                <a16:creationId xmlns="" xmlns:a16="http://schemas.microsoft.com/office/drawing/2014/main" id="{AFE3A2AF-177E-45E6-A191-0F8523DB7FFA}"/>
+                <a16:creationId xmlns:a16="http://schemas.microsoft.com/office/drawing/2014/main" xmlns="" id="{AFE3A2AF-177E-45E6-A191-0F8523DB7FFA}"/>
               </a:ext>
             </a:extLst>
           </p:cNvPr>
@@ -22178,7 +22259,7 @@
           <p:cNvPr id="7" name="Text Placeholder 30">
             <a:extLst>
               <a:ext uri="{FF2B5EF4-FFF2-40B4-BE49-F238E27FC236}">
-                <a16:creationId xmlns="" xmlns:a16="http://schemas.microsoft.com/office/drawing/2014/main" id="{372426BE-BEE7-4A6D-BCD2-059615BBCE25}"/>
+                <a16:creationId xmlns:a16="http://schemas.microsoft.com/office/drawing/2014/main" xmlns="" id="{372426BE-BEE7-4A6D-BCD2-059615BBCE25}"/>
               </a:ext>
             </a:extLst>
           </p:cNvPr>
@@ -22434,7 +22515,7 @@
           <p:cNvPr id="8" name="Text Placeholder 30">
             <a:extLst>
               <a:ext uri="{FF2B5EF4-FFF2-40B4-BE49-F238E27FC236}">
-                <a16:creationId xmlns="" xmlns:a16="http://schemas.microsoft.com/office/drawing/2014/main" id="{E61E227A-5883-4C77-B25A-46A22FFDF41F}"/>
+                <a16:creationId xmlns:a16="http://schemas.microsoft.com/office/drawing/2014/main" xmlns="" id="{E61E227A-5883-4C77-B25A-46A22FFDF41F}"/>
               </a:ext>
             </a:extLst>
           </p:cNvPr>
@@ -22690,7 +22771,7 @@
           <p:cNvPr id="9" name="Title 3">
             <a:extLst>
               <a:ext uri="{FF2B5EF4-FFF2-40B4-BE49-F238E27FC236}">
-                <a16:creationId xmlns="" xmlns:a16="http://schemas.microsoft.com/office/drawing/2014/main" id="{E25373E9-1A26-4A40-9897-E42DE485D8E3}"/>
+                <a16:creationId xmlns:a16="http://schemas.microsoft.com/office/drawing/2014/main" xmlns="" id="{E25373E9-1A26-4A40-9897-E42DE485D8E3}"/>
               </a:ext>
             </a:extLst>
           </p:cNvPr>
@@ -22802,7 +22883,7 @@
           <p:cNvPr id="10" name="Text Placeholder 1">
             <a:extLst>
               <a:ext uri="{FF2B5EF4-FFF2-40B4-BE49-F238E27FC236}">
-                <a16:creationId xmlns="" xmlns:a16="http://schemas.microsoft.com/office/drawing/2014/main" id="{B19D8AC7-3787-4ADB-9212-0808F015C2DD}"/>
+                <a16:creationId xmlns:a16="http://schemas.microsoft.com/office/drawing/2014/main" xmlns="" id="{B19D8AC7-3787-4ADB-9212-0808F015C2DD}"/>
               </a:ext>
             </a:extLst>
           </p:cNvPr>
@@ -23522,7 +23603,7 @@
           <p:cNvPr id="5" name="Picture 4">
             <a:extLst>
               <a:ext uri="{FF2B5EF4-FFF2-40B4-BE49-F238E27FC236}">
-                <a16:creationId xmlns="" xmlns:a16="http://schemas.microsoft.com/office/drawing/2014/main" id="{BBB0C869-7C5C-4070-BD4D-F3FC2DA8F301}"/>
+                <a16:creationId xmlns:a16="http://schemas.microsoft.com/office/drawing/2014/main" xmlns="" id="{BBB0C869-7C5C-4070-BD4D-F3FC2DA8F301}"/>
               </a:ext>
             </a:extLst>
           </p:cNvPr>
@@ -23551,7 +23632,7 @@
           <p:cNvPr id="4" name="Title 3">
             <a:extLst>
               <a:ext uri="{FF2B5EF4-FFF2-40B4-BE49-F238E27FC236}">
-                <a16:creationId xmlns="" xmlns:a16="http://schemas.microsoft.com/office/drawing/2014/main" id="{AFE3A2AF-177E-45E6-A191-0F8523DB7FFA}"/>
+                <a16:creationId xmlns:a16="http://schemas.microsoft.com/office/drawing/2014/main" xmlns="" id="{AFE3A2AF-177E-45E6-A191-0F8523DB7FFA}"/>
               </a:ext>
             </a:extLst>
           </p:cNvPr>
@@ -23591,7 +23672,7 @@
           <p:cNvPr id="7" name="Text Placeholder 30">
             <a:extLst>
               <a:ext uri="{FF2B5EF4-FFF2-40B4-BE49-F238E27FC236}">
-                <a16:creationId xmlns="" xmlns:a16="http://schemas.microsoft.com/office/drawing/2014/main" id="{372426BE-BEE7-4A6D-BCD2-059615BBCE25}"/>
+                <a16:creationId xmlns:a16="http://schemas.microsoft.com/office/drawing/2014/main" xmlns="" id="{372426BE-BEE7-4A6D-BCD2-059615BBCE25}"/>
               </a:ext>
             </a:extLst>
           </p:cNvPr>
@@ -23847,7 +23928,7 @@
           <p:cNvPr id="8" name="Text Placeholder 30">
             <a:extLst>
               <a:ext uri="{FF2B5EF4-FFF2-40B4-BE49-F238E27FC236}">
-                <a16:creationId xmlns="" xmlns:a16="http://schemas.microsoft.com/office/drawing/2014/main" id="{E61E227A-5883-4C77-B25A-46A22FFDF41F}"/>
+                <a16:creationId xmlns:a16="http://schemas.microsoft.com/office/drawing/2014/main" xmlns="" id="{E61E227A-5883-4C77-B25A-46A22FFDF41F}"/>
               </a:ext>
             </a:extLst>
           </p:cNvPr>
@@ -24103,7 +24184,7 @@
           <p:cNvPr id="9" name="Title 3">
             <a:extLst>
               <a:ext uri="{FF2B5EF4-FFF2-40B4-BE49-F238E27FC236}">
-                <a16:creationId xmlns="" xmlns:a16="http://schemas.microsoft.com/office/drawing/2014/main" id="{E25373E9-1A26-4A40-9897-E42DE485D8E3}"/>
+                <a16:creationId xmlns:a16="http://schemas.microsoft.com/office/drawing/2014/main" xmlns="" id="{E25373E9-1A26-4A40-9897-E42DE485D8E3}"/>
               </a:ext>
             </a:extLst>
           </p:cNvPr>
@@ -24215,7 +24296,7 @@
           <p:cNvPr id="10" name="Text Placeholder 1">
             <a:extLst>
               <a:ext uri="{FF2B5EF4-FFF2-40B4-BE49-F238E27FC236}">
-                <a16:creationId xmlns="" xmlns:a16="http://schemas.microsoft.com/office/drawing/2014/main" id="{B19D8AC7-3787-4ADB-9212-0808F015C2DD}"/>
+                <a16:creationId xmlns:a16="http://schemas.microsoft.com/office/drawing/2014/main" xmlns="" id="{B19D8AC7-3787-4ADB-9212-0808F015C2DD}"/>
               </a:ext>
             </a:extLst>
           </p:cNvPr>
@@ -25996,21 +26077,21 @@
 </file>
 
 <file path=customXml/item2.xml><?xml version="1.0" encoding="utf-8"?>
+<p:properties xmlns:p="http://schemas.microsoft.com/office/2006/metadata/properties" xmlns:xsi="http://www.w3.org/2001/XMLSchema-instance" xmlns:pc="http://schemas.microsoft.com/office/infopath/2007/PartnerControls">
+  <documentManagement>
+    <Status xmlns="71af3243-3dd4-4a8d-8c0d-dd76da1f02a5">Not started</Status>
+    <MediaServiceKeyPoints xmlns="71af3243-3dd4-4a8d-8c0d-dd76da1f02a5" xsi:nil="true"/>
+  </documentManagement>
+</p:properties>
+</file>
+
+<file path=customXml/item3.xml><?xml version="1.0" encoding="utf-8"?>
 <?mso-contentType ?>
 <FormTemplates xmlns="http://schemas.microsoft.com/sharepoint/v3/contenttype/forms">
   <Display>DocumentLibraryForm</Display>
   <Edit>DocumentLibraryForm</Edit>
   <New>DocumentLibraryForm</New>
 </FormTemplates>
-</file>
-
-<file path=customXml/item3.xml><?xml version="1.0" encoding="utf-8"?>
-<p:properties xmlns:p="http://schemas.microsoft.com/office/2006/metadata/properties" xmlns:xsi="http://www.w3.org/2001/XMLSchema-instance" xmlns:pc="http://schemas.microsoft.com/office/infopath/2007/PartnerControls">
-  <documentManagement>
-    <Status xmlns="71af3243-3dd4-4a8d-8c0d-dd76da1f02a5">Not started</Status>
-    <MediaServiceKeyPoints xmlns="71af3243-3dd4-4a8d-8c0d-dd76da1f02a5" xsi:nil="true"/>
-  </documentManagement>
-</p:properties>
 </file>
 
 <file path=customXml/itemProps1.xml><?xml version="1.0" encoding="utf-8"?>
@@ -26033,14 +26114,6 @@
 </file>
 
 <file path=customXml/itemProps2.xml><?xml version="1.0" encoding="utf-8"?>
-<ds:datastoreItem xmlns:ds="http://schemas.openxmlformats.org/officeDocument/2006/customXml" ds:itemID="{05D99ABA-76CE-4A8E-B5F0-C051B96628DE}">
-  <ds:schemaRefs>
-    <ds:schemaRef ds:uri="http://schemas.microsoft.com/sharepoint/v3/contenttype/forms"/>
-  </ds:schemaRefs>
-</ds:datastoreItem>
-</file>
-
-<file path=customXml/itemProps3.xml><?xml version="1.0" encoding="utf-8"?>
 <ds:datastoreItem xmlns:ds="http://schemas.openxmlformats.org/officeDocument/2006/customXml" ds:itemID="{4DEA9014-ED64-4558-B1E1-D03F0EE32BEB}">
   <ds:schemaRefs>
     <ds:schemaRef ds:uri="http://schemas.microsoft.com/office/2006/metadata/properties"/>
@@ -26048,4 +26121,12 @@
     <ds:schemaRef ds:uri="71af3243-3dd4-4a8d-8c0d-dd76da1f02a5"/>
   </ds:schemaRefs>
 </ds:datastoreItem>
+</file>
+
+<file path=customXml/itemProps3.xml><?xml version="1.0" encoding="utf-8"?>
+<ds:datastoreItem xmlns:ds="http://schemas.openxmlformats.org/officeDocument/2006/customXml" ds:itemID="{05D99ABA-76CE-4A8E-B5F0-C051B96628DE}">
+  <ds:schemaRefs>
+    <ds:schemaRef ds:uri="http://schemas.microsoft.com/sharepoint/v3/contenttype/forms"/>
+  </ds:schemaRefs>
+</ds:datastoreItem>
 </file>